--- a/Foundation_F1/F1-L11_Arabic_Around_Us.pptx
+++ b/Foundation_F1/F1-L11_Arabic_Around_Us.pptx
@@ -1,6 +1,6 @@
 
 <file path=ppt/presentation.xml><?xml version="1.0" encoding="utf-8"?>
-<p:presentation xmlns:a="http://schemas.openxmlformats.org/drawingml/2006/main" xmlns:r="http://schemas.openxmlformats.org/officeDocument/2006/relationships" xmlns:p="http://schemas.openxmlformats.org/presentationml/2006/main" saveSubsetFonts="1" autoCompressPictures="0">
+<p:presentation xmlns:a="http://schemas.openxmlformats.org/drawingml/2006/main" xmlns:r="http://schemas.openxmlformats.org/officeDocument/2006/relationships" xmlns:p="http://schemas.openxmlformats.org/presentationml/2006/main" embedTrueTypeFonts="1" saveSubsetFonts="1" autoCompressPictures="0">
   <p:sldMasterIdLst>
     <p:sldMasterId id="2147483648" r:id="rId1"/>
   </p:sldMasterIdLst>
@@ -36,6 +36,13 @@
   </p:notesMasterIdLst>
   <p:sldSz cx="12192000" cy="6858000"/>
   <p:notesSz cx="6858000" cy="12192000"/>
+  <p:embeddedFontLst>
+    <p:embeddedFont>
+      <p:font typeface="Amiri" pitchFamily="2" charset="-78"/>
+      <p:regular r:id="rIdFont1"/>
+      <p:bold r:id="rIdFont2"/>
+    </p:embeddedFont>
+  </p:embeddedFontLst>
   <p:defaultTextStyle>
     <a:lvl1pPr marL="0" algn="l" defTabSz="914400" rtl="0" eaLnBrk="1" latinLnBrk="0" hangingPunct="1">
       <a:defRPr sz="1800" kern="1200">
@@ -392,8 +399,7 @@
           <a:schemeClr val="tx1"/>
         </a:solidFill>
         <a:latin typeface="+mn-lt"/>
-        <a:ea typeface="+mn-ea"/>
-        <a:cs typeface="+mn-cs"/>
+        <a:cs typeface="Amiri" pitchFamily="2" charset="-78"/>
       </a:defRPr>
     </a:lvl1pPr>
     <a:lvl2pPr marL="457200" algn="l" defTabSz="914400" rtl="0" eaLnBrk="1" latinLnBrk="0" hangingPunct="1">
@@ -402,8 +408,7 @@
           <a:schemeClr val="tx1"/>
         </a:solidFill>
         <a:latin typeface="+mn-lt"/>
-        <a:ea typeface="+mn-ea"/>
-        <a:cs typeface="+mn-cs"/>
+        <a:cs typeface="Amiri" pitchFamily="2" charset="-78"/>
       </a:defRPr>
     </a:lvl2pPr>
     <a:lvl3pPr marL="914400" algn="l" defTabSz="914400" rtl="0" eaLnBrk="1" latinLnBrk="0" hangingPunct="1">
@@ -412,8 +417,7 @@
           <a:schemeClr val="tx1"/>
         </a:solidFill>
         <a:latin typeface="+mn-lt"/>
-        <a:ea typeface="+mn-ea"/>
-        <a:cs typeface="+mn-cs"/>
+        <a:cs typeface="Amiri" pitchFamily="2" charset="-78"/>
       </a:defRPr>
     </a:lvl3pPr>
     <a:lvl4pPr marL="1371600" algn="l" defTabSz="914400" rtl="0" eaLnBrk="1" latinLnBrk="0" hangingPunct="1">
@@ -422,8 +426,7 @@
           <a:schemeClr val="tx1"/>
         </a:solidFill>
         <a:latin typeface="+mn-lt"/>
-        <a:ea typeface="+mn-ea"/>
-        <a:cs typeface="+mn-cs"/>
+        <a:cs typeface="Amiri" pitchFamily="2" charset="-78"/>
       </a:defRPr>
     </a:lvl4pPr>
     <a:lvl5pPr marL="1828800" algn="l" defTabSz="914400" rtl="0" eaLnBrk="1" latinLnBrk="0" hangingPunct="1">
@@ -432,8 +435,7 @@
           <a:schemeClr val="tx1"/>
         </a:solidFill>
         <a:latin typeface="+mn-lt"/>
-        <a:ea typeface="+mn-ea"/>
-        <a:cs typeface="+mn-cs"/>
+        <a:cs typeface="Amiri" pitchFamily="2" charset="-78"/>
       </a:defRPr>
     </a:lvl5pPr>
     <a:lvl6pPr marL="2286000" algn="l" defTabSz="914400" rtl="0" eaLnBrk="1" latinLnBrk="0" hangingPunct="1">
@@ -442,8 +444,7 @@
           <a:schemeClr val="tx1"/>
         </a:solidFill>
         <a:latin typeface="+mn-lt"/>
-        <a:ea typeface="+mn-ea"/>
-        <a:cs typeface="+mn-cs"/>
+        <a:cs typeface="Amiri" pitchFamily="2" charset="-78"/>
       </a:defRPr>
     </a:lvl6pPr>
     <a:lvl7pPr marL="2743200" algn="l" defTabSz="914400" rtl="0" eaLnBrk="1" latinLnBrk="0" hangingPunct="1">
@@ -452,8 +453,7 @@
           <a:schemeClr val="tx1"/>
         </a:solidFill>
         <a:latin typeface="+mn-lt"/>
-        <a:ea typeface="+mn-ea"/>
-        <a:cs typeface="+mn-cs"/>
+        <a:cs typeface="Amiri" pitchFamily="2" charset="-78"/>
       </a:defRPr>
     </a:lvl7pPr>
     <a:lvl8pPr marL="3200400" algn="l" defTabSz="914400" rtl="0" eaLnBrk="1" latinLnBrk="0" hangingPunct="1">
@@ -462,8 +462,7 @@
           <a:schemeClr val="tx1"/>
         </a:solidFill>
         <a:latin typeface="+mn-lt"/>
-        <a:ea typeface="+mn-ea"/>
-        <a:cs typeface="+mn-cs"/>
+        <a:cs typeface="Amiri" pitchFamily="2" charset="-78"/>
       </a:defRPr>
     </a:lvl8pPr>
     <a:lvl9pPr marL="3657600" algn="l" defTabSz="914400" rtl="0" eaLnBrk="1" latinLnBrk="0" hangingPunct="1">
@@ -472,8 +471,7 @@
           <a:schemeClr val="tx1"/>
         </a:solidFill>
         <a:latin typeface="+mn-lt"/>
-        <a:ea typeface="+mn-ea"/>
-        <a:cs typeface="+mn-cs"/>
+        <a:cs typeface="Amiri" pitchFamily="2" charset="-78"/>
       </a:defRPr>
     </a:lvl9pPr>
   </p:notesStyle>
@@ -2796,8 +2794,7 @@
             <a:schemeClr val="tx1"/>
           </a:solidFill>
           <a:latin typeface="+mj-lt"/>
-          <a:ea typeface="+mj-ea"/>
-          <a:cs typeface="+mj-cs"/>
+          <a:cs typeface="Amiri" pitchFamily="2" charset="-78"/>
         </a:defRPr>
       </a:lvl1pPr>
     </p:titleStyle>
@@ -2813,8 +2810,7 @@
             <a:schemeClr val="tx1"/>
           </a:solidFill>
           <a:latin typeface="+mn-lt"/>
-          <a:ea typeface="+mn-ea"/>
-          <a:cs typeface="+mn-cs"/>
+          <a:cs typeface="Amiri" pitchFamily="2" charset="-78"/>
         </a:defRPr>
       </a:lvl1pPr>
       <a:lvl2pPr marL="742950" indent="-285750" algn="l" defTabSz="914400" rtl="0" eaLnBrk="1" latinLnBrk="0" hangingPunct="1">
@@ -2828,8 +2824,7 @@
             <a:schemeClr val="tx1"/>
           </a:solidFill>
           <a:latin typeface="+mn-lt"/>
-          <a:ea typeface="+mn-ea"/>
-          <a:cs typeface="+mn-cs"/>
+          <a:cs typeface="Amiri" pitchFamily="2" charset="-78"/>
         </a:defRPr>
       </a:lvl2pPr>
       <a:lvl3pPr marL="1143000" indent="-228600" algn="l" defTabSz="914400" rtl="0" eaLnBrk="1" latinLnBrk="0" hangingPunct="1">
@@ -2843,8 +2838,7 @@
             <a:schemeClr val="tx1"/>
           </a:solidFill>
           <a:latin typeface="+mn-lt"/>
-          <a:ea typeface="+mn-ea"/>
-          <a:cs typeface="+mn-cs"/>
+          <a:cs typeface="Amiri" pitchFamily="2" charset="-78"/>
         </a:defRPr>
       </a:lvl3pPr>
       <a:lvl4pPr marL="1600200" indent="-228600" algn="l" defTabSz="914400" rtl="0" eaLnBrk="1" latinLnBrk="0" hangingPunct="1">
@@ -2858,8 +2852,7 @@
             <a:schemeClr val="tx1"/>
           </a:solidFill>
           <a:latin typeface="+mn-lt"/>
-          <a:ea typeface="+mn-ea"/>
-          <a:cs typeface="+mn-cs"/>
+          <a:cs typeface="Amiri" pitchFamily="2" charset="-78"/>
         </a:defRPr>
       </a:lvl4pPr>
       <a:lvl5pPr marL="2057400" indent="-228600" algn="l" defTabSz="914400" rtl="0" eaLnBrk="1" latinLnBrk="0" hangingPunct="1">
@@ -2873,8 +2866,7 @@
             <a:schemeClr val="tx1"/>
           </a:solidFill>
           <a:latin typeface="+mn-lt"/>
-          <a:ea typeface="+mn-ea"/>
-          <a:cs typeface="+mn-cs"/>
+          <a:cs typeface="Amiri" pitchFamily="2" charset="-78"/>
         </a:defRPr>
       </a:lvl5pPr>
       <a:lvl6pPr marL="2514600" indent="-228600" algn="l" defTabSz="914400" rtl="0" eaLnBrk="1" latinLnBrk="0" hangingPunct="1">
@@ -2888,8 +2880,7 @@
             <a:schemeClr val="tx1"/>
           </a:solidFill>
           <a:latin typeface="+mn-lt"/>
-          <a:ea typeface="+mn-ea"/>
-          <a:cs typeface="+mn-cs"/>
+          <a:cs typeface="Amiri" pitchFamily="2" charset="-78"/>
         </a:defRPr>
       </a:lvl6pPr>
       <a:lvl7pPr marL="2971800" indent="-228600" algn="l" defTabSz="914400" rtl="0" eaLnBrk="1" latinLnBrk="0" hangingPunct="1">
@@ -2903,8 +2894,7 @@
             <a:schemeClr val="tx1"/>
           </a:solidFill>
           <a:latin typeface="+mn-lt"/>
-          <a:ea typeface="+mn-ea"/>
-          <a:cs typeface="+mn-cs"/>
+          <a:cs typeface="Amiri" pitchFamily="2" charset="-78"/>
         </a:defRPr>
       </a:lvl7pPr>
       <a:lvl8pPr marL="3429000" indent="-228600" algn="l" defTabSz="914400" rtl="0" eaLnBrk="1" latinLnBrk="0" hangingPunct="1">
@@ -2918,8 +2908,7 @@
             <a:schemeClr val="tx1"/>
           </a:solidFill>
           <a:latin typeface="+mn-lt"/>
-          <a:ea typeface="+mn-ea"/>
-          <a:cs typeface="+mn-cs"/>
+          <a:cs typeface="Amiri" pitchFamily="2" charset="-78"/>
         </a:defRPr>
       </a:lvl8pPr>
       <a:lvl9pPr marL="3886200" indent="-228600" algn="l" defTabSz="914400" rtl="0" eaLnBrk="1" latinLnBrk="0" hangingPunct="1">
@@ -2933,8 +2922,7 @@
             <a:schemeClr val="tx1"/>
           </a:solidFill>
           <a:latin typeface="+mn-lt"/>
-          <a:ea typeface="+mn-ea"/>
-          <a:cs typeface="+mn-cs"/>
+          <a:cs typeface="Amiri" pitchFamily="2" charset="-78"/>
         </a:defRPr>
       </a:lvl9pPr>
     </p:bodyStyle>
@@ -2948,8 +2936,7 @@
             <a:schemeClr val="tx1"/>
           </a:solidFill>
           <a:latin typeface="+mn-lt"/>
-          <a:ea typeface="+mn-ea"/>
-          <a:cs typeface="+mn-cs"/>
+          <a:cs typeface="Amiri" pitchFamily="2" charset="-78"/>
         </a:defRPr>
       </a:lvl1pPr>
       <a:lvl2pPr marL="457200" algn="l" defTabSz="914400" rtl="0" eaLnBrk="1" latinLnBrk="0" hangingPunct="1">
@@ -2958,8 +2945,7 @@
             <a:schemeClr val="tx1"/>
           </a:solidFill>
           <a:latin typeface="+mn-lt"/>
-          <a:ea typeface="+mn-ea"/>
-          <a:cs typeface="+mn-cs"/>
+          <a:cs typeface="Amiri" pitchFamily="2" charset="-78"/>
         </a:defRPr>
       </a:lvl2pPr>
       <a:lvl3pPr marL="914400" algn="l" defTabSz="914400" rtl="0" eaLnBrk="1" latinLnBrk="0" hangingPunct="1">
@@ -2968,8 +2954,7 @@
             <a:schemeClr val="tx1"/>
           </a:solidFill>
           <a:latin typeface="+mn-lt"/>
-          <a:ea typeface="+mn-ea"/>
-          <a:cs typeface="+mn-cs"/>
+          <a:cs typeface="Amiri" pitchFamily="2" charset="-78"/>
         </a:defRPr>
       </a:lvl3pPr>
       <a:lvl4pPr marL="1371600" algn="l" defTabSz="914400" rtl="0" eaLnBrk="1" latinLnBrk="0" hangingPunct="1">
@@ -2978,8 +2963,7 @@
             <a:schemeClr val="tx1"/>
           </a:solidFill>
           <a:latin typeface="+mn-lt"/>
-          <a:ea typeface="+mn-ea"/>
-          <a:cs typeface="+mn-cs"/>
+          <a:cs typeface="Amiri" pitchFamily="2" charset="-78"/>
         </a:defRPr>
       </a:lvl4pPr>
       <a:lvl5pPr marL="1828800" algn="l" defTabSz="914400" rtl="0" eaLnBrk="1" latinLnBrk="0" hangingPunct="1">
@@ -2988,8 +2972,7 @@
             <a:schemeClr val="tx1"/>
           </a:solidFill>
           <a:latin typeface="+mn-lt"/>
-          <a:ea typeface="+mn-ea"/>
-          <a:cs typeface="+mn-cs"/>
+          <a:cs typeface="Amiri" pitchFamily="2" charset="-78"/>
         </a:defRPr>
       </a:lvl5pPr>
       <a:lvl6pPr marL="2286000" algn="l" defTabSz="914400" rtl="0" eaLnBrk="1" latinLnBrk="0" hangingPunct="1">
@@ -2998,8 +2981,7 @@
             <a:schemeClr val="tx1"/>
           </a:solidFill>
           <a:latin typeface="+mn-lt"/>
-          <a:ea typeface="+mn-ea"/>
-          <a:cs typeface="+mn-cs"/>
+          <a:cs typeface="Amiri" pitchFamily="2" charset="-78"/>
         </a:defRPr>
       </a:lvl6pPr>
       <a:lvl7pPr marL="2743200" algn="l" defTabSz="914400" rtl="0" eaLnBrk="1" latinLnBrk="0" hangingPunct="1">
@@ -3008,8 +2990,7 @@
             <a:schemeClr val="tx1"/>
           </a:solidFill>
           <a:latin typeface="+mn-lt"/>
-          <a:ea typeface="+mn-ea"/>
-          <a:cs typeface="+mn-cs"/>
+          <a:cs typeface="Amiri" pitchFamily="2" charset="-78"/>
         </a:defRPr>
       </a:lvl7pPr>
       <a:lvl8pPr marL="3200400" algn="l" defTabSz="914400" rtl="0" eaLnBrk="1" latinLnBrk="0" hangingPunct="1">
@@ -3018,8 +2999,7 @@
             <a:schemeClr val="tx1"/>
           </a:solidFill>
           <a:latin typeface="+mn-lt"/>
-          <a:ea typeface="+mn-ea"/>
-          <a:cs typeface="+mn-cs"/>
+          <a:cs typeface="Amiri" pitchFamily="2" charset="-78"/>
         </a:defRPr>
       </a:lvl8pPr>
       <a:lvl9pPr marL="3657600" algn="l" defTabSz="914400" rtl="0" eaLnBrk="1" latinLnBrk="0" hangingPunct="1">
@@ -3028,8 +3008,7 @@
             <a:schemeClr val="tx1"/>
           </a:solidFill>
           <a:latin typeface="+mn-lt"/>
-          <a:ea typeface="+mn-ea"/>
-          <a:cs typeface="+mn-cs"/>
+          <a:cs typeface="Amiri" pitchFamily="2" charset="-78"/>
         </a:defRPr>
       </a:lvl9pPr>
     </p:otherStyle>
@@ -3189,9 +3168,8 @@
                 <a:solidFill>
                   <a:srgbClr val="D4AF37"/>
                 </a:solidFill>
-                <a:latin typeface="Amiri" pitchFamily="34" charset="0"/>
-                <a:ea typeface="Amiri" pitchFamily="34" charset="-122"/>
-                <a:cs typeface="Amiri" pitchFamily="34" charset="-120"/>
+                <a:latin typeface="Amiri" pitchFamily="2" charset="-78"/>
+                <a:cs typeface="Amiri" pitchFamily="2" charset="-78"/>
               </a:rPr>
               <a:t>م</a:t>
             </a:r>
@@ -3229,8 +3207,7 @@
                   <a:srgbClr val="FFFFFF"/>
                 </a:solidFill>
                 <a:latin typeface="Cambria" pitchFamily="34" charset="0"/>
-                <a:ea typeface="Cambria" pitchFamily="34" charset="-122"/>
-                <a:cs typeface="Cambria" pitchFamily="34" charset="-120"/>
+                <a:cs typeface="Amiri" pitchFamily="2" charset="-78"/>
               </a:rPr>
               <a:t>Al Madina Online School</a:t>
             </a:r>
@@ -3246,8 +3223,7 @@
                   <a:srgbClr val="D4AF37"/>
                 </a:solidFill>
                 <a:latin typeface="Calibri" pitchFamily="34" charset="0"/>
-                <a:ea typeface="Calibri" pitchFamily="34" charset="-122"/>
-                <a:cs typeface="Calibri" pitchFamily="34" charset="-120"/>
+                <a:cs typeface="Amiri" pitchFamily="2" charset="-78"/>
               </a:rPr>
               <a:t>ARABIC DEPARTMENT · MIFTAH ARABIC</a:t>
             </a:r>
@@ -3285,8 +3261,7 @@
                   <a:srgbClr val="D4AF37"/>
                 </a:solidFill>
                 <a:latin typeface="Calibri" pitchFamily="34" charset="0"/>
-                <a:ea typeface="Calibri" pitchFamily="34" charset="-122"/>
-                <a:cs typeface="Calibri" pitchFamily="34" charset="-120"/>
+                <a:cs typeface="Amiri" pitchFamily="2" charset="-78"/>
               </a:rPr>
               <a:t>CAMBRIDGE IGCSE ARABIC 0544  ·  YEAR 7  ·  FOUNDATION F1  ·  F1-L11</a:t>
             </a:r>
@@ -3324,8 +3299,7 @@
                   <a:srgbClr val="9FB3D1"/>
                 </a:solidFill>
                 <a:latin typeface="Cambria" pitchFamily="34" charset="0"/>
-                <a:ea typeface="Cambria" pitchFamily="34" charset="-122"/>
-                <a:cs typeface="Cambria" pitchFamily="34" charset="-120"/>
+                <a:cs typeface="Amiri" pitchFamily="2" charset="-78"/>
               </a:rPr>
               <a:t>F1-L11</a:t>
             </a:r>
@@ -3363,8 +3337,7 @@
                   <a:srgbClr val="FFFFFF"/>
                 </a:solidFill>
                 <a:latin typeface="Cambria" pitchFamily="34" charset="0"/>
-                <a:ea typeface="Cambria" pitchFamily="34" charset="-122"/>
-                <a:cs typeface="Cambria" pitchFamily="34" charset="-120"/>
+                <a:cs typeface="Amiri" pitchFamily="2" charset="-78"/>
               </a:rPr>
               <a:t>Arabic Around Us</a:t>
             </a:r>
@@ -3401,9 +3374,8 @@
                 <a:solidFill>
                   <a:srgbClr val="D4AF37"/>
                 </a:solidFill>
-                <a:latin typeface="Amiri" pitchFamily="34" charset="0"/>
-                <a:ea typeface="Amiri" pitchFamily="34" charset="-122"/>
-                <a:cs typeface="Amiri" pitchFamily="34" charset="-120"/>
+                <a:latin typeface="Amiri" pitchFamily="2" charset="-78"/>
+                <a:cs typeface="Amiri" pitchFamily="2" charset="-78"/>
               </a:rPr>
               <a:t>خَطٌّ وَاحِدٌ، أَصْوَاتٌ كَثِيرَةٌ، ثَقَافَاتٌ كَثِيرَةٌ</a:t>
             </a:r>
@@ -3441,8 +3413,7 @@
                   <a:srgbClr val="C6D2E6"/>
                 </a:solidFill>
                 <a:latin typeface="Calibri" pitchFamily="34" charset="0"/>
-                <a:ea typeface="Calibri" pitchFamily="34" charset="-122"/>
-                <a:cs typeface="Calibri" pitchFamily="34" charset="-120"/>
+                <a:cs typeface="Amiri" pitchFamily="2" charset="-78"/>
               </a:rPr>
               <a:t>Use your reading skills on Arabic from real life: tell script, language and meaning apart, understand formal Arabic and spoken dialects, meet three styles of calligraphy and travel through ten Arabic-speaking countries.</a:t>
             </a:r>
@@ -3507,8 +3478,7 @@
                   <a:srgbClr val="D4AF37"/>
                 </a:solidFill>
                 <a:latin typeface="Calibri" pitchFamily="34" charset="0"/>
-                <a:ea typeface="Calibri" pitchFamily="34" charset="-122"/>
-                <a:cs typeface="Calibri" pitchFamily="34" charset="-120"/>
+                <a:cs typeface="Amiri" pitchFamily="2" charset="-78"/>
               </a:rPr>
               <a:t>LESSON</a:t>
             </a:r>
@@ -3524,8 +3494,7 @@
                   <a:srgbClr val="FFFFFF"/>
                 </a:solidFill>
                 <a:latin typeface="Calibri" pitchFamily="34" charset="0"/>
-                <a:ea typeface="Calibri" pitchFamily="34" charset="-122"/>
-                <a:cs typeface="Calibri" pitchFamily="34" charset="-120"/>
+                <a:cs typeface="Amiri" pitchFamily="2" charset="-78"/>
               </a:rPr>
               <a:t>F1-L11 · Foundation F1 · Arabic Script &amp; Sounds</a:t>
             </a:r>
@@ -3590,8 +3559,7 @@
                   <a:srgbClr val="D4AF37"/>
                 </a:solidFill>
                 <a:latin typeface="Calibri" pitchFamily="34" charset="0"/>
-                <a:ea typeface="Calibri" pitchFamily="34" charset="-122"/>
-                <a:cs typeface="Calibri" pitchFamily="34" charset="-120"/>
+                <a:cs typeface="Amiri" pitchFamily="2" charset="-78"/>
               </a:rPr>
               <a:t>DURATION</a:t>
             </a:r>
@@ -3607,8 +3575,7 @@
                   <a:srgbClr val="FFFFFF"/>
                 </a:solidFill>
                 <a:latin typeface="Calibri" pitchFamily="34" charset="0"/>
-                <a:ea typeface="Calibri" pitchFamily="34" charset="-122"/>
-                <a:cs typeface="Calibri" pitchFamily="34" charset="-120"/>
+                <a:cs typeface="Amiri" pitchFamily="2" charset="-78"/>
               </a:rPr>
               <a:t>60 minutes · Teams</a:t>
             </a:r>
@@ -3673,8 +3640,7 @@
                   <a:srgbClr val="D4AF37"/>
                 </a:solidFill>
                 <a:latin typeface="Calibri" pitchFamily="34" charset="0"/>
-                <a:ea typeface="Calibri" pitchFamily="34" charset="-122"/>
-                <a:cs typeface="Calibri" pitchFamily="34" charset="-120"/>
+                <a:cs typeface="Amiri" pitchFamily="2" charset="-78"/>
               </a:rPr>
               <a:t>LEVEL</a:t>
             </a:r>
@@ -3690,8 +3656,7 @@
                   <a:srgbClr val="FFFFFF"/>
                 </a:solidFill>
                 <a:latin typeface="Calibri" pitchFamily="34" charset="0"/>
-                <a:ea typeface="Calibri" pitchFamily="34" charset="-122"/>
-                <a:cs typeface="Calibri" pitchFamily="34" charset="-120"/>
+                <a:cs typeface="Amiri" pitchFamily="2" charset="-78"/>
               </a:rPr>
               <a:t>Foundation · beginner</a:t>
             </a:r>
@@ -3756,8 +3721,7 @@
                   <a:srgbClr val="D4AF37"/>
                 </a:solidFill>
                 <a:latin typeface="Calibri" pitchFamily="34" charset="0"/>
-                <a:ea typeface="Calibri" pitchFamily="34" charset="-122"/>
-                <a:cs typeface="Calibri" pitchFamily="34" charset="-120"/>
+                <a:cs typeface="Amiri" pitchFamily="2" charset="-78"/>
               </a:rPr>
               <a:t>ON THE WEBSITE</a:t>
             </a:r>
@@ -3773,8 +3737,7 @@
                   <a:srgbClr val="FFFFFF"/>
                 </a:solidFill>
                 <a:latin typeface="Calibri" pitchFamily="34" charset="0"/>
-                <a:ea typeface="Calibri" pitchFamily="34" charset="-122"/>
-                <a:cs typeface="Calibri" pitchFamily="34" charset="-120"/>
+                <a:cs typeface="Amiri" pitchFamily="2" charset="-78"/>
               </a:rPr>
               <a:t>Pathways › Foundation › F1 › F1-L11</a:t>
             </a:r>
@@ -3868,9 +3831,8 @@
                 <a:solidFill>
                   <a:srgbClr val="D4AF37"/>
                 </a:solidFill>
-                <a:latin typeface="Amiri" pitchFamily="34" charset="0"/>
-                <a:ea typeface="Amiri" pitchFamily="34" charset="-122"/>
-                <a:cs typeface="Amiri" pitchFamily="34" charset="-120"/>
+                <a:latin typeface="Amiri" pitchFamily="2" charset="-78"/>
+                <a:cs typeface="Amiri" pitchFamily="2" charset="-78"/>
               </a:rPr>
               <a:t>م</a:t>
             </a:r>
@@ -3908,8 +3870,7 @@
                   <a:srgbClr val="1B3B6F"/>
                 </a:solidFill>
                 <a:latin typeface="Cambria" pitchFamily="34" charset="0"/>
-                <a:ea typeface="Cambria" pitchFamily="34" charset="-122"/>
-                <a:cs typeface="Cambria" pitchFamily="34" charset="-120"/>
+                <a:cs typeface="Amiri" pitchFamily="2" charset="-78"/>
               </a:rPr>
               <a:t>Al Madina Online School</a:t>
             </a:r>
@@ -3947,8 +3908,7 @@
                   <a:srgbClr val="8A6D1E"/>
                 </a:solidFill>
                 <a:latin typeface="Calibri" pitchFamily="34" charset="0"/>
-                <a:ea typeface="Calibri" pitchFamily="34" charset="-122"/>
-                <a:cs typeface="Calibri" pitchFamily="34" charset="-120"/>
+                <a:cs typeface="Amiri" pitchFamily="2" charset="-78"/>
               </a:rPr>
               <a:t>ARABIC DEPARTMENT · MIFTAH ARABIC · IGCSE 0544</a:t>
             </a:r>
@@ -4013,8 +3973,7 @@
                   <a:srgbClr val="FFFFFF"/>
                 </a:solidFill>
                 <a:latin typeface="Calibri" pitchFamily="34" charset="0"/>
-                <a:ea typeface="Calibri" pitchFamily="34" charset="-122"/>
-                <a:cs typeface="Calibri" pitchFamily="34" charset="-120"/>
+                <a:cs typeface="Amiri" pitchFamily="2" charset="-78"/>
               </a:rPr>
               <a:t>F1-L11 · Arabic around us</a:t>
             </a:r>
@@ -4079,8 +4038,7 @@
                   <a:srgbClr val="FFFFFF"/>
                 </a:solidFill>
                 <a:latin typeface="Calibri" pitchFamily="34" charset="0"/>
-                <a:ea typeface="Calibri" pitchFamily="34" charset="-122"/>
-                <a:cs typeface="Calibri" pitchFamily="34" charset="-120"/>
+                <a:cs typeface="Amiri" pitchFamily="2" charset="-78"/>
               </a:rPr>
               <a:t>TEACHER INSTRUCTION · 2 MIN</a:t>
             </a:r>
@@ -4118,8 +4076,7 @@
                   <a:srgbClr val="1B3B6F"/>
                 </a:solidFill>
                 <a:latin typeface="Calibri" pitchFamily="34" charset="0"/>
-                <a:ea typeface="Calibri" pitchFamily="34" charset="-122"/>
-                <a:cs typeface="Calibri" pitchFamily="34" charset="-120"/>
+                <a:cs typeface="Amiri" pitchFamily="2" charset="-78"/>
               </a:rPr>
               <a:t>CHECK FOR UNDERSTANDING · HINGE QUESTIONS</a:t>
             </a:r>
@@ -4157,8 +4114,7 @@
                   <a:srgbClr val="1B3B6F"/>
                 </a:solidFill>
                 <a:latin typeface="Cambria" pitchFamily="34" charset="0"/>
-                <a:ea typeface="Cambria" pitchFamily="34" charset="-122"/>
-                <a:cs typeface="Cambria" pitchFamily="34" charset="-120"/>
+                <a:cs typeface="Amiri" pitchFamily="2" charset="-78"/>
               </a:rPr>
               <a:t>Quick check</a:t>
             </a:r>
@@ -4195,9 +4151,8 @@
                 <a:solidFill>
                   <a:srgbClr val="8A6D1E"/>
                 </a:solidFill>
-                <a:latin typeface="Amiri" pitchFamily="34" charset="0"/>
-                <a:ea typeface="Amiri" pitchFamily="34" charset="-122"/>
-                <a:cs typeface="Amiri" pitchFamily="34" charset="-120"/>
+                <a:latin typeface="Amiri" pitchFamily="2" charset="-78"/>
+                <a:cs typeface="Amiri" pitchFamily="2" charset="-78"/>
               </a:rPr>
               <a:t>فَحْصٌ سَرِيعٌ</a:t>
             </a:r>
@@ -4235,8 +4190,7 @@
                   <a:srgbClr val="8A93A0"/>
                 </a:solidFill>
                 <a:latin typeface="Calibri" pitchFamily="34" charset="0"/>
-                <a:ea typeface="Calibri" pitchFamily="34" charset="-122"/>
-                <a:cs typeface="Calibri" pitchFamily="34" charset="-120"/>
+                <a:cs typeface="Amiri" pitchFamily="2" charset="-78"/>
               </a:rPr>
               <a:t>Miftah Arabic · Foundation F1 · Arabic Script &amp; Sounds · F1-L11</a:t>
             </a:r>
@@ -4333,8 +4287,7 @@
                   <a:srgbClr val="FFFFFF"/>
                 </a:solidFill>
                 <a:latin typeface="Calibri" pitchFamily="34" charset="0"/>
-                <a:ea typeface="Calibri" pitchFamily="34" charset="-122"/>
-                <a:cs typeface="Calibri" pitchFamily="34" charset="-120"/>
+                <a:cs typeface="Amiri" pitchFamily="2" charset="-78"/>
               </a:rPr>
               <a:t>1</a:t>
             </a:r>
@@ -4372,8 +4325,7 @@
                   <a:srgbClr val="1B3B6F"/>
                 </a:solidFill>
                 <a:latin typeface="Calibri" pitchFamily="34" charset="0"/>
-                <a:ea typeface="Calibri" pitchFamily="34" charset="-122"/>
-                <a:cs typeface="Calibri" pitchFamily="34" charset="-120"/>
+                <a:cs typeface="Amiri" pitchFamily="2" charset="-78"/>
               </a:rPr>
               <a:t>Does Arabic script always mean the language is Arabic?</a:t>
             </a:r>
@@ -4436,8 +4388,7 @@
                   <a:srgbClr val="1B3B6F"/>
                 </a:solidFill>
                 <a:latin typeface="Calibri" pitchFamily="34" charset="0"/>
-                <a:ea typeface="Calibri" pitchFamily="34" charset="-122"/>
-                <a:cs typeface="Calibri" pitchFamily="34" charset="-120"/>
+                <a:cs typeface="Amiri" pitchFamily="2" charset="-78"/>
               </a:rPr>
               <a:t>A</a:t>
             </a:r>
@@ -4475,8 +4426,7 @@
                   <a:srgbClr val="1F2A37"/>
                 </a:solidFill>
                 <a:latin typeface="Calibri" pitchFamily="34" charset="0"/>
-                <a:ea typeface="Calibri" pitchFamily="34" charset="-122"/>
-                <a:cs typeface="Calibri" pitchFamily="34" charset="-120"/>
+                <a:cs typeface="Amiri" pitchFamily="2" charset="-78"/>
               </a:rPr>
               <a:t>No — it also writes Persian, Urdu and more</a:t>
             </a:r>
@@ -4539,8 +4489,7 @@
                   <a:srgbClr val="1B3B6F"/>
                 </a:solidFill>
                 <a:latin typeface="Calibri" pitchFamily="34" charset="0"/>
-                <a:ea typeface="Calibri" pitchFamily="34" charset="-122"/>
-                <a:cs typeface="Calibri" pitchFamily="34" charset="-120"/>
+                <a:cs typeface="Amiri" pitchFamily="2" charset="-78"/>
               </a:rPr>
               <a:t>B</a:t>
             </a:r>
@@ -4578,8 +4527,7 @@
                   <a:srgbClr val="1F2A37"/>
                 </a:solidFill>
                 <a:latin typeface="Calibri" pitchFamily="34" charset="0"/>
-                <a:ea typeface="Calibri" pitchFamily="34" charset="-122"/>
-                <a:cs typeface="Calibri" pitchFamily="34" charset="-120"/>
+                <a:cs typeface="Amiri" pitchFamily="2" charset="-78"/>
               </a:rPr>
               <a:t>Yes, always</a:t>
             </a:r>
@@ -4676,8 +4624,7 @@
                   <a:srgbClr val="FFFFFF"/>
                 </a:solidFill>
                 <a:latin typeface="Calibri" pitchFamily="34" charset="0"/>
-                <a:ea typeface="Calibri" pitchFamily="34" charset="-122"/>
-                <a:cs typeface="Calibri" pitchFamily="34" charset="-120"/>
+                <a:cs typeface="Amiri" pitchFamily="2" charset="-78"/>
               </a:rPr>
               <a:t>2</a:t>
             </a:r>
@@ -4715,8 +4662,7 @@
                   <a:srgbClr val="1B3B6F"/>
                 </a:solidFill>
                 <a:latin typeface="Calibri" pitchFamily="34" charset="0"/>
-                <a:ea typeface="Calibri" pitchFamily="34" charset="-122"/>
-                <a:cs typeface="Calibri" pitchFamily="34" charset="-120"/>
+                <a:cs typeface="Amiri" pitchFamily="2" charset="-78"/>
               </a:rPr>
               <a:t>What are dialects?</a:t>
             </a:r>
@@ -4779,8 +4725,7 @@
                   <a:srgbClr val="1B3B6F"/>
                 </a:solidFill>
                 <a:latin typeface="Calibri" pitchFamily="34" charset="0"/>
-                <a:ea typeface="Calibri" pitchFamily="34" charset="-122"/>
-                <a:cs typeface="Calibri" pitchFamily="34" charset="-120"/>
+                <a:cs typeface="Amiri" pitchFamily="2" charset="-78"/>
               </a:rPr>
               <a:t>A</a:t>
             </a:r>
@@ -4818,8 +4763,7 @@
                   <a:srgbClr val="1F2A37"/>
                 </a:solidFill>
                 <a:latin typeface="Calibri" pitchFamily="34" charset="0"/>
-                <a:ea typeface="Calibri" pitchFamily="34" charset="-122"/>
-                <a:cs typeface="Calibri" pitchFamily="34" charset="-120"/>
+                <a:cs typeface="Amiri" pitchFamily="2" charset="-78"/>
               </a:rPr>
               <a:t>Mistakes in Arabic</a:t>
             </a:r>
@@ -4882,8 +4826,7 @@
                   <a:srgbClr val="1B3B6F"/>
                 </a:solidFill>
                 <a:latin typeface="Calibri" pitchFamily="34" charset="0"/>
-                <a:ea typeface="Calibri" pitchFamily="34" charset="-122"/>
-                <a:cs typeface="Calibri" pitchFamily="34" charset="-120"/>
+                <a:cs typeface="Amiri" pitchFamily="2" charset="-78"/>
               </a:rPr>
               <a:t>B</a:t>
             </a:r>
@@ -4921,8 +4864,7 @@
                   <a:srgbClr val="1F2A37"/>
                 </a:solidFill>
                 <a:latin typeface="Calibri" pitchFamily="34" charset="0"/>
-                <a:ea typeface="Calibri" pitchFamily="34" charset="-122"/>
-                <a:cs typeface="Calibri" pitchFamily="34" charset="-120"/>
+                <a:cs typeface="Amiri" pitchFamily="2" charset="-78"/>
               </a:rPr>
               <a:t>Systematic spoken varieties</a:t>
             </a:r>
@@ -5019,8 +4961,7 @@
                   <a:srgbClr val="FFFFFF"/>
                 </a:solidFill>
                 <a:latin typeface="Calibri" pitchFamily="34" charset="0"/>
-                <a:ea typeface="Calibri" pitchFamily="34" charset="-122"/>
-                <a:cs typeface="Calibri" pitchFamily="34" charset="-120"/>
+                <a:cs typeface="Amiri" pitchFamily="2" charset="-78"/>
               </a:rPr>
               <a:t>3</a:t>
             </a:r>
@@ -5058,8 +4999,7 @@
                   <a:srgbClr val="1B3B6F"/>
                 </a:solidFill>
                 <a:latin typeface="Calibri" pitchFamily="34" charset="0"/>
-                <a:ea typeface="Calibri" pitchFamily="34" charset="-122"/>
-                <a:cs typeface="Calibri" pitchFamily="34" charset="-120"/>
+                <a:cs typeface="Amiri" pitchFamily="2" charset="-78"/>
               </a:rPr>
               <a:t>Which Arabic do we use in class tasks?</a:t>
             </a:r>
@@ -5122,8 +5062,7 @@
                   <a:srgbClr val="1B3B6F"/>
                 </a:solidFill>
                 <a:latin typeface="Calibri" pitchFamily="34" charset="0"/>
-                <a:ea typeface="Calibri" pitchFamily="34" charset="-122"/>
-                <a:cs typeface="Calibri" pitchFamily="34" charset="-120"/>
+                <a:cs typeface="Amiri" pitchFamily="2" charset="-78"/>
               </a:rPr>
               <a:t>A</a:t>
             </a:r>
@@ -5161,8 +5100,7 @@
                   <a:srgbClr val="1F2A37"/>
                 </a:solidFill>
                 <a:latin typeface="Calibri" pitchFamily="34" charset="0"/>
-                <a:ea typeface="Calibri" pitchFamily="34" charset="-122"/>
-                <a:cs typeface="Calibri" pitchFamily="34" charset="-120"/>
+                <a:cs typeface="Amiri" pitchFamily="2" charset="-78"/>
               </a:rPr>
               <a:t>Modern Standard Arabic</a:t>
             </a:r>
@@ -5225,8 +5163,7 @@
                   <a:srgbClr val="1B3B6F"/>
                 </a:solidFill>
                 <a:latin typeface="Calibri" pitchFamily="34" charset="0"/>
-                <a:ea typeface="Calibri" pitchFamily="34" charset="-122"/>
-                <a:cs typeface="Calibri" pitchFamily="34" charset="-120"/>
+                <a:cs typeface="Amiri" pitchFamily="2" charset="-78"/>
               </a:rPr>
               <a:t>B</a:t>
             </a:r>
@@ -5264,8 +5201,7 @@
                   <a:srgbClr val="1F2A37"/>
                 </a:solidFill>
                 <a:latin typeface="Calibri" pitchFamily="34" charset="0"/>
-                <a:ea typeface="Calibri" pitchFamily="34" charset="-122"/>
-                <a:cs typeface="Calibri" pitchFamily="34" charset="-120"/>
+                <a:cs typeface="Amiri" pitchFamily="2" charset="-78"/>
               </a:rPr>
               <a:t>Only Egyptian Arabic</a:t>
             </a:r>
@@ -5362,8 +5298,7 @@
                   <a:srgbClr val="FFFFFF"/>
                 </a:solidFill>
                 <a:latin typeface="Calibri" pitchFamily="34" charset="0"/>
-                <a:ea typeface="Calibri" pitchFamily="34" charset="-122"/>
-                <a:cs typeface="Calibri" pitchFamily="34" charset="-120"/>
+                <a:cs typeface="Amiri" pitchFamily="2" charset="-78"/>
               </a:rPr>
               <a:t>4</a:t>
             </a:r>
@@ -5401,8 +5336,7 @@
                   <a:srgbClr val="1B3B6F"/>
                 </a:solidFill>
                 <a:latin typeface="Calibri" pitchFamily="34" charset="0"/>
-                <a:ea typeface="Calibri" pitchFamily="34" charset="-122"/>
-                <a:cs typeface="Calibri" pitchFamily="34" charset="-120"/>
+                <a:cs typeface="Amiri" pitchFamily="2" charset="-78"/>
               </a:rPr>
               <a:t>What does </a:t>
             </a:r>
@@ -5414,9 +5348,8 @@
                 <a:solidFill>
                   <a:srgbClr val="1B3B6F"/>
                 </a:solidFill>
-                <a:latin typeface="Amiri" pitchFamily="34" charset="0"/>
-                <a:ea typeface="Amiri" pitchFamily="34" charset="-122"/>
-                <a:cs typeface="Amiri" pitchFamily="34" charset="-120"/>
+                <a:latin typeface="Amiri" pitchFamily="2" charset="-78"/>
+                <a:cs typeface="Amiri" pitchFamily="2" charset="-78"/>
               </a:rPr>
               <a:t>ثَقَافَةٌ</a:t>
             </a:r>
@@ -5429,8 +5362,7 @@
                   <a:srgbClr val="1B3B6F"/>
                 </a:solidFill>
                 <a:latin typeface="Calibri" pitchFamily="34" charset="0"/>
-                <a:ea typeface="Calibri" pitchFamily="34" charset="-122"/>
-                <a:cs typeface="Calibri" pitchFamily="34" charset="-120"/>
+                <a:cs typeface="Amiri" pitchFamily="2" charset="-78"/>
               </a:rPr>
               <a:t> mean?</a:t>
             </a:r>
@@ -5493,8 +5425,7 @@
                   <a:srgbClr val="1B3B6F"/>
                 </a:solidFill>
                 <a:latin typeface="Calibri" pitchFamily="34" charset="0"/>
-                <a:ea typeface="Calibri" pitchFamily="34" charset="-122"/>
-                <a:cs typeface="Calibri" pitchFamily="34" charset="-120"/>
+                <a:cs typeface="Amiri" pitchFamily="2" charset="-78"/>
               </a:rPr>
               <a:t>A</a:t>
             </a:r>
@@ -5532,8 +5463,7 @@
                   <a:srgbClr val="1F2A37"/>
                 </a:solidFill>
                 <a:latin typeface="Calibri" pitchFamily="34" charset="0"/>
-                <a:ea typeface="Calibri" pitchFamily="34" charset="-122"/>
-                <a:cs typeface="Calibri" pitchFamily="34" charset="-120"/>
+                <a:cs typeface="Amiri" pitchFamily="2" charset="-78"/>
               </a:rPr>
               <a:t>culture</a:t>
             </a:r>
@@ -5596,8 +5526,7 @@
                   <a:srgbClr val="1B3B6F"/>
                 </a:solidFill>
                 <a:latin typeface="Calibri" pitchFamily="34" charset="0"/>
-                <a:ea typeface="Calibri" pitchFamily="34" charset="-122"/>
-                <a:cs typeface="Calibri" pitchFamily="34" charset="-120"/>
+                <a:cs typeface="Amiri" pitchFamily="2" charset="-78"/>
               </a:rPr>
               <a:t>B</a:t>
             </a:r>
@@ -5635,8 +5564,7 @@
                   <a:srgbClr val="1F2A37"/>
                 </a:solidFill>
                 <a:latin typeface="Calibri" pitchFamily="34" charset="0"/>
-                <a:ea typeface="Calibri" pitchFamily="34" charset="-122"/>
-                <a:cs typeface="Calibri" pitchFamily="34" charset="-120"/>
+                <a:cs typeface="Amiri" pitchFamily="2" charset="-78"/>
               </a:rPr>
               <a:t>language</a:t>
             </a:r>
@@ -5699,8 +5627,7 @@
                   <a:srgbClr val="1B3B6F"/>
                 </a:solidFill>
                 <a:latin typeface="Calibri" pitchFamily="34" charset="0"/>
-                <a:ea typeface="Calibri" pitchFamily="34" charset="-122"/>
-                <a:cs typeface="Calibri" pitchFamily="34" charset="-120"/>
+                <a:cs typeface="Amiri" pitchFamily="2" charset="-78"/>
               </a:rPr>
               <a:t>C</a:t>
             </a:r>
@@ -5738,8 +5665,7 @@
                   <a:srgbClr val="1F2A37"/>
                 </a:solidFill>
                 <a:latin typeface="Calibri" pitchFamily="34" charset="0"/>
-                <a:ea typeface="Calibri" pitchFamily="34" charset="-122"/>
-                <a:cs typeface="Calibri" pitchFamily="34" charset="-120"/>
+                <a:cs typeface="Amiri" pitchFamily="2" charset="-78"/>
               </a:rPr>
               <a:t>art</a:t>
             </a:r>
@@ -5777,8 +5703,7 @@
                   <a:srgbClr val="8A93A0"/>
                 </a:solidFill>
                 <a:latin typeface="Calibri" pitchFamily="34" charset="0"/>
-                <a:ea typeface="Calibri" pitchFamily="34" charset="-122"/>
-                <a:cs typeface="Calibri" pitchFamily="34" charset="-120"/>
+                <a:cs typeface="Amiri" pitchFamily="2" charset="-78"/>
               </a:rPr>
               <a:t>10 / 25</a:t>
             </a:r>
@@ -5872,9 +5797,8 @@
                 <a:solidFill>
                   <a:srgbClr val="D4AF37"/>
                 </a:solidFill>
-                <a:latin typeface="Amiri" pitchFamily="34" charset="0"/>
-                <a:ea typeface="Amiri" pitchFamily="34" charset="-122"/>
-                <a:cs typeface="Amiri" pitchFamily="34" charset="-120"/>
+                <a:latin typeface="Amiri" pitchFamily="2" charset="-78"/>
+                <a:cs typeface="Amiri" pitchFamily="2" charset="-78"/>
               </a:rPr>
               <a:t>م</a:t>
             </a:r>
@@ -5912,8 +5836,7 @@
                   <a:srgbClr val="1B3B6F"/>
                 </a:solidFill>
                 <a:latin typeface="Cambria" pitchFamily="34" charset="0"/>
-                <a:ea typeface="Cambria" pitchFamily="34" charset="-122"/>
-                <a:cs typeface="Cambria" pitchFamily="34" charset="-120"/>
+                <a:cs typeface="Amiri" pitchFamily="2" charset="-78"/>
               </a:rPr>
               <a:t>Al Madina Online School</a:t>
             </a:r>
@@ -5951,8 +5874,7 @@
                   <a:srgbClr val="8A6D1E"/>
                 </a:solidFill>
                 <a:latin typeface="Calibri" pitchFamily="34" charset="0"/>
-                <a:ea typeface="Calibri" pitchFamily="34" charset="-122"/>
-                <a:cs typeface="Calibri" pitchFamily="34" charset="-120"/>
+                <a:cs typeface="Amiri" pitchFamily="2" charset="-78"/>
               </a:rPr>
               <a:t>ARABIC DEPARTMENT · MIFTAH ARABIC · IGCSE 0544</a:t>
             </a:r>
@@ -6017,8 +5939,7 @@
                   <a:srgbClr val="FFFFFF"/>
                 </a:solidFill>
                 <a:latin typeface="Calibri" pitchFamily="34" charset="0"/>
-                <a:ea typeface="Calibri" pitchFamily="34" charset="-122"/>
-                <a:cs typeface="Calibri" pitchFamily="34" charset="-120"/>
+                <a:cs typeface="Amiri" pitchFamily="2" charset="-78"/>
               </a:rPr>
               <a:t>F1-L11 · Arabic around us</a:t>
             </a:r>
@@ -6083,8 +6004,7 @@
                   <a:srgbClr val="FFFFFF"/>
                 </a:solidFill>
                 <a:latin typeface="Calibri" pitchFamily="34" charset="0"/>
-                <a:ea typeface="Calibri" pitchFamily="34" charset="-122"/>
-                <a:cs typeface="Calibri" pitchFamily="34" charset="-120"/>
+                <a:cs typeface="Amiri" pitchFamily="2" charset="-78"/>
               </a:rPr>
               <a:t>TEACHER INSTRUCTION · 2 MIN</a:t>
             </a:r>
@@ -6122,8 +6042,7 @@
                   <a:srgbClr val="1B3B6F"/>
                 </a:solidFill>
                 <a:latin typeface="Calibri" pitchFamily="34" charset="0"/>
-                <a:ea typeface="Calibri" pitchFamily="34" charset="-122"/>
-                <a:cs typeface="Calibri" pitchFamily="34" charset="-120"/>
+                <a:cs typeface="Amiri" pitchFamily="2" charset="-78"/>
               </a:rPr>
               <a:t>CHECK FOR UNDERSTANDING · ANSWERS</a:t>
             </a:r>
@@ -6161,8 +6080,7 @@
                   <a:srgbClr val="1B3B6F"/>
                 </a:solidFill>
                 <a:latin typeface="Cambria" pitchFamily="34" charset="0"/>
-                <a:ea typeface="Cambria" pitchFamily="34" charset="-122"/>
-                <a:cs typeface="Cambria" pitchFamily="34" charset="-120"/>
+                <a:cs typeface="Amiri" pitchFamily="2" charset="-78"/>
               </a:rPr>
               <a:t>Answers and reasons</a:t>
             </a:r>
@@ -6199,9 +6117,8 @@
                 <a:solidFill>
                   <a:srgbClr val="8A6D1E"/>
                 </a:solidFill>
-                <a:latin typeface="Amiri" pitchFamily="34" charset="0"/>
-                <a:ea typeface="Amiri" pitchFamily="34" charset="-122"/>
-                <a:cs typeface="Amiri" pitchFamily="34" charset="-120"/>
+                <a:latin typeface="Amiri" pitchFamily="2" charset="-78"/>
+                <a:cs typeface="Amiri" pitchFamily="2" charset="-78"/>
               </a:rPr>
               <a:t>الإِجَابَاتُ وَالتَّعْلِيلُ</a:t>
             </a:r>
@@ -6239,8 +6156,7 @@
                   <a:srgbClr val="8A93A0"/>
                 </a:solidFill>
                 <a:latin typeface="Calibri" pitchFamily="34" charset="0"/>
-                <a:ea typeface="Calibri" pitchFamily="34" charset="-122"/>
-                <a:cs typeface="Calibri" pitchFamily="34" charset="-120"/>
+                <a:cs typeface="Amiri" pitchFamily="2" charset="-78"/>
               </a:rPr>
               <a:t>Miftah Arabic · Foundation F1 · Arabic Script &amp; Sounds · F1-L11</a:t>
             </a:r>
@@ -6337,8 +6253,7 @@
                   <a:srgbClr val="FFFFFF"/>
                 </a:solidFill>
                 <a:latin typeface="Calibri" pitchFamily="34" charset="0"/>
-                <a:ea typeface="Calibri" pitchFamily="34" charset="-122"/>
-                <a:cs typeface="Calibri" pitchFamily="34" charset="-120"/>
+                <a:cs typeface="Amiri" pitchFamily="2" charset="-78"/>
               </a:rPr>
               <a:t>1</a:t>
             </a:r>
@@ -6376,8 +6291,7 @@
                   <a:srgbClr val="1B3B6F"/>
                 </a:solidFill>
                 <a:latin typeface="Calibri" pitchFamily="34" charset="0"/>
-                <a:ea typeface="Calibri" pitchFamily="34" charset="-122"/>
-                <a:cs typeface="Calibri" pitchFamily="34" charset="-120"/>
+                <a:cs typeface="Amiri" pitchFamily="2" charset="-78"/>
               </a:rPr>
               <a:t>Does Arabic script always mean the language is Arabic?</a:t>
             </a:r>
@@ -6467,8 +6381,7 @@
                   <a:srgbClr val="FFFFFF"/>
                 </a:solidFill>
                 <a:latin typeface="Calibri" pitchFamily="34" charset="0"/>
-                <a:ea typeface="Calibri" pitchFamily="34" charset="-122"/>
-                <a:cs typeface="Calibri" pitchFamily="34" charset="-120"/>
+                <a:cs typeface="Amiri" pitchFamily="2" charset="-78"/>
               </a:rPr>
               <a:t>A</a:t>
             </a:r>
@@ -6506,8 +6419,7 @@
                   <a:srgbClr val="1F2A37"/>
                 </a:solidFill>
                 <a:latin typeface="Calibri" pitchFamily="34" charset="0"/>
-                <a:ea typeface="Calibri" pitchFamily="34" charset="-122"/>
-                <a:cs typeface="Calibri" pitchFamily="34" charset="-120"/>
+                <a:cs typeface="Amiri" pitchFamily="2" charset="-78"/>
               </a:rPr>
               <a:t>No — it also writes Persian, Urdu and more</a:t>
             </a:r>
@@ -6570,8 +6482,7 @@
                   <a:srgbClr val="1B3B6F"/>
                 </a:solidFill>
                 <a:latin typeface="Calibri" pitchFamily="34" charset="0"/>
-                <a:ea typeface="Calibri" pitchFamily="34" charset="-122"/>
-                <a:cs typeface="Calibri" pitchFamily="34" charset="-120"/>
+                <a:cs typeface="Amiri" pitchFamily="2" charset="-78"/>
               </a:rPr>
               <a:t>B</a:t>
             </a:r>
@@ -6609,8 +6520,7 @@
                   <a:srgbClr val="9AA1AB"/>
                 </a:solidFill>
                 <a:latin typeface="Calibri" pitchFamily="34" charset="0"/>
-                <a:ea typeface="Calibri" pitchFamily="34" charset="-122"/>
-                <a:cs typeface="Calibri" pitchFamily="34" charset="-120"/>
+                <a:cs typeface="Amiri" pitchFamily="2" charset="-78"/>
               </a:rPr>
               <a:t>Yes, always</a:t>
             </a:r>
@@ -6648,8 +6558,7 @@
                   <a:srgbClr val="8A6D1E"/>
                 </a:solidFill>
                 <a:latin typeface="Calibri" pitchFamily="34" charset="0"/>
-                <a:ea typeface="Calibri" pitchFamily="34" charset="-122"/>
-                <a:cs typeface="Calibri" pitchFamily="34" charset="-120"/>
+                <a:cs typeface="Amiri" pitchFamily="2" charset="-78"/>
               </a:rPr>
               <a:t>Website Part 2.</a:t>
             </a:r>
@@ -6746,8 +6655,7 @@
                   <a:srgbClr val="FFFFFF"/>
                 </a:solidFill>
                 <a:latin typeface="Calibri" pitchFamily="34" charset="0"/>
-                <a:ea typeface="Calibri" pitchFamily="34" charset="-122"/>
-                <a:cs typeface="Calibri" pitchFamily="34" charset="-120"/>
+                <a:cs typeface="Amiri" pitchFamily="2" charset="-78"/>
               </a:rPr>
               <a:t>2</a:t>
             </a:r>
@@ -6785,8 +6693,7 @@
                   <a:srgbClr val="1B3B6F"/>
                 </a:solidFill>
                 <a:latin typeface="Calibri" pitchFamily="34" charset="0"/>
-                <a:ea typeface="Calibri" pitchFamily="34" charset="-122"/>
-                <a:cs typeface="Calibri" pitchFamily="34" charset="-120"/>
+                <a:cs typeface="Amiri" pitchFamily="2" charset="-78"/>
               </a:rPr>
               <a:t>What are dialects?</a:t>
             </a:r>
@@ -6849,8 +6756,7 @@
                   <a:srgbClr val="1B3B6F"/>
                 </a:solidFill>
                 <a:latin typeface="Calibri" pitchFamily="34" charset="0"/>
-                <a:ea typeface="Calibri" pitchFamily="34" charset="-122"/>
-                <a:cs typeface="Calibri" pitchFamily="34" charset="-120"/>
+                <a:cs typeface="Amiri" pitchFamily="2" charset="-78"/>
               </a:rPr>
               <a:t>A</a:t>
             </a:r>
@@ -6888,8 +6794,7 @@
                   <a:srgbClr val="9AA1AB"/>
                 </a:solidFill>
                 <a:latin typeface="Calibri" pitchFamily="34" charset="0"/>
-                <a:ea typeface="Calibri" pitchFamily="34" charset="-122"/>
-                <a:cs typeface="Calibri" pitchFamily="34" charset="-120"/>
+                <a:cs typeface="Amiri" pitchFamily="2" charset="-78"/>
               </a:rPr>
               <a:t>Mistakes in Arabic</a:t>
             </a:r>
@@ -6979,8 +6884,7 @@
                   <a:srgbClr val="FFFFFF"/>
                 </a:solidFill>
                 <a:latin typeface="Calibri" pitchFamily="34" charset="0"/>
-                <a:ea typeface="Calibri" pitchFamily="34" charset="-122"/>
-                <a:cs typeface="Calibri" pitchFamily="34" charset="-120"/>
+                <a:cs typeface="Amiri" pitchFamily="2" charset="-78"/>
               </a:rPr>
               <a:t>B</a:t>
             </a:r>
@@ -7018,8 +6922,7 @@
                   <a:srgbClr val="1F2A37"/>
                 </a:solidFill>
                 <a:latin typeface="Calibri" pitchFamily="34" charset="0"/>
-                <a:ea typeface="Calibri" pitchFamily="34" charset="-122"/>
-                <a:cs typeface="Calibri" pitchFamily="34" charset="-120"/>
+                <a:cs typeface="Amiri" pitchFamily="2" charset="-78"/>
               </a:rPr>
               <a:t>Systematic spoken varieties</a:t>
             </a:r>
@@ -7057,8 +6960,7 @@
                   <a:srgbClr val="8A6D1E"/>
                 </a:solidFill>
                 <a:latin typeface="Calibri" pitchFamily="34" charset="0"/>
-                <a:ea typeface="Calibri" pitchFamily="34" charset="-122"/>
-                <a:cs typeface="Calibri" pitchFamily="34" charset="-120"/>
+                <a:cs typeface="Amiri" pitchFamily="2" charset="-78"/>
               </a:rPr>
               <a:t>The respect rule.</a:t>
             </a:r>
@@ -7155,8 +7057,7 @@
                   <a:srgbClr val="FFFFFF"/>
                 </a:solidFill>
                 <a:latin typeface="Calibri" pitchFamily="34" charset="0"/>
-                <a:ea typeface="Calibri" pitchFamily="34" charset="-122"/>
-                <a:cs typeface="Calibri" pitchFamily="34" charset="-120"/>
+                <a:cs typeface="Amiri" pitchFamily="2" charset="-78"/>
               </a:rPr>
               <a:t>3</a:t>
             </a:r>
@@ -7194,8 +7095,7 @@
                   <a:srgbClr val="1B3B6F"/>
                 </a:solidFill>
                 <a:latin typeface="Calibri" pitchFamily="34" charset="0"/>
-                <a:ea typeface="Calibri" pitchFamily="34" charset="-122"/>
-                <a:cs typeface="Calibri" pitchFamily="34" charset="-120"/>
+                <a:cs typeface="Amiri" pitchFamily="2" charset="-78"/>
               </a:rPr>
               <a:t>Which Arabic do we use in class tasks?</a:t>
             </a:r>
@@ -7285,8 +7185,7 @@
                   <a:srgbClr val="FFFFFF"/>
                 </a:solidFill>
                 <a:latin typeface="Calibri" pitchFamily="34" charset="0"/>
-                <a:ea typeface="Calibri" pitchFamily="34" charset="-122"/>
-                <a:cs typeface="Calibri" pitchFamily="34" charset="-120"/>
+                <a:cs typeface="Amiri" pitchFamily="2" charset="-78"/>
               </a:rPr>
               <a:t>A</a:t>
             </a:r>
@@ -7324,8 +7223,7 @@
                   <a:srgbClr val="1F2A37"/>
                 </a:solidFill>
                 <a:latin typeface="Calibri" pitchFamily="34" charset="0"/>
-                <a:ea typeface="Calibri" pitchFamily="34" charset="-122"/>
-                <a:cs typeface="Calibri" pitchFamily="34" charset="-120"/>
+                <a:cs typeface="Amiri" pitchFamily="2" charset="-78"/>
               </a:rPr>
               <a:t>Modern Standard Arabic</a:t>
             </a:r>
@@ -7388,8 +7286,7 @@
                   <a:srgbClr val="1B3B6F"/>
                 </a:solidFill>
                 <a:latin typeface="Calibri" pitchFamily="34" charset="0"/>
-                <a:ea typeface="Calibri" pitchFamily="34" charset="-122"/>
-                <a:cs typeface="Calibri" pitchFamily="34" charset="-120"/>
+                <a:cs typeface="Amiri" pitchFamily="2" charset="-78"/>
               </a:rPr>
               <a:t>B</a:t>
             </a:r>
@@ -7427,8 +7324,7 @@
                   <a:srgbClr val="9AA1AB"/>
                 </a:solidFill>
                 <a:latin typeface="Calibri" pitchFamily="34" charset="0"/>
-                <a:ea typeface="Calibri" pitchFamily="34" charset="-122"/>
-                <a:cs typeface="Calibri" pitchFamily="34" charset="-120"/>
+                <a:cs typeface="Amiri" pitchFamily="2" charset="-78"/>
               </a:rPr>
               <a:t>Only Egyptian Arabic</a:t>
             </a:r>
@@ -7466,8 +7362,7 @@
                   <a:srgbClr val="8A6D1E"/>
                 </a:solidFill>
                 <a:latin typeface="Calibri" pitchFamily="34" charset="0"/>
-                <a:ea typeface="Calibri" pitchFamily="34" charset="-122"/>
-                <a:cs typeface="Calibri" pitchFamily="34" charset="-120"/>
+                <a:cs typeface="Amiri" pitchFamily="2" charset="-78"/>
               </a:rPr>
               <a:t>Course standard.</a:t>
             </a:r>
@@ -7564,8 +7459,7 @@
                   <a:srgbClr val="FFFFFF"/>
                 </a:solidFill>
                 <a:latin typeface="Calibri" pitchFamily="34" charset="0"/>
-                <a:ea typeface="Calibri" pitchFamily="34" charset="-122"/>
-                <a:cs typeface="Calibri" pitchFamily="34" charset="-120"/>
+                <a:cs typeface="Amiri" pitchFamily="2" charset="-78"/>
               </a:rPr>
               <a:t>4</a:t>
             </a:r>
@@ -7603,8 +7497,7 @@
                   <a:srgbClr val="1B3B6F"/>
                 </a:solidFill>
                 <a:latin typeface="Calibri" pitchFamily="34" charset="0"/>
-                <a:ea typeface="Calibri" pitchFamily="34" charset="-122"/>
-                <a:cs typeface="Calibri" pitchFamily="34" charset="-120"/>
+                <a:cs typeface="Amiri" pitchFamily="2" charset="-78"/>
               </a:rPr>
               <a:t>What does </a:t>
             </a:r>
@@ -7616,9 +7509,8 @@
                 <a:solidFill>
                   <a:srgbClr val="1B3B6F"/>
                 </a:solidFill>
-                <a:latin typeface="Amiri" pitchFamily="34" charset="0"/>
-                <a:ea typeface="Amiri" pitchFamily="34" charset="-122"/>
-                <a:cs typeface="Amiri" pitchFamily="34" charset="-120"/>
+                <a:latin typeface="Amiri" pitchFamily="2" charset="-78"/>
+                <a:cs typeface="Amiri" pitchFamily="2" charset="-78"/>
               </a:rPr>
               <a:t>ثَقَافَةٌ</a:t>
             </a:r>
@@ -7631,8 +7523,7 @@
                   <a:srgbClr val="1B3B6F"/>
                 </a:solidFill>
                 <a:latin typeface="Calibri" pitchFamily="34" charset="0"/>
-                <a:ea typeface="Calibri" pitchFamily="34" charset="-122"/>
-                <a:cs typeface="Calibri" pitchFamily="34" charset="-120"/>
+                <a:cs typeface="Amiri" pitchFamily="2" charset="-78"/>
               </a:rPr>
               <a:t> mean?</a:t>
             </a:r>
@@ -7722,8 +7613,7 @@
                   <a:srgbClr val="FFFFFF"/>
                 </a:solidFill>
                 <a:latin typeface="Calibri" pitchFamily="34" charset="0"/>
-                <a:ea typeface="Calibri" pitchFamily="34" charset="-122"/>
-                <a:cs typeface="Calibri" pitchFamily="34" charset="-120"/>
+                <a:cs typeface="Amiri" pitchFamily="2" charset="-78"/>
               </a:rPr>
               <a:t>A</a:t>
             </a:r>
@@ -7761,8 +7651,7 @@
                   <a:srgbClr val="1F2A37"/>
                 </a:solidFill>
                 <a:latin typeface="Calibri" pitchFamily="34" charset="0"/>
-                <a:ea typeface="Calibri" pitchFamily="34" charset="-122"/>
-                <a:cs typeface="Calibri" pitchFamily="34" charset="-120"/>
+                <a:cs typeface="Amiri" pitchFamily="2" charset="-78"/>
               </a:rPr>
               <a:t>culture</a:t>
             </a:r>
@@ -7825,8 +7714,7 @@
                   <a:srgbClr val="1B3B6F"/>
                 </a:solidFill>
                 <a:latin typeface="Calibri" pitchFamily="34" charset="0"/>
-                <a:ea typeface="Calibri" pitchFamily="34" charset="-122"/>
-                <a:cs typeface="Calibri" pitchFamily="34" charset="-120"/>
+                <a:cs typeface="Amiri" pitchFamily="2" charset="-78"/>
               </a:rPr>
               <a:t>B</a:t>
             </a:r>
@@ -7864,8 +7752,7 @@
                   <a:srgbClr val="9AA1AB"/>
                 </a:solidFill>
                 <a:latin typeface="Calibri" pitchFamily="34" charset="0"/>
-                <a:ea typeface="Calibri" pitchFamily="34" charset="-122"/>
-                <a:cs typeface="Calibri" pitchFamily="34" charset="-120"/>
+                <a:cs typeface="Amiri" pitchFamily="2" charset="-78"/>
               </a:rPr>
               <a:t>language</a:t>
             </a:r>
@@ -7928,8 +7815,7 @@
                   <a:srgbClr val="1B3B6F"/>
                 </a:solidFill>
                 <a:latin typeface="Calibri" pitchFamily="34" charset="0"/>
-                <a:ea typeface="Calibri" pitchFamily="34" charset="-122"/>
-                <a:cs typeface="Calibri" pitchFamily="34" charset="-120"/>
+                <a:cs typeface="Amiri" pitchFamily="2" charset="-78"/>
               </a:rPr>
               <a:t>C</a:t>
             </a:r>
@@ -7967,8 +7853,7 @@
                   <a:srgbClr val="9AA1AB"/>
                 </a:solidFill>
                 <a:latin typeface="Calibri" pitchFamily="34" charset="0"/>
-                <a:ea typeface="Calibri" pitchFamily="34" charset="-122"/>
-                <a:cs typeface="Calibri" pitchFamily="34" charset="-120"/>
+                <a:cs typeface="Amiri" pitchFamily="2" charset="-78"/>
               </a:rPr>
               <a:t>art</a:t>
             </a:r>
@@ -8006,8 +7891,7 @@
                   <a:srgbClr val="8A6D1E"/>
                 </a:solidFill>
                 <a:latin typeface="Calibri" pitchFamily="34" charset="0"/>
-                <a:ea typeface="Calibri" pitchFamily="34" charset="-122"/>
-                <a:cs typeface="Calibri" pitchFamily="34" charset="-120"/>
+                <a:cs typeface="Amiri" pitchFamily="2" charset="-78"/>
               </a:rPr>
               <a:t>Key vocabulary.</a:t>
             </a:r>
@@ -8045,8 +7929,7 @@
                   <a:srgbClr val="8A93A0"/>
                 </a:solidFill>
                 <a:latin typeface="Calibri" pitchFamily="34" charset="0"/>
-                <a:ea typeface="Calibri" pitchFamily="34" charset="-122"/>
-                <a:cs typeface="Calibri" pitchFamily="34" charset="-120"/>
+                <a:cs typeface="Amiri" pitchFamily="2" charset="-78"/>
               </a:rPr>
               <a:t>11 / 25</a:t>
             </a:r>
@@ -8140,9 +8023,8 @@
                 <a:solidFill>
                   <a:srgbClr val="D4AF37"/>
                 </a:solidFill>
-                <a:latin typeface="Amiri" pitchFamily="34" charset="0"/>
-                <a:ea typeface="Amiri" pitchFamily="34" charset="-122"/>
-                <a:cs typeface="Amiri" pitchFamily="34" charset="-120"/>
+                <a:latin typeface="Amiri" pitchFamily="2" charset="-78"/>
+                <a:cs typeface="Amiri" pitchFamily="2" charset="-78"/>
               </a:rPr>
               <a:t>م</a:t>
             </a:r>
@@ -8180,8 +8062,7 @@
                   <a:srgbClr val="1B3B6F"/>
                 </a:solidFill>
                 <a:latin typeface="Cambria" pitchFamily="34" charset="0"/>
-                <a:ea typeface="Cambria" pitchFamily="34" charset="-122"/>
-                <a:cs typeface="Cambria" pitchFamily="34" charset="-120"/>
+                <a:cs typeface="Amiri" pitchFamily="2" charset="-78"/>
               </a:rPr>
               <a:t>Al Madina Online School</a:t>
             </a:r>
@@ -8219,8 +8100,7 @@
                   <a:srgbClr val="8A6D1E"/>
                 </a:solidFill>
                 <a:latin typeface="Calibri" pitchFamily="34" charset="0"/>
-                <a:ea typeface="Calibri" pitchFamily="34" charset="-122"/>
-                <a:cs typeface="Calibri" pitchFamily="34" charset="-120"/>
+                <a:cs typeface="Amiri" pitchFamily="2" charset="-78"/>
               </a:rPr>
               <a:t>ARABIC DEPARTMENT · MIFTAH ARABIC · IGCSE 0544</a:t>
             </a:r>
@@ -8285,8 +8165,7 @@
                   <a:srgbClr val="FFFFFF"/>
                 </a:solidFill>
                 <a:latin typeface="Calibri" pitchFamily="34" charset="0"/>
-                <a:ea typeface="Calibri" pitchFamily="34" charset="-122"/>
-                <a:cs typeface="Calibri" pitchFamily="34" charset="-120"/>
+                <a:cs typeface="Amiri" pitchFamily="2" charset="-78"/>
               </a:rPr>
               <a:t>F1-L11 · Arabic around us</a:t>
             </a:r>
@@ -8351,8 +8230,7 @@
                   <a:srgbClr val="FFFFFF"/>
                 </a:solidFill>
                 <a:latin typeface="Calibri" pitchFamily="34" charset="0"/>
-                <a:ea typeface="Calibri" pitchFamily="34" charset="-122"/>
-                <a:cs typeface="Calibri" pitchFamily="34" charset="-120"/>
+                <a:cs typeface="Amiri" pitchFamily="2" charset="-78"/>
               </a:rPr>
               <a:t>I DO · 4 MIN</a:t>
             </a:r>
@@ -8390,8 +8268,7 @@
                   <a:srgbClr val="6B4C9A"/>
                 </a:solidFill>
                 <a:latin typeface="Calibri" pitchFamily="34" charset="0"/>
-                <a:ea typeface="Calibri" pitchFamily="34" charset="-122"/>
-                <a:cs typeface="Calibri" pitchFamily="34" charset="-120"/>
+                <a:cs typeface="Amiri" pitchFamily="2" charset="-78"/>
               </a:rPr>
               <a:t>I DO · THE ABCD DETECTIVE CHAIN (WEBSITE PART 7) · WORKED EXAMPLE</a:t>
             </a:r>
@@ -8429,8 +8306,7 @@
                   <a:srgbClr val="1B3B6F"/>
                 </a:solidFill>
                 <a:latin typeface="Cambria" pitchFamily="34" charset="0"/>
-                <a:ea typeface="Cambria" pitchFamily="34" charset="-122"/>
-                <a:cs typeface="Cambria" pitchFamily="34" charset="-120"/>
+                <a:cs typeface="Amiri" pitchFamily="2" charset="-78"/>
               </a:rPr>
               <a:t>Watch me investigate a shop sign</a:t>
             </a:r>
@@ -8467,9 +8343,8 @@
                 <a:solidFill>
                   <a:srgbClr val="8A6D1E"/>
                 </a:solidFill>
-                <a:latin typeface="Amiri" pitchFamily="34" charset="0"/>
-                <a:ea typeface="Amiri" pitchFamily="34" charset="-122"/>
-                <a:cs typeface="Amiri" pitchFamily="34" charset="-120"/>
+                <a:latin typeface="Amiri" pitchFamily="2" charset="-78"/>
+                <a:cs typeface="Amiri" pitchFamily="2" charset="-78"/>
               </a:rPr>
               <a:t>كُنْ مُحَقِّقًا لِلْخَطِّ العَرَبِيِّ</a:t>
             </a:r>
@@ -8507,8 +8382,7 @@
                   <a:srgbClr val="8A93A0"/>
                 </a:solidFill>
                 <a:latin typeface="Calibri" pitchFamily="34" charset="0"/>
-                <a:ea typeface="Calibri" pitchFamily="34" charset="-122"/>
-                <a:cs typeface="Calibri" pitchFamily="34" charset="-120"/>
+                <a:cs typeface="Amiri" pitchFamily="2" charset="-78"/>
               </a:rPr>
               <a:t>Miftah Arabic · Foundation F1 · Arabic Script &amp; Sounds · F1-L11</a:t>
             </a:r>
@@ -8571,8 +8445,7 @@
                   <a:srgbClr val="FFFFFF"/>
                 </a:solidFill>
                 <a:latin typeface="Calibri" pitchFamily="34" charset="0"/>
-                <a:ea typeface="Calibri" pitchFamily="34" charset="-122"/>
-                <a:cs typeface="Calibri" pitchFamily="34" charset="-120"/>
+                <a:cs typeface="Amiri" pitchFamily="2" charset="-78"/>
               </a:rPr>
               <a:t>Step</a:t>
             </a:r>
@@ -8610,8 +8483,7 @@
                   <a:srgbClr val="FFFFFF"/>
                 </a:solidFill>
                 <a:latin typeface="Calibri" pitchFamily="34" charset="0"/>
-                <a:ea typeface="Calibri" pitchFamily="34" charset="-122"/>
-                <a:cs typeface="Calibri" pitchFamily="34" charset="-120"/>
+                <a:cs typeface="Amiri" pitchFamily="2" charset="-78"/>
               </a:rPr>
               <a:t>Question</a:t>
             </a:r>
@@ -8648,9 +8520,8 @@
                 <a:solidFill>
                   <a:srgbClr val="FFFFFF"/>
                 </a:solidFill>
-                <a:latin typeface="Amiri" pitchFamily="34" charset="0"/>
-                <a:ea typeface="Amiri" pitchFamily="34" charset="-122"/>
-                <a:cs typeface="Amiri" pitchFamily="34" charset="-120"/>
+                <a:latin typeface="Amiri" pitchFamily="2" charset="-78"/>
+                <a:cs typeface="Amiri" pitchFamily="2" charset="-78"/>
               </a:rPr>
               <a:t>مَخْبَز</a:t>
             </a:r>
@@ -8663,8 +8534,7 @@
                   <a:srgbClr val="FFFFFF"/>
                 </a:solidFill>
                 <a:latin typeface="Calibri" pitchFamily="34" charset="0"/>
-                <a:ea typeface="Calibri" pitchFamily="34" charset="-122"/>
-                <a:cs typeface="Calibri" pitchFamily="34" charset="-120"/>
+                <a:cs typeface="Amiri" pitchFamily="2" charset="-78"/>
               </a:rPr>
               <a:t> on a shop front</a:t>
             </a:r>
@@ -8729,8 +8599,7 @@
                   <a:srgbClr val="5A6472"/>
                 </a:solidFill>
                 <a:latin typeface="Calibri" pitchFamily="34" charset="0"/>
-                <a:ea typeface="Calibri" pitchFamily="34" charset="-122"/>
-                <a:cs typeface="Calibri" pitchFamily="34" charset="-120"/>
+                <a:cs typeface="Amiri" pitchFamily="2" charset="-78"/>
               </a:rPr>
               <a:t>A · Attend</a:t>
             </a:r>
@@ -8768,8 +8637,7 @@
                   <a:srgbClr val="5A6472"/>
                 </a:solidFill>
                 <a:latin typeface="Calibri" pitchFamily="34" charset="0"/>
-                <a:ea typeface="Calibri" pitchFamily="34" charset="-122"/>
-                <a:cs typeface="Calibri" pitchFamily="34" charset="-120"/>
+                <a:cs typeface="Amiri" pitchFamily="2" charset="-78"/>
               </a:rPr>
               <a:t>What can I observe?</a:t>
             </a:r>
@@ -8806,9 +8674,8 @@
                 <a:solidFill>
                   <a:srgbClr val="5A6472"/>
                 </a:solidFill>
-                <a:latin typeface="Amiri" pitchFamily="34" charset="0"/>
-                <a:ea typeface="Amiri" pitchFamily="34" charset="-122"/>
-                <a:cs typeface="Amiri" pitchFamily="34" charset="-120"/>
+                <a:latin typeface="Amiri" pitchFamily="2" charset="-78"/>
+                <a:cs typeface="Amiri" pitchFamily="2" charset="-78"/>
               </a:rPr>
               <a:t>م خ ب ز</a:t>
             </a:r>
@@ -8821,8 +8688,7 @@
                   <a:srgbClr val="5A6472"/>
                 </a:solidFill>
                 <a:latin typeface="Calibri" pitchFamily="34" charset="0"/>
-                <a:ea typeface="Calibri" pitchFamily="34" charset="-122"/>
-                <a:cs typeface="Calibri" pitchFamily="34" charset="-120"/>
+                <a:cs typeface="Amiri" pitchFamily="2" charset="-78"/>
               </a:rPr>
               <a:t> — final </a:t>
             </a:r>
@@ -8834,9 +8700,8 @@
                 <a:solidFill>
                   <a:srgbClr val="5A6472"/>
                 </a:solidFill>
-                <a:latin typeface="Amiri" pitchFamily="34" charset="0"/>
-                <a:ea typeface="Amiri" pitchFamily="34" charset="-122"/>
-                <a:cs typeface="Amiri" pitchFamily="34" charset="-120"/>
+                <a:latin typeface="Amiri" pitchFamily="2" charset="-78"/>
+                <a:cs typeface="Amiri" pitchFamily="2" charset="-78"/>
               </a:rPr>
               <a:t>ز</a:t>
             </a:r>
@@ -8849,8 +8714,7 @@
                   <a:srgbClr val="5A6472"/>
                 </a:solidFill>
                 <a:latin typeface="Calibri" pitchFamily="34" charset="0"/>
-                <a:ea typeface="Calibri" pitchFamily="34" charset="-122"/>
-                <a:cs typeface="Calibri" pitchFamily="34" charset="-120"/>
+                <a:cs typeface="Amiri" pitchFamily="2" charset="-78"/>
               </a:rPr>
               <a:t> does not connect onwards</a:t>
             </a:r>
@@ -8915,8 +8779,7 @@
                   <a:srgbClr val="FFFFFF"/>
                 </a:solidFill>
                 <a:latin typeface="Calibri" pitchFamily="34" charset="0"/>
-                <a:ea typeface="Calibri" pitchFamily="34" charset="-122"/>
-                <a:cs typeface="Calibri" pitchFamily="34" charset="-120"/>
+                <a:cs typeface="Amiri" pitchFamily="2" charset="-78"/>
               </a:rPr>
               <a:t>CORE</a:t>
             </a:r>
@@ -8981,8 +8844,7 @@
                   <a:srgbClr val="5A6472"/>
                 </a:solidFill>
                 <a:latin typeface="Calibri" pitchFamily="34" charset="0"/>
-                <a:ea typeface="Calibri" pitchFamily="34" charset="-122"/>
-                <a:cs typeface="Calibri" pitchFamily="34" charset="-120"/>
+                <a:cs typeface="Amiri" pitchFamily="2" charset="-78"/>
               </a:rPr>
               <a:t>B · Build</a:t>
             </a:r>
@@ -9020,8 +8882,7 @@
                   <a:srgbClr val="5A6472"/>
                 </a:solidFill>
                 <a:latin typeface="Calibri" pitchFamily="34" charset="0"/>
-                <a:ea typeface="Calibri" pitchFamily="34" charset="-122"/>
-                <a:cs typeface="Calibri" pitchFamily="34" charset="-120"/>
+                <a:cs typeface="Amiri" pitchFamily="2" charset="-78"/>
               </a:rPr>
               <a:t>What could it say? How sure am I?</a:t>
             </a:r>
@@ -9058,9 +8919,8 @@
                 <a:solidFill>
                   <a:srgbClr val="5A6472"/>
                 </a:solidFill>
-                <a:latin typeface="Amiri" pitchFamily="34" charset="0"/>
-                <a:ea typeface="Amiri" pitchFamily="34" charset="-122"/>
-                <a:cs typeface="Amiri" pitchFamily="34" charset="-120"/>
+                <a:latin typeface="Amiri" pitchFamily="2" charset="-78"/>
+                <a:cs typeface="Amiri" pitchFamily="2" charset="-78"/>
               </a:rPr>
               <a:t>مَخْبَز</a:t>
             </a:r>
@@ -9073,8 +8933,7 @@
                   <a:srgbClr val="5A6472"/>
                 </a:solidFill>
                 <a:latin typeface="Calibri" pitchFamily="34" charset="0"/>
-                <a:ea typeface="Calibri" pitchFamily="34" charset="-122"/>
-                <a:cs typeface="Calibri" pitchFamily="34" charset="-120"/>
+                <a:cs typeface="Amiri" pitchFamily="2" charset="-78"/>
               </a:rPr>
               <a:t> — makhbaz</a:t>
             </a:r>
@@ -9139,8 +8998,7 @@
                   <a:srgbClr val="FFFFFF"/>
                 </a:solidFill>
                 <a:latin typeface="Calibri" pitchFamily="34" charset="0"/>
-                <a:ea typeface="Calibri" pitchFamily="34" charset="-122"/>
-                <a:cs typeface="Calibri" pitchFamily="34" charset="-120"/>
+                <a:cs typeface="Amiri" pitchFamily="2" charset="-78"/>
               </a:rPr>
               <a:t>CORE</a:t>
             </a:r>
@@ -9205,8 +9063,7 @@
                   <a:srgbClr val="5A6472"/>
                 </a:solidFill>
                 <a:latin typeface="Calibri" pitchFamily="34" charset="0"/>
-                <a:ea typeface="Calibri" pitchFamily="34" charset="-122"/>
-                <a:cs typeface="Calibri" pitchFamily="34" charset="-120"/>
+                <a:cs typeface="Amiri" pitchFamily="2" charset="-78"/>
               </a:rPr>
               <a:t>C · Contextualise</a:t>
             </a:r>
@@ -9244,8 +9101,7 @@
                   <a:srgbClr val="5A6472"/>
                 </a:solidFill>
                 <a:latin typeface="Calibri" pitchFamily="34" charset="0"/>
-                <a:ea typeface="Calibri" pitchFamily="34" charset="-122"/>
-                <a:cs typeface="Calibri" pitchFamily="34" charset="-120"/>
+                <a:cs typeface="Amiri" pitchFamily="2" charset="-78"/>
               </a:rPr>
               <a:t>Who wrote it, for whom, why?</a:t>
             </a:r>
@@ -9283,8 +9139,7 @@
                   <a:srgbClr val="5A6472"/>
                 </a:solidFill>
                 <a:latin typeface="Calibri" pitchFamily="34" charset="0"/>
-                <a:ea typeface="Calibri" pitchFamily="34" charset="-122"/>
-                <a:cs typeface="Calibri" pitchFamily="34" charset="-120"/>
+                <a:cs typeface="Amiri" pitchFamily="2" charset="-78"/>
               </a:rPr>
               <a:t>A shop front with pictures of bread</a:t>
             </a:r>
@@ -9349,8 +9204,7 @@
                   <a:srgbClr val="FFFFFF"/>
                 </a:solidFill>
                 <a:latin typeface="Calibri" pitchFamily="34" charset="0"/>
-                <a:ea typeface="Calibri" pitchFamily="34" charset="-122"/>
-                <a:cs typeface="Calibri" pitchFamily="34" charset="-120"/>
+                <a:cs typeface="Amiri" pitchFamily="2" charset="-78"/>
               </a:rPr>
               <a:t>CORE</a:t>
             </a:r>
@@ -9415,8 +9269,7 @@
                   <a:srgbClr val="5A6472"/>
                 </a:solidFill>
                 <a:latin typeface="Calibri" pitchFamily="34" charset="0"/>
-                <a:ea typeface="Calibri" pitchFamily="34" charset="-122"/>
-                <a:cs typeface="Calibri" pitchFamily="34" charset="-120"/>
+                <a:cs typeface="Amiri" pitchFamily="2" charset="-78"/>
               </a:rPr>
               <a:t>D · Double-check</a:t>
             </a:r>
@@ -9454,8 +9307,7 @@
                   <a:srgbClr val="5A6472"/>
                 </a:solidFill>
                 <a:latin typeface="Calibri" pitchFamily="34" charset="0"/>
-                <a:ea typeface="Calibri" pitchFamily="34" charset="-122"/>
-                <a:cs typeface="Calibri" pitchFamily="34" charset="-120"/>
+                <a:cs typeface="Amiri" pitchFamily="2" charset="-78"/>
               </a:rPr>
               <a:t>Can I verify it?</a:t>
             </a:r>
@@ -9493,8 +9345,7 @@
                   <a:srgbClr val="5A6472"/>
                 </a:solidFill>
                 <a:latin typeface="Calibri" pitchFamily="34" charset="0"/>
-                <a:ea typeface="Calibri" pitchFamily="34" charset="-122"/>
-                <a:cs typeface="Calibri" pitchFamily="34" charset="-120"/>
+                <a:cs typeface="Amiri" pitchFamily="2" charset="-78"/>
               </a:rPr>
               <a:t>The shop’s bilingual listing says “bakery” ✓ secure</a:t>
             </a:r>
@@ -9559,8 +9410,7 @@
                   <a:srgbClr val="FFFFFF"/>
                 </a:solidFill>
                 <a:latin typeface="Calibri" pitchFamily="34" charset="0"/>
-                <a:ea typeface="Calibri" pitchFamily="34" charset="-122"/>
-                <a:cs typeface="Calibri" pitchFamily="34" charset="-120"/>
+                <a:cs typeface="Amiri" pitchFamily="2" charset="-78"/>
               </a:rPr>
               <a:t>CORE</a:t>
             </a:r>
@@ -9598,8 +9448,7 @@
                   <a:srgbClr val="8A93A0"/>
                 </a:solidFill>
                 <a:latin typeface="Calibri" pitchFamily="34" charset="0"/>
-                <a:ea typeface="Calibri" pitchFamily="34" charset="-122"/>
-                <a:cs typeface="Calibri" pitchFamily="34" charset="-120"/>
+                <a:cs typeface="Amiri" pitchFamily="2" charset="-78"/>
               </a:rPr>
               <a:t>12 / 25</a:t>
             </a:r>
@@ -9693,9 +9542,8 @@
                 <a:solidFill>
                   <a:srgbClr val="D4AF37"/>
                 </a:solidFill>
-                <a:latin typeface="Amiri" pitchFamily="34" charset="0"/>
-                <a:ea typeface="Amiri" pitchFamily="34" charset="-122"/>
-                <a:cs typeface="Amiri" pitchFamily="34" charset="-120"/>
+                <a:latin typeface="Amiri" pitchFamily="2" charset="-78"/>
+                <a:cs typeface="Amiri" pitchFamily="2" charset="-78"/>
               </a:rPr>
               <a:t>م</a:t>
             </a:r>
@@ -9733,8 +9581,7 @@
                   <a:srgbClr val="1B3B6F"/>
                 </a:solidFill>
                 <a:latin typeface="Cambria" pitchFamily="34" charset="0"/>
-                <a:ea typeface="Cambria" pitchFamily="34" charset="-122"/>
-                <a:cs typeface="Cambria" pitchFamily="34" charset="-120"/>
+                <a:cs typeface="Amiri" pitchFamily="2" charset="-78"/>
               </a:rPr>
               <a:t>Al Madina Online School</a:t>
             </a:r>
@@ -9772,8 +9619,7 @@
                   <a:srgbClr val="8A6D1E"/>
                 </a:solidFill>
                 <a:latin typeface="Calibri" pitchFamily="34" charset="0"/>
-                <a:ea typeface="Calibri" pitchFamily="34" charset="-122"/>
-                <a:cs typeface="Calibri" pitchFamily="34" charset="-120"/>
+                <a:cs typeface="Amiri" pitchFamily="2" charset="-78"/>
               </a:rPr>
               <a:t>ARABIC DEPARTMENT · MIFTAH ARABIC · IGCSE 0544</a:t>
             </a:r>
@@ -9838,8 +9684,7 @@
                   <a:srgbClr val="FFFFFF"/>
                 </a:solidFill>
                 <a:latin typeface="Calibri" pitchFamily="34" charset="0"/>
-                <a:ea typeface="Calibri" pitchFamily="34" charset="-122"/>
-                <a:cs typeface="Calibri" pitchFamily="34" charset="-120"/>
+                <a:cs typeface="Amiri" pitchFamily="2" charset="-78"/>
               </a:rPr>
               <a:t>F1-L11 · Arabic around us</a:t>
             </a:r>
@@ -9904,8 +9749,7 @@
                   <a:srgbClr val="FFFFFF"/>
                 </a:solidFill>
                 <a:latin typeface="Calibri" pitchFamily="34" charset="0"/>
-                <a:ea typeface="Calibri" pitchFamily="34" charset="-122"/>
-                <a:cs typeface="Calibri" pitchFamily="34" charset="-120"/>
+                <a:cs typeface="Amiri" pitchFamily="2" charset="-78"/>
               </a:rPr>
               <a:t>WE DO · 4 MIN</a:t>
             </a:r>
@@ -9943,8 +9787,7 @@
                   <a:srgbClr val="2F6FB0"/>
                 </a:solidFill>
                 <a:latin typeface="Calibri" pitchFamily="34" charset="0"/>
-                <a:ea typeface="Calibri" pitchFamily="34" charset="-122"/>
-                <a:cs typeface="Calibri" pitchFamily="34" charset="-120"/>
+                <a:cs typeface="Amiri" pitchFamily="2" charset="-78"/>
               </a:rPr>
               <a:t>WE DO · WHERE ARABIC APPEARS AROUND US (WEBSITE PART 4)</a:t>
             </a:r>
@@ -9982,8 +9825,7 @@
                   <a:srgbClr val="1B3B6F"/>
                 </a:solidFill>
                 <a:latin typeface="Cambria" pitchFamily="34" charset="0"/>
-                <a:ea typeface="Cambria" pitchFamily="34" charset="-122"/>
-                <a:cs typeface="Cambria" pitchFamily="34" charset="-120"/>
+                <a:cs typeface="Amiri" pitchFamily="2" charset="-78"/>
               </a:rPr>
               <a:t>Arabic in everyday life</a:t>
             </a:r>
@@ -10020,9 +9862,8 @@
                 <a:solidFill>
                   <a:srgbClr val="8A6D1E"/>
                 </a:solidFill>
-                <a:latin typeface="Amiri" pitchFamily="34" charset="0"/>
-                <a:ea typeface="Amiri" pitchFamily="34" charset="-122"/>
-                <a:cs typeface="Amiri" pitchFamily="34" charset="-120"/>
+                <a:latin typeface="Amiri" pitchFamily="2" charset="-78"/>
+                <a:cs typeface="Amiri" pitchFamily="2" charset="-78"/>
               </a:rPr>
               <a:t>العَرَبِيَّةُ فِي الحَيَاةِ اليَوْمِيَّةِ</a:t>
             </a:r>
@@ -10060,8 +9901,7 @@
                   <a:srgbClr val="8A93A0"/>
                 </a:solidFill>
                 <a:latin typeface="Calibri" pitchFamily="34" charset="0"/>
-                <a:ea typeface="Calibri" pitchFamily="34" charset="-122"/>
-                <a:cs typeface="Calibri" pitchFamily="34" charset="-120"/>
+                <a:cs typeface="Amiri" pitchFamily="2" charset="-78"/>
               </a:rPr>
               <a:t>Miftah Arabic · Foundation F1 · Arabic Script &amp; Sounds · F1-L11</a:t>
             </a:r>
@@ -10124,8 +9964,7 @@
                   <a:srgbClr val="FFFFFF"/>
                 </a:solidFill>
                 <a:latin typeface="Calibri" pitchFamily="34" charset="0"/>
-                <a:ea typeface="Calibri" pitchFamily="34" charset="-122"/>
-                <a:cs typeface="Calibri" pitchFamily="34" charset="-120"/>
+                <a:cs typeface="Amiri" pitchFamily="2" charset="-78"/>
               </a:rPr>
               <a:t>Context</a:t>
             </a:r>
@@ -10163,8 +10002,7 @@
                   <a:srgbClr val="FFFFFF"/>
                 </a:solidFill>
                 <a:latin typeface="Calibri" pitchFamily="34" charset="0"/>
-                <a:ea typeface="Calibri" pitchFamily="34" charset="-122"/>
-                <a:cs typeface="Calibri" pitchFamily="34" charset="-120"/>
+                <a:cs typeface="Amiri" pitchFamily="2" charset="-78"/>
               </a:rPr>
               <a:t>Arabic you may see</a:t>
             </a:r>
@@ -10202,8 +10040,7 @@
                   <a:srgbClr val="FFFFFF"/>
                 </a:solidFill>
                 <a:latin typeface="Calibri" pitchFamily="34" charset="0"/>
-                <a:ea typeface="Calibri" pitchFamily="34" charset="-122"/>
-                <a:cs typeface="Calibri" pitchFamily="34" charset="-120"/>
+                <a:cs typeface="Amiri" pitchFamily="2" charset="-78"/>
               </a:rPr>
               <a:t>Meaning</a:t>
             </a:r>
@@ -10268,8 +10105,7 @@
                   <a:srgbClr val="5A6472"/>
                 </a:solidFill>
                 <a:latin typeface="Calibri" pitchFamily="34" charset="0"/>
-                <a:ea typeface="Calibri" pitchFamily="34" charset="-122"/>
-                <a:cs typeface="Calibri" pitchFamily="34" charset="-120"/>
+                <a:cs typeface="Amiri" pitchFamily="2" charset="-78"/>
               </a:rPr>
               <a:t>Food and packaging</a:t>
             </a:r>
@@ -10306,9 +10142,8 @@
                 <a:solidFill>
                   <a:srgbClr val="1B3B6F"/>
                 </a:solidFill>
-                <a:latin typeface="Amiri" pitchFamily="34" charset="0"/>
-                <a:ea typeface="Amiri" pitchFamily="34" charset="-122"/>
-                <a:cs typeface="Amiri" pitchFamily="34" charset="-120"/>
+                <a:latin typeface="Amiri" pitchFamily="2" charset="-78"/>
+                <a:cs typeface="Amiri" pitchFamily="2" charset="-78"/>
               </a:rPr>
               <a:t>مُكَوِّنَات · تَارِيخ</a:t>
             </a:r>
@@ -10346,8 +10181,7 @@
                   <a:srgbClr val="5A6472"/>
                 </a:solidFill>
                 <a:latin typeface="Calibri" pitchFamily="34" charset="0"/>
-                <a:ea typeface="Calibri" pitchFamily="34" charset="-122"/>
-                <a:cs typeface="Calibri" pitchFamily="34" charset="-120"/>
+                <a:cs typeface="Amiri" pitchFamily="2" charset="-78"/>
               </a:rPr>
               <a:t>ingredients · date</a:t>
             </a:r>
@@ -10412,8 +10246,7 @@
                   <a:srgbClr val="FFFFFF"/>
                 </a:solidFill>
                 <a:latin typeface="Calibri" pitchFamily="34" charset="0"/>
-                <a:ea typeface="Calibri" pitchFamily="34" charset="-122"/>
-                <a:cs typeface="Calibri" pitchFamily="34" charset="-120"/>
+                <a:cs typeface="Amiri" pitchFamily="2" charset="-78"/>
               </a:rPr>
               <a:t>CORE</a:t>
             </a:r>
@@ -10478,8 +10311,7 @@
                   <a:srgbClr val="5A6472"/>
                 </a:solidFill>
                 <a:latin typeface="Calibri" pitchFamily="34" charset="0"/>
-                <a:ea typeface="Calibri" pitchFamily="34" charset="-122"/>
-                <a:cs typeface="Calibri" pitchFamily="34" charset="-120"/>
+                <a:cs typeface="Amiri" pitchFamily="2" charset="-78"/>
               </a:rPr>
               <a:t>Business</a:t>
             </a:r>
@@ -10516,9 +10348,8 @@
                 <a:solidFill>
                   <a:srgbClr val="1B3B6F"/>
                 </a:solidFill>
-                <a:latin typeface="Amiri" pitchFamily="34" charset="0"/>
-                <a:ea typeface="Amiri" pitchFamily="34" charset="-122"/>
-                <a:cs typeface="Amiri" pitchFamily="34" charset="-120"/>
+                <a:latin typeface="Amiri" pitchFamily="2" charset="-78"/>
+                <a:cs typeface="Amiri" pitchFamily="2" charset="-78"/>
               </a:rPr>
               <a:t>مَطْعَم · مَخْبَز</a:t>
             </a:r>
@@ -10556,8 +10387,7 @@
                   <a:srgbClr val="5A6472"/>
                 </a:solidFill>
                 <a:latin typeface="Calibri" pitchFamily="34" charset="0"/>
-                <a:ea typeface="Calibri" pitchFamily="34" charset="-122"/>
-                <a:cs typeface="Calibri" pitchFamily="34" charset="-120"/>
+                <a:cs typeface="Amiri" pitchFamily="2" charset="-78"/>
               </a:rPr>
               <a:t>restaurant · bakery</a:t>
             </a:r>
@@ -10622,8 +10452,7 @@
                   <a:srgbClr val="FFFFFF"/>
                 </a:solidFill>
                 <a:latin typeface="Calibri" pitchFamily="34" charset="0"/>
-                <a:ea typeface="Calibri" pitchFamily="34" charset="-122"/>
-                <a:cs typeface="Calibri" pitchFamily="34" charset="-120"/>
+                <a:cs typeface="Amiri" pitchFamily="2" charset="-78"/>
               </a:rPr>
               <a:t>CORE</a:t>
             </a:r>
@@ -10688,8 +10517,7 @@
                   <a:srgbClr val="5A6472"/>
                 </a:solidFill>
                 <a:latin typeface="Calibri" pitchFamily="34" charset="0"/>
-                <a:ea typeface="Calibri" pitchFamily="34" charset="-122"/>
-                <a:cs typeface="Calibri" pitchFamily="34" charset="-120"/>
+                <a:cs typeface="Amiri" pitchFamily="2" charset="-78"/>
               </a:rPr>
               <a:t>Community and faith</a:t>
             </a:r>
@@ -10726,9 +10554,8 @@
                 <a:solidFill>
                   <a:srgbClr val="1B3B6F"/>
                 </a:solidFill>
-                <a:latin typeface="Amiri" pitchFamily="34" charset="0"/>
-                <a:ea typeface="Amiri" pitchFamily="34" charset="-122"/>
-                <a:cs typeface="Amiri" pitchFamily="34" charset="-120"/>
+                <a:latin typeface="Amiri" pitchFamily="2" charset="-78"/>
+                <a:cs typeface="Amiri" pitchFamily="2" charset="-78"/>
               </a:rPr>
               <a:t>مَرْكَز · مَسْجِد</a:t>
             </a:r>
@@ -10766,8 +10593,7 @@
                   <a:srgbClr val="5A6472"/>
                 </a:solidFill>
                 <a:latin typeface="Calibri" pitchFamily="34" charset="0"/>
-                <a:ea typeface="Calibri" pitchFamily="34" charset="-122"/>
-                <a:cs typeface="Calibri" pitchFamily="34" charset="-120"/>
+                <a:cs typeface="Amiri" pitchFamily="2" charset="-78"/>
               </a:rPr>
               <a:t>centre · mosque</a:t>
             </a:r>
@@ -10832,8 +10658,7 @@
                   <a:srgbClr val="FFFFFF"/>
                 </a:solidFill>
                 <a:latin typeface="Calibri" pitchFamily="34" charset="0"/>
-                <a:ea typeface="Calibri" pitchFamily="34" charset="-122"/>
-                <a:cs typeface="Calibri" pitchFamily="34" charset="-120"/>
+                <a:cs typeface="Amiri" pitchFamily="2" charset="-78"/>
               </a:rPr>
               <a:t>CORE</a:t>
             </a:r>
@@ -10898,8 +10723,7 @@
                   <a:srgbClr val="5A6472"/>
                 </a:solidFill>
                 <a:latin typeface="Calibri" pitchFamily="34" charset="0"/>
-                <a:ea typeface="Calibri" pitchFamily="34" charset="-122"/>
-                <a:cs typeface="Calibri" pitchFamily="34" charset="-120"/>
+                <a:cs typeface="Amiri" pitchFamily="2" charset="-78"/>
               </a:rPr>
               <a:t>Media</a:t>
             </a:r>
@@ -10936,9 +10760,8 @@
                 <a:solidFill>
                   <a:srgbClr val="1B3B6F"/>
                 </a:solidFill>
-                <a:latin typeface="Amiri" pitchFamily="34" charset="0"/>
-                <a:ea typeface="Amiri" pitchFamily="34" charset="-122"/>
-                <a:cs typeface="Amiri" pitchFamily="34" charset="-120"/>
+                <a:latin typeface="Amiri" pitchFamily="2" charset="-78"/>
+                <a:cs typeface="Amiri" pitchFamily="2" charset="-78"/>
               </a:rPr>
               <a:t>أَخْبَار · صَحِيفَة</a:t>
             </a:r>
@@ -10976,8 +10799,7 @@
                   <a:srgbClr val="5A6472"/>
                 </a:solidFill>
                 <a:latin typeface="Calibri" pitchFamily="34" charset="0"/>
-                <a:ea typeface="Calibri" pitchFamily="34" charset="-122"/>
-                <a:cs typeface="Calibri" pitchFamily="34" charset="-120"/>
+                <a:cs typeface="Amiri" pitchFamily="2" charset="-78"/>
               </a:rPr>
               <a:t>news · newspaper</a:t>
             </a:r>
@@ -11042,8 +10864,7 @@
                   <a:srgbClr val="5A6472"/>
                 </a:solidFill>
                 <a:latin typeface="Calibri" pitchFamily="34" charset="0"/>
-                <a:ea typeface="Calibri" pitchFamily="34" charset="-122"/>
-                <a:cs typeface="Calibri" pitchFamily="34" charset="-120"/>
+                <a:cs typeface="Amiri" pitchFamily="2" charset="-78"/>
               </a:rPr>
               <a:t>Travel</a:t>
             </a:r>
@@ -11080,9 +10901,8 @@
                 <a:solidFill>
                   <a:srgbClr val="1B3B6F"/>
                 </a:solidFill>
-                <a:latin typeface="Amiri" pitchFamily="34" charset="0"/>
-                <a:ea typeface="Amiri" pitchFamily="34" charset="-122"/>
-                <a:cs typeface="Amiri" pitchFamily="34" charset="-120"/>
+                <a:latin typeface="Amiri" pitchFamily="2" charset="-78"/>
+                <a:cs typeface="Amiri" pitchFamily="2" charset="-78"/>
               </a:rPr>
               <a:t>وُصُول · مُغَادَرَة</a:t>
             </a:r>
@@ -11120,8 +10940,7 @@
                   <a:srgbClr val="5A6472"/>
                 </a:solidFill>
                 <a:latin typeface="Calibri" pitchFamily="34" charset="0"/>
-                <a:ea typeface="Calibri" pitchFamily="34" charset="-122"/>
-                <a:cs typeface="Calibri" pitchFamily="34" charset="-120"/>
+                <a:cs typeface="Amiri" pitchFamily="2" charset="-78"/>
               </a:rPr>
               <a:t>arrivals · departures</a:t>
             </a:r>
@@ -11186,8 +11005,7 @@
                   <a:srgbClr val="5A6472"/>
                 </a:solidFill>
                 <a:latin typeface="Calibri" pitchFamily="34" charset="0"/>
-                <a:ea typeface="Calibri" pitchFamily="34" charset="-122"/>
-                <a:cs typeface="Calibri" pitchFamily="34" charset="-120"/>
+                <a:cs typeface="Amiri" pitchFamily="2" charset="-78"/>
               </a:rPr>
               <a:t>Digital life</a:t>
             </a:r>
@@ -11224,9 +11042,8 @@
                 <a:solidFill>
                   <a:srgbClr val="1B3B6F"/>
                 </a:solidFill>
-                <a:latin typeface="Amiri" pitchFamily="34" charset="0"/>
-                <a:ea typeface="Amiri" pitchFamily="34" charset="-122"/>
-                <a:cs typeface="Amiri" pitchFamily="34" charset="-120"/>
+                <a:latin typeface="Amiri" pitchFamily="2" charset="-78"/>
+                <a:cs typeface="Amiri" pitchFamily="2" charset="-78"/>
               </a:rPr>
               <a:t>بَحْث · رِسَالَة</a:t>
             </a:r>
@@ -11264,8 +11081,7 @@
                   <a:srgbClr val="5A6472"/>
                 </a:solidFill>
                 <a:latin typeface="Calibri" pitchFamily="34" charset="0"/>
-                <a:ea typeface="Calibri" pitchFamily="34" charset="-122"/>
-                <a:cs typeface="Calibri" pitchFamily="34" charset="-120"/>
+                <a:cs typeface="Amiri" pitchFamily="2" charset="-78"/>
               </a:rPr>
               <a:t>search · message</a:t>
             </a:r>
@@ -11303,8 +11119,7 @@
                   <a:srgbClr val="8A93A0"/>
                 </a:solidFill>
                 <a:latin typeface="Calibri" pitchFamily="34" charset="0"/>
-                <a:ea typeface="Calibri" pitchFamily="34" charset="-122"/>
-                <a:cs typeface="Calibri" pitchFamily="34" charset="-120"/>
+                <a:cs typeface="Amiri" pitchFamily="2" charset="-78"/>
               </a:rPr>
               <a:t>13 / 25</a:t>
             </a:r>
@@ -11398,9 +11213,8 @@
                 <a:solidFill>
                   <a:srgbClr val="D4AF37"/>
                 </a:solidFill>
-                <a:latin typeface="Amiri" pitchFamily="34" charset="0"/>
-                <a:ea typeface="Amiri" pitchFamily="34" charset="-122"/>
-                <a:cs typeface="Amiri" pitchFamily="34" charset="-120"/>
+                <a:latin typeface="Amiri" pitchFamily="2" charset="-78"/>
+                <a:cs typeface="Amiri" pitchFamily="2" charset="-78"/>
               </a:rPr>
               <a:t>م</a:t>
             </a:r>
@@ -11438,8 +11252,7 @@
                   <a:srgbClr val="1B3B6F"/>
                 </a:solidFill>
                 <a:latin typeface="Cambria" pitchFamily="34" charset="0"/>
-                <a:ea typeface="Cambria" pitchFamily="34" charset="-122"/>
-                <a:cs typeface="Cambria" pitchFamily="34" charset="-120"/>
+                <a:cs typeface="Amiri" pitchFamily="2" charset="-78"/>
               </a:rPr>
               <a:t>Al Madina Online School</a:t>
             </a:r>
@@ -11477,8 +11290,7 @@
                   <a:srgbClr val="8A6D1E"/>
                 </a:solidFill>
                 <a:latin typeface="Calibri" pitchFamily="34" charset="0"/>
-                <a:ea typeface="Calibri" pitchFamily="34" charset="-122"/>
-                <a:cs typeface="Calibri" pitchFamily="34" charset="-120"/>
+                <a:cs typeface="Amiri" pitchFamily="2" charset="-78"/>
               </a:rPr>
               <a:t>ARABIC DEPARTMENT · MIFTAH ARABIC · IGCSE 0544</a:t>
             </a:r>
@@ -11543,8 +11355,7 @@
                   <a:srgbClr val="FFFFFF"/>
                 </a:solidFill>
                 <a:latin typeface="Calibri" pitchFamily="34" charset="0"/>
-                <a:ea typeface="Calibri" pitchFamily="34" charset="-122"/>
-                <a:cs typeface="Calibri" pitchFamily="34" charset="-120"/>
+                <a:cs typeface="Amiri" pitchFamily="2" charset="-78"/>
               </a:rPr>
               <a:t>F1-L11 · Arabic around us</a:t>
             </a:r>
@@ -11609,8 +11420,7 @@
                   <a:srgbClr val="FFFFFF"/>
                 </a:solidFill>
                 <a:latin typeface="Calibri" pitchFamily="34" charset="0"/>
-                <a:ea typeface="Calibri" pitchFamily="34" charset="-122"/>
-                <a:cs typeface="Calibri" pitchFamily="34" charset="-120"/>
+                <a:cs typeface="Amiri" pitchFamily="2" charset="-78"/>
               </a:rPr>
               <a:t>WE DO · 3 MIN</a:t>
             </a:r>
@@ -11648,8 +11458,7 @@
                   <a:srgbClr val="2F6FB0"/>
                 </a:solidFill>
                 <a:latin typeface="Calibri" pitchFamily="34" charset="0"/>
-                <a:ea typeface="Calibri" pitchFamily="34" charset="-122"/>
-                <a:cs typeface="Calibri" pitchFamily="34" charset="-120"/>
+                <a:cs typeface="Amiri" pitchFamily="2" charset="-78"/>
               </a:rPr>
               <a:t>WE DO · WEBSITE GAME “CONTEXT SORT”</a:t>
             </a:r>
@@ -11687,8 +11496,7 @@
                   <a:srgbClr val="1B3B6F"/>
                 </a:solidFill>
                 <a:latin typeface="Cambria" pitchFamily="34" charset="0"/>
-                <a:ea typeface="Cambria" pitchFamily="34" charset="-122"/>
-                <a:cs typeface="Cambria" pitchFamily="34" charset="-120"/>
+                <a:cs typeface="Amiri" pitchFamily="2" charset="-78"/>
               </a:rPr>
               <a:t>Which context?</a:t>
             </a:r>
@@ -11725,9 +11533,8 @@
                 <a:solidFill>
                   <a:srgbClr val="8A6D1E"/>
                 </a:solidFill>
-                <a:latin typeface="Amiri" pitchFamily="34" charset="0"/>
-                <a:ea typeface="Amiri" pitchFamily="34" charset="-122"/>
-                <a:cs typeface="Amiri" pitchFamily="34" charset="-120"/>
+                <a:latin typeface="Amiri" pitchFamily="2" charset="-78"/>
+                <a:cs typeface="Amiri" pitchFamily="2" charset="-78"/>
               </a:rPr>
               <a:t>صَنِّفِ الأَمْثِلَةَ</a:t>
             </a:r>
@@ -11765,8 +11572,7 @@
                   <a:srgbClr val="8A93A0"/>
                 </a:solidFill>
                 <a:latin typeface="Calibri" pitchFamily="34" charset="0"/>
-                <a:ea typeface="Calibri" pitchFamily="34" charset="-122"/>
-                <a:cs typeface="Calibri" pitchFamily="34" charset="-120"/>
+                <a:cs typeface="Amiri" pitchFamily="2" charset="-78"/>
               </a:rPr>
               <a:t>Miftah Arabic · Foundation F1 · Arabic Script &amp; Sounds · F1-L11</a:t>
             </a:r>
@@ -11837,9 +11643,8 @@
                 <a:solidFill>
                   <a:srgbClr val="1B3B6F"/>
                 </a:solidFill>
-                <a:latin typeface="Amiri" pitchFamily="34" charset="0"/>
-                <a:ea typeface="Amiri" pitchFamily="34" charset="-122"/>
-                <a:cs typeface="Amiri" pitchFamily="34" charset="-120"/>
+                <a:latin typeface="Amiri" pitchFamily="2" charset="-78"/>
+                <a:cs typeface="Amiri" pitchFamily="2" charset="-78"/>
               </a:rPr>
               <a:t>مَطْعَم</a:t>
             </a:r>
@@ -11910,9 +11715,8 @@
                 <a:solidFill>
                   <a:srgbClr val="1B3B6F"/>
                 </a:solidFill>
-                <a:latin typeface="Amiri" pitchFamily="34" charset="0"/>
-                <a:ea typeface="Amiri" pitchFamily="34" charset="-122"/>
-                <a:cs typeface="Amiri" pitchFamily="34" charset="-120"/>
+                <a:latin typeface="Amiri" pitchFamily="2" charset="-78"/>
+                <a:cs typeface="Amiri" pitchFamily="2" charset="-78"/>
               </a:rPr>
               <a:t>أَخْبَار</a:t>
             </a:r>
@@ -11983,9 +11787,8 @@
                 <a:solidFill>
                   <a:srgbClr val="1B3B6F"/>
                 </a:solidFill>
-                <a:latin typeface="Amiri" pitchFamily="34" charset="0"/>
-                <a:ea typeface="Amiri" pitchFamily="34" charset="-122"/>
-                <a:cs typeface="Amiri" pitchFamily="34" charset="-120"/>
+                <a:latin typeface="Amiri" pitchFamily="2" charset="-78"/>
+                <a:cs typeface="Amiri" pitchFamily="2" charset="-78"/>
               </a:rPr>
               <a:t>وُصُول</a:t>
             </a:r>
@@ -12056,9 +11859,8 @@
                 <a:solidFill>
                   <a:srgbClr val="1B3B6F"/>
                 </a:solidFill>
-                <a:latin typeface="Amiri" pitchFamily="34" charset="0"/>
-                <a:ea typeface="Amiri" pitchFamily="34" charset="-122"/>
-                <a:cs typeface="Amiri" pitchFamily="34" charset="-120"/>
+                <a:latin typeface="Amiri" pitchFamily="2" charset="-78"/>
+                <a:cs typeface="Amiri" pitchFamily="2" charset="-78"/>
               </a:rPr>
               <a:t>مُكَوِّنَات</a:t>
             </a:r>
@@ -12129,9 +11931,8 @@
                 <a:solidFill>
                   <a:srgbClr val="1B3B6F"/>
                 </a:solidFill>
-                <a:latin typeface="Amiri" pitchFamily="34" charset="0"/>
-                <a:ea typeface="Amiri" pitchFamily="34" charset="-122"/>
-                <a:cs typeface="Amiri" pitchFamily="34" charset="-120"/>
+                <a:latin typeface="Amiri" pitchFamily="2" charset="-78"/>
+                <a:cs typeface="Amiri" pitchFamily="2" charset="-78"/>
               </a:rPr>
               <a:t>رِسَالَة</a:t>
             </a:r>
@@ -12202,9 +12003,8 @@
                 <a:solidFill>
                   <a:srgbClr val="1B3B6F"/>
                 </a:solidFill>
-                <a:latin typeface="Amiri" pitchFamily="34" charset="0"/>
-                <a:ea typeface="Amiri" pitchFamily="34" charset="-122"/>
-                <a:cs typeface="Amiri" pitchFamily="34" charset="-120"/>
+                <a:latin typeface="Amiri" pitchFamily="2" charset="-78"/>
+                <a:cs typeface="Amiri" pitchFamily="2" charset="-78"/>
               </a:rPr>
               <a:t>مُغَادَرَة</a:t>
             </a:r>
@@ -12275,9 +12075,8 @@
                 <a:solidFill>
                   <a:srgbClr val="1B3B6F"/>
                 </a:solidFill>
-                <a:latin typeface="Amiri" pitchFamily="34" charset="0"/>
-                <a:ea typeface="Amiri" pitchFamily="34" charset="-122"/>
-                <a:cs typeface="Amiri" pitchFamily="34" charset="-120"/>
+                <a:latin typeface="Amiri" pitchFamily="2" charset="-78"/>
+                <a:cs typeface="Amiri" pitchFamily="2" charset="-78"/>
               </a:rPr>
               <a:t>مَخْبَز</a:t>
             </a:r>
@@ -12348,9 +12147,8 @@
                 <a:solidFill>
                   <a:srgbClr val="1B3B6F"/>
                 </a:solidFill>
-                <a:latin typeface="Amiri" pitchFamily="34" charset="0"/>
-                <a:ea typeface="Amiri" pitchFamily="34" charset="-122"/>
-                <a:cs typeface="Amiri" pitchFamily="34" charset="-120"/>
+                <a:latin typeface="Amiri" pitchFamily="2" charset="-78"/>
+                <a:cs typeface="Amiri" pitchFamily="2" charset="-78"/>
               </a:rPr>
               <a:t>بَحْث</a:t>
             </a:r>
@@ -12442,8 +12240,7 @@
                   <a:srgbClr val="FFFFFF"/>
                 </a:solidFill>
                 <a:latin typeface="Calibri" pitchFamily="34" charset="0"/>
-                <a:ea typeface="Calibri" pitchFamily="34" charset="-122"/>
-                <a:cs typeface="Calibri" pitchFamily="34" charset="-120"/>
+                <a:cs typeface="Amiri" pitchFamily="2" charset="-78"/>
               </a:rPr>
               <a:t>1 · Food / business</a:t>
             </a:r>
@@ -12535,8 +12332,7 @@
                   <a:srgbClr val="FFFFFF"/>
                 </a:solidFill>
                 <a:latin typeface="Calibri" pitchFamily="34" charset="0"/>
-                <a:ea typeface="Calibri" pitchFamily="34" charset="-122"/>
-                <a:cs typeface="Calibri" pitchFamily="34" charset="-120"/>
+                <a:cs typeface="Amiri" pitchFamily="2" charset="-78"/>
               </a:rPr>
               <a:t>2 · Media / digital</a:t>
             </a:r>
@@ -12628,8 +12424,7 @@
                   <a:srgbClr val="FFFFFF"/>
                 </a:solidFill>
                 <a:latin typeface="Calibri" pitchFamily="34" charset="0"/>
-                <a:ea typeface="Calibri" pitchFamily="34" charset="-122"/>
-                <a:cs typeface="Calibri" pitchFamily="34" charset="-120"/>
+                <a:cs typeface="Amiri" pitchFamily="2" charset="-78"/>
               </a:rPr>
               <a:t>3 · Travel</a:t>
             </a:r>
@@ -12667,8 +12462,7 @@
                   <a:srgbClr val="8A93A0"/>
                 </a:solidFill>
                 <a:latin typeface="Calibri" pitchFamily="34" charset="0"/>
-                <a:ea typeface="Calibri" pitchFamily="34" charset="-122"/>
-                <a:cs typeface="Calibri" pitchFamily="34" charset="-120"/>
+                <a:cs typeface="Amiri" pitchFamily="2" charset="-78"/>
               </a:rPr>
               <a:t>14 / 25</a:t>
             </a:r>
@@ -12762,9 +12556,8 @@
                 <a:solidFill>
                   <a:srgbClr val="D4AF37"/>
                 </a:solidFill>
-                <a:latin typeface="Amiri" pitchFamily="34" charset="0"/>
-                <a:ea typeface="Amiri" pitchFamily="34" charset="-122"/>
-                <a:cs typeface="Amiri" pitchFamily="34" charset="-120"/>
+                <a:latin typeface="Amiri" pitchFamily="2" charset="-78"/>
+                <a:cs typeface="Amiri" pitchFamily="2" charset="-78"/>
               </a:rPr>
               <a:t>م</a:t>
             </a:r>
@@ -12802,8 +12595,7 @@
                   <a:srgbClr val="1B3B6F"/>
                 </a:solidFill>
                 <a:latin typeface="Cambria" pitchFamily="34" charset="0"/>
-                <a:ea typeface="Cambria" pitchFamily="34" charset="-122"/>
-                <a:cs typeface="Cambria" pitchFamily="34" charset="-120"/>
+                <a:cs typeface="Amiri" pitchFamily="2" charset="-78"/>
               </a:rPr>
               <a:t>Al Madina Online School</a:t>
             </a:r>
@@ -12841,8 +12633,7 @@
                   <a:srgbClr val="8A6D1E"/>
                 </a:solidFill>
                 <a:latin typeface="Calibri" pitchFamily="34" charset="0"/>
-                <a:ea typeface="Calibri" pitchFamily="34" charset="-122"/>
-                <a:cs typeface="Calibri" pitchFamily="34" charset="-120"/>
+                <a:cs typeface="Amiri" pitchFamily="2" charset="-78"/>
               </a:rPr>
               <a:t>ARABIC DEPARTMENT · MIFTAH ARABIC · IGCSE 0544</a:t>
             </a:r>
@@ -12907,8 +12698,7 @@
                   <a:srgbClr val="FFFFFF"/>
                 </a:solidFill>
                 <a:latin typeface="Calibri" pitchFamily="34" charset="0"/>
-                <a:ea typeface="Calibri" pitchFamily="34" charset="-122"/>
-                <a:cs typeface="Calibri" pitchFamily="34" charset="-120"/>
+                <a:cs typeface="Amiri" pitchFamily="2" charset="-78"/>
               </a:rPr>
               <a:t>F1-L11 · Arabic around us</a:t>
             </a:r>
@@ -12973,8 +12763,7 @@
                   <a:srgbClr val="FFFFFF"/>
                 </a:solidFill>
                 <a:latin typeface="Calibri" pitchFamily="34" charset="0"/>
-                <a:ea typeface="Calibri" pitchFamily="34" charset="-122"/>
-                <a:cs typeface="Calibri" pitchFamily="34" charset="-120"/>
+                <a:cs typeface="Amiri" pitchFamily="2" charset="-78"/>
               </a:rPr>
               <a:t>WE DO · 3 MIN</a:t>
             </a:r>
@@ -13012,8 +12801,7 @@
                   <a:srgbClr val="2F6FB0"/>
                 </a:solidFill>
                 <a:latin typeface="Calibri" pitchFamily="34" charset="0"/>
-                <a:ea typeface="Calibri" pitchFamily="34" charset="-122"/>
-                <a:cs typeface="Calibri" pitchFamily="34" charset="-120"/>
+                <a:cs typeface="Amiri" pitchFamily="2" charset="-78"/>
               </a:rPr>
               <a:t>WE DO · CONTEXT SORT ANSWERS</a:t>
             </a:r>
@@ -13051,8 +12839,7 @@
                   <a:srgbClr val="1B3B6F"/>
                 </a:solidFill>
                 <a:latin typeface="Cambria" pitchFamily="34" charset="0"/>
-                <a:ea typeface="Cambria" pitchFamily="34" charset="-122"/>
-                <a:cs typeface="Cambria" pitchFamily="34" charset="-120"/>
+                <a:cs typeface="Amiri" pitchFamily="2" charset="-78"/>
               </a:rPr>
               <a:t>Sorted</a:t>
             </a:r>
@@ -13089,9 +12876,8 @@
                 <a:solidFill>
                   <a:srgbClr val="8A6D1E"/>
                 </a:solidFill>
-                <a:latin typeface="Amiri" pitchFamily="34" charset="0"/>
-                <a:ea typeface="Amiri" pitchFamily="34" charset="-122"/>
-                <a:cs typeface="Amiri" pitchFamily="34" charset="-120"/>
+                <a:latin typeface="Amiri" pitchFamily="2" charset="-78"/>
+                <a:cs typeface="Amiri" pitchFamily="2" charset="-78"/>
               </a:rPr>
               <a:t>الإِجَابَاتُ</a:t>
             </a:r>
@@ -13129,8 +12915,7 @@
                   <a:srgbClr val="8A93A0"/>
                 </a:solidFill>
                 <a:latin typeface="Calibri" pitchFamily="34" charset="0"/>
-                <a:ea typeface="Calibri" pitchFamily="34" charset="-122"/>
-                <a:cs typeface="Calibri" pitchFamily="34" charset="-120"/>
+                <a:cs typeface="Amiri" pitchFamily="2" charset="-78"/>
               </a:rPr>
               <a:t>Miftah Arabic · Foundation F1 · Arabic Script &amp; Sounds · F1-L11</a:t>
             </a:r>
@@ -13222,8 +13007,7 @@
                   <a:srgbClr val="FFFFFF"/>
                 </a:solidFill>
                 <a:latin typeface="Calibri" pitchFamily="34" charset="0"/>
-                <a:ea typeface="Calibri" pitchFamily="34" charset="-122"/>
-                <a:cs typeface="Calibri" pitchFamily="34" charset="-120"/>
+                <a:cs typeface="Amiri" pitchFamily="2" charset="-78"/>
               </a:rPr>
               <a:t>1 · Food / business</a:t>
             </a:r>
@@ -13287,9 +13071,8 @@
                 <a:solidFill>
                   <a:srgbClr val="1B3B6F"/>
                 </a:solidFill>
-                <a:latin typeface="Amiri" pitchFamily="34" charset="0"/>
-                <a:ea typeface="Amiri" pitchFamily="34" charset="-122"/>
-                <a:cs typeface="Amiri" pitchFamily="34" charset="-120"/>
+                <a:latin typeface="Amiri" pitchFamily="2" charset="-78"/>
+                <a:cs typeface="Amiri" pitchFamily="2" charset="-78"/>
               </a:rPr>
               <a:t>مَطْعَم</a:t>
             </a:r>
@@ -13353,9 +13136,8 @@
                 <a:solidFill>
                   <a:srgbClr val="1B3B6F"/>
                 </a:solidFill>
-                <a:latin typeface="Amiri" pitchFamily="34" charset="0"/>
-                <a:ea typeface="Amiri" pitchFamily="34" charset="-122"/>
-                <a:cs typeface="Amiri" pitchFamily="34" charset="-120"/>
+                <a:latin typeface="Amiri" pitchFamily="2" charset="-78"/>
+                <a:cs typeface="Amiri" pitchFamily="2" charset="-78"/>
               </a:rPr>
               <a:t>مُكَوِّنَات</a:t>
             </a:r>
@@ -13419,9 +13201,8 @@
                 <a:solidFill>
                   <a:srgbClr val="1B3B6F"/>
                 </a:solidFill>
-                <a:latin typeface="Amiri" pitchFamily="34" charset="0"/>
-                <a:ea typeface="Amiri" pitchFamily="34" charset="-122"/>
-                <a:cs typeface="Amiri" pitchFamily="34" charset="-120"/>
+                <a:latin typeface="Amiri" pitchFamily="2" charset="-78"/>
+                <a:cs typeface="Amiri" pitchFamily="2" charset="-78"/>
               </a:rPr>
               <a:t>مَخْبَز</a:t>
             </a:r>
@@ -13513,8 +13294,7 @@
                   <a:srgbClr val="FFFFFF"/>
                 </a:solidFill>
                 <a:latin typeface="Calibri" pitchFamily="34" charset="0"/>
-                <a:ea typeface="Calibri" pitchFamily="34" charset="-122"/>
-                <a:cs typeface="Calibri" pitchFamily="34" charset="-120"/>
+                <a:cs typeface="Amiri" pitchFamily="2" charset="-78"/>
               </a:rPr>
               <a:t>2 · Media / digital</a:t>
             </a:r>
@@ -13578,9 +13358,8 @@
                 <a:solidFill>
                   <a:srgbClr val="1B3B6F"/>
                 </a:solidFill>
-                <a:latin typeface="Amiri" pitchFamily="34" charset="0"/>
-                <a:ea typeface="Amiri" pitchFamily="34" charset="-122"/>
-                <a:cs typeface="Amiri" pitchFamily="34" charset="-120"/>
+                <a:latin typeface="Amiri" pitchFamily="2" charset="-78"/>
+                <a:cs typeface="Amiri" pitchFamily="2" charset="-78"/>
               </a:rPr>
               <a:t>أَخْبَار</a:t>
             </a:r>
@@ -13644,9 +13423,8 @@
                 <a:solidFill>
                   <a:srgbClr val="1B3B6F"/>
                 </a:solidFill>
-                <a:latin typeface="Amiri" pitchFamily="34" charset="0"/>
-                <a:ea typeface="Amiri" pitchFamily="34" charset="-122"/>
-                <a:cs typeface="Amiri" pitchFamily="34" charset="-120"/>
+                <a:latin typeface="Amiri" pitchFamily="2" charset="-78"/>
+                <a:cs typeface="Amiri" pitchFamily="2" charset="-78"/>
               </a:rPr>
               <a:t>رِسَالَة</a:t>
             </a:r>
@@ -13710,9 +13488,8 @@
                 <a:solidFill>
                   <a:srgbClr val="1B3B6F"/>
                 </a:solidFill>
-                <a:latin typeface="Amiri" pitchFamily="34" charset="0"/>
-                <a:ea typeface="Amiri" pitchFamily="34" charset="-122"/>
-                <a:cs typeface="Amiri" pitchFamily="34" charset="-120"/>
+                <a:latin typeface="Amiri" pitchFamily="2" charset="-78"/>
+                <a:cs typeface="Amiri" pitchFamily="2" charset="-78"/>
               </a:rPr>
               <a:t>بَحْث</a:t>
             </a:r>
@@ -13804,8 +13581,7 @@
                   <a:srgbClr val="FFFFFF"/>
                 </a:solidFill>
                 <a:latin typeface="Calibri" pitchFamily="34" charset="0"/>
-                <a:ea typeface="Calibri" pitchFamily="34" charset="-122"/>
-                <a:cs typeface="Calibri" pitchFamily="34" charset="-120"/>
+                <a:cs typeface="Amiri" pitchFamily="2" charset="-78"/>
               </a:rPr>
               <a:t>3 · Travel</a:t>
             </a:r>
@@ -13869,9 +13645,8 @@
                 <a:solidFill>
                   <a:srgbClr val="1B3B6F"/>
                 </a:solidFill>
-                <a:latin typeface="Amiri" pitchFamily="34" charset="0"/>
-                <a:ea typeface="Amiri" pitchFamily="34" charset="-122"/>
-                <a:cs typeface="Amiri" pitchFamily="34" charset="-120"/>
+                <a:latin typeface="Amiri" pitchFamily="2" charset="-78"/>
+                <a:cs typeface="Amiri" pitchFamily="2" charset="-78"/>
               </a:rPr>
               <a:t>وُصُول</a:t>
             </a:r>
@@ -13935,9 +13710,8 @@
                 <a:solidFill>
                   <a:srgbClr val="1B3B6F"/>
                 </a:solidFill>
-                <a:latin typeface="Amiri" pitchFamily="34" charset="0"/>
-                <a:ea typeface="Amiri" pitchFamily="34" charset="-122"/>
-                <a:cs typeface="Amiri" pitchFamily="34" charset="-120"/>
+                <a:latin typeface="Amiri" pitchFamily="2" charset="-78"/>
+                <a:cs typeface="Amiri" pitchFamily="2" charset="-78"/>
               </a:rPr>
               <a:t>مُغَادَرَة</a:t>
             </a:r>
@@ -13975,8 +13749,7 @@
                   <a:srgbClr val="8A93A0"/>
                 </a:solidFill>
                 <a:latin typeface="Calibri" pitchFamily="34" charset="0"/>
-                <a:ea typeface="Calibri" pitchFamily="34" charset="-122"/>
-                <a:cs typeface="Calibri" pitchFamily="34" charset="-120"/>
+                <a:cs typeface="Amiri" pitchFamily="2" charset="-78"/>
               </a:rPr>
               <a:t>15 / 25</a:t>
             </a:r>
@@ -14070,9 +13843,8 @@
                 <a:solidFill>
                   <a:srgbClr val="D4AF37"/>
                 </a:solidFill>
-                <a:latin typeface="Amiri" pitchFamily="34" charset="0"/>
-                <a:ea typeface="Amiri" pitchFamily="34" charset="-122"/>
-                <a:cs typeface="Amiri" pitchFamily="34" charset="-120"/>
+                <a:latin typeface="Amiri" pitchFamily="2" charset="-78"/>
+                <a:cs typeface="Amiri" pitchFamily="2" charset="-78"/>
               </a:rPr>
               <a:t>م</a:t>
             </a:r>
@@ -14110,8 +13882,7 @@
                   <a:srgbClr val="1B3B6F"/>
                 </a:solidFill>
                 <a:latin typeface="Cambria" pitchFamily="34" charset="0"/>
-                <a:ea typeface="Cambria" pitchFamily="34" charset="-122"/>
-                <a:cs typeface="Cambria" pitchFamily="34" charset="-120"/>
+                <a:cs typeface="Amiri" pitchFamily="2" charset="-78"/>
               </a:rPr>
               <a:t>Al Madina Online School</a:t>
             </a:r>
@@ -14149,8 +13920,7 @@
                   <a:srgbClr val="8A6D1E"/>
                 </a:solidFill>
                 <a:latin typeface="Calibri" pitchFamily="34" charset="0"/>
-                <a:ea typeface="Calibri" pitchFamily="34" charset="-122"/>
-                <a:cs typeface="Calibri" pitchFamily="34" charset="-120"/>
+                <a:cs typeface="Amiri" pitchFamily="2" charset="-78"/>
               </a:rPr>
               <a:t>ARABIC DEPARTMENT · MIFTAH ARABIC · IGCSE 0544</a:t>
             </a:r>
@@ -14215,8 +13985,7 @@
                   <a:srgbClr val="FFFFFF"/>
                 </a:solidFill>
                 <a:latin typeface="Calibri" pitchFamily="34" charset="0"/>
-                <a:ea typeface="Calibri" pitchFamily="34" charset="-122"/>
-                <a:cs typeface="Calibri" pitchFamily="34" charset="-120"/>
+                <a:cs typeface="Amiri" pitchFamily="2" charset="-78"/>
               </a:rPr>
               <a:t>F1-L11 · Arabic around us</a:t>
             </a:r>
@@ -14281,8 +14050,7 @@
                   <a:srgbClr val="FFFFFF"/>
                 </a:solidFill>
                 <a:latin typeface="Calibri" pitchFamily="34" charset="0"/>
-                <a:ea typeface="Calibri" pitchFamily="34" charset="-122"/>
-                <a:cs typeface="Calibri" pitchFamily="34" charset="-120"/>
+                <a:cs typeface="Amiri" pitchFamily="2" charset="-78"/>
               </a:rPr>
               <a:t>WE DO · 3 MIN</a:t>
             </a:r>
@@ -14347,8 +14115,7 @@
                   <a:srgbClr val="5A6472"/>
                 </a:solidFill>
                 <a:latin typeface="Calibri" pitchFamily="34" charset="0"/>
-                <a:ea typeface="Calibri" pitchFamily="34" charset="-122"/>
-                <a:cs typeface="Calibri" pitchFamily="34" charset="-120"/>
+                <a:cs typeface="Amiri" pitchFamily="2" charset="-78"/>
               </a:rPr>
               <a:t>FLEX</a:t>
             </a:r>
@@ -14386,8 +14153,7 @@
                   <a:srgbClr val="2F6FB0"/>
                 </a:solidFill>
                 <a:latin typeface="Calibri" pitchFamily="34" charset="0"/>
-                <a:ea typeface="Calibri" pitchFamily="34" charset="-122"/>
-                <a:cs typeface="Calibri" pitchFamily="34" charset="-120"/>
+                <a:cs typeface="Amiri" pitchFamily="2" charset="-78"/>
               </a:rPr>
               <a:t>WE DO · THREE CALLIGRAPHIC TRADITIONS (WEBSITE PART 5) · FLEX</a:t>
             </a:r>
@@ -14425,8 +14191,7 @@
                   <a:srgbClr val="1B3B6F"/>
                 </a:solidFill>
                 <a:latin typeface="Cambria" pitchFamily="34" charset="0"/>
-                <a:ea typeface="Cambria" pitchFamily="34" charset="-122"/>
-                <a:cs typeface="Cambria" pitchFamily="34" charset="-120"/>
+                <a:cs typeface="Amiri" pitchFamily="2" charset="-78"/>
               </a:rPr>
               <a:t>Three styles, three jobs</a:t>
             </a:r>
@@ -14463,9 +14228,8 @@
                 <a:solidFill>
                   <a:srgbClr val="8A6D1E"/>
                 </a:solidFill>
-                <a:latin typeface="Amiri" pitchFamily="34" charset="0"/>
-                <a:ea typeface="Amiri" pitchFamily="34" charset="-122"/>
-                <a:cs typeface="Amiri" pitchFamily="34" charset="-120"/>
+                <a:latin typeface="Amiri" pitchFamily="2" charset="-78"/>
+                <a:cs typeface="Amiri" pitchFamily="2" charset="-78"/>
               </a:rPr>
               <a:t>فُنُونُ الخَطِّ العَرَبِيِّ</a:t>
             </a:r>
@@ -14503,8 +14267,7 @@
                   <a:srgbClr val="8A93A0"/>
                 </a:solidFill>
                 <a:latin typeface="Calibri" pitchFamily="34" charset="0"/>
-                <a:ea typeface="Calibri" pitchFamily="34" charset="-122"/>
-                <a:cs typeface="Calibri" pitchFamily="34" charset="-120"/>
+                <a:cs typeface="Amiri" pitchFamily="2" charset="-78"/>
               </a:rPr>
               <a:t>Miftah Arabic · Foundation F1 · Arabic Script &amp; Sounds · F1-L11</a:t>
             </a:r>
@@ -14567,8 +14330,7 @@
                   <a:srgbClr val="FFFFFF"/>
                 </a:solidFill>
                 <a:latin typeface="Calibri" pitchFamily="34" charset="0"/>
-                <a:ea typeface="Calibri" pitchFamily="34" charset="-122"/>
-                <a:cs typeface="Calibri" pitchFamily="34" charset="-120"/>
+                <a:cs typeface="Amiri" pitchFamily="2" charset="-78"/>
               </a:rPr>
               <a:t>Style</a:t>
             </a:r>
@@ -14606,8 +14368,7 @@
                   <a:srgbClr val="FFFFFF"/>
                 </a:solidFill>
                 <a:latin typeface="Calibri" pitchFamily="34" charset="0"/>
-                <a:ea typeface="Calibri" pitchFamily="34" charset="-122"/>
-                <a:cs typeface="Calibri" pitchFamily="34" charset="-120"/>
+                <a:cs typeface="Amiri" pitchFamily="2" charset="-78"/>
               </a:rPr>
               <a:t>Name</a:t>
             </a:r>
@@ -14645,8 +14406,7 @@
                   <a:srgbClr val="FFFFFF"/>
                 </a:solidFill>
                 <a:latin typeface="Calibri" pitchFamily="34" charset="0"/>
-                <a:ea typeface="Calibri" pitchFamily="34" charset="-122"/>
-                <a:cs typeface="Calibri" pitchFamily="34" charset="-120"/>
+                <a:cs typeface="Amiri" pitchFamily="2" charset="-78"/>
               </a:rPr>
               <a:t>What it looks like</a:t>
             </a:r>
@@ -14684,8 +14444,7 @@
                   <a:srgbClr val="FFFFFF"/>
                 </a:solidFill>
                 <a:latin typeface="Calibri" pitchFamily="34" charset="0"/>
-                <a:ea typeface="Calibri" pitchFamily="34" charset="-122"/>
-                <a:cs typeface="Calibri" pitchFamily="34" charset="-120"/>
+                <a:cs typeface="Amiri" pitchFamily="2" charset="-78"/>
               </a:rPr>
               <a:t>Its job</a:t>
             </a:r>
@@ -14750,8 +14509,7 @@
                   <a:srgbClr val="5A6472"/>
                 </a:solidFill>
                 <a:latin typeface="Calibri" pitchFamily="34" charset="0"/>
-                <a:ea typeface="Calibri" pitchFamily="34" charset="-122"/>
-                <a:cs typeface="Calibri" pitchFamily="34" charset="-120"/>
+                <a:cs typeface="Amiri" pitchFamily="2" charset="-78"/>
               </a:rPr>
               <a:t>Naskh</a:t>
             </a:r>
@@ -14788,9 +14546,8 @@
                 <a:solidFill>
                   <a:srgbClr val="1B3B6F"/>
                 </a:solidFill>
-                <a:latin typeface="Amiri" pitchFamily="34" charset="0"/>
-                <a:ea typeface="Amiri" pitchFamily="34" charset="-122"/>
-                <a:cs typeface="Amiri" pitchFamily="34" charset="-120"/>
+                <a:latin typeface="Amiri" pitchFamily="2" charset="-78"/>
+                <a:cs typeface="Amiri" pitchFamily="2" charset="-78"/>
               </a:rPr>
               <a:t>النَّسْخ</a:t>
             </a:r>
@@ -14828,8 +14585,7 @@
                   <a:srgbClr val="5A6472"/>
                 </a:solidFill>
                 <a:latin typeface="Calibri" pitchFamily="34" charset="0"/>
-                <a:ea typeface="Calibri" pitchFamily="34" charset="-122"/>
-                <a:cs typeface="Calibri" pitchFamily="34" charset="-120"/>
+                <a:cs typeface="Amiri" pitchFamily="2" charset="-78"/>
               </a:rPr>
               <a:t>clear, rounded, very readable</a:t>
             </a:r>
@@ -14867,8 +14623,7 @@
                   <a:srgbClr val="5A6472"/>
                 </a:solidFill>
                 <a:latin typeface="Calibri" pitchFamily="34" charset="0"/>
-                <a:ea typeface="Calibri" pitchFamily="34" charset="-122"/>
-                <a:cs typeface="Calibri" pitchFamily="34" charset="-120"/>
+                <a:cs typeface="Amiri" pitchFamily="2" charset="-78"/>
               </a:rPr>
               <a:t>manuscripts, print, screens — our school hand</a:t>
             </a:r>
@@ -14933,8 +14688,7 @@
                   <a:srgbClr val="FFFFFF"/>
                 </a:solidFill>
                 <a:latin typeface="Calibri" pitchFamily="34" charset="0"/>
-                <a:ea typeface="Calibri" pitchFamily="34" charset="-122"/>
-                <a:cs typeface="Calibri" pitchFamily="34" charset="-120"/>
+                <a:cs typeface="Amiri" pitchFamily="2" charset="-78"/>
               </a:rPr>
               <a:t>CORE</a:t>
             </a:r>
@@ -14999,8 +14753,7 @@
                   <a:srgbClr val="5A6472"/>
                 </a:solidFill>
                 <a:latin typeface="Calibri" pitchFamily="34" charset="0"/>
-                <a:ea typeface="Calibri" pitchFamily="34" charset="-122"/>
-                <a:cs typeface="Calibri" pitchFamily="34" charset="-120"/>
+                <a:cs typeface="Amiri" pitchFamily="2" charset="-78"/>
               </a:rPr>
               <a:t>Ruqʿah</a:t>
             </a:r>
@@ -15037,9 +14790,8 @@
                 <a:solidFill>
                   <a:srgbClr val="1B3B6F"/>
                 </a:solidFill>
-                <a:latin typeface="Amiri" pitchFamily="34" charset="0"/>
-                <a:ea typeface="Amiri" pitchFamily="34" charset="-122"/>
-                <a:cs typeface="Amiri" pitchFamily="34" charset="-120"/>
+                <a:latin typeface="Amiri" pitchFamily="2" charset="-78"/>
+                <a:cs typeface="Amiri" pitchFamily="2" charset="-78"/>
               </a:rPr>
               <a:t>الرُّقْعَة</a:t>
             </a:r>
@@ -15077,8 +14829,7 @@
                   <a:srgbClr val="5A6472"/>
                 </a:solidFill>
                 <a:latin typeface="Calibri" pitchFamily="34" charset="0"/>
-                <a:ea typeface="Calibri" pitchFamily="34" charset="-122"/>
-                <a:cs typeface="Calibri" pitchFamily="34" charset="-120"/>
+                <a:cs typeface="Amiri" pitchFamily="2" charset="-78"/>
               </a:rPr>
               <a:t>compact, simplified shapes</a:t>
             </a:r>
@@ -15116,8 +14867,7 @@
                   <a:srgbClr val="5A6472"/>
                 </a:solidFill>
                 <a:latin typeface="Calibri" pitchFamily="34" charset="0"/>
-                <a:ea typeface="Calibri" pitchFamily="34" charset="-122"/>
-                <a:cs typeface="Calibri" pitchFamily="34" charset="-120"/>
+                <a:cs typeface="Amiri" pitchFamily="2" charset="-78"/>
               </a:rPr>
               <a:t>quick everyday handwriting</a:t>
             </a:r>
@@ -15182,8 +14932,7 @@
                   <a:srgbClr val="5A6472"/>
                 </a:solidFill>
                 <a:latin typeface="Calibri" pitchFamily="34" charset="0"/>
-                <a:ea typeface="Calibri" pitchFamily="34" charset="-122"/>
-                <a:cs typeface="Calibri" pitchFamily="34" charset="-120"/>
+                <a:cs typeface="Amiri" pitchFamily="2" charset="-78"/>
               </a:rPr>
               <a:t>Thuluth</a:t>
             </a:r>
@@ -15220,9 +14969,8 @@
                 <a:solidFill>
                   <a:srgbClr val="1B3B6F"/>
                 </a:solidFill>
-                <a:latin typeface="Amiri" pitchFamily="34" charset="0"/>
-                <a:ea typeface="Amiri" pitchFamily="34" charset="-122"/>
-                <a:cs typeface="Amiri" pitchFamily="34" charset="-120"/>
+                <a:latin typeface="Amiri" pitchFamily="2" charset="-78"/>
+                <a:cs typeface="Amiri" pitchFamily="2" charset="-78"/>
               </a:rPr>
               <a:t>الثُّلُث</a:t>
             </a:r>
@@ -15260,8 +15008,7 @@
                   <a:srgbClr val="5A6472"/>
                 </a:solidFill>
                 <a:latin typeface="Calibri" pitchFamily="34" charset="0"/>
-                <a:ea typeface="Calibri" pitchFamily="34" charset="-122"/>
-                <a:cs typeface="Calibri" pitchFamily="34" charset="-120"/>
+                <a:cs typeface="Amiri" pitchFamily="2" charset="-78"/>
               </a:rPr>
               <a:t>large, sweeping, carefully proportioned</a:t>
             </a:r>
@@ -15299,8 +15046,7 @@
                   <a:srgbClr val="5A6472"/>
                 </a:solidFill>
                 <a:latin typeface="Calibri" pitchFamily="34" charset="0"/>
-                <a:ea typeface="Calibri" pitchFamily="34" charset="-122"/>
-                <a:cs typeface="Calibri" pitchFamily="34" charset="-120"/>
+                <a:cs typeface="Amiri" pitchFamily="2" charset="-78"/>
               </a:rPr>
               <a:t>monumental inscriptions, architecture</a:t>
             </a:r>
@@ -15338,8 +15084,7 @@
                   <a:srgbClr val="8A93A0"/>
                 </a:solidFill>
                 <a:latin typeface="Calibri" pitchFamily="34" charset="0"/>
-                <a:ea typeface="Calibri" pitchFamily="34" charset="-122"/>
-                <a:cs typeface="Calibri" pitchFamily="34" charset="-120"/>
+                <a:cs typeface="Amiri" pitchFamily="2" charset="-78"/>
               </a:rPr>
               <a:t>16 / 25</a:t>
             </a:r>
@@ -15433,9 +15178,8 @@
                 <a:solidFill>
                   <a:srgbClr val="D4AF37"/>
                 </a:solidFill>
-                <a:latin typeface="Amiri" pitchFamily="34" charset="0"/>
-                <a:ea typeface="Amiri" pitchFamily="34" charset="-122"/>
-                <a:cs typeface="Amiri" pitchFamily="34" charset="-120"/>
+                <a:latin typeface="Amiri" pitchFamily="2" charset="-78"/>
+                <a:cs typeface="Amiri" pitchFamily="2" charset="-78"/>
               </a:rPr>
               <a:t>م</a:t>
             </a:r>
@@ -15473,8 +15217,7 @@
                   <a:srgbClr val="1B3B6F"/>
                 </a:solidFill>
                 <a:latin typeface="Cambria" pitchFamily="34" charset="0"/>
-                <a:ea typeface="Cambria" pitchFamily="34" charset="-122"/>
-                <a:cs typeface="Cambria" pitchFamily="34" charset="-120"/>
+                <a:cs typeface="Amiri" pitchFamily="2" charset="-78"/>
               </a:rPr>
               <a:t>Al Madina Online School</a:t>
             </a:r>
@@ -15512,8 +15255,7 @@
                   <a:srgbClr val="8A6D1E"/>
                 </a:solidFill>
                 <a:latin typeface="Calibri" pitchFamily="34" charset="0"/>
-                <a:ea typeface="Calibri" pitchFamily="34" charset="-122"/>
-                <a:cs typeface="Calibri" pitchFamily="34" charset="-120"/>
+                <a:cs typeface="Amiri" pitchFamily="2" charset="-78"/>
               </a:rPr>
               <a:t>ARABIC DEPARTMENT · MIFTAH ARABIC · IGCSE 0544</a:t>
             </a:r>
@@ -15578,8 +15320,7 @@
                   <a:srgbClr val="FFFFFF"/>
                 </a:solidFill>
                 <a:latin typeface="Calibri" pitchFamily="34" charset="0"/>
-                <a:ea typeface="Calibri" pitchFamily="34" charset="-122"/>
-                <a:cs typeface="Calibri" pitchFamily="34" charset="-120"/>
+                <a:cs typeface="Amiri" pitchFamily="2" charset="-78"/>
               </a:rPr>
               <a:t>F1-L11 · Arabic around us</a:t>
             </a:r>
@@ -15644,8 +15385,7 @@
                   <a:srgbClr val="FFFFFF"/>
                 </a:solidFill>
                 <a:latin typeface="Calibri" pitchFamily="34" charset="0"/>
-                <a:ea typeface="Calibri" pitchFamily="34" charset="-122"/>
-                <a:cs typeface="Calibri" pitchFamily="34" charset="-120"/>
+                <a:cs typeface="Amiri" pitchFamily="2" charset="-78"/>
               </a:rPr>
               <a:t>WE DO · 4 MIN</a:t>
             </a:r>
@@ -15683,8 +15423,7 @@
                   <a:srgbClr val="2F6FB0"/>
                 </a:solidFill>
                 <a:latin typeface="Calibri" pitchFamily="34" charset="0"/>
-                <a:ea typeface="Calibri" pitchFamily="34" charset="-122"/>
-                <a:cs typeface="Calibri" pitchFamily="34" charset="-120"/>
+                <a:cs typeface="Amiri" pitchFamily="2" charset="-78"/>
               </a:rPr>
               <a:t>WE DO · A WEST-TO-EAST ROUTE THROUGH TEN COUNTRIES (WEBSITE PART 6)</a:t>
             </a:r>
@@ -15722,8 +15461,7 @@
                   <a:srgbClr val="1B3B6F"/>
                 </a:solidFill>
                 <a:latin typeface="Cambria" pitchFamily="34" charset="0"/>
-                <a:ea typeface="Cambria" pitchFamily="34" charset="-122"/>
-                <a:cs typeface="Cambria" pitchFamily="34" charset="-120"/>
+                <a:cs typeface="Amiri" pitchFamily="2" charset="-78"/>
               </a:rPr>
               <a:t>Journey across the Arab world</a:t>
             </a:r>
@@ -15760,9 +15498,8 @@
                 <a:solidFill>
                   <a:srgbClr val="8A6D1E"/>
                 </a:solidFill>
-                <a:latin typeface="Amiri" pitchFamily="34" charset="0"/>
-                <a:ea typeface="Amiri" pitchFamily="34" charset="-122"/>
-                <a:cs typeface="Amiri" pitchFamily="34" charset="-120"/>
+                <a:latin typeface="Amiri" pitchFamily="2" charset="-78"/>
+                <a:cs typeface="Amiri" pitchFamily="2" charset="-78"/>
               </a:rPr>
               <a:t>رِحْلَةٌ فِي العَالَمِ العَرَبِيِّ</a:t>
             </a:r>
@@ -15800,8 +15537,7 @@
                   <a:srgbClr val="8A93A0"/>
                 </a:solidFill>
                 <a:latin typeface="Calibri" pitchFamily="34" charset="0"/>
-                <a:ea typeface="Calibri" pitchFamily="34" charset="-122"/>
-                <a:cs typeface="Calibri" pitchFamily="34" charset="-120"/>
+                <a:cs typeface="Amiri" pitchFamily="2" charset="-78"/>
               </a:rPr>
               <a:t>Miftah Arabic · Foundation F1 · Arabic Script &amp; Sounds · F1-L11</a:t>
             </a:r>
@@ -15864,8 +15600,7 @@
                   <a:srgbClr val="FFFFFF"/>
                 </a:solidFill>
                 <a:latin typeface="Calibri" pitchFamily="34" charset="0"/>
-                <a:ea typeface="Calibri" pitchFamily="34" charset="-122"/>
-                <a:cs typeface="Calibri" pitchFamily="34" charset="-120"/>
+                <a:cs typeface="Amiri" pitchFamily="2" charset="-78"/>
               </a:rPr>
               <a:t>Country (Arabic)</a:t>
             </a:r>
@@ -15903,8 +15638,7 @@
                   <a:srgbClr val="FFFFFF"/>
                 </a:solidFill>
                 <a:latin typeface="Calibri" pitchFamily="34" charset="0"/>
-                <a:ea typeface="Calibri" pitchFamily="34" charset="-122"/>
-                <a:cs typeface="Calibri" pitchFamily="34" charset="-120"/>
+                <a:cs typeface="Amiri" pitchFamily="2" charset="-78"/>
               </a:rPr>
               <a:t>English</a:t>
             </a:r>
@@ -15942,8 +15676,7 @@
                   <a:srgbClr val="FFFFFF"/>
                 </a:solidFill>
                 <a:latin typeface="Calibri" pitchFamily="34" charset="0"/>
-                <a:ea typeface="Calibri" pitchFamily="34" charset="-122"/>
-                <a:cs typeface="Calibri" pitchFamily="34" charset="-120"/>
+                <a:cs typeface="Amiri" pitchFamily="2" charset="-78"/>
               </a:rPr>
               <a:t>Region</a:t>
             </a:r>
@@ -16007,9 +15740,8 @@
                 <a:solidFill>
                   <a:srgbClr val="1B3B6F"/>
                 </a:solidFill>
-                <a:latin typeface="Amiri" pitchFamily="34" charset="0"/>
-                <a:ea typeface="Amiri" pitchFamily="34" charset="-122"/>
-                <a:cs typeface="Amiri" pitchFamily="34" charset="-120"/>
+                <a:latin typeface="Amiri" pitchFamily="2" charset="-78"/>
+                <a:cs typeface="Amiri" pitchFamily="2" charset="-78"/>
               </a:rPr>
               <a:t>المَغْرِب</a:t>
             </a:r>
@@ -16047,8 +15779,7 @@
                   <a:srgbClr val="5A6472"/>
                 </a:solidFill>
                 <a:latin typeface="Calibri" pitchFamily="34" charset="0"/>
-                <a:ea typeface="Calibri" pitchFamily="34" charset="-122"/>
-                <a:cs typeface="Calibri" pitchFamily="34" charset="-120"/>
+                <a:cs typeface="Amiri" pitchFamily="2" charset="-78"/>
               </a:rPr>
               <a:t>Morocco</a:t>
             </a:r>
@@ -16086,8 +15817,7 @@
                   <a:srgbClr val="5A6472"/>
                 </a:solidFill>
                 <a:latin typeface="Calibri" pitchFamily="34" charset="0"/>
-                <a:ea typeface="Calibri" pitchFamily="34" charset="-122"/>
-                <a:cs typeface="Calibri" pitchFamily="34" charset="-120"/>
+                <a:cs typeface="Amiri" pitchFamily="2" charset="-78"/>
               </a:rPr>
               <a:t>Maghreb · North-west Africa</a:t>
             </a:r>
@@ -16152,8 +15882,7 @@
                   <a:srgbClr val="FFFFFF"/>
                 </a:solidFill>
                 <a:latin typeface="Calibri" pitchFamily="34" charset="0"/>
-                <a:ea typeface="Calibri" pitchFamily="34" charset="-122"/>
-                <a:cs typeface="Calibri" pitchFamily="34" charset="-120"/>
+                <a:cs typeface="Amiri" pitchFamily="2" charset="-78"/>
               </a:rPr>
               <a:t>CORE</a:t>
             </a:r>
@@ -16217,9 +15946,8 @@
                 <a:solidFill>
                   <a:srgbClr val="1B3B6F"/>
                 </a:solidFill>
-                <a:latin typeface="Amiri" pitchFamily="34" charset="0"/>
-                <a:ea typeface="Amiri" pitchFamily="34" charset="-122"/>
-                <a:cs typeface="Amiri" pitchFamily="34" charset="-120"/>
+                <a:latin typeface="Amiri" pitchFamily="2" charset="-78"/>
+                <a:cs typeface="Amiri" pitchFamily="2" charset="-78"/>
               </a:rPr>
               <a:t>الجَزَائِر</a:t>
             </a:r>
@@ -16257,8 +15985,7 @@
                   <a:srgbClr val="5A6472"/>
                 </a:solidFill>
                 <a:latin typeface="Calibri" pitchFamily="34" charset="0"/>
-                <a:ea typeface="Calibri" pitchFamily="34" charset="-122"/>
-                <a:cs typeface="Calibri" pitchFamily="34" charset="-120"/>
+                <a:cs typeface="Amiri" pitchFamily="2" charset="-78"/>
               </a:rPr>
               <a:t>Algeria</a:t>
             </a:r>
@@ -16296,8 +16023,7 @@
                   <a:srgbClr val="5A6472"/>
                 </a:solidFill>
                 <a:latin typeface="Calibri" pitchFamily="34" charset="0"/>
-                <a:ea typeface="Calibri" pitchFamily="34" charset="-122"/>
-                <a:cs typeface="Calibri" pitchFamily="34" charset="-120"/>
+                <a:cs typeface="Amiri" pitchFamily="2" charset="-78"/>
               </a:rPr>
               <a:t>Maghreb</a:t>
             </a:r>
@@ -16362,8 +16088,7 @@
                   <a:srgbClr val="FFFFFF"/>
                 </a:solidFill>
                 <a:latin typeface="Calibri" pitchFamily="34" charset="0"/>
-                <a:ea typeface="Calibri" pitchFamily="34" charset="-122"/>
-                <a:cs typeface="Calibri" pitchFamily="34" charset="-120"/>
+                <a:cs typeface="Amiri" pitchFamily="2" charset="-78"/>
               </a:rPr>
               <a:t>CORE</a:t>
             </a:r>
@@ -16427,9 +16152,8 @@
                 <a:solidFill>
                   <a:srgbClr val="1B3B6F"/>
                 </a:solidFill>
-                <a:latin typeface="Amiri" pitchFamily="34" charset="0"/>
-                <a:ea typeface="Amiri" pitchFamily="34" charset="-122"/>
-                <a:cs typeface="Amiri" pitchFamily="34" charset="-120"/>
+                <a:latin typeface="Amiri" pitchFamily="2" charset="-78"/>
+                <a:cs typeface="Amiri" pitchFamily="2" charset="-78"/>
               </a:rPr>
               <a:t>تُونِس</a:t>
             </a:r>
@@ -16467,8 +16191,7 @@
                   <a:srgbClr val="5A6472"/>
                 </a:solidFill>
                 <a:latin typeface="Calibri" pitchFamily="34" charset="0"/>
-                <a:ea typeface="Calibri" pitchFamily="34" charset="-122"/>
-                <a:cs typeface="Calibri" pitchFamily="34" charset="-120"/>
+                <a:cs typeface="Amiri" pitchFamily="2" charset="-78"/>
               </a:rPr>
               <a:t>Tunisia</a:t>
             </a:r>
@@ -16506,8 +16229,7 @@
                   <a:srgbClr val="5A6472"/>
                 </a:solidFill>
                 <a:latin typeface="Calibri" pitchFamily="34" charset="0"/>
-                <a:ea typeface="Calibri" pitchFamily="34" charset="-122"/>
-                <a:cs typeface="Calibri" pitchFamily="34" charset="-120"/>
+                <a:cs typeface="Amiri" pitchFamily="2" charset="-78"/>
               </a:rPr>
               <a:t>Maghreb</a:t>
             </a:r>
@@ -16571,9 +16293,8 @@
                 <a:solidFill>
                   <a:srgbClr val="1B3B6F"/>
                 </a:solidFill>
-                <a:latin typeface="Amiri" pitchFamily="34" charset="0"/>
-                <a:ea typeface="Amiri" pitchFamily="34" charset="-122"/>
-                <a:cs typeface="Amiri" pitchFamily="34" charset="-120"/>
+                <a:latin typeface="Amiri" pitchFamily="2" charset="-78"/>
+                <a:cs typeface="Amiri" pitchFamily="2" charset="-78"/>
               </a:rPr>
               <a:t>مِصْر</a:t>
             </a:r>
@@ -16611,8 +16332,7 @@
                   <a:srgbClr val="5A6472"/>
                 </a:solidFill>
                 <a:latin typeface="Calibri" pitchFamily="34" charset="0"/>
-                <a:ea typeface="Calibri" pitchFamily="34" charset="-122"/>
-                <a:cs typeface="Calibri" pitchFamily="34" charset="-120"/>
+                <a:cs typeface="Amiri" pitchFamily="2" charset="-78"/>
               </a:rPr>
               <a:t>Egypt</a:t>
             </a:r>
@@ -16650,8 +16370,7 @@
                   <a:srgbClr val="5A6472"/>
                 </a:solidFill>
                 <a:latin typeface="Calibri" pitchFamily="34" charset="0"/>
-                <a:ea typeface="Calibri" pitchFamily="34" charset="-122"/>
-                <a:cs typeface="Calibri" pitchFamily="34" charset="-120"/>
+                <a:cs typeface="Amiri" pitchFamily="2" charset="-78"/>
               </a:rPr>
               <a:t>Nile Valley</a:t>
             </a:r>
@@ -16716,8 +16435,7 @@
                   <a:srgbClr val="FFFFFF"/>
                 </a:solidFill>
                 <a:latin typeface="Calibri" pitchFamily="34" charset="0"/>
-                <a:ea typeface="Calibri" pitchFamily="34" charset="-122"/>
-                <a:cs typeface="Calibri" pitchFamily="34" charset="-120"/>
+                <a:cs typeface="Amiri" pitchFamily="2" charset="-78"/>
               </a:rPr>
               <a:t>CORE</a:t>
             </a:r>
@@ -16781,9 +16499,8 @@
                 <a:solidFill>
                   <a:srgbClr val="1B3B6F"/>
                 </a:solidFill>
-                <a:latin typeface="Amiri" pitchFamily="34" charset="0"/>
-                <a:ea typeface="Amiri" pitchFamily="34" charset="-122"/>
-                <a:cs typeface="Amiri" pitchFamily="34" charset="-120"/>
+                <a:latin typeface="Amiri" pitchFamily="2" charset="-78"/>
+                <a:cs typeface="Amiri" pitchFamily="2" charset="-78"/>
               </a:rPr>
               <a:t>السُّودَان</a:t>
             </a:r>
@@ -16821,8 +16538,7 @@
                   <a:srgbClr val="5A6472"/>
                 </a:solidFill>
                 <a:latin typeface="Calibri" pitchFamily="34" charset="0"/>
-                <a:ea typeface="Calibri" pitchFamily="34" charset="-122"/>
-                <a:cs typeface="Calibri" pitchFamily="34" charset="-120"/>
+                <a:cs typeface="Amiri" pitchFamily="2" charset="-78"/>
               </a:rPr>
               <a:t>Sudan</a:t>
             </a:r>
@@ -16860,8 +16576,7 @@
                   <a:srgbClr val="5A6472"/>
                 </a:solidFill>
                 <a:latin typeface="Calibri" pitchFamily="34" charset="0"/>
-                <a:ea typeface="Calibri" pitchFamily="34" charset="-122"/>
-                <a:cs typeface="Calibri" pitchFamily="34" charset="-120"/>
+                <a:cs typeface="Amiri" pitchFamily="2" charset="-78"/>
               </a:rPr>
               <a:t>Nile Valley</a:t>
             </a:r>
@@ -16925,9 +16640,8 @@
                 <a:solidFill>
                   <a:srgbClr val="1B3B6F"/>
                 </a:solidFill>
-                <a:latin typeface="Amiri" pitchFamily="34" charset="0"/>
-                <a:ea typeface="Amiri" pitchFamily="34" charset="-122"/>
-                <a:cs typeface="Amiri" pitchFamily="34" charset="-120"/>
+                <a:latin typeface="Amiri" pitchFamily="2" charset="-78"/>
+                <a:cs typeface="Amiri" pitchFamily="2" charset="-78"/>
               </a:rPr>
               <a:t>لُبْنَان</a:t>
             </a:r>
@@ -16965,8 +16679,7 @@
                   <a:srgbClr val="5A6472"/>
                 </a:solidFill>
                 <a:latin typeface="Calibri" pitchFamily="34" charset="0"/>
-                <a:ea typeface="Calibri" pitchFamily="34" charset="-122"/>
-                <a:cs typeface="Calibri" pitchFamily="34" charset="-120"/>
+                <a:cs typeface="Amiri" pitchFamily="2" charset="-78"/>
               </a:rPr>
               <a:t>Lebanon</a:t>
             </a:r>
@@ -17004,8 +16717,7 @@
                   <a:srgbClr val="5A6472"/>
                 </a:solidFill>
                 <a:latin typeface="Calibri" pitchFamily="34" charset="0"/>
-                <a:ea typeface="Calibri" pitchFamily="34" charset="-122"/>
-                <a:cs typeface="Calibri" pitchFamily="34" charset="-120"/>
+                <a:cs typeface="Amiri" pitchFamily="2" charset="-78"/>
               </a:rPr>
               <a:t>Levant</a:t>
             </a:r>
@@ -17069,9 +16781,8 @@
                 <a:solidFill>
                   <a:srgbClr val="1B3B6F"/>
                 </a:solidFill>
-                <a:latin typeface="Amiri" pitchFamily="34" charset="0"/>
-                <a:ea typeface="Amiri" pitchFamily="34" charset="-122"/>
-                <a:cs typeface="Amiri" pitchFamily="34" charset="-120"/>
+                <a:latin typeface="Amiri" pitchFamily="2" charset="-78"/>
+                <a:cs typeface="Amiri" pitchFamily="2" charset="-78"/>
               </a:rPr>
               <a:t>سُورِيَا</a:t>
             </a:r>
@@ -17109,8 +16820,7 @@
                   <a:srgbClr val="5A6472"/>
                 </a:solidFill>
                 <a:latin typeface="Calibri" pitchFamily="34" charset="0"/>
-                <a:ea typeface="Calibri" pitchFamily="34" charset="-122"/>
-                <a:cs typeface="Calibri" pitchFamily="34" charset="-120"/>
+                <a:cs typeface="Amiri" pitchFamily="2" charset="-78"/>
               </a:rPr>
               <a:t>Syria</a:t>
             </a:r>
@@ -17148,8 +16858,7 @@
                   <a:srgbClr val="5A6472"/>
                 </a:solidFill>
                 <a:latin typeface="Calibri" pitchFamily="34" charset="0"/>
-                <a:ea typeface="Calibri" pitchFamily="34" charset="-122"/>
-                <a:cs typeface="Calibri" pitchFamily="34" charset="-120"/>
+                <a:cs typeface="Amiri" pitchFamily="2" charset="-78"/>
               </a:rPr>
               <a:t>Levant</a:t>
             </a:r>
@@ -17213,9 +16922,8 @@
                 <a:solidFill>
                   <a:srgbClr val="1B3B6F"/>
                 </a:solidFill>
-                <a:latin typeface="Amiri" pitchFamily="34" charset="0"/>
-                <a:ea typeface="Amiri" pitchFamily="34" charset="-122"/>
-                <a:cs typeface="Amiri" pitchFamily="34" charset="-120"/>
+                <a:latin typeface="Amiri" pitchFamily="2" charset="-78"/>
+                <a:cs typeface="Amiri" pitchFamily="2" charset="-78"/>
               </a:rPr>
               <a:t>العِرَاق</a:t>
             </a:r>
@@ -17253,8 +16961,7 @@
                   <a:srgbClr val="5A6472"/>
                 </a:solidFill>
                 <a:latin typeface="Calibri" pitchFamily="34" charset="0"/>
-                <a:ea typeface="Calibri" pitchFamily="34" charset="-122"/>
-                <a:cs typeface="Calibri" pitchFamily="34" charset="-120"/>
+                <a:cs typeface="Amiri" pitchFamily="2" charset="-78"/>
               </a:rPr>
               <a:t>Iraq</a:t>
             </a:r>
@@ -17292,8 +16999,7 @@
                   <a:srgbClr val="5A6472"/>
                 </a:solidFill>
                 <a:latin typeface="Calibri" pitchFamily="34" charset="0"/>
-                <a:ea typeface="Calibri" pitchFamily="34" charset="-122"/>
-                <a:cs typeface="Calibri" pitchFamily="34" charset="-120"/>
+                <a:cs typeface="Amiri" pitchFamily="2" charset="-78"/>
               </a:rPr>
               <a:t>Iraq</a:t>
             </a:r>
@@ -17358,8 +17064,7 @@
                   <a:srgbClr val="FFFFFF"/>
                 </a:solidFill>
                 <a:latin typeface="Calibri" pitchFamily="34" charset="0"/>
-                <a:ea typeface="Calibri" pitchFamily="34" charset="-122"/>
-                <a:cs typeface="Calibri" pitchFamily="34" charset="-120"/>
+                <a:cs typeface="Amiri" pitchFamily="2" charset="-78"/>
               </a:rPr>
               <a:t>CORE</a:t>
             </a:r>
@@ -17423,9 +17128,8 @@
                 <a:solidFill>
                   <a:srgbClr val="1B3B6F"/>
                 </a:solidFill>
-                <a:latin typeface="Amiri" pitchFamily="34" charset="0"/>
-                <a:ea typeface="Amiri" pitchFamily="34" charset="-122"/>
-                <a:cs typeface="Amiri" pitchFamily="34" charset="-120"/>
+                <a:latin typeface="Amiri" pitchFamily="2" charset="-78"/>
+                <a:cs typeface="Amiri" pitchFamily="2" charset="-78"/>
               </a:rPr>
               <a:t>المَمْلَكَةُ العَرَبِيَّةُ السُّعُودِيَّة</a:t>
             </a:r>
@@ -17463,8 +17167,7 @@
                   <a:srgbClr val="5A6472"/>
                 </a:solidFill>
                 <a:latin typeface="Calibri" pitchFamily="34" charset="0"/>
-                <a:ea typeface="Calibri" pitchFamily="34" charset="-122"/>
-                <a:cs typeface="Calibri" pitchFamily="34" charset="-120"/>
+                <a:cs typeface="Amiri" pitchFamily="2" charset="-78"/>
               </a:rPr>
               <a:t>Saudi Arabia</a:t>
             </a:r>
@@ -17502,8 +17205,7 @@
                   <a:srgbClr val="5A6472"/>
                 </a:solidFill>
                 <a:latin typeface="Calibri" pitchFamily="34" charset="0"/>
-                <a:ea typeface="Calibri" pitchFamily="34" charset="-122"/>
-                <a:cs typeface="Calibri" pitchFamily="34" charset="-120"/>
+                <a:cs typeface="Amiri" pitchFamily="2" charset="-78"/>
               </a:rPr>
               <a:t>Arabian Peninsula</a:t>
             </a:r>
@@ -17568,8 +17270,7 @@
                   <a:srgbClr val="FFFFFF"/>
                 </a:solidFill>
                 <a:latin typeface="Calibri" pitchFamily="34" charset="0"/>
-                <a:ea typeface="Calibri" pitchFamily="34" charset="-122"/>
-                <a:cs typeface="Calibri" pitchFamily="34" charset="-120"/>
+                <a:cs typeface="Amiri" pitchFamily="2" charset="-78"/>
               </a:rPr>
               <a:t>CORE</a:t>
             </a:r>
@@ -17633,9 +17334,8 @@
                 <a:solidFill>
                   <a:srgbClr val="1B3B6F"/>
                 </a:solidFill>
-                <a:latin typeface="Amiri" pitchFamily="34" charset="0"/>
-                <a:ea typeface="Amiri" pitchFamily="34" charset="-122"/>
-                <a:cs typeface="Amiri" pitchFamily="34" charset="-120"/>
+                <a:latin typeface="Amiri" pitchFamily="2" charset="-78"/>
+                <a:cs typeface="Amiri" pitchFamily="2" charset="-78"/>
               </a:rPr>
               <a:t>عُمَان</a:t>
             </a:r>
@@ -17673,8 +17373,7 @@
                   <a:srgbClr val="5A6472"/>
                 </a:solidFill>
                 <a:latin typeface="Calibri" pitchFamily="34" charset="0"/>
-                <a:ea typeface="Calibri" pitchFamily="34" charset="-122"/>
-                <a:cs typeface="Calibri" pitchFamily="34" charset="-120"/>
+                <a:cs typeface="Amiri" pitchFamily="2" charset="-78"/>
               </a:rPr>
               <a:t>Oman</a:t>
             </a:r>
@@ -17712,8 +17411,7 @@
                   <a:srgbClr val="5A6472"/>
                 </a:solidFill>
                 <a:latin typeface="Calibri" pitchFamily="34" charset="0"/>
-                <a:ea typeface="Calibri" pitchFamily="34" charset="-122"/>
-                <a:cs typeface="Calibri" pitchFamily="34" charset="-120"/>
+                <a:cs typeface="Amiri" pitchFamily="2" charset="-78"/>
               </a:rPr>
               <a:t>Arabian Peninsula</a:t>
             </a:r>
@@ -17751,8 +17449,7 @@
                   <a:srgbClr val="8A93A0"/>
                 </a:solidFill>
                 <a:latin typeface="Calibri" pitchFamily="34" charset="0"/>
-                <a:ea typeface="Calibri" pitchFamily="34" charset="-122"/>
-                <a:cs typeface="Calibri" pitchFamily="34" charset="-120"/>
+                <a:cs typeface="Amiri" pitchFamily="2" charset="-78"/>
               </a:rPr>
               <a:t>17 / 25</a:t>
             </a:r>
@@ -17846,9 +17543,8 @@
                 <a:solidFill>
                   <a:srgbClr val="D4AF37"/>
                 </a:solidFill>
-                <a:latin typeface="Amiri" pitchFamily="34" charset="0"/>
-                <a:ea typeface="Amiri" pitchFamily="34" charset="-122"/>
-                <a:cs typeface="Amiri" pitchFamily="34" charset="-120"/>
+                <a:latin typeface="Amiri" pitchFamily="2" charset="-78"/>
+                <a:cs typeface="Amiri" pitchFamily="2" charset="-78"/>
               </a:rPr>
               <a:t>م</a:t>
             </a:r>
@@ -17886,8 +17582,7 @@
                   <a:srgbClr val="1B3B6F"/>
                 </a:solidFill>
                 <a:latin typeface="Cambria" pitchFamily="34" charset="0"/>
-                <a:ea typeface="Cambria" pitchFamily="34" charset="-122"/>
-                <a:cs typeface="Cambria" pitchFamily="34" charset="-120"/>
+                <a:cs typeface="Amiri" pitchFamily="2" charset="-78"/>
               </a:rPr>
               <a:t>Al Madina Online School</a:t>
             </a:r>
@@ -17925,8 +17620,7 @@
                   <a:srgbClr val="8A6D1E"/>
                 </a:solidFill>
                 <a:latin typeface="Calibri" pitchFamily="34" charset="0"/>
-                <a:ea typeface="Calibri" pitchFamily="34" charset="-122"/>
-                <a:cs typeface="Calibri" pitchFamily="34" charset="-120"/>
+                <a:cs typeface="Amiri" pitchFamily="2" charset="-78"/>
               </a:rPr>
               <a:t>ARABIC DEPARTMENT · MIFTAH ARABIC · IGCSE 0544</a:t>
             </a:r>
@@ -17991,8 +17685,7 @@
                   <a:srgbClr val="FFFFFF"/>
                 </a:solidFill>
                 <a:latin typeface="Calibri" pitchFamily="34" charset="0"/>
-                <a:ea typeface="Calibri" pitchFamily="34" charset="-122"/>
-                <a:cs typeface="Calibri" pitchFamily="34" charset="-120"/>
+                <a:cs typeface="Amiri" pitchFamily="2" charset="-78"/>
               </a:rPr>
               <a:t>F1-L11 · Arabic around us</a:t>
             </a:r>
@@ -18057,8 +17750,7 @@
                   <a:srgbClr val="FFFFFF"/>
                 </a:solidFill>
                 <a:latin typeface="Calibri" pitchFamily="34" charset="0"/>
-                <a:ea typeface="Calibri" pitchFamily="34" charset="-122"/>
-                <a:cs typeface="Calibri" pitchFamily="34" charset="-120"/>
+                <a:cs typeface="Amiri" pitchFamily="2" charset="-78"/>
               </a:rPr>
               <a:t>YOU DO · 7 MIN</a:t>
             </a:r>
@@ -18096,8 +17788,7 @@
                   <a:srgbClr val="1E6B52"/>
                 </a:solidFill>
                 <a:latin typeface="Calibri" pitchFamily="34" charset="0"/>
-                <a:ea typeface="Calibri" pitchFamily="34" charset="-122"/>
-                <a:cs typeface="Calibri" pitchFamily="34" charset="-120"/>
+                <a:cs typeface="Amiri" pitchFamily="2" charset="-78"/>
               </a:rPr>
               <a:t>YOU DO · INDEPENDENT PRACTICE · 7 MINUTES</a:t>
             </a:r>
@@ -18135,8 +17826,7 @@
                   <a:srgbClr val="1B3B6F"/>
                 </a:solidFill>
                 <a:latin typeface="Cambria" pitchFamily="34" charset="0"/>
-                <a:ea typeface="Cambria" pitchFamily="34" charset="-122"/>
-                <a:cs typeface="Cambria" pitchFamily="34" charset="-120"/>
+                <a:cs typeface="Amiri" pitchFamily="2" charset="-78"/>
               </a:rPr>
               <a:t>Investigate: choose your route</a:t>
             </a:r>
@@ -18173,9 +17863,8 @@
                 <a:solidFill>
                   <a:srgbClr val="8A6D1E"/>
                 </a:solidFill>
-                <a:latin typeface="Amiri" pitchFamily="34" charset="0"/>
-                <a:ea typeface="Amiri" pitchFamily="34" charset="-122"/>
-                <a:cs typeface="Amiri" pitchFamily="34" charset="-120"/>
+                <a:latin typeface="Amiri" pitchFamily="2" charset="-78"/>
+                <a:cs typeface="Amiri" pitchFamily="2" charset="-78"/>
               </a:rPr>
               <a:t>اِبْحَثْ وَاكْتُبْ</a:t>
             </a:r>
@@ -18213,8 +17902,7 @@
                   <a:srgbClr val="8A93A0"/>
                 </a:solidFill>
                 <a:latin typeface="Calibri" pitchFamily="34" charset="0"/>
-                <a:ea typeface="Calibri" pitchFamily="34" charset="-122"/>
-                <a:cs typeface="Calibri" pitchFamily="34" charset="-120"/>
+                <a:cs typeface="Amiri" pitchFamily="2" charset="-78"/>
               </a:rPr>
               <a:t>Miftah Arabic · Foundation F1 · Arabic Script &amp; Sounds · F1-L11</a:t>
             </a:r>
@@ -18313,8 +18001,7 @@
                   <a:srgbClr val="FFFFFF"/>
                 </a:solidFill>
                 <a:latin typeface="Calibri" pitchFamily="34" charset="0"/>
-                <a:ea typeface="Calibri" pitchFamily="34" charset="-122"/>
-                <a:cs typeface="Calibri" pitchFamily="34" charset="-120"/>
+                <a:cs typeface="Amiri" pitchFamily="2" charset="-78"/>
               </a:rPr>
               <a:t>CORE</a:t>
             </a:r>
@@ -18351,9 +18038,8 @@
                 <a:solidFill>
                   <a:srgbClr val="2E8B57"/>
                 </a:solidFill>
-                <a:latin typeface="Amiri" pitchFamily="34" charset="0"/>
-                <a:ea typeface="Amiri" pitchFamily="34" charset="-122"/>
-                <a:cs typeface="Amiri" pitchFamily="34" charset="-120"/>
+                <a:latin typeface="Amiri" pitchFamily="2" charset="-78"/>
+                <a:cs typeface="Amiri" pitchFamily="2" charset="-78"/>
               </a:rPr>
               <a:t>الأَسَاسُ</a:t>
             </a:r>
@@ -18391,8 +18077,7 @@
                   <a:srgbClr val="2E8B57"/>
                 </a:solidFill>
                 <a:latin typeface="Cambria" pitchFamily="34" charset="0"/>
-                <a:ea typeface="Cambria" pitchFamily="34" charset="-122"/>
-                <a:cs typeface="Cambria" pitchFamily="34" charset="-120"/>
+                <a:cs typeface="Amiri" pitchFamily="2" charset="-78"/>
               </a:rPr>
               <a:t>5 countries + 3 contexts</a:t>
             </a:r>
@@ -18430,8 +18115,7 @@
                   <a:srgbClr val="1F2A37"/>
                 </a:solidFill>
                 <a:latin typeface="Calibri" pitchFamily="34" charset="0"/>
-                <a:ea typeface="Calibri" pitchFamily="34" charset="-122"/>
-                <a:cs typeface="Calibri" pitchFamily="34" charset="-120"/>
+                <a:cs typeface="Amiri" pitchFamily="2" charset="-78"/>
               </a:rPr>
               <a:t>Copy five country names in Arabic with the English. Then copy three everyday words from the context table.</a:t>
             </a:r>
@@ -18496,8 +18180,7 @@
                   <a:srgbClr val="2E8B57"/>
                 </a:solidFill>
                 <a:latin typeface="Calibri" pitchFamily="34" charset="0"/>
-                <a:ea typeface="Calibri" pitchFamily="34" charset="-122"/>
-                <a:cs typeface="Calibri" pitchFamily="34" charset="-120"/>
+                <a:cs typeface="Amiri" pitchFamily="2" charset="-78"/>
               </a:rPr>
               <a:t>HOW</a:t>
             </a:r>
@@ -18513,8 +18196,7 @@
                   <a:srgbClr val="1F2A37"/>
                 </a:solidFill>
                 <a:latin typeface="Calibri" pitchFamily="34" charset="0"/>
-                <a:ea typeface="Calibri" pitchFamily="34" charset="-122"/>
-                <a:cs typeface="Calibri" pitchFamily="34" charset="-120"/>
+                <a:cs typeface="Amiri" pitchFamily="2" charset="-78"/>
               </a:rPr>
               <a:t>Say each word aloud as you copy it.</a:t>
             </a:r>
@@ -18613,8 +18295,7 @@
                   <a:srgbClr val="FFFFFF"/>
                 </a:solidFill>
                 <a:latin typeface="Calibri" pitchFamily="34" charset="0"/>
-                <a:ea typeface="Calibri" pitchFamily="34" charset="-122"/>
-                <a:cs typeface="Calibri" pitchFamily="34" charset="-120"/>
+                <a:cs typeface="Amiri" pitchFamily="2" charset="-78"/>
               </a:rPr>
               <a:t>DEVELOP</a:t>
             </a:r>
@@ -18651,9 +18332,8 @@
                 <a:solidFill>
                   <a:srgbClr val="C9780A"/>
                 </a:solidFill>
-                <a:latin typeface="Amiri" pitchFamily="34" charset="0"/>
-                <a:ea typeface="Amiri" pitchFamily="34" charset="-122"/>
-                <a:cs typeface="Amiri" pitchFamily="34" charset="-120"/>
+                <a:latin typeface="Amiri" pitchFamily="2" charset="-78"/>
+                <a:cs typeface="Amiri" pitchFamily="2" charset="-78"/>
               </a:rPr>
               <a:t>التَّطْوِيرُ</a:t>
             </a:r>
@@ -18691,8 +18371,7 @@
                   <a:srgbClr val="C9780A"/>
                 </a:solidFill>
                 <a:latin typeface="Cambria" pitchFamily="34" charset="0"/>
-                <a:ea typeface="Cambria" pitchFamily="34" charset="-122"/>
-                <a:cs typeface="Cambria" pitchFamily="34" charset="-120"/>
+                <a:cs typeface="Amiri" pitchFamily="2" charset="-78"/>
               </a:rPr>
               <a:t>script · language · meaning</a:t>
             </a:r>
@@ -18730,8 +18409,7 @@
                   <a:srgbClr val="1F2A37"/>
                 </a:solidFill>
                 <a:latin typeface="Calibri" pitchFamily="34" charset="0"/>
-                <a:ea typeface="Calibri" pitchFamily="34" charset="-122"/>
-                <a:cs typeface="Calibri" pitchFamily="34" charset="-120"/>
+                <a:cs typeface="Amiri" pitchFamily="2" charset="-78"/>
               </a:rPr>
               <a:t>Use your own example from home (or </a:t>
             </a:r>
@@ -18743,9 +18421,8 @@
                 <a:solidFill>
                   <a:srgbClr val="1F2A37"/>
                 </a:solidFill>
-                <a:latin typeface="Amiri" pitchFamily="34" charset="0"/>
-                <a:ea typeface="Amiri" pitchFamily="34" charset="-122"/>
-                <a:cs typeface="Amiri" pitchFamily="34" charset="-120"/>
+                <a:latin typeface="Amiri" pitchFamily="2" charset="-78"/>
+                <a:cs typeface="Amiri" pitchFamily="2" charset="-78"/>
               </a:rPr>
               <a:t>مَطْعَم</a:t>
             </a:r>
@@ -18758,8 +18435,7 @@
                   <a:srgbClr val="1F2A37"/>
                 </a:solidFill>
                 <a:latin typeface="Calibri" pitchFamily="34" charset="0"/>
-                <a:ea typeface="Calibri" pitchFamily="34" charset="-122"/>
-                <a:cs typeface="Calibri" pitchFamily="34" charset="-120"/>
+                <a:cs typeface="Amiri" pitchFamily="2" charset="-78"/>
               </a:rPr>
               <a:t>). Write the three questions and your answer to each.</a:t>
             </a:r>
@@ -18824,8 +18500,7 @@
                   <a:srgbClr val="C9780A"/>
                 </a:solidFill>
                 <a:latin typeface="Calibri" pitchFamily="34" charset="0"/>
-                <a:ea typeface="Calibri" pitchFamily="34" charset="-122"/>
-                <a:cs typeface="Calibri" pitchFamily="34" charset="-120"/>
+                <a:cs typeface="Amiri" pitchFamily="2" charset="-78"/>
               </a:rPr>
               <a:t>HOW</a:t>
             </a:r>
@@ -18841,8 +18516,7 @@
                   <a:srgbClr val="1F2A37"/>
                 </a:solidFill>
                 <a:latin typeface="Calibri" pitchFamily="34" charset="0"/>
-                <a:ea typeface="Calibri" pitchFamily="34" charset="-122"/>
-                <a:cs typeface="Calibri" pitchFamily="34" charset="-120"/>
+                <a:cs typeface="Amiri" pitchFamily="2" charset="-78"/>
               </a:rPr>
               <a:t>Finish with: secure, likely or uncertain — and why.</a:t>
             </a:r>
@@ -18941,8 +18615,7 @@
                   <a:srgbClr val="FFFFFF"/>
                 </a:solidFill>
                 <a:latin typeface="Calibri" pitchFamily="34" charset="0"/>
-                <a:ea typeface="Calibri" pitchFamily="34" charset="-122"/>
-                <a:cs typeface="Calibri" pitchFamily="34" charset="-120"/>
+                <a:cs typeface="Amiri" pitchFamily="2" charset="-78"/>
               </a:rPr>
               <a:t>STRETCH</a:t>
             </a:r>
@@ -18979,9 +18652,8 @@
                 <a:solidFill>
                   <a:srgbClr val="B83227"/>
                 </a:solidFill>
-                <a:latin typeface="Amiri" pitchFamily="34" charset="0"/>
-                <a:ea typeface="Amiri" pitchFamily="34" charset="-122"/>
-                <a:cs typeface="Amiri" pitchFamily="34" charset="-120"/>
+                <a:latin typeface="Amiri" pitchFamily="2" charset="-78"/>
+                <a:cs typeface="Amiri" pitchFamily="2" charset="-78"/>
               </a:rPr>
               <a:t>التَّحَدِّي</a:t>
             </a:r>
@@ -19019,8 +18691,7 @@
                   <a:srgbClr val="B83227"/>
                 </a:solidFill>
                 <a:latin typeface="Cambria" pitchFamily="34" charset="0"/>
-                <a:ea typeface="Cambria" pitchFamily="34" charset="-122"/>
-                <a:cs typeface="Cambria" pitchFamily="34" charset="-120"/>
+                <a:cs typeface="Amiri" pitchFamily="2" charset="-78"/>
               </a:rPr>
               <a:t>ABCD + name design</a:t>
             </a:r>
@@ -19058,8 +18729,7 @@
                   <a:srgbClr val="1F2A37"/>
                 </a:solidFill>
                 <a:latin typeface="Calibri" pitchFamily="34" charset="0"/>
-                <a:ea typeface="Calibri" pitchFamily="34" charset="-122"/>
-                <a:cs typeface="Calibri" pitchFamily="34" charset="-120"/>
+                <a:cs typeface="Amiri" pitchFamily="2" charset="-78"/>
               </a:rPr>
               <a:t>Complete the ABCD chain for your own example. Then design your name in Arabic (Naskh first).</a:t>
             </a:r>
@@ -19124,8 +18794,7 @@
                   <a:srgbClr val="B83227"/>
                 </a:solidFill>
                 <a:latin typeface="Calibri" pitchFamily="34" charset="0"/>
-                <a:ea typeface="Calibri" pitchFamily="34" charset="-122"/>
-                <a:cs typeface="Calibri" pitchFamily="34" charset="-120"/>
+                <a:cs typeface="Amiri" pitchFamily="2" charset="-78"/>
               </a:rPr>
               <a:t>HOW</a:t>
             </a:r>
@@ -19141,8 +18810,7 @@
                   <a:srgbClr val="1F2A37"/>
                 </a:solidFill>
                 <a:latin typeface="Calibri" pitchFamily="34" charset="0"/>
-                <a:ea typeface="Calibri" pitchFamily="34" charset="-122"/>
-                <a:cs typeface="Calibri" pitchFamily="34" charset="-120"/>
+                <a:cs typeface="Amiri" pitchFamily="2" charset="-78"/>
               </a:rPr>
               <a:t>Label it “Arabic-inspired name design” and write an artist’s note: spelling, legibility, visual idea.</a:t>
             </a:r>
@@ -19180,8 +18848,7 @@
                   <a:srgbClr val="8A93A0"/>
                 </a:solidFill>
                 <a:latin typeface="Calibri" pitchFamily="34" charset="0"/>
-                <a:ea typeface="Calibri" pitchFamily="34" charset="-122"/>
-                <a:cs typeface="Calibri" pitchFamily="34" charset="-120"/>
+                <a:cs typeface="Amiri" pitchFamily="2" charset="-78"/>
               </a:rPr>
               <a:t>18 / 25</a:t>
             </a:r>
@@ -19275,9 +18942,8 @@
                 <a:solidFill>
                   <a:srgbClr val="D4AF37"/>
                 </a:solidFill>
-                <a:latin typeface="Amiri" pitchFamily="34" charset="0"/>
-                <a:ea typeface="Amiri" pitchFamily="34" charset="-122"/>
-                <a:cs typeface="Amiri" pitchFamily="34" charset="-120"/>
+                <a:latin typeface="Amiri" pitchFamily="2" charset="-78"/>
+                <a:cs typeface="Amiri" pitchFamily="2" charset="-78"/>
               </a:rPr>
               <a:t>م</a:t>
             </a:r>
@@ -19315,8 +18981,7 @@
                   <a:srgbClr val="1B3B6F"/>
                 </a:solidFill>
                 <a:latin typeface="Cambria" pitchFamily="34" charset="0"/>
-                <a:ea typeface="Cambria" pitchFamily="34" charset="-122"/>
-                <a:cs typeface="Cambria" pitchFamily="34" charset="-120"/>
+                <a:cs typeface="Amiri" pitchFamily="2" charset="-78"/>
               </a:rPr>
               <a:t>Al Madina Online School</a:t>
             </a:r>
@@ -19354,8 +19019,7 @@
                   <a:srgbClr val="8A6D1E"/>
                 </a:solidFill>
                 <a:latin typeface="Calibri" pitchFamily="34" charset="0"/>
-                <a:ea typeface="Calibri" pitchFamily="34" charset="-122"/>
-                <a:cs typeface="Calibri" pitchFamily="34" charset="-120"/>
+                <a:cs typeface="Amiri" pitchFamily="2" charset="-78"/>
               </a:rPr>
               <a:t>ARABIC DEPARTMENT · MIFTAH ARABIC · IGCSE 0544</a:t>
             </a:r>
@@ -19420,8 +19084,7 @@
                   <a:srgbClr val="FFFFFF"/>
                 </a:solidFill>
                 <a:latin typeface="Calibri" pitchFamily="34" charset="0"/>
-                <a:ea typeface="Calibri" pitchFamily="34" charset="-122"/>
-                <a:cs typeface="Calibri" pitchFamily="34" charset="-120"/>
+                <a:cs typeface="Amiri" pitchFamily="2" charset="-78"/>
               </a:rPr>
               <a:t>F1-L11 · Arabic around us</a:t>
             </a:r>
@@ -19486,8 +19149,7 @@
                   <a:srgbClr val="FFFFFF"/>
                 </a:solidFill>
                 <a:latin typeface="Calibri" pitchFamily="34" charset="0"/>
-                <a:ea typeface="Calibri" pitchFamily="34" charset="-122"/>
-                <a:cs typeface="Calibri" pitchFamily="34" charset="-120"/>
+                <a:cs typeface="Amiri" pitchFamily="2" charset="-78"/>
               </a:rPr>
               <a:t>YOU DO · 3 MIN</a:t>
             </a:r>
@@ -19525,8 +19187,7 @@
                   <a:srgbClr val="1E6B52"/>
                 </a:solidFill>
                 <a:latin typeface="Calibri" pitchFamily="34" charset="0"/>
-                <a:ea typeface="Calibri" pitchFamily="34" charset="-122"/>
-                <a:cs typeface="Calibri" pitchFamily="34" charset="-120"/>
+                <a:cs typeface="Amiri" pitchFamily="2" charset="-78"/>
               </a:rPr>
               <a:t>YOU DO · SAY IT BEFORE YOU WRITE IT</a:t>
             </a:r>
@@ -19564,8 +19225,7 @@
                   <a:srgbClr val="1B3B6F"/>
                 </a:solidFill>
                 <a:latin typeface="Cambria" pitchFamily="34" charset="0"/>
-                <a:ea typeface="Cambria" pitchFamily="34" charset="-122"/>
-                <a:cs typeface="Cambria" pitchFamily="34" charset="-120"/>
+                <a:cs typeface="Amiri" pitchFamily="2" charset="-78"/>
               </a:rPr>
               <a:t>Share your example: source, script, reading, confidence</a:t>
             </a:r>
@@ -19602,9 +19262,8 @@
                 <a:solidFill>
                   <a:srgbClr val="8A6D1E"/>
                 </a:solidFill>
-                <a:latin typeface="Amiri" pitchFamily="34" charset="0"/>
-                <a:ea typeface="Amiri" pitchFamily="34" charset="-122"/>
-                <a:cs typeface="Amiri" pitchFamily="34" charset="-120"/>
+                <a:latin typeface="Amiri" pitchFamily="2" charset="-78"/>
+                <a:cs typeface="Amiri" pitchFamily="2" charset="-78"/>
               </a:rPr>
               <a:t>التَّحَدُّثُ</a:t>
             </a:r>
@@ -19642,8 +19301,7 @@
                   <a:srgbClr val="8A93A0"/>
                 </a:solidFill>
                 <a:latin typeface="Calibri" pitchFamily="34" charset="0"/>
-                <a:ea typeface="Calibri" pitchFamily="34" charset="-122"/>
-                <a:cs typeface="Calibri" pitchFamily="34" charset="-120"/>
+                <a:cs typeface="Amiri" pitchFamily="2" charset="-78"/>
               </a:rPr>
               <a:t>Miftah Arabic · Foundation F1 · Arabic Script &amp; Sounds · F1-L11</a:t>
             </a:r>
@@ -19708,8 +19366,7 @@
                   <a:srgbClr val="1B3B6F"/>
                 </a:solidFill>
                 <a:latin typeface="Arial" pitchFamily="34" charset="0"/>
-                <a:ea typeface="Arial" pitchFamily="34" charset="-122"/>
-                <a:cs typeface="Arial" pitchFamily="34" charset="-120"/>
+                <a:cs typeface="Amiri" pitchFamily="2" charset="-78"/>
               </a:rPr>
               <a:t>●</a:t>
             </a:r>
@@ -19747,8 +19404,7 @@
                   <a:srgbClr val="1B3B6F"/>
                 </a:solidFill>
                 <a:latin typeface="Calibri" pitchFamily="34" charset="0"/>
-                <a:ea typeface="Calibri" pitchFamily="34" charset="-122"/>
-                <a:cs typeface="Calibri" pitchFamily="34" charset="-120"/>
+                <a:cs typeface="Amiri" pitchFamily="2" charset="-78"/>
               </a:rPr>
               <a:t>Think</a:t>
             </a:r>
@@ -19764,8 +19420,7 @@
                   <a:srgbClr val="5A6472"/>
                 </a:solidFill>
                 <a:latin typeface="Calibri" pitchFamily="34" charset="0"/>
-                <a:ea typeface="Calibri" pitchFamily="34" charset="-122"/>
-                <a:cs typeface="Calibri" pitchFamily="34" charset="-120"/>
+                <a:cs typeface="Amiri" pitchFamily="2" charset="-78"/>
               </a:rPr>
               <a:t>10 seconds</a:t>
             </a:r>
@@ -19830,8 +19485,7 @@
                   <a:srgbClr val="1B3B6F"/>
                 </a:solidFill>
                 <a:latin typeface="Arial" pitchFamily="34" charset="0"/>
-                <a:ea typeface="Arial" pitchFamily="34" charset="-122"/>
-                <a:cs typeface="Arial" pitchFamily="34" charset="-120"/>
+                <a:cs typeface="Amiri" pitchFamily="2" charset="-78"/>
               </a:rPr>
               <a:t>↔</a:t>
             </a:r>
@@ -19869,8 +19523,7 @@
                   <a:srgbClr val="1B3B6F"/>
                 </a:solidFill>
                 <a:latin typeface="Calibri" pitchFamily="34" charset="0"/>
-                <a:ea typeface="Calibri" pitchFamily="34" charset="-122"/>
-                <a:cs typeface="Calibri" pitchFamily="34" charset="-120"/>
+                <a:cs typeface="Amiri" pitchFamily="2" charset="-78"/>
               </a:rPr>
               <a:t>Rehearse</a:t>
             </a:r>
@@ -19886,8 +19539,7 @@
                   <a:srgbClr val="5A6472"/>
                 </a:solidFill>
                 <a:latin typeface="Calibri" pitchFamily="34" charset="0"/>
-                <a:ea typeface="Calibri" pitchFamily="34" charset="-122"/>
-                <a:cs typeface="Calibri" pitchFamily="34" charset="-120"/>
+                <a:cs typeface="Amiri" pitchFamily="2" charset="-78"/>
               </a:rPr>
               <a:t>muted · 45 s</a:t>
             </a:r>
@@ -19952,8 +19604,7 @@
                   <a:srgbClr val="1B3B6F"/>
                 </a:solidFill>
                 <a:latin typeface="Arial" pitchFamily="34" charset="0"/>
-                <a:ea typeface="Arial" pitchFamily="34" charset="-122"/>
-                <a:cs typeface="Arial" pitchFamily="34" charset="-120"/>
+                <a:cs typeface="Amiri" pitchFamily="2" charset="-78"/>
               </a:rPr>
               <a:t>◎</a:t>
             </a:r>
@@ -19991,8 +19642,7 @@
                   <a:srgbClr val="1B3B6F"/>
                 </a:solidFill>
                 <a:latin typeface="Calibri" pitchFamily="34" charset="0"/>
-                <a:ea typeface="Calibri" pitchFamily="34" charset="-122"/>
-                <a:cs typeface="Calibri" pitchFamily="34" charset="-120"/>
+                <a:cs typeface="Amiri" pitchFamily="2" charset="-78"/>
               </a:rPr>
               <a:t>Pairs share</a:t>
             </a:r>
@@ -20008,8 +19658,7 @@
                   <a:srgbClr val="5A6472"/>
                 </a:solidFill>
                 <a:latin typeface="Calibri" pitchFamily="34" charset="0"/>
-                <a:ea typeface="Calibri" pitchFamily="34" charset="-122"/>
-                <a:cs typeface="Calibri" pitchFamily="34" charset="-120"/>
+                <a:cs typeface="Amiri" pitchFamily="2" charset="-78"/>
               </a:rPr>
               <a:t>open mic</a:t>
             </a:r>
@@ -20074,8 +19723,7 @@
                   <a:srgbClr val="1B3B6F"/>
                 </a:solidFill>
                 <a:latin typeface="Arial" pitchFamily="34" charset="0"/>
-                <a:ea typeface="Arial" pitchFamily="34" charset="-122"/>
-                <a:cs typeface="Arial" pitchFamily="34" charset="-120"/>
+                <a:cs typeface="Amiri" pitchFamily="2" charset="-78"/>
               </a:rPr>
               <a:t>+ ?</a:t>
             </a:r>
@@ -20113,8 +19761,7 @@
                   <a:srgbClr val="1B3B6F"/>
                 </a:solidFill>
                 <a:latin typeface="Calibri" pitchFamily="34" charset="0"/>
-                <a:ea typeface="Calibri" pitchFamily="34" charset="-122"/>
-                <a:cs typeface="Calibri" pitchFamily="34" charset="-120"/>
+                <a:cs typeface="Amiri" pitchFamily="2" charset="-78"/>
               </a:rPr>
               <a:t>Build / ask</a:t>
             </a:r>
@@ -20130,8 +19777,7 @@
                   <a:srgbClr val="5A6472"/>
                 </a:solidFill>
                 <a:latin typeface="Calibri" pitchFamily="34" charset="0"/>
-                <a:ea typeface="Calibri" pitchFamily="34" charset="-122"/>
-                <a:cs typeface="Calibri" pitchFamily="34" charset="-120"/>
+                <a:cs typeface="Amiri" pitchFamily="2" charset="-78"/>
               </a:rPr>
               <a:t>in the chat</a:t>
             </a:r>
@@ -20196,8 +19842,7 @@
                   <a:srgbClr val="1B3B6F"/>
                 </a:solidFill>
                 <a:latin typeface="Arial" pitchFamily="34" charset="0"/>
-                <a:ea typeface="Arial" pitchFamily="34" charset="-122"/>
-                <a:cs typeface="Arial" pitchFamily="34" charset="-120"/>
+                <a:cs typeface="Amiri" pitchFamily="2" charset="-78"/>
               </a:rPr>
               <a:t>↺</a:t>
             </a:r>
@@ -20235,8 +19880,7 @@
                   <a:srgbClr val="1B3B6F"/>
                 </a:solidFill>
                 <a:latin typeface="Calibri" pitchFamily="34" charset="0"/>
-                <a:ea typeface="Calibri" pitchFamily="34" charset="-122"/>
-                <a:cs typeface="Calibri" pitchFamily="34" charset="-120"/>
+                <a:cs typeface="Amiri" pitchFamily="2" charset="-78"/>
               </a:rPr>
               <a:t>Summarise</a:t>
             </a:r>
@@ -20252,8 +19896,7 @@
                   <a:srgbClr val="5A6472"/>
                 </a:solidFill>
                 <a:latin typeface="Calibri" pitchFamily="34" charset="0"/>
-                <a:ea typeface="Calibri" pitchFamily="34" charset="-122"/>
-                <a:cs typeface="Calibri" pitchFamily="34" charset="-120"/>
+                <a:cs typeface="Amiri" pitchFamily="2" charset="-78"/>
               </a:rPr>
               <a:t>he / she …</a:t>
             </a:r>
@@ -20352,8 +19995,7 @@
                   <a:srgbClr val="FFFFFF"/>
                 </a:solidFill>
                 <a:latin typeface="Calibri" pitchFamily="34" charset="0"/>
-                <a:ea typeface="Calibri" pitchFamily="34" charset="-122"/>
-                <a:cs typeface="Calibri" pitchFamily="34" charset="-120"/>
+                <a:cs typeface="Amiri" pitchFamily="2" charset="-78"/>
               </a:rPr>
               <a:t>CORE</a:t>
             </a:r>
@@ -20390,9 +20032,8 @@
                 <a:solidFill>
                   <a:srgbClr val="1B3B6F"/>
                 </a:solidFill>
-                <a:latin typeface="Amiri" pitchFamily="34" charset="0"/>
-                <a:ea typeface="Amiri" pitchFamily="34" charset="-122"/>
-                <a:cs typeface="Amiri" pitchFamily="34" charset="-120"/>
+                <a:latin typeface="Amiri" pitchFamily="2" charset="-78"/>
+                <a:cs typeface="Amiri" pitchFamily="2" charset="-78"/>
               </a:rPr>
               <a:t>أَيْنَ رَأَيْتَ الكِتَابَةَ العَرَبِيَّةَ؟</a:t>
             </a:r>
@@ -20491,8 +20132,7 @@
                   <a:srgbClr val="FFFFFF"/>
                 </a:solidFill>
                 <a:latin typeface="Calibri" pitchFamily="34" charset="0"/>
-                <a:ea typeface="Calibri" pitchFamily="34" charset="-122"/>
-                <a:cs typeface="Calibri" pitchFamily="34" charset="-120"/>
+                <a:cs typeface="Amiri" pitchFamily="2" charset="-78"/>
               </a:rPr>
               <a:t>CORE</a:t>
             </a:r>
@@ -20529,9 +20169,8 @@
                 <a:solidFill>
                   <a:srgbClr val="1B3B6F"/>
                 </a:solidFill>
-                <a:latin typeface="Amiri" pitchFamily="34" charset="0"/>
-                <a:ea typeface="Amiri" pitchFamily="34" charset="-122"/>
-                <a:cs typeface="Amiri" pitchFamily="34" charset="-120"/>
+                <a:latin typeface="Amiri" pitchFamily="2" charset="-78"/>
+                <a:cs typeface="Amiri" pitchFamily="2" charset="-78"/>
               </a:rPr>
               <a:t>اِقْرَأِ اسْمَ بَلَدٍ.</a:t>
             </a:r>
@@ -20630,8 +20269,7 @@
                   <a:srgbClr val="FFFFFF"/>
                 </a:solidFill>
                 <a:latin typeface="Calibri" pitchFamily="34" charset="0"/>
-                <a:ea typeface="Calibri" pitchFamily="34" charset="-122"/>
-                <a:cs typeface="Calibri" pitchFamily="34" charset="-120"/>
+                <a:cs typeface="Amiri" pitchFamily="2" charset="-78"/>
               </a:rPr>
               <a:t>DEVELOP</a:t>
             </a:r>
@@ -20668,9 +20306,8 @@
                 <a:solidFill>
                   <a:srgbClr val="1B3B6F"/>
                 </a:solidFill>
-                <a:latin typeface="Amiri" pitchFamily="34" charset="0"/>
-                <a:ea typeface="Amiri" pitchFamily="34" charset="-122"/>
-                <a:cs typeface="Amiri" pitchFamily="34" charset="-120"/>
+                <a:latin typeface="Amiri" pitchFamily="2" charset="-78"/>
+                <a:cs typeface="Amiri" pitchFamily="2" charset="-78"/>
               </a:rPr>
               <a:t>هَلْ هِيَ العَرَبِيَّةُ؟ كَيْفَ تَعْرِفُ؟</a:t>
             </a:r>
@@ -20769,8 +20406,7 @@
                   <a:srgbClr val="FFFFFF"/>
                 </a:solidFill>
                 <a:latin typeface="Calibri" pitchFamily="34" charset="0"/>
-                <a:ea typeface="Calibri" pitchFamily="34" charset="-122"/>
-                <a:cs typeface="Calibri" pitchFamily="34" charset="-120"/>
+                <a:cs typeface="Amiri" pitchFamily="2" charset="-78"/>
               </a:rPr>
               <a:t>STRETCH</a:t>
             </a:r>
@@ -20807,9 +20443,8 @@
                 <a:solidFill>
                   <a:srgbClr val="1B3B6F"/>
                 </a:solidFill>
-                <a:latin typeface="Amiri" pitchFamily="34" charset="0"/>
-                <a:ea typeface="Amiri" pitchFamily="34" charset="-122"/>
-                <a:cs typeface="Amiri" pitchFamily="34" charset="-120"/>
+                <a:latin typeface="Amiri" pitchFamily="2" charset="-78"/>
+                <a:cs typeface="Amiri" pitchFamily="2" charset="-78"/>
               </a:rPr>
               <a:t>مَا الفَرْقُ بَيْنَ الفُصْحَى وَاللَّهْجَةِ؟</a:t>
             </a:r>
@@ -20881,8 +20516,7 @@
                   <a:srgbClr val="1B3B6F"/>
                 </a:solidFill>
                 <a:latin typeface="Calibri" pitchFamily="34" charset="0"/>
-                <a:ea typeface="Calibri" pitchFamily="34" charset="-122"/>
-                <a:cs typeface="Calibri" pitchFamily="34" charset="-120"/>
+                <a:cs typeface="Amiri" pitchFamily="2" charset="-78"/>
               </a:rPr>
               <a:t>SENTENCE STEMS</a:t>
             </a:r>
@@ -20947,8 +20581,7 @@
                   <a:srgbClr val="FFFFFF"/>
                 </a:solidFill>
                 <a:latin typeface="Calibri" pitchFamily="34" charset="0"/>
-                <a:ea typeface="Calibri" pitchFamily="34" charset="-122"/>
-                <a:cs typeface="Calibri" pitchFamily="34" charset="-120"/>
+                <a:cs typeface="Amiri" pitchFamily="2" charset="-78"/>
               </a:rPr>
               <a:t>CORE</a:t>
             </a:r>
@@ -20985,9 +20618,8 @@
                 <a:solidFill>
                   <a:srgbClr val="1D5FBF"/>
                 </a:solidFill>
-                <a:latin typeface="Amiri" pitchFamily="34" charset="0"/>
-                <a:ea typeface="Amiri" pitchFamily="34" charset="-122"/>
-                <a:cs typeface="Amiri" pitchFamily="34" charset="-120"/>
+                <a:latin typeface="Amiri" pitchFamily="2" charset="-78"/>
+                <a:cs typeface="Amiri" pitchFamily="2" charset="-78"/>
               </a:rPr>
               <a:t>رَأَيْتُهَا عَلَى ___ .</a:t>
             </a:r>
@@ -21052,8 +20684,7 @@
                   <a:srgbClr val="FFFFFF"/>
                 </a:solidFill>
                 <a:latin typeface="Calibri" pitchFamily="34" charset="0"/>
-                <a:ea typeface="Calibri" pitchFamily="34" charset="-122"/>
-                <a:cs typeface="Calibri" pitchFamily="34" charset="-120"/>
+                <a:cs typeface="Amiri" pitchFamily="2" charset="-78"/>
               </a:rPr>
               <a:t>DEVELOP</a:t>
             </a:r>
@@ -21090,9 +20721,8 @@
                 <a:solidFill>
                   <a:srgbClr val="1F2A37"/>
                 </a:solidFill>
-                <a:latin typeface="Amiri" pitchFamily="34" charset="0"/>
-                <a:ea typeface="Amiri" pitchFamily="34" charset="-122"/>
-                <a:cs typeface="Amiri" pitchFamily="34" charset="-120"/>
+                <a:latin typeface="Amiri" pitchFamily="2" charset="-78"/>
+                <a:cs typeface="Amiri" pitchFamily="2" charset="-78"/>
               </a:rPr>
               <a:t>أَنَا مُتَأَكِّدٌ / لَسْتُ مُتَأَكِّدًا .</a:t>
             </a:r>
@@ -21157,8 +20787,7 @@
                   <a:srgbClr val="FFFFFF"/>
                 </a:solidFill>
                 <a:latin typeface="Calibri" pitchFamily="34" charset="0"/>
-                <a:ea typeface="Calibri" pitchFamily="34" charset="-122"/>
-                <a:cs typeface="Calibri" pitchFamily="34" charset="-120"/>
+                <a:cs typeface="Amiri" pitchFamily="2" charset="-78"/>
               </a:rPr>
               <a:t>STRETCH</a:t>
             </a:r>
@@ -21195,9 +20824,8 @@
                 <a:solidFill>
                   <a:srgbClr val="1F2A37"/>
                 </a:solidFill>
-                <a:latin typeface="Amiri" pitchFamily="34" charset="0"/>
-                <a:ea typeface="Amiri" pitchFamily="34" charset="-122"/>
-                <a:cs typeface="Amiri" pitchFamily="34" charset="-120"/>
+                <a:latin typeface="Amiri" pitchFamily="2" charset="-78"/>
+                <a:cs typeface="Amiri" pitchFamily="2" charset="-78"/>
               </a:rPr>
               <a:t>الفُصْحَى لِـ ___ ، وَاللَّهْجَةُ لِـ ___ .</a:t>
             </a:r>
@@ -21262,8 +20890,7 @@
                   <a:srgbClr val="FFFFFF"/>
                 </a:solidFill>
                 <a:latin typeface="Calibri" pitchFamily="34" charset="0"/>
-                <a:ea typeface="Calibri" pitchFamily="34" charset="-122"/>
-                <a:cs typeface="Calibri" pitchFamily="34" charset="-120"/>
+                <a:cs typeface="Amiri" pitchFamily="2" charset="-78"/>
               </a:rPr>
               <a:t>↺ SUM UP</a:t>
             </a:r>
@@ -21300,9 +20927,8 @@
                 <a:solidFill>
                   <a:srgbClr val="1F2A37"/>
                 </a:solidFill>
-                <a:latin typeface="Amiri" pitchFamily="34" charset="0"/>
-                <a:ea typeface="Amiri" pitchFamily="34" charset="-122"/>
-                <a:cs typeface="Amiri" pitchFamily="34" charset="-120"/>
+                <a:latin typeface="Amiri" pitchFamily="2" charset="-78"/>
+                <a:cs typeface="Amiri" pitchFamily="2" charset="-78"/>
               </a:rPr>
               <a:t>رَأَى / رَأَتْ ___ .</a:t>
             </a:r>
@@ -21374,8 +21000,7 @@
                   <a:srgbClr val="1E6B52"/>
                 </a:solidFill>
                 <a:latin typeface="Calibri" pitchFamily="34" charset="0"/>
-                <a:ea typeface="Calibri" pitchFamily="34" charset="-122"/>
-                <a:cs typeface="Calibri" pitchFamily="34" charset="-120"/>
+                <a:cs typeface="Amiri" pitchFamily="2" charset="-78"/>
               </a:rPr>
               <a:t>MODEL (WEBSITE)</a:t>
             </a:r>
@@ -21438,8 +21063,7 @@
                   <a:srgbClr val="FFFFFF"/>
                 </a:solidFill>
                 <a:latin typeface="Calibri" pitchFamily="34" charset="0"/>
-                <a:ea typeface="Calibri" pitchFamily="34" charset="-122"/>
-                <a:cs typeface="Calibri" pitchFamily="34" charset="-120"/>
+                <a:cs typeface="Amiri" pitchFamily="2" charset="-78"/>
               </a:rPr>
               <a:t>A</a:t>
             </a:r>
@@ -21476,9 +21100,8 @@
                 <a:solidFill>
                   <a:srgbClr val="1F2A37"/>
                 </a:solidFill>
-                <a:latin typeface="Amiri" pitchFamily="34" charset="0"/>
-                <a:ea typeface="Amiri" pitchFamily="34" charset="-122"/>
-                <a:cs typeface="Amiri" pitchFamily="34" charset="-120"/>
+                <a:latin typeface="Amiri" pitchFamily="2" charset="-78"/>
+                <a:cs typeface="Amiri" pitchFamily="2" charset="-78"/>
               </a:rPr>
               <a:t>أَيْنَ رَأَيْتَ الكِتَابَةَ العَرَبِيَّةَ؟</a:t>
             </a:r>
@@ -21516,8 +21139,7 @@
                   <a:srgbClr val="5A6472"/>
                 </a:solidFill>
                 <a:latin typeface="Calibri" pitchFamily="34" charset="0"/>
-                <a:ea typeface="Calibri" pitchFamily="34" charset="-122"/>
-                <a:cs typeface="Calibri" pitchFamily="34" charset="-120"/>
+                <a:cs typeface="Amiri" pitchFamily="2" charset="-78"/>
               </a:rPr>
               <a:t>Where did you see Arabic writing?</a:t>
             </a:r>
@@ -21580,8 +21202,7 @@
                   <a:srgbClr val="FFFFFF"/>
                 </a:solidFill>
                 <a:latin typeface="Calibri" pitchFamily="34" charset="0"/>
-                <a:ea typeface="Calibri" pitchFamily="34" charset="-122"/>
-                <a:cs typeface="Calibri" pitchFamily="34" charset="-120"/>
+                <a:cs typeface="Amiri" pitchFamily="2" charset="-78"/>
               </a:rPr>
               <a:t>B</a:t>
             </a:r>
@@ -21618,9 +21239,8 @@
                 <a:solidFill>
                   <a:srgbClr val="1F2A37"/>
                 </a:solidFill>
-                <a:latin typeface="Amiri" pitchFamily="34" charset="0"/>
-                <a:ea typeface="Amiri" pitchFamily="34" charset="-122"/>
-                <a:cs typeface="Amiri" pitchFamily="34" charset="-120"/>
+                <a:latin typeface="Amiri" pitchFamily="2" charset="-78"/>
+                <a:cs typeface="Amiri" pitchFamily="2" charset="-78"/>
               </a:rPr>
               <a:t>رَأَيْتُهَا عَلَى مَطْعَمٍ.</a:t>
             </a:r>
@@ -21658,8 +21278,7 @@
                   <a:srgbClr val="5A6472"/>
                 </a:solidFill>
                 <a:latin typeface="Calibri" pitchFamily="34" charset="0"/>
-                <a:ea typeface="Calibri" pitchFamily="34" charset="-122"/>
-                <a:cs typeface="Calibri" pitchFamily="34" charset="-120"/>
+                <a:cs typeface="Amiri" pitchFamily="2" charset="-78"/>
               </a:rPr>
               <a:t>I saw it on a restaurant.</a:t>
             </a:r>
@@ -21697,8 +21316,7 @@
                   <a:srgbClr val="8A93A0"/>
                 </a:solidFill>
                 <a:latin typeface="Calibri" pitchFamily="34" charset="0"/>
-                <a:ea typeface="Calibri" pitchFamily="34" charset="-122"/>
-                <a:cs typeface="Calibri" pitchFamily="34" charset="-120"/>
+                <a:cs typeface="Amiri" pitchFamily="2" charset="-78"/>
               </a:rPr>
               <a:t>19 / 25</a:t>
             </a:r>
@@ -21792,9 +21410,8 @@
                 <a:solidFill>
                   <a:srgbClr val="D4AF37"/>
                 </a:solidFill>
-                <a:latin typeface="Amiri" pitchFamily="34" charset="0"/>
-                <a:ea typeface="Amiri" pitchFamily="34" charset="-122"/>
-                <a:cs typeface="Amiri" pitchFamily="34" charset="-120"/>
+                <a:latin typeface="Amiri" pitchFamily="2" charset="-78"/>
+                <a:cs typeface="Amiri" pitchFamily="2" charset="-78"/>
               </a:rPr>
               <a:t>م</a:t>
             </a:r>
@@ -21832,8 +21449,7 @@
                   <a:srgbClr val="1B3B6F"/>
                 </a:solidFill>
                 <a:latin typeface="Cambria" pitchFamily="34" charset="0"/>
-                <a:ea typeface="Cambria" pitchFamily="34" charset="-122"/>
-                <a:cs typeface="Cambria" pitchFamily="34" charset="-120"/>
+                <a:cs typeface="Amiri" pitchFamily="2" charset="-78"/>
               </a:rPr>
               <a:t>Al Madina Online School</a:t>
             </a:r>
@@ -21871,8 +21487,7 @@
                   <a:srgbClr val="8A6D1E"/>
                 </a:solidFill>
                 <a:latin typeface="Calibri" pitchFamily="34" charset="0"/>
-                <a:ea typeface="Calibri" pitchFamily="34" charset="-122"/>
-                <a:cs typeface="Calibri" pitchFamily="34" charset="-120"/>
+                <a:cs typeface="Amiri" pitchFamily="2" charset="-78"/>
               </a:rPr>
               <a:t>ARABIC DEPARTMENT · MIFTAH ARABIC · IGCSE 0544</a:t>
             </a:r>
@@ -21937,8 +21552,7 @@
                   <a:srgbClr val="FFFFFF"/>
                 </a:solidFill>
                 <a:latin typeface="Calibri" pitchFamily="34" charset="0"/>
-                <a:ea typeface="Calibri" pitchFamily="34" charset="-122"/>
-                <a:cs typeface="Calibri" pitchFamily="34" charset="-120"/>
+                <a:cs typeface="Amiri" pitchFamily="2" charset="-78"/>
               </a:rPr>
               <a:t>F1-L11 · Arabic around us</a:t>
             </a:r>
@@ -22003,8 +21617,7 @@
                   <a:srgbClr val="FFFFFF"/>
                 </a:solidFill>
                 <a:latin typeface="Calibri" pitchFamily="34" charset="0"/>
-                <a:ea typeface="Calibri" pitchFamily="34" charset="-122"/>
-                <a:cs typeface="Calibri" pitchFamily="34" charset="-120"/>
+                <a:cs typeface="Amiri" pitchFamily="2" charset="-78"/>
               </a:rPr>
               <a:t>WELCOME · 1 MIN</a:t>
             </a:r>
@@ -22042,8 +21655,7 @@
                   <a:srgbClr val="5A6472"/>
                 </a:solidFill>
                 <a:latin typeface="Calibri" pitchFamily="34" charset="0"/>
-                <a:ea typeface="Calibri" pitchFamily="34" charset="-122"/>
-                <a:cs typeface="Calibri" pitchFamily="34" charset="-120"/>
+                <a:cs typeface="Amiri" pitchFamily="2" charset="-78"/>
               </a:rPr>
               <a:t>BEFORE WE BEGIN</a:t>
             </a:r>
@@ -22081,8 +21693,7 @@
                   <a:srgbClr val="1B3B6F"/>
                 </a:solidFill>
                 <a:latin typeface="Cambria" pitchFamily="34" charset="0"/>
-                <a:ea typeface="Cambria" pitchFamily="34" charset="-122"/>
-                <a:cs typeface="Cambria" pitchFamily="34" charset="-120"/>
+                <a:cs typeface="Amiri" pitchFamily="2" charset="-78"/>
               </a:rPr>
               <a:t>Our online classroom</a:t>
             </a:r>
@@ -22119,9 +21730,8 @@
                 <a:solidFill>
                   <a:srgbClr val="8A6D1E"/>
                 </a:solidFill>
-                <a:latin typeface="Amiri" pitchFamily="34" charset="0"/>
-                <a:ea typeface="Amiri" pitchFamily="34" charset="-122"/>
-                <a:cs typeface="Amiri" pitchFamily="34" charset="-120"/>
+                <a:latin typeface="Amiri" pitchFamily="2" charset="-78"/>
+                <a:cs typeface="Amiri" pitchFamily="2" charset="-78"/>
               </a:rPr>
               <a:t>آدَابُ الصَّفِّ</a:t>
             </a:r>
@@ -22159,8 +21769,7 @@
                   <a:srgbClr val="8A93A0"/>
                 </a:solidFill>
                 <a:latin typeface="Calibri" pitchFamily="34" charset="0"/>
-                <a:ea typeface="Calibri" pitchFamily="34" charset="-122"/>
-                <a:cs typeface="Calibri" pitchFamily="34" charset="-120"/>
+                <a:cs typeface="Amiri" pitchFamily="2" charset="-78"/>
               </a:rPr>
               <a:t>Miftah Arabic · Foundation F1 · Arabic Script &amp; Sounds · F1-L11</a:t>
             </a:r>
@@ -22281,8 +21890,7 @@
                   <a:srgbClr val="1B3B6F"/>
                 </a:solidFill>
                 <a:latin typeface="Calibri" pitchFamily="34" charset="0"/>
-                <a:ea typeface="Calibri" pitchFamily="34" charset="-122"/>
-                <a:cs typeface="Calibri" pitchFamily="34" charset="-120"/>
+                <a:cs typeface="Amiri" pitchFamily="2" charset="-78"/>
               </a:rPr>
               <a:t>Camera on</a:t>
             </a:r>
@@ -22298,8 +21906,7 @@
                   <a:srgbClr val="5A6472"/>
                 </a:solidFill>
                 <a:latin typeface="Calibri" pitchFamily="34" charset="0"/>
-                <a:ea typeface="Calibri" pitchFamily="34" charset="-122"/>
-                <a:cs typeface="Calibri" pitchFamily="34" charset="-120"/>
+                <a:cs typeface="Amiri" pitchFamily="2" charset="-78"/>
               </a:rPr>
               <a:t>So I can see you learning and help you quickly.</a:t>
             </a:r>
@@ -22420,8 +22027,7 @@
                   <a:srgbClr val="1B3B6F"/>
                 </a:solidFill>
                 <a:latin typeface="Calibri" pitchFamily="34" charset="0"/>
-                <a:ea typeface="Calibri" pitchFamily="34" charset="-122"/>
-                <a:cs typeface="Calibri" pitchFamily="34" charset="-120"/>
+                <a:cs typeface="Amiri" pitchFamily="2" charset="-78"/>
               </a:rPr>
               <a:t>Mic muted</a:t>
             </a:r>
@@ -22437,8 +22043,7 @@
                   <a:srgbClr val="5A6472"/>
                 </a:solidFill>
                 <a:latin typeface="Calibri" pitchFamily="34" charset="0"/>
-                <a:ea typeface="Calibri" pitchFamily="34" charset="-122"/>
-                <a:cs typeface="Calibri" pitchFamily="34" charset="-120"/>
+                <a:cs typeface="Amiri" pitchFamily="2" charset="-78"/>
               </a:rPr>
               <a:t>Unmute only when invited to speak.</a:t>
             </a:r>
@@ -22559,8 +22164,7 @@
                   <a:srgbClr val="1B3B6F"/>
                 </a:solidFill>
                 <a:latin typeface="Calibri" pitchFamily="34" charset="0"/>
-                <a:ea typeface="Calibri" pitchFamily="34" charset="-122"/>
-                <a:cs typeface="Calibri" pitchFamily="34" charset="-120"/>
+                <a:cs typeface="Amiri" pitchFamily="2" charset="-78"/>
               </a:rPr>
               <a:t>Chat for learning</a:t>
             </a:r>
@@ -22576,8 +22180,7 @@
                   <a:srgbClr val="5A6472"/>
                 </a:solidFill>
                 <a:latin typeface="Calibri" pitchFamily="34" charset="0"/>
-                <a:ea typeface="Calibri" pitchFamily="34" charset="-122"/>
-                <a:cs typeface="Calibri" pitchFamily="34" charset="-120"/>
+                <a:cs typeface="Amiri" pitchFamily="2" charset="-78"/>
               </a:rPr>
               <a:t>Answers, questions and Arabic only.</a:t>
             </a:r>
@@ -22698,8 +22301,7 @@
                   <a:srgbClr val="1B3B6F"/>
                 </a:solidFill>
                 <a:latin typeface="Calibri" pitchFamily="34" charset="0"/>
-                <a:ea typeface="Calibri" pitchFamily="34" charset="-122"/>
-                <a:cs typeface="Calibri" pitchFamily="34" charset="-120"/>
+                <a:cs typeface="Amiri" pitchFamily="2" charset="-78"/>
               </a:rPr>
               <a:t>Raise your hand</a:t>
             </a:r>
@@ -22715,8 +22317,7 @@
                   <a:srgbClr val="5A6472"/>
                 </a:solidFill>
                 <a:latin typeface="Calibri" pitchFamily="34" charset="0"/>
-                <a:ea typeface="Calibri" pitchFamily="34" charset="-122"/>
-                <a:cs typeface="Calibri" pitchFamily="34" charset="-120"/>
+                <a:cs typeface="Amiri" pitchFamily="2" charset="-78"/>
               </a:rPr>
               <a:t>Use the hand button to ask for help.</a:t>
             </a:r>
@@ -22788,8 +22389,7 @@
                   <a:srgbClr val="1B3B6F"/>
                 </a:solidFill>
                 <a:latin typeface="Calibri" pitchFamily="34" charset="0"/>
-                <a:ea typeface="Calibri" pitchFamily="34" charset="-122"/>
-                <a:cs typeface="Calibri" pitchFamily="34" charset="-120"/>
+                <a:cs typeface="Amiri" pitchFamily="2" charset="-78"/>
               </a:rPr>
               <a:t>HOW WE TALK — THE ORACY CODE</a:t>
             </a:r>
@@ -22852,8 +22452,7 @@
                   <a:srgbClr val="D4AF37"/>
                 </a:solidFill>
                 <a:latin typeface="Arial" pitchFamily="34" charset="0"/>
-                <a:ea typeface="Arial" pitchFamily="34" charset="-122"/>
-                <a:cs typeface="Arial" pitchFamily="34" charset="-120"/>
+                <a:cs typeface="Amiri" pitchFamily="2" charset="-78"/>
               </a:rPr>
               <a:t>●</a:t>
             </a:r>
@@ -22891,8 +22490,7 @@
                   <a:srgbClr val="1B3B6F"/>
                 </a:solidFill>
                 <a:latin typeface="Calibri" pitchFamily="34" charset="0"/>
-                <a:ea typeface="Calibri" pitchFamily="34" charset="-122"/>
-                <a:cs typeface="Calibri" pitchFamily="34" charset="-120"/>
+                <a:cs typeface="Amiri" pitchFamily="2" charset="-78"/>
               </a:rPr>
               <a:t>Think</a:t>
             </a:r>
@@ -22908,8 +22506,7 @@
                   <a:srgbClr val="5A6472"/>
                 </a:solidFill>
                 <a:latin typeface="Calibri" pitchFamily="34" charset="0"/>
-                <a:ea typeface="Calibri" pitchFamily="34" charset="-122"/>
-                <a:cs typeface="Calibri" pitchFamily="34" charset="-120"/>
+                <a:cs typeface="Amiri" pitchFamily="2" charset="-78"/>
               </a:rPr>
               <a:t>silent preparation</a:t>
             </a:r>
@@ -22972,8 +22569,7 @@
                   <a:srgbClr val="D4AF37"/>
                 </a:solidFill>
                 <a:latin typeface="Arial" pitchFamily="34" charset="0"/>
-                <a:ea typeface="Arial" pitchFamily="34" charset="-122"/>
-                <a:cs typeface="Arial" pitchFamily="34" charset="-120"/>
+                <a:cs typeface="Amiri" pitchFamily="2" charset="-78"/>
               </a:rPr>
               <a:t>↔</a:t>
             </a:r>
@@ -23011,8 +22607,7 @@
                   <a:srgbClr val="1B3B6F"/>
                 </a:solidFill>
                 <a:latin typeface="Calibri" pitchFamily="34" charset="0"/>
-                <a:ea typeface="Calibri" pitchFamily="34" charset="-122"/>
-                <a:cs typeface="Calibri" pitchFamily="34" charset="-120"/>
+                <a:cs typeface="Amiri" pitchFamily="2" charset="-78"/>
               </a:rPr>
               <a:t>Rehearse</a:t>
             </a:r>
@@ -23028,8 +22623,7 @@
                   <a:srgbClr val="5A6472"/>
                 </a:solidFill>
                 <a:latin typeface="Calibri" pitchFamily="34" charset="0"/>
-                <a:ea typeface="Calibri" pitchFamily="34" charset="-122"/>
-                <a:cs typeface="Calibri" pitchFamily="34" charset="-120"/>
+                <a:cs typeface="Amiri" pitchFamily="2" charset="-78"/>
               </a:rPr>
               <a:t>both partners speak</a:t>
             </a:r>
@@ -23092,8 +22686,7 @@
                   <a:srgbClr val="D4AF37"/>
                 </a:solidFill>
                 <a:latin typeface="Arial" pitchFamily="34" charset="0"/>
-                <a:ea typeface="Arial" pitchFamily="34" charset="-122"/>
-                <a:cs typeface="Arial" pitchFamily="34" charset="-120"/>
+                <a:cs typeface="Amiri" pitchFamily="2" charset="-78"/>
               </a:rPr>
               <a:t>+</a:t>
             </a:r>
@@ -23131,8 +22724,7 @@
                   <a:srgbClr val="1B3B6F"/>
                 </a:solidFill>
                 <a:latin typeface="Calibri" pitchFamily="34" charset="0"/>
-                <a:ea typeface="Calibri" pitchFamily="34" charset="-122"/>
-                <a:cs typeface="Calibri" pitchFamily="34" charset="-120"/>
+                <a:cs typeface="Amiri" pitchFamily="2" charset="-78"/>
               </a:rPr>
               <a:t>Build</a:t>
             </a:r>
@@ -23148,8 +22740,7 @@
                   <a:srgbClr val="5A6472"/>
                 </a:solidFill>
                 <a:latin typeface="Calibri" pitchFamily="34" charset="0"/>
-                <a:ea typeface="Calibri" pitchFamily="34" charset="-122"/>
-                <a:cs typeface="Calibri" pitchFamily="34" charset="-120"/>
+                <a:cs typeface="Amiri" pitchFamily="2" charset="-78"/>
               </a:rPr>
               <a:t>add a reason or detail</a:t>
             </a:r>
@@ -23212,8 +22803,7 @@
                   <a:srgbClr val="D4AF37"/>
                 </a:solidFill>
                 <a:latin typeface="Arial" pitchFamily="34" charset="0"/>
-                <a:ea typeface="Arial" pitchFamily="34" charset="-122"/>
-                <a:cs typeface="Arial" pitchFamily="34" charset="-120"/>
+                <a:cs typeface="Amiri" pitchFamily="2" charset="-78"/>
               </a:rPr>
               <a:t>?</a:t>
             </a:r>
@@ -23251,8 +22841,7 @@
                   <a:srgbClr val="1B3B6F"/>
                 </a:solidFill>
                 <a:latin typeface="Calibri" pitchFamily="34" charset="0"/>
-                <a:ea typeface="Calibri" pitchFamily="34" charset="-122"/>
-                <a:cs typeface="Calibri" pitchFamily="34" charset="-120"/>
+                <a:cs typeface="Amiri" pitchFamily="2" charset="-78"/>
               </a:rPr>
               <a:t>Challenge</a:t>
             </a:r>
@@ -23268,8 +22857,7 @@
                   <a:srgbClr val="5A6472"/>
                 </a:solidFill>
                 <a:latin typeface="Calibri" pitchFamily="34" charset="0"/>
-                <a:ea typeface="Calibri" pitchFamily="34" charset="-122"/>
-                <a:cs typeface="Calibri" pitchFamily="34" charset="-120"/>
+                <a:cs typeface="Amiri" pitchFamily="2" charset="-78"/>
               </a:rPr>
               <a:t>question respectfully</a:t>
             </a:r>
@@ -23332,8 +22920,7 @@
                   <a:srgbClr val="D4AF37"/>
                 </a:solidFill>
                 <a:latin typeface="Arial" pitchFamily="34" charset="0"/>
-                <a:ea typeface="Arial" pitchFamily="34" charset="-122"/>
-                <a:cs typeface="Arial" pitchFamily="34" charset="-120"/>
+                <a:cs typeface="Amiri" pitchFamily="2" charset="-78"/>
               </a:rPr>
               <a:t>◎</a:t>
             </a:r>
@@ -23371,8 +22958,7 @@
                   <a:srgbClr val="1B3B6F"/>
                 </a:solidFill>
                 <a:latin typeface="Calibri" pitchFamily="34" charset="0"/>
-                <a:ea typeface="Calibri" pitchFamily="34" charset="-122"/>
-                <a:cs typeface="Calibri" pitchFamily="34" charset="-120"/>
+                <a:cs typeface="Amiri" pitchFamily="2" charset="-78"/>
               </a:rPr>
               <a:t>Share</a:t>
             </a:r>
@@ -23388,8 +22974,7 @@
                   <a:srgbClr val="5A6472"/>
                 </a:solidFill>
                 <a:latin typeface="Calibri" pitchFamily="34" charset="0"/>
-                <a:ea typeface="Calibri" pitchFamily="34" charset="-122"/>
-                <a:cs typeface="Calibri" pitchFamily="34" charset="-120"/>
+                <a:cs typeface="Amiri" pitchFamily="2" charset="-78"/>
               </a:rPr>
               <a:t>anyone may be invited</a:t>
             </a:r>
@@ -23452,8 +23037,7 @@
                   <a:srgbClr val="D4AF37"/>
                 </a:solidFill>
                 <a:latin typeface="Arial" pitchFamily="34" charset="0"/>
-                <a:ea typeface="Arial" pitchFamily="34" charset="-122"/>
-                <a:cs typeface="Arial" pitchFamily="34" charset="-120"/>
+                <a:cs typeface="Amiri" pitchFamily="2" charset="-78"/>
               </a:rPr>
               <a:t>↺</a:t>
             </a:r>
@@ -23491,8 +23075,7 @@
                   <a:srgbClr val="1B3B6F"/>
                 </a:solidFill>
                 <a:latin typeface="Calibri" pitchFamily="34" charset="0"/>
-                <a:ea typeface="Calibri" pitchFamily="34" charset="-122"/>
-                <a:cs typeface="Calibri" pitchFamily="34" charset="-120"/>
+                <a:cs typeface="Amiri" pitchFamily="2" charset="-78"/>
               </a:rPr>
               <a:t>Summarise</a:t>
             </a:r>
@@ -23508,8 +23091,7 @@
                   <a:srgbClr val="5A6472"/>
                 </a:solidFill>
                 <a:latin typeface="Calibri" pitchFamily="34" charset="0"/>
-                <a:ea typeface="Calibri" pitchFamily="34" charset="-122"/>
-                <a:cs typeface="Calibri" pitchFamily="34" charset="-120"/>
+                <a:cs typeface="Amiri" pitchFamily="2" charset="-78"/>
               </a:rPr>
               <a:t>say it more precisely</a:t>
             </a:r>
@@ -23547,8 +23129,7 @@
                   <a:srgbClr val="8A6D1E"/>
                 </a:solidFill>
                 <a:latin typeface="Calibri" pitchFamily="34" charset="0"/>
-                <a:ea typeface="Calibri" pitchFamily="34" charset="-122"/>
-                <a:cs typeface="Calibri" pitchFamily="34" charset="-120"/>
+                <a:cs typeface="Amiri" pitchFamily="2" charset="-78"/>
               </a:rPr>
               <a:t>I will always give you thinking and practice time before I ask anyone. Reading aloud is by invitation — you can always say “pass, please come back to me”.</a:t>
             </a:r>
@@ -23586,8 +23167,7 @@
                   <a:srgbClr val="8A93A0"/>
                 </a:solidFill>
                 <a:latin typeface="Calibri" pitchFamily="34" charset="0"/>
-                <a:ea typeface="Calibri" pitchFamily="34" charset="-122"/>
-                <a:cs typeface="Calibri" pitchFamily="34" charset="-120"/>
+                <a:cs typeface="Amiri" pitchFamily="2" charset="-78"/>
               </a:rPr>
               <a:t>2 / 25</a:t>
             </a:r>
@@ -23681,9 +23261,8 @@
                 <a:solidFill>
                   <a:srgbClr val="D4AF37"/>
                 </a:solidFill>
-                <a:latin typeface="Amiri" pitchFamily="34" charset="0"/>
-                <a:ea typeface="Amiri" pitchFamily="34" charset="-122"/>
-                <a:cs typeface="Amiri" pitchFamily="34" charset="-120"/>
+                <a:latin typeface="Amiri" pitchFamily="2" charset="-78"/>
+                <a:cs typeface="Amiri" pitchFamily="2" charset="-78"/>
               </a:rPr>
               <a:t>م</a:t>
             </a:r>
@@ -23721,8 +23300,7 @@
                   <a:srgbClr val="1B3B6F"/>
                 </a:solidFill>
                 <a:latin typeface="Cambria" pitchFamily="34" charset="0"/>
-                <a:ea typeface="Cambria" pitchFamily="34" charset="-122"/>
-                <a:cs typeface="Cambria" pitchFamily="34" charset="-120"/>
+                <a:cs typeface="Amiri" pitchFamily="2" charset="-78"/>
               </a:rPr>
               <a:t>Al Madina Online School</a:t>
             </a:r>
@@ -23760,8 +23338,7 @@
                   <a:srgbClr val="8A6D1E"/>
                 </a:solidFill>
                 <a:latin typeface="Calibri" pitchFamily="34" charset="0"/>
-                <a:ea typeface="Calibri" pitchFamily="34" charset="-122"/>
-                <a:cs typeface="Calibri" pitchFamily="34" charset="-120"/>
+                <a:cs typeface="Amiri" pitchFamily="2" charset="-78"/>
               </a:rPr>
               <a:t>ARABIC DEPARTMENT · MIFTAH ARABIC · IGCSE 0544</a:t>
             </a:r>
@@ -23826,8 +23403,7 @@
                   <a:srgbClr val="FFFFFF"/>
                 </a:solidFill>
                 <a:latin typeface="Calibri" pitchFamily="34" charset="0"/>
-                <a:ea typeface="Calibri" pitchFamily="34" charset="-122"/>
-                <a:cs typeface="Calibri" pitchFamily="34" charset="-120"/>
+                <a:cs typeface="Amiri" pitchFamily="2" charset="-78"/>
               </a:rPr>
               <a:t>F1-L11 · Arabic around us</a:t>
             </a:r>
@@ -23892,8 +23468,7 @@
                   <a:srgbClr val="FFFFFF"/>
                 </a:solidFill>
                 <a:latin typeface="Calibri" pitchFamily="34" charset="0"/>
-                <a:ea typeface="Calibri" pitchFamily="34" charset="-122"/>
-                <a:cs typeface="Calibri" pitchFamily="34" charset="-120"/>
+                <a:cs typeface="Amiri" pitchFamily="2" charset="-78"/>
               </a:rPr>
               <a:t>FEEDBACK · 2 MIN</a:t>
             </a:r>
@@ -23931,8 +23506,7 @@
                   <a:srgbClr val="8A6D1E"/>
                 </a:solidFill>
                 <a:latin typeface="Calibri" pitchFamily="34" charset="0"/>
-                <a:ea typeface="Calibri" pitchFamily="34" charset="-122"/>
-                <a:cs typeface="Calibri" pitchFamily="34" charset="-120"/>
+                <a:cs typeface="Amiri" pitchFamily="2" charset="-78"/>
               </a:rPr>
               <a:t>FEEDBACK · CAREFUL CLAIMS</a:t>
             </a:r>
@@ -23970,8 +23544,7 @@
                   <a:srgbClr val="1B3B6F"/>
                 </a:solidFill>
                 <a:latin typeface="Cambria" pitchFamily="34" charset="0"/>
-                <a:ea typeface="Cambria" pitchFamily="34" charset="-122"/>
-                <a:cs typeface="Cambria" pitchFamily="34" charset="-120"/>
+                <a:cs typeface="Amiri" pitchFamily="2" charset="-78"/>
               </a:rPr>
               <a:t>Strong claims and careful claims</a:t>
             </a:r>
@@ -24008,9 +23581,8 @@
                 <a:solidFill>
                   <a:srgbClr val="8A6D1E"/>
                 </a:solidFill>
-                <a:latin typeface="Amiri" pitchFamily="34" charset="0"/>
-                <a:ea typeface="Amiri" pitchFamily="34" charset="-122"/>
-                <a:cs typeface="Amiri" pitchFamily="34" charset="-120"/>
+                <a:latin typeface="Amiri" pitchFamily="2" charset="-78"/>
+                <a:cs typeface="Amiri" pitchFamily="2" charset="-78"/>
               </a:rPr>
               <a:t>الدَّلِيلُ أَوَّلًا</a:t>
             </a:r>
@@ -24048,8 +23620,7 @@
                   <a:srgbClr val="8A93A0"/>
                 </a:solidFill>
                 <a:latin typeface="Calibri" pitchFamily="34" charset="0"/>
-                <a:ea typeface="Calibri" pitchFamily="34" charset="-122"/>
-                <a:cs typeface="Calibri" pitchFamily="34" charset="-120"/>
+                <a:cs typeface="Amiri" pitchFamily="2" charset="-78"/>
               </a:rPr>
               <a:t>Miftah Arabic · Foundation F1 · Arabic Script &amp; Sounds · F1-L11</a:t>
             </a:r>
@@ -24112,8 +23683,7 @@
                   <a:srgbClr val="FFFFFF"/>
                 </a:solidFill>
                 <a:latin typeface="Calibri" pitchFamily="34" charset="0"/>
-                <a:ea typeface="Calibri" pitchFamily="34" charset="-122"/>
-                <a:cs typeface="Calibri" pitchFamily="34" charset="-120"/>
+                <a:cs typeface="Amiri" pitchFamily="2" charset="-78"/>
               </a:rPr>
               <a:t>Risky claim</a:t>
             </a:r>
@@ -24151,8 +23721,7 @@
                   <a:srgbClr val="FFFFFF"/>
                 </a:solidFill>
                 <a:latin typeface="Calibri" pitchFamily="34" charset="0"/>
-                <a:ea typeface="Calibri" pitchFamily="34" charset="-122"/>
-                <a:cs typeface="Calibri" pitchFamily="34" charset="-120"/>
+                <a:cs typeface="Amiri" pitchFamily="2" charset="-78"/>
               </a:rPr>
               <a:t>Stronger, careful claim</a:t>
             </a:r>
@@ -24217,8 +23786,7 @@
                   <a:srgbClr val="5A6472"/>
                 </a:solidFill>
                 <a:latin typeface="Calibri" pitchFamily="34" charset="0"/>
-                <a:ea typeface="Calibri" pitchFamily="34" charset="-122"/>
-                <a:cs typeface="Calibri" pitchFamily="34" charset="-120"/>
+                <a:cs typeface="Amiri" pitchFamily="2" charset="-78"/>
               </a:rPr>
               <a:t>“It’s Arabic script, so it’s Arabic.”</a:t>
             </a:r>
@@ -24256,8 +23824,7 @@
                   <a:srgbClr val="5A6472"/>
                 </a:solidFill>
                 <a:latin typeface="Calibri" pitchFamily="34" charset="0"/>
-                <a:ea typeface="Calibri" pitchFamily="34" charset="-122"/>
-                <a:cs typeface="Calibri" pitchFamily="34" charset="-120"/>
+                <a:cs typeface="Amiri" pitchFamily="2" charset="-78"/>
               </a:rPr>
               <a:t>“It is Arabic script; I need to check the language.”</a:t>
             </a:r>
@@ -24322,8 +23889,7 @@
                   <a:srgbClr val="FFFFFF"/>
                 </a:solidFill>
                 <a:latin typeface="Calibri" pitchFamily="34" charset="0"/>
-                <a:ea typeface="Calibri" pitchFamily="34" charset="-122"/>
-                <a:cs typeface="Calibri" pitchFamily="34" charset="-120"/>
+                <a:cs typeface="Amiri" pitchFamily="2" charset="-78"/>
               </a:rPr>
               <a:t>CORE</a:t>
             </a:r>
@@ -24388,8 +23954,7 @@
                   <a:srgbClr val="5A6472"/>
                 </a:solidFill>
                 <a:latin typeface="Calibri" pitchFamily="34" charset="0"/>
-                <a:ea typeface="Calibri" pitchFamily="34" charset="-122"/>
-                <a:cs typeface="Calibri" pitchFamily="34" charset="-120"/>
+                <a:cs typeface="Amiri" pitchFamily="2" charset="-78"/>
               </a:rPr>
               <a:t>“This sign tells me the owner’s religion.”</a:t>
             </a:r>
@@ -24427,8 +23992,7 @@
                   <a:srgbClr val="5A6472"/>
                 </a:solidFill>
                 <a:latin typeface="Calibri" pitchFamily="34" charset="0"/>
-                <a:ea typeface="Calibri" pitchFamily="34" charset="-122"/>
-                <a:cs typeface="Calibri" pitchFamily="34" charset="-120"/>
+                <a:cs typeface="Amiri" pitchFamily="2" charset="-78"/>
               </a:rPr>
               <a:t>“The sign tells me what the business is — not who people are.”</a:t>
             </a:r>
@@ -24493,8 +24057,7 @@
                   <a:srgbClr val="FFFFFF"/>
                 </a:solidFill>
                 <a:latin typeface="Calibri" pitchFamily="34" charset="0"/>
-                <a:ea typeface="Calibri" pitchFamily="34" charset="-122"/>
-                <a:cs typeface="Calibri" pitchFamily="34" charset="-120"/>
+                <a:cs typeface="Amiri" pitchFamily="2" charset="-78"/>
               </a:rPr>
               <a:t>CORE</a:t>
             </a:r>
@@ -24559,8 +24122,7 @@
                   <a:srgbClr val="5A6472"/>
                 </a:solidFill>
                 <a:latin typeface="Calibri" pitchFamily="34" charset="0"/>
-                <a:ea typeface="Calibri" pitchFamily="34" charset="-122"/>
-                <a:cs typeface="Calibri" pitchFamily="34" charset="-120"/>
+                <a:cs typeface="Amiri" pitchFamily="2" charset="-78"/>
               </a:rPr>
               <a:t>“Dialects are bad Arabic.”</a:t>
             </a:r>
@@ -24598,8 +24160,7 @@
                   <a:srgbClr val="5A6472"/>
                 </a:solidFill>
                 <a:latin typeface="Calibri" pitchFamily="34" charset="0"/>
-                <a:ea typeface="Calibri" pitchFamily="34" charset="-122"/>
-                <a:cs typeface="Calibri" pitchFamily="34" charset="-120"/>
+                <a:cs typeface="Amiri" pitchFamily="2" charset="-78"/>
               </a:rPr>
               <a:t>“Dialects are spoken varieties with their own rules; MSA is the shared formal variety.”</a:t>
             </a:r>
@@ -24664,8 +24225,7 @@
                   <a:srgbClr val="FFFFFF"/>
                 </a:solidFill>
                 <a:latin typeface="Calibri" pitchFamily="34" charset="0"/>
-                <a:ea typeface="Calibri" pitchFamily="34" charset="-122"/>
-                <a:cs typeface="Calibri" pitchFamily="34" charset="-120"/>
+                <a:cs typeface="Amiri" pitchFamily="2" charset="-78"/>
               </a:rPr>
               <a:t>CORE</a:t>
             </a:r>
@@ -24730,8 +24290,7 @@
                   <a:srgbClr val="5A6472"/>
                 </a:solidFill>
                 <a:latin typeface="Calibri" pitchFamily="34" charset="0"/>
-                <a:ea typeface="Calibri" pitchFamily="34" charset="-122"/>
-                <a:cs typeface="Calibri" pitchFamily="34" charset="-120"/>
+                <a:cs typeface="Amiri" pitchFamily="2" charset="-78"/>
               </a:rPr>
               <a:t>“It must mean bakery — there’s bread.”</a:t>
             </a:r>
@@ -24769,8 +24328,7 @@
                   <a:srgbClr val="5A6472"/>
                 </a:solidFill>
                 <a:latin typeface="Calibri" pitchFamily="34" charset="0"/>
-                <a:ea typeface="Calibri" pitchFamily="34" charset="-122"/>
-                <a:cs typeface="Calibri" pitchFamily="34" charset="-120"/>
+                <a:cs typeface="Amiri" pitchFamily="2" charset="-78"/>
               </a:rPr>
               <a:t>“The letters read </a:t>
             </a:r>
@@ -24782,9 +24340,8 @@
                 <a:solidFill>
                   <a:srgbClr val="5A6472"/>
                 </a:solidFill>
-                <a:latin typeface="Amiri" pitchFamily="34" charset="0"/>
-                <a:ea typeface="Amiri" pitchFamily="34" charset="-122"/>
-                <a:cs typeface="Amiri" pitchFamily="34" charset="-120"/>
+                <a:latin typeface="Amiri" pitchFamily="2" charset="-78"/>
+                <a:cs typeface="Amiri" pitchFamily="2" charset="-78"/>
               </a:rPr>
               <a:t>مَخْبَز</a:t>
             </a:r>
@@ -24797,8 +24354,7 @@
                   <a:srgbClr val="5A6472"/>
                 </a:solidFill>
                 <a:latin typeface="Calibri" pitchFamily="34" charset="0"/>
-                <a:ea typeface="Calibri" pitchFamily="34" charset="-122"/>
-                <a:cs typeface="Calibri" pitchFamily="34" charset="-120"/>
+                <a:cs typeface="Amiri" pitchFamily="2" charset="-78"/>
               </a:rPr>
               <a:t>, and the picture agrees.”</a:t>
             </a:r>
@@ -24836,8 +24392,7 @@
                   <a:srgbClr val="8A93A0"/>
                 </a:solidFill>
                 <a:latin typeface="Calibri" pitchFamily="34" charset="0"/>
-                <a:ea typeface="Calibri" pitchFamily="34" charset="-122"/>
-                <a:cs typeface="Calibri" pitchFamily="34" charset="-120"/>
+                <a:cs typeface="Amiri" pitchFamily="2" charset="-78"/>
               </a:rPr>
               <a:t>20 / 25</a:t>
             </a:r>
@@ -24931,9 +24486,8 @@
                 <a:solidFill>
                   <a:srgbClr val="D4AF37"/>
                 </a:solidFill>
-                <a:latin typeface="Amiri" pitchFamily="34" charset="0"/>
-                <a:ea typeface="Amiri" pitchFamily="34" charset="-122"/>
-                <a:cs typeface="Amiri" pitchFamily="34" charset="-120"/>
+                <a:latin typeface="Amiri" pitchFamily="2" charset="-78"/>
+                <a:cs typeface="Amiri" pitchFamily="2" charset="-78"/>
               </a:rPr>
               <a:t>م</a:t>
             </a:r>
@@ -24971,8 +24525,7 @@
                   <a:srgbClr val="1B3B6F"/>
                 </a:solidFill>
                 <a:latin typeface="Cambria" pitchFamily="34" charset="0"/>
-                <a:ea typeface="Cambria" pitchFamily="34" charset="-122"/>
-                <a:cs typeface="Cambria" pitchFamily="34" charset="-120"/>
+                <a:cs typeface="Amiri" pitchFamily="2" charset="-78"/>
               </a:rPr>
               <a:t>Al Madina Online School</a:t>
             </a:r>
@@ -25010,8 +24563,7 @@
                   <a:srgbClr val="8A6D1E"/>
                 </a:solidFill>
                 <a:latin typeface="Calibri" pitchFamily="34" charset="0"/>
-                <a:ea typeface="Calibri" pitchFamily="34" charset="-122"/>
-                <a:cs typeface="Calibri" pitchFamily="34" charset="-120"/>
+                <a:cs typeface="Amiri" pitchFamily="2" charset="-78"/>
               </a:rPr>
               <a:t>ARABIC DEPARTMENT · MIFTAH ARABIC · IGCSE 0544</a:t>
             </a:r>
@@ -25076,8 +24628,7 @@
                   <a:srgbClr val="FFFFFF"/>
                 </a:solidFill>
                 <a:latin typeface="Calibri" pitchFamily="34" charset="0"/>
-                <a:ea typeface="Calibri" pitchFamily="34" charset="-122"/>
-                <a:cs typeface="Calibri" pitchFamily="34" charset="-120"/>
+                <a:cs typeface="Amiri" pitchFamily="2" charset="-78"/>
               </a:rPr>
               <a:t>F1-L11 · Arabic around us</a:t>
             </a:r>
@@ -25142,8 +24693,7 @@
                   <a:srgbClr val="FFFFFF"/>
                 </a:solidFill>
                 <a:latin typeface="Calibri" pitchFamily="34" charset="0"/>
-                <a:ea typeface="Calibri" pitchFamily="34" charset="-122"/>
-                <a:cs typeface="Calibri" pitchFamily="34" charset="-120"/>
+                <a:cs typeface="Amiri" pitchFamily="2" charset="-78"/>
               </a:rPr>
               <a:t>FEEDBACK · 1 MIN</a:t>
             </a:r>
@@ -25181,8 +24731,7 @@
                   <a:srgbClr val="8A6D1E"/>
                 </a:solidFill>
                 <a:latin typeface="Calibri" pitchFamily="34" charset="0"/>
-                <a:ea typeface="Calibri" pitchFamily="34" charset="-122"/>
-                <a:cs typeface="Calibri" pitchFamily="34" charset="-120"/>
+                <a:cs typeface="Amiri" pitchFamily="2" charset="-78"/>
               </a:rPr>
               <a:t>FEEDBACK · SUCCESS CRITERIA</a:t>
             </a:r>
@@ -25220,8 +24769,7 @@
                   <a:srgbClr val="1B3B6F"/>
                 </a:solidFill>
                 <a:latin typeface="Cambria" pitchFamily="34" charset="0"/>
-                <a:ea typeface="Cambria" pitchFamily="34" charset="-122"/>
-                <a:cs typeface="Cambria" pitchFamily="34" charset="-120"/>
+                <a:cs typeface="Amiri" pitchFamily="2" charset="-78"/>
               </a:rPr>
               <a:t>Check your work</a:t>
             </a:r>
@@ -25258,9 +24806,8 @@
                 <a:solidFill>
                   <a:srgbClr val="8A6D1E"/>
                 </a:solidFill>
-                <a:latin typeface="Amiri" pitchFamily="34" charset="0"/>
-                <a:ea typeface="Amiri" pitchFamily="34" charset="-122"/>
-                <a:cs typeface="Amiri" pitchFamily="34" charset="-120"/>
+                <a:latin typeface="Amiri" pitchFamily="2" charset="-78"/>
+                <a:cs typeface="Amiri" pitchFamily="2" charset="-78"/>
               </a:rPr>
               <a:t>قَيِّمْ عَمَلَكَ</a:t>
             </a:r>
@@ -25298,8 +24845,7 @@
                   <a:srgbClr val="8A93A0"/>
                 </a:solidFill>
                 <a:latin typeface="Calibri" pitchFamily="34" charset="0"/>
-                <a:ea typeface="Calibri" pitchFamily="34" charset="-122"/>
-                <a:cs typeface="Calibri" pitchFamily="34" charset="-120"/>
+                <a:cs typeface="Amiri" pitchFamily="2" charset="-78"/>
               </a:rPr>
               <a:t>Miftah Arabic · Foundation F1 · Arabic Script &amp; Sounds · F1-L11</a:t>
             </a:r>
@@ -25396,8 +24942,7 @@
                   <a:srgbClr val="1F2A37"/>
                 </a:solidFill>
                 <a:latin typeface="Calibri" pitchFamily="34" charset="0"/>
-                <a:ea typeface="Calibri" pitchFamily="34" charset="-122"/>
-                <a:cs typeface="Calibri" pitchFamily="34" charset="-120"/>
+                <a:cs typeface="Amiri" pitchFamily="2" charset="-78"/>
               </a:rPr>
               <a:t>I can say where Arabic appears around me.</a:t>
             </a:r>
@@ -25462,8 +25007,7 @@
                   <a:srgbClr val="FFFFFF"/>
                 </a:solidFill>
                 <a:latin typeface="Calibri" pitchFamily="34" charset="0"/>
-                <a:ea typeface="Calibri" pitchFamily="34" charset="-122"/>
-                <a:cs typeface="Calibri" pitchFamily="34" charset="-120"/>
+                <a:cs typeface="Amiri" pitchFamily="2" charset="-78"/>
               </a:rPr>
               <a:t>CORE</a:t>
             </a:r>
@@ -25560,8 +25104,7 @@
                   <a:srgbClr val="1F2A37"/>
                 </a:solidFill>
                 <a:latin typeface="Calibri" pitchFamily="34" charset="0"/>
-                <a:ea typeface="Calibri" pitchFamily="34" charset="-122"/>
-                <a:cs typeface="Calibri" pitchFamily="34" charset="-120"/>
+                <a:cs typeface="Amiri" pitchFamily="2" charset="-78"/>
               </a:rPr>
               <a:t>I can read five Arabic country names.</a:t>
             </a:r>
@@ -25626,8 +25169,7 @@
                   <a:srgbClr val="FFFFFF"/>
                 </a:solidFill>
                 <a:latin typeface="Calibri" pitchFamily="34" charset="0"/>
-                <a:ea typeface="Calibri" pitchFamily="34" charset="-122"/>
-                <a:cs typeface="Calibri" pitchFamily="34" charset="-120"/>
+                <a:cs typeface="Amiri" pitchFamily="2" charset="-78"/>
               </a:rPr>
               <a:t>CORE</a:t>
             </a:r>
@@ -25724,8 +25266,7 @@
                   <a:srgbClr val="1F2A37"/>
                 </a:solidFill>
                 <a:latin typeface="Calibri" pitchFamily="34" charset="0"/>
-                <a:ea typeface="Calibri" pitchFamily="34" charset="-122"/>
-                <a:cs typeface="Calibri" pitchFamily="34" charset="-120"/>
+                <a:cs typeface="Amiri" pitchFamily="2" charset="-78"/>
               </a:rPr>
               <a:t>I can distinguish script, language, context and meaning.</a:t>
             </a:r>
@@ -25790,8 +25331,7 @@
                   <a:srgbClr val="FFFFFF"/>
                 </a:solidFill>
                 <a:latin typeface="Calibri" pitchFamily="34" charset="0"/>
-                <a:ea typeface="Calibri" pitchFamily="34" charset="-122"/>
-                <a:cs typeface="Calibri" pitchFamily="34" charset="-120"/>
+                <a:cs typeface="Amiri" pitchFamily="2" charset="-78"/>
               </a:rPr>
               <a:t>DEVELOP</a:t>
             </a:r>
@@ -25888,8 +25428,7 @@
                   <a:srgbClr val="1F2A37"/>
                 </a:solidFill>
                 <a:latin typeface="Calibri" pitchFamily="34" charset="0"/>
-                <a:ea typeface="Calibri" pitchFamily="34" charset="-122"/>
-                <a:cs typeface="Calibri" pitchFamily="34" charset="-120"/>
+                <a:cs typeface="Amiri" pitchFamily="2" charset="-78"/>
               </a:rPr>
               <a:t>I can explain MSA and spoken varieties respectfully.</a:t>
             </a:r>
@@ -25954,8 +25493,7 @@
                   <a:srgbClr val="FFFFFF"/>
                 </a:solidFill>
                 <a:latin typeface="Calibri" pitchFamily="34" charset="0"/>
-                <a:ea typeface="Calibri" pitchFamily="34" charset="-122"/>
-                <a:cs typeface="Calibri" pitchFamily="34" charset="-120"/>
+                <a:cs typeface="Amiri" pitchFamily="2" charset="-78"/>
               </a:rPr>
               <a:t>DEVELOP</a:t>
             </a:r>
@@ -26052,8 +25590,7 @@
                   <a:srgbClr val="1F2A37"/>
                 </a:solidFill>
                 <a:latin typeface="Calibri" pitchFamily="34" charset="0"/>
-                <a:ea typeface="Calibri" pitchFamily="34" charset="-122"/>
-                <a:cs typeface="Calibri" pitchFamily="34" charset="-120"/>
+                <a:cs typeface="Amiri" pitchFamily="2" charset="-78"/>
               </a:rPr>
               <a:t>I can use ABCD and say when evidence is uncertain.</a:t>
             </a:r>
@@ -26118,8 +25655,7 @@
                   <a:srgbClr val="FFFFFF"/>
                 </a:solidFill>
                 <a:latin typeface="Calibri" pitchFamily="34" charset="0"/>
-                <a:ea typeface="Calibri" pitchFamily="34" charset="-122"/>
-                <a:cs typeface="Calibri" pitchFamily="34" charset="-120"/>
+                <a:cs typeface="Amiri" pitchFamily="2" charset="-78"/>
               </a:rPr>
               <a:t>STRETCH</a:t>
             </a:r>
@@ -26191,8 +25727,7 @@
                   <a:srgbClr val="2E8B57"/>
                 </a:solidFill>
                 <a:latin typeface="Calibri" pitchFamily="34" charset="0"/>
-                <a:ea typeface="Calibri" pitchFamily="34" charset="-122"/>
-                <a:cs typeface="Calibri" pitchFamily="34" charset="-120"/>
+                <a:cs typeface="Amiri" pitchFamily="2" charset="-78"/>
               </a:rPr>
               <a:t>WWW</a:t>
             </a:r>
@@ -26208,8 +25743,7 @@
                   <a:srgbClr val="1F2A37"/>
                 </a:solidFill>
                 <a:latin typeface="Calibri" pitchFamily="34" charset="0"/>
-                <a:ea typeface="Calibri" pitchFamily="34" charset="-122"/>
-                <a:cs typeface="Calibri" pitchFamily="34" charset="-120"/>
+                <a:cs typeface="Amiri" pitchFamily="2" charset="-78"/>
               </a:rPr>
               <a:t>What went well? One thing you did accurately.</a:t>
             </a:r>
@@ -26281,8 +25815,7 @@
                   <a:srgbClr val="C9780A"/>
                 </a:solidFill>
                 <a:latin typeface="Calibri" pitchFamily="34" charset="0"/>
-                <a:ea typeface="Calibri" pitchFamily="34" charset="-122"/>
-                <a:cs typeface="Calibri" pitchFamily="34" charset="-120"/>
+                <a:cs typeface="Amiri" pitchFamily="2" charset="-78"/>
               </a:rPr>
               <a:t>EBI</a:t>
             </a:r>
@@ -26298,8 +25831,7 @@
                   <a:srgbClr val="1F2A37"/>
                 </a:solidFill>
                 <a:latin typeface="Calibri" pitchFamily="34" charset="0"/>
-                <a:ea typeface="Calibri" pitchFamily="34" charset="-122"/>
-                <a:cs typeface="Calibri" pitchFamily="34" charset="-120"/>
+                <a:cs typeface="Amiri" pitchFamily="2" charset="-78"/>
               </a:rPr>
               <a:t>Even better if… One thing you will fix or add.</a:t>
             </a:r>
@@ -26337,8 +25869,7 @@
                   <a:srgbClr val="8A93A0"/>
                 </a:solidFill>
                 <a:latin typeface="Calibri" pitchFamily="34" charset="0"/>
-                <a:ea typeface="Calibri" pitchFamily="34" charset="-122"/>
-                <a:cs typeface="Calibri" pitchFamily="34" charset="-120"/>
+                <a:cs typeface="Amiri" pitchFamily="2" charset="-78"/>
               </a:rPr>
               <a:t>21 / 25</a:t>
             </a:r>
@@ -26432,9 +25963,8 @@
                 <a:solidFill>
                   <a:srgbClr val="D4AF37"/>
                 </a:solidFill>
-                <a:latin typeface="Amiri" pitchFamily="34" charset="0"/>
-                <a:ea typeface="Amiri" pitchFamily="34" charset="-122"/>
-                <a:cs typeface="Amiri" pitchFamily="34" charset="-120"/>
+                <a:latin typeface="Amiri" pitchFamily="2" charset="-78"/>
+                <a:cs typeface="Amiri" pitchFamily="2" charset="-78"/>
               </a:rPr>
               <a:t>م</a:t>
             </a:r>
@@ -26472,8 +26002,7 @@
                   <a:srgbClr val="1B3B6F"/>
                 </a:solidFill>
                 <a:latin typeface="Cambria" pitchFamily="34" charset="0"/>
-                <a:ea typeface="Cambria" pitchFamily="34" charset="-122"/>
-                <a:cs typeface="Cambria" pitchFamily="34" charset="-120"/>
+                <a:cs typeface="Amiri" pitchFamily="2" charset="-78"/>
               </a:rPr>
               <a:t>Al Madina Online School</a:t>
             </a:r>
@@ -26511,8 +26040,7 @@
                   <a:srgbClr val="8A6D1E"/>
                 </a:solidFill>
                 <a:latin typeface="Calibri" pitchFamily="34" charset="0"/>
-                <a:ea typeface="Calibri" pitchFamily="34" charset="-122"/>
-                <a:cs typeface="Calibri" pitchFamily="34" charset="-120"/>
+                <a:cs typeface="Amiri" pitchFamily="2" charset="-78"/>
               </a:rPr>
               <a:t>ARABIC DEPARTMENT · MIFTAH ARABIC · IGCSE 0544</a:t>
             </a:r>
@@ -26577,8 +26105,7 @@
                   <a:srgbClr val="FFFFFF"/>
                 </a:solidFill>
                 <a:latin typeface="Calibri" pitchFamily="34" charset="0"/>
-                <a:ea typeface="Calibri" pitchFamily="34" charset="-122"/>
-                <a:cs typeface="Calibri" pitchFamily="34" charset="-120"/>
+                <a:cs typeface="Amiri" pitchFamily="2" charset="-78"/>
               </a:rPr>
               <a:t>F1-L11 · Arabic around us</a:t>
             </a:r>
@@ -26643,8 +26170,7 @@
                   <a:srgbClr val="FFFFFF"/>
                 </a:solidFill>
                 <a:latin typeface="Calibri" pitchFamily="34" charset="0"/>
-                <a:ea typeface="Calibri" pitchFamily="34" charset="-122"/>
-                <a:cs typeface="Calibri" pitchFamily="34" charset="-120"/>
+                <a:cs typeface="Amiri" pitchFamily="2" charset="-78"/>
               </a:rPr>
               <a:t>FEEDBACK · 2 MIN</a:t>
             </a:r>
@@ -26682,8 +26208,7 @@
                   <a:srgbClr val="8A6D1E"/>
                 </a:solidFill>
                 <a:latin typeface="Calibri" pitchFamily="34" charset="0"/>
-                <a:ea typeface="Calibri" pitchFamily="34" charset="-122"/>
-                <a:cs typeface="Calibri" pitchFamily="34" charset="-120"/>
+                <a:cs typeface="Amiri" pitchFamily="2" charset="-78"/>
               </a:rPr>
               <a:t>EXIT TICKET · ON YOUR OWN</a:t>
             </a:r>
@@ -26721,8 +26246,7 @@
                   <a:srgbClr val="1B3B6F"/>
                 </a:solidFill>
                 <a:latin typeface="Cambria" pitchFamily="34" charset="0"/>
-                <a:ea typeface="Cambria" pitchFamily="34" charset="-122"/>
-                <a:cs typeface="Cambria" pitchFamily="34" charset="-120"/>
+                <a:cs typeface="Amiri" pitchFamily="2" charset="-78"/>
               </a:rPr>
               <a:t>Exit ticket: three questions</a:t>
             </a:r>
@@ -26759,9 +26283,8 @@
                 <a:solidFill>
                   <a:srgbClr val="8A6D1E"/>
                 </a:solidFill>
-                <a:latin typeface="Amiri" pitchFamily="34" charset="0"/>
-                <a:ea typeface="Amiri" pitchFamily="34" charset="-122"/>
-                <a:cs typeface="Amiri" pitchFamily="34" charset="-120"/>
+                <a:latin typeface="Amiri" pitchFamily="2" charset="-78"/>
+                <a:cs typeface="Amiri" pitchFamily="2" charset="-78"/>
               </a:rPr>
               <a:t>تَذْكِرَةُ الخُرُوجِ</a:t>
             </a:r>
@@ -26799,8 +26322,7 @@
                   <a:srgbClr val="8A93A0"/>
                 </a:solidFill>
                 <a:latin typeface="Calibri" pitchFamily="34" charset="0"/>
-                <a:ea typeface="Calibri" pitchFamily="34" charset="-122"/>
-                <a:cs typeface="Calibri" pitchFamily="34" charset="-120"/>
+                <a:cs typeface="Amiri" pitchFamily="2" charset="-78"/>
               </a:rPr>
               <a:t>Miftah Arabic · Foundation F1 · Arabic Script &amp; Sounds · F1-L11</a:t>
             </a:r>
@@ -26897,8 +26419,7 @@
                   <a:srgbClr val="FFFFFF"/>
                 </a:solidFill>
                 <a:latin typeface="Calibri" pitchFamily="34" charset="0"/>
-                <a:ea typeface="Calibri" pitchFamily="34" charset="-122"/>
-                <a:cs typeface="Calibri" pitchFamily="34" charset="-120"/>
+                <a:cs typeface="Amiri" pitchFamily="2" charset="-78"/>
               </a:rPr>
               <a:t>1</a:t>
             </a:r>
@@ -26936,8 +26457,7 @@
                   <a:srgbClr val="1B3B6F"/>
                 </a:solidFill>
                 <a:latin typeface="Calibri" pitchFamily="34" charset="0"/>
-                <a:ea typeface="Calibri" pitchFamily="34" charset="-122"/>
-                <a:cs typeface="Calibri" pitchFamily="34" charset="-120"/>
+                <a:cs typeface="Amiri" pitchFamily="2" charset="-78"/>
               </a:rPr>
               <a:t>Which country is </a:t>
             </a:r>
@@ -26949,9 +26469,8 @@
                 <a:solidFill>
                   <a:srgbClr val="1B3B6F"/>
                 </a:solidFill>
-                <a:latin typeface="Amiri" pitchFamily="34" charset="0"/>
-                <a:ea typeface="Amiri" pitchFamily="34" charset="-122"/>
-                <a:cs typeface="Amiri" pitchFamily="34" charset="-120"/>
+                <a:latin typeface="Amiri" pitchFamily="2" charset="-78"/>
+                <a:cs typeface="Amiri" pitchFamily="2" charset="-78"/>
               </a:rPr>
               <a:t>مِصْر</a:t>
             </a:r>
@@ -26964,8 +26483,7 @@
                   <a:srgbClr val="1B3B6F"/>
                 </a:solidFill>
                 <a:latin typeface="Calibri" pitchFamily="34" charset="0"/>
-                <a:ea typeface="Calibri" pitchFamily="34" charset="-122"/>
-                <a:cs typeface="Calibri" pitchFamily="34" charset="-120"/>
+                <a:cs typeface="Amiri" pitchFamily="2" charset="-78"/>
               </a:rPr>
               <a:t>?</a:t>
             </a:r>
@@ -27028,8 +26546,7 @@
                   <a:srgbClr val="1B3B6F"/>
                 </a:solidFill>
                 <a:latin typeface="Calibri" pitchFamily="34" charset="0"/>
-                <a:ea typeface="Calibri" pitchFamily="34" charset="-122"/>
-                <a:cs typeface="Calibri" pitchFamily="34" charset="-120"/>
+                <a:cs typeface="Amiri" pitchFamily="2" charset="-78"/>
               </a:rPr>
               <a:t>A</a:t>
             </a:r>
@@ -27067,8 +26584,7 @@
                   <a:srgbClr val="1F2A37"/>
                 </a:solidFill>
                 <a:latin typeface="Calibri" pitchFamily="34" charset="0"/>
-                <a:ea typeface="Calibri" pitchFamily="34" charset="-122"/>
-                <a:cs typeface="Calibri" pitchFamily="34" charset="-120"/>
+                <a:cs typeface="Amiri" pitchFamily="2" charset="-78"/>
               </a:rPr>
               <a:t>Egypt</a:t>
             </a:r>
@@ -27131,8 +26647,7 @@
                   <a:srgbClr val="1B3B6F"/>
                 </a:solidFill>
                 <a:latin typeface="Calibri" pitchFamily="34" charset="0"/>
-                <a:ea typeface="Calibri" pitchFamily="34" charset="-122"/>
-                <a:cs typeface="Calibri" pitchFamily="34" charset="-120"/>
+                <a:cs typeface="Amiri" pitchFamily="2" charset="-78"/>
               </a:rPr>
               <a:t>B</a:t>
             </a:r>
@@ -27170,8 +26685,7 @@
                   <a:srgbClr val="1F2A37"/>
                 </a:solidFill>
                 <a:latin typeface="Calibri" pitchFamily="34" charset="0"/>
-                <a:ea typeface="Calibri" pitchFamily="34" charset="-122"/>
-                <a:cs typeface="Calibri" pitchFamily="34" charset="-120"/>
+                <a:cs typeface="Amiri" pitchFamily="2" charset="-78"/>
               </a:rPr>
               <a:t>Morocco</a:t>
             </a:r>
@@ -27234,8 +26748,7 @@
                   <a:srgbClr val="1B3B6F"/>
                 </a:solidFill>
                 <a:latin typeface="Calibri" pitchFamily="34" charset="0"/>
-                <a:ea typeface="Calibri" pitchFamily="34" charset="-122"/>
-                <a:cs typeface="Calibri" pitchFamily="34" charset="-120"/>
+                <a:cs typeface="Amiri" pitchFamily="2" charset="-78"/>
               </a:rPr>
               <a:t>C</a:t>
             </a:r>
@@ -27273,8 +26786,7 @@
                   <a:srgbClr val="1F2A37"/>
                 </a:solidFill>
                 <a:latin typeface="Calibri" pitchFamily="34" charset="0"/>
-                <a:ea typeface="Calibri" pitchFamily="34" charset="-122"/>
-                <a:cs typeface="Calibri" pitchFamily="34" charset="-120"/>
+                <a:cs typeface="Amiri" pitchFamily="2" charset="-78"/>
               </a:rPr>
               <a:t>Iraq</a:t>
             </a:r>
@@ -27371,8 +26883,7 @@
                   <a:srgbClr val="FFFFFF"/>
                 </a:solidFill>
                 <a:latin typeface="Calibri" pitchFamily="34" charset="0"/>
-                <a:ea typeface="Calibri" pitchFamily="34" charset="-122"/>
-                <a:cs typeface="Calibri" pitchFamily="34" charset="-120"/>
+                <a:cs typeface="Amiri" pitchFamily="2" charset="-78"/>
               </a:rPr>
               <a:t>2</a:t>
             </a:r>
@@ -27410,8 +26921,7 @@
                   <a:srgbClr val="1B3B6F"/>
                 </a:solidFill>
                 <a:latin typeface="Calibri" pitchFamily="34" charset="0"/>
-                <a:ea typeface="Calibri" pitchFamily="34" charset="-122"/>
-                <a:cs typeface="Calibri" pitchFamily="34" charset="-120"/>
+                <a:cs typeface="Amiri" pitchFamily="2" charset="-78"/>
               </a:rPr>
               <a:t>Which calligraphy style is our clear school hand based on?</a:t>
             </a:r>
@@ -27474,8 +26984,7 @@
                   <a:srgbClr val="1B3B6F"/>
                 </a:solidFill>
                 <a:latin typeface="Calibri" pitchFamily="34" charset="0"/>
-                <a:ea typeface="Calibri" pitchFamily="34" charset="-122"/>
-                <a:cs typeface="Calibri" pitchFamily="34" charset="-120"/>
+                <a:cs typeface="Amiri" pitchFamily="2" charset="-78"/>
               </a:rPr>
               <a:t>A</a:t>
             </a:r>
@@ -27513,8 +27022,7 @@
                   <a:srgbClr val="1F2A37"/>
                 </a:solidFill>
                 <a:latin typeface="Calibri" pitchFamily="34" charset="0"/>
-                <a:ea typeface="Calibri" pitchFamily="34" charset="-122"/>
-                <a:cs typeface="Calibri" pitchFamily="34" charset="-120"/>
+                <a:cs typeface="Amiri" pitchFamily="2" charset="-78"/>
               </a:rPr>
               <a:t>Thuluth</a:t>
             </a:r>
@@ -27577,8 +27085,7 @@
                   <a:srgbClr val="1B3B6F"/>
                 </a:solidFill>
                 <a:latin typeface="Calibri" pitchFamily="34" charset="0"/>
-                <a:ea typeface="Calibri" pitchFamily="34" charset="-122"/>
-                <a:cs typeface="Calibri" pitchFamily="34" charset="-120"/>
+                <a:cs typeface="Amiri" pitchFamily="2" charset="-78"/>
               </a:rPr>
               <a:t>B</a:t>
             </a:r>
@@ -27616,8 +27123,7 @@
                   <a:srgbClr val="1F2A37"/>
                 </a:solidFill>
                 <a:latin typeface="Calibri" pitchFamily="34" charset="0"/>
-                <a:ea typeface="Calibri" pitchFamily="34" charset="-122"/>
-                <a:cs typeface="Calibri" pitchFamily="34" charset="-120"/>
+                <a:cs typeface="Amiri" pitchFamily="2" charset="-78"/>
               </a:rPr>
               <a:t>Naskh</a:t>
             </a:r>
@@ -27680,8 +27186,7 @@
                   <a:srgbClr val="1B3B6F"/>
                 </a:solidFill>
                 <a:latin typeface="Calibri" pitchFamily="34" charset="0"/>
-                <a:ea typeface="Calibri" pitchFamily="34" charset="-122"/>
-                <a:cs typeface="Calibri" pitchFamily="34" charset="-120"/>
+                <a:cs typeface="Amiri" pitchFamily="2" charset="-78"/>
               </a:rPr>
               <a:t>C</a:t>
             </a:r>
@@ -27719,8 +27224,7 @@
                   <a:srgbClr val="1F2A37"/>
                 </a:solidFill>
                 <a:latin typeface="Calibri" pitchFamily="34" charset="0"/>
-                <a:ea typeface="Calibri" pitchFamily="34" charset="-122"/>
-                <a:cs typeface="Calibri" pitchFamily="34" charset="-120"/>
+                <a:cs typeface="Amiri" pitchFamily="2" charset="-78"/>
               </a:rPr>
               <a:t>Ruqʿah</a:t>
             </a:r>
@@ -27817,8 +27321,7 @@
                   <a:srgbClr val="FFFFFF"/>
                 </a:solidFill>
                 <a:latin typeface="Calibri" pitchFamily="34" charset="0"/>
-                <a:ea typeface="Calibri" pitchFamily="34" charset="-122"/>
-                <a:cs typeface="Calibri" pitchFamily="34" charset="-120"/>
+                <a:cs typeface="Amiri" pitchFamily="2" charset="-78"/>
               </a:rPr>
               <a:t>3</a:t>
             </a:r>
@@ -27856,8 +27359,7 @@
                   <a:srgbClr val="1B3B6F"/>
                 </a:solidFill>
                 <a:latin typeface="Calibri" pitchFamily="34" charset="0"/>
-                <a:ea typeface="Calibri" pitchFamily="34" charset="-122"/>
-                <a:cs typeface="Calibri" pitchFamily="34" charset="-120"/>
+                <a:cs typeface="Amiri" pitchFamily="2" charset="-78"/>
               </a:rPr>
               <a:t>A sign is cropped and has no source. What do you say?</a:t>
             </a:r>
@@ -27920,8 +27422,7 @@
                   <a:srgbClr val="1B3B6F"/>
                 </a:solidFill>
                 <a:latin typeface="Calibri" pitchFamily="34" charset="0"/>
-                <a:ea typeface="Calibri" pitchFamily="34" charset="-122"/>
-                <a:cs typeface="Calibri" pitchFamily="34" charset="-120"/>
+                <a:cs typeface="Amiri" pitchFamily="2" charset="-78"/>
               </a:rPr>
               <a:t>A</a:t>
             </a:r>
@@ -27959,8 +27460,7 @@
                   <a:srgbClr val="1F2A37"/>
                 </a:solidFill>
                 <a:latin typeface="Calibri" pitchFamily="34" charset="0"/>
-                <a:ea typeface="Calibri" pitchFamily="34" charset="-122"/>
-                <a:cs typeface="Calibri" pitchFamily="34" charset="-120"/>
+                <a:cs typeface="Amiri" pitchFamily="2" charset="-78"/>
               </a:rPr>
               <a:t>“I am sure what it means.”</a:t>
             </a:r>
@@ -28023,8 +27523,7 @@
                   <a:srgbClr val="1B3B6F"/>
                 </a:solidFill>
                 <a:latin typeface="Calibri" pitchFamily="34" charset="0"/>
-                <a:ea typeface="Calibri" pitchFamily="34" charset="-122"/>
-                <a:cs typeface="Calibri" pitchFamily="34" charset="-120"/>
+                <a:cs typeface="Amiri" pitchFamily="2" charset="-78"/>
               </a:rPr>
               <a:t>B</a:t>
             </a:r>
@@ -28062,8 +27561,7 @@
                   <a:srgbClr val="1F2A37"/>
                 </a:solidFill>
                 <a:latin typeface="Calibri" pitchFamily="34" charset="0"/>
-                <a:ea typeface="Calibri" pitchFamily="34" charset="-122"/>
-                <a:cs typeface="Calibri" pitchFamily="34" charset="-120"/>
+                <a:cs typeface="Amiri" pitchFamily="2" charset="-78"/>
               </a:rPr>
               <a:t>“I can identify the script, but I cannot yet verify the meaning.”</a:t>
             </a:r>
@@ -28135,8 +27633,7 @@
                   <a:srgbClr val="8A6D1E"/>
                 </a:solidFill>
                 <a:latin typeface="Calibri" pitchFamily="34" charset="0"/>
-                <a:ea typeface="Calibri" pitchFamily="34" charset="-122"/>
-                <a:cs typeface="Calibri" pitchFamily="34" charset="-120"/>
+                <a:cs typeface="Amiri" pitchFamily="2" charset="-78"/>
               </a:rPr>
               <a:t>ON YOUR OWN · 2 MINUTES</a:t>
             </a:r>
@@ -28174,8 +27671,7 @@
                   <a:srgbClr val="1F2A37"/>
                 </a:solidFill>
                 <a:latin typeface="Calibri" pitchFamily="34" charset="0"/>
-                <a:ea typeface="Calibri" pitchFamily="34" charset="-122"/>
-                <a:cs typeface="Calibri" pitchFamily="34" charset="-120"/>
+                <a:cs typeface="Amiri" pitchFamily="2" charset="-78"/>
               </a:rPr>
               <a:t>Answer silently. When the timer ends, type your three letters in the chat: 1_ 2_ 3_. The other end-of-lesson questions are on the website.</a:t>
             </a:r>
@@ -28213,8 +27709,7 @@
                   <a:srgbClr val="8A93A0"/>
                 </a:solidFill>
                 <a:latin typeface="Calibri" pitchFamily="34" charset="0"/>
-                <a:ea typeface="Calibri" pitchFamily="34" charset="-122"/>
-                <a:cs typeface="Calibri" pitchFamily="34" charset="-120"/>
+                <a:cs typeface="Amiri" pitchFamily="2" charset="-78"/>
               </a:rPr>
               <a:t>22 / 25</a:t>
             </a:r>
@@ -28308,9 +27803,8 @@
                 <a:solidFill>
                   <a:srgbClr val="D4AF37"/>
                 </a:solidFill>
-                <a:latin typeface="Amiri" pitchFamily="34" charset="0"/>
-                <a:ea typeface="Amiri" pitchFamily="34" charset="-122"/>
-                <a:cs typeface="Amiri" pitchFamily="34" charset="-120"/>
+                <a:latin typeface="Amiri" pitchFamily="2" charset="-78"/>
+                <a:cs typeface="Amiri" pitchFamily="2" charset="-78"/>
               </a:rPr>
               <a:t>م</a:t>
             </a:r>
@@ -28348,8 +27842,7 @@
                   <a:srgbClr val="1B3B6F"/>
                 </a:solidFill>
                 <a:latin typeface="Cambria" pitchFamily="34" charset="0"/>
-                <a:ea typeface="Cambria" pitchFamily="34" charset="-122"/>
-                <a:cs typeface="Cambria" pitchFamily="34" charset="-120"/>
+                <a:cs typeface="Amiri" pitchFamily="2" charset="-78"/>
               </a:rPr>
               <a:t>Al Madina Online School</a:t>
             </a:r>
@@ -28387,8 +27880,7 @@
                   <a:srgbClr val="8A6D1E"/>
                 </a:solidFill>
                 <a:latin typeface="Calibri" pitchFamily="34" charset="0"/>
-                <a:ea typeface="Calibri" pitchFamily="34" charset="-122"/>
-                <a:cs typeface="Calibri" pitchFamily="34" charset="-120"/>
+                <a:cs typeface="Amiri" pitchFamily="2" charset="-78"/>
               </a:rPr>
               <a:t>ARABIC DEPARTMENT · MIFTAH ARABIC · IGCSE 0544</a:t>
             </a:r>
@@ -28453,8 +27945,7 @@
                   <a:srgbClr val="FFFFFF"/>
                 </a:solidFill>
                 <a:latin typeface="Calibri" pitchFamily="34" charset="0"/>
-                <a:ea typeface="Calibri" pitchFamily="34" charset="-122"/>
-                <a:cs typeface="Calibri" pitchFamily="34" charset="-120"/>
+                <a:cs typeface="Amiri" pitchFamily="2" charset="-78"/>
               </a:rPr>
               <a:t>F1-L11 · Arabic around us</a:t>
             </a:r>
@@ -28519,8 +28010,7 @@
                   <a:srgbClr val="FFFFFF"/>
                 </a:solidFill>
                 <a:latin typeface="Calibri" pitchFamily="34" charset="0"/>
-                <a:ea typeface="Calibri" pitchFamily="34" charset="-122"/>
-                <a:cs typeface="Calibri" pitchFamily="34" charset="-120"/>
+                <a:cs typeface="Amiri" pitchFamily="2" charset="-78"/>
               </a:rPr>
               <a:t>FEEDBACK · 1 MIN</a:t>
             </a:r>
@@ -28558,8 +28048,7 @@
                   <a:srgbClr val="8A6D1E"/>
                 </a:solidFill>
                 <a:latin typeface="Calibri" pitchFamily="34" charset="0"/>
-                <a:ea typeface="Calibri" pitchFamily="34" charset="-122"/>
-                <a:cs typeface="Calibri" pitchFamily="34" charset="-120"/>
+                <a:cs typeface="Amiri" pitchFamily="2" charset="-78"/>
               </a:rPr>
               <a:t>EXIT TICKET · ANSWERS</a:t>
             </a:r>
@@ -28597,8 +28086,7 @@
                   <a:srgbClr val="1B3B6F"/>
                 </a:solidFill>
                 <a:latin typeface="Cambria" pitchFamily="34" charset="0"/>
-                <a:ea typeface="Cambria" pitchFamily="34" charset="-122"/>
-                <a:cs typeface="Cambria" pitchFamily="34" charset="-120"/>
+                <a:cs typeface="Amiri" pitchFamily="2" charset="-78"/>
               </a:rPr>
               <a:t>Exit ticket: answers</a:t>
             </a:r>
@@ -28635,9 +28123,8 @@
                 <a:solidFill>
                   <a:srgbClr val="8A6D1E"/>
                 </a:solidFill>
-                <a:latin typeface="Amiri" pitchFamily="34" charset="0"/>
-                <a:ea typeface="Amiri" pitchFamily="34" charset="-122"/>
-                <a:cs typeface="Amiri" pitchFamily="34" charset="-120"/>
+                <a:latin typeface="Amiri" pitchFamily="2" charset="-78"/>
+                <a:cs typeface="Amiri" pitchFamily="2" charset="-78"/>
               </a:rPr>
               <a:t>إِجَابَاتُ تَذْكِرَةِ الخُرُوجِ</a:t>
             </a:r>
@@ -28675,8 +28162,7 @@
                   <a:srgbClr val="8A93A0"/>
                 </a:solidFill>
                 <a:latin typeface="Calibri" pitchFamily="34" charset="0"/>
-                <a:ea typeface="Calibri" pitchFamily="34" charset="-122"/>
-                <a:cs typeface="Calibri" pitchFamily="34" charset="-120"/>
+                <a:cs typeface="Amiri" pitchFamily="2" charset="-78"/>
               </a:rPr>
               <a:t>Miftah Arabic · Foundation F1 · Arabic Script &amp; Sounds · F1-L11</a:t>
             </a:r>
@@ -28773,8 +28259,7 @@
                   <a:srgbClr val="FFFFFF"/>
                 </a:solidFill>
                 <a:latin typeface="Calibri" pitchFamily="34" charset="0"/>
-                <a:ea typeface="Calibri" pitchFamily="34" charset="-122"/>
-                <a:cs typeface="Calibri" pitchFamily="34" charset="-120"/>
+                <a:cs typeface="Amiri" pitchFamily="2" charset="-78"/>
               </a:rPr>
               <a:t>1</a:t>
             </a:r>
@@ -28812,8 +28297,7 @@
                   <a:srgbClr val="1B3B6F"/>
                 </a:solidFill>
                 <a:latin typeface="Calibri" pitchFamily="34" charset="0"/>
-                <a:ea typeface="Calibri" pitchFamily="34" charset="-122"/>
-                <a:cs typeface="Calibri" pitchFamily="34" charset="-120"/>
+                <a:cs typeface="Amiri" pitchFamily="2" charset="-78"/>
               </a:rPr>
               <a:t>Which country is </a:t>
             </a:r>
@@ -28825,9 +28309,8 @@
                 <a:solidFill>
                   <a:srgbClr val="1B3B6F"/>
                 </a:solidFill>
-                <a:latin typeface="Amiri" pitchFamily="34" charset="0"/>
-                <a:ea typeface="Amiri" pitchFamily="34" charset="-122"/>
-                <a:cs typeface="Amiri" pitchFamily="34" charset="-120"/>
+                <a:latin typeface="Amiri" pitchFamily="2" charset="-78"/>
+                <a:cs typeface="Amiri" pitchFamily="2" charset="-78"/>
               </a:rPr>
               <a:t>مِصْر</a:t>
             </a:r>
@@ -28840,8 +28323,7 @@
                   <a:srgbClr val="1B3B6F"/>
                 </a:solidFill>
                 <a:latin typeface="Calibri" pitchFamily="34" charset="0"/>
-                <a:ea typeface="Calibri" pitchFamily="34" charset="-122"/>
-                <a:cs typeface="Calibri" pitchFamily="34" charset="-120"/>
+                <a:cs typeface="Amiri" pitchFamily="2" charset="-78"/>
               </a:rPr>
               <a:t>?</a:t>
             </a:r>
@@ -28931,8 +28413,7 @@
                   <a:srgbClr val="FFFFFF"/>
                 </a:solidFill>
                 <a:latin typeface="Calibri" pitchFamily="34" charset="0"/>
-                <a:ea typeface="Calibri" pitchFamily="34" charset="-122"/>
-                <a:cs typeface="Calibri" pitchFamily="34" charset="-120"/>
+                <a:cs typeface="Amiri" pitchFamily="2" charset="-78"/>
               </a:rPr>
               <a:t>A</a:t>
             </a:r>
@@ -28970,8 +28451,7 @@
                   <a:srgbClr val="1F2A37"/>
                 </a:solidFill>
                 <a:latin typeface="Calibri" pitchFamily="34" charset="0"/>
-                <a:ea typeface="Calibri" pitchFamily="34" charset="-122"/>
-                <a:cs typeface="Calibri" pitchFamily="34" charset="-120"/>
+                <a:cs typeface="Amiri" pitchFamily="2" charset="-78"/>
               </a:rPr>
               <a:t>Egypt</a:t>
             </a:r>
@@ -29034,8 +28514,7 @@
                   <a:srgbClr val="1B3B6F"/>
                 </a:solidFill>
                 <a:latin typeface="Calibri" pitchFamily="34" charset="0"/>
-                <a:ea typeface="Calibri" pitchFamily="34" charset="-122"/>
-                <a:cs typeface="Calibri" pitchFamily="34" charset="-120"/>
+                <a:cs typeface="Amiri" pitchFamily="2" charset="-78"/>
               </a:rPr>
               <a:t>B</a:t>
             </a:r>
@@ -29073,8 +28552,7 @@
                   <a:srgbClr val="9AA1AB"/>
                 </a:solidFill>
                 <a:latin typeface="Calibri" pitchFamily="34" charset="0"/>
-                <a:ea typeface="Calibri" pitchFamily="34" charset="-122"/>
-                <a:cs typeface="Calibri" pitchFamily="34" charset="-120"/>
+                <a:cs typeface="Amiri" pitchFamily="2" charset="-78"/>
               </a:rPr>
               <a:t>Morocco</a:t>
             </a:r>
@@ -29137,8 +28615,7 @@
                   <a:srgbClr val="1B3B6F"/>
                 </a:solidFill>
                 <a:latin typeface="Calibri" pitchFamily="34" charset="0"/>
-                <a:ea typeface="Calibri" pitchFamily="34" charset="-122"/>
-                <a:cs typeface="Calibri" pitchFamily="34" charset="-120"/>
+                <a:cs typeface="Amiri" pitchFamily="2" charset="-78"/>
               </a:rPr>
               <a:t>C</a:t>
             </a:r>
@@ -29176,8 +28653,7 @@
                   <a:srgbClr val="9AA1AB"/>
                 </a:solidFill>
                 <a:latin typeface="Calibri" pitchFamily="34" charset="0"/>
-                <a:ea typeface="Calibri" pitchFamily="34" charset="-122"/>
-                <a:cs typeface="Calibri" pitchFamily="34" charset="-120"/>
+                <a:cs typeface="Amiri" pitchFamily="2" charset="-78"/>
               </a:rPr>
               <a:t>Iraq</a:t>
             </a:r>
@@ -29215,8 +28691,7 @@
                   <a:srgbClr val="8A6D1E"/>
                 </a:solidFill>
                 <a:latin typeface="Calibri" pitchFamily="34" charset="0"/>
-                <a:ea typeface="Calibri" pitchFamily="34" charset="-122"/>
-                <a:cs typeface="Calibri" pitchFamily="34" charset="-120"/>
+                <a:cs typeface="Amiri" pitchFamily="2" charset="-78"/>
               </a:rPr>
               <a:t>Nile Valley.</a:t>
             </a:r>
@@ -29313,8 +28788,7 @@
                   <a:srgbClr val="FFFFFF"/>
                 </a:solidFill>
                 <a:latin typeface="Calibri" pitchFamily="34" charset="0"/>
-                <a:ea typeface="Calibri" pitchFamily="34" charset="-122"/>
-                <a:cs typeface="Calibri" pitchFamily="34" charset="-120"/>
+                <a:cs typeface="Amiri" pitchFamily="2" charset="-78"/>
               </a:rPr>
               <a:t>2</a:t>
             </a:r>
@@ -29352,8 +28826,7 @@
                   <a:srgbClr val="1B3B6F"/>
                 </a:solidFill>
                 <a:latin typeface="Calibri" pitchFamily="34" charset="0"/>
-                <a:ea typeface="Calibri" pitchFamily="34" charset="-122"/>
-                <a:cs typeface="Calibri" pitchFamily="34" charset="-120"/>
+                <a:cs typeface="Amiri" pitchFamily="2" charset="-78"/>
               </a:rPr>
               <a:t>Which calligraphy style is our clear school hand based on?</a:t>
             </a:r>
@@ -29416,8 +28889,7 @@
                   <a:srgbClr val="1B3B6F"/>
                 </a:solidFill>
                 <a:latin typeface="Calibri" pitchFamily="34" charset="0"/>
-                <a:ea typeface="Calibri" pitchFamily="34" charset="-122"/>
-                <a:cs typeface="Calibri" pitchFamily="34" charset="-120"/>
+                <a:cs typeface="Amiri" pitchFamily="2" charset="-78"/>
               </a:rPr>
               <a:t>A</a:t>
             </a:r>
@@ -29455,8 +28927,7 @@
                   <a:srgbClr val="9AA1AB"/>
                 </a:solidFill>
                 <a:latin typeface="Calibri" pitchFamily="34" charset="0"/>
-                <a:ea typeface="Calibri" pitchFamily="34" charset="-122"/>
-                <a:cs typeface="Calibri" pitchFamily="34" charset="-120"/>
+                <a:cs typeface="Amiri" pitchFamily="2" charset="-78"/>
               </a:rPr>
               <a:t>Thuluth</a:t>
             </a:r>
@@ -29546,8 +29017,7 @@
                   <a:srgbClr val="FFFFFF"/>
                 </a:solidFill>
                 <a:latin typeface="Calibri" pitchFamily="34" charset="0"/>
-                <a:ea typeface="Calibri" pitchFamily="34" charset="-122"/>
-                <a:cs typeface="Calibri" pitchFamily="34" charset="-120"/>
+                <a:cs typeface="Amiri" pitchFamily="2" charset="-78"/>
               </a:rPr>
               <a:t>B</a:t>
             </a:r>
@@ -29585,8 +29055,7 @@
                   <a:srgbClr val="1F2A37"/>
                 </a:solidFill>
                 <a:latin typeface="Calibri" pitchFamily="34" charset="0"/>
-                <a:ea typeface="Calibri" pitchFamily="34" charset="-122"/>
-                <a:cs typeface="Calibri" pitchFamily="34" charset="-120"/>
+                <a:cs typeface="Amiri" pitchFamily="2" charset="-78"/>
               </a:rPr>
               <a:t>Naskh</a:t>
             </a:r>
@@ -29649,8 +29118,7 @@
                   <a:srgbClr val="1B3B6F"/>
                 </a:solidFill>
                 <a:latin typeface="Calibri" pitchFamily="34" charset="0"/>
-                <a:ea typeface="Calibri" pitchFamily="34" charset="-122"/>
-                <a:cs typeface="Calibri" pitchFamily="34" charset="-120"/>
+                <a:cs typeface="Amiri" pitchFamily="2" charset="-78"/>
               </a:rPr>
               <a:t>C</a:t>
             </a:r>
@@ -29688,8 +29156,7 @@
                   <a:srgbClr val="9AA1AB"/>
                 </a:solidFill>
                 <a:latin typeface="Calibri" pitchFamily="34" charset="0"/>
-                <a:ea typeface="Calibri" pitchFamily="34" charset="-122"/>
-                <a:cs typeface="Calibri" pitchFamily="34" charset="-120"/>
+                <a:cs typeface="Amiri" pitchFamily="2" charset="-78"/>
               </a:rPr>
               <a:t>Ruqʿah</a:t>
             </a:r>
@@ -29727,8 +29194,7 @@
                   <a:srgbClr val="8A6D1E"/>
                 </a:solidFill>
                 <a:latin typeface="Calibri" pitchFamily="34" charset="0"/>
-                <a:ea typeface="Calibri" pitchFamily="34" charset="-122"/>
-                <a:cs typeface="Calibri" pitchFamily="34" charset="-120"/>
+                <a:cs typeface="Amiri" pitchFamily="2" charset="-78"/>
               </a:rPr>
               <a:t>Website Part 5.</a:t>
             </a:r>
@@ -29825,8 +29291,7 @@
                   <a:srgbClr val="FFFFFF"/>
                 </a:solidFill>
                 <a:latin typeface="Calibri" pitchFamily="34" charset="0"/>
-                <a:ea typeface="Calibri" pitchFamily="34" charset="-122"/>
-                <a:cs typeface="Calibri" pitchFamily="34" charset="-120"/>
+                <a:cs typeface="Amiri" pitchFamily="2" charset="-78"/>
               </a:rPr>
               <a:t>3</a:t>
             </a:r>
@@ -29864,8 +29329,7 @@
                   <a:srgbClr val="1B3B6F"/>
                 </a:solidFill>
                 <a:latin typeface="Calibri" pitchFamily="34" charset="0"/>
-                <a:ea typeface="Calibri" pitchFamily="34" charset="-122"/>
-                <a:cs typeface="Calibri" pitchFamily="34" charset="-120"/>
+                <a:cs typeface="Amiri" pitchFamily="2" charset="-78"/>
               </a:rPr>
               <a:t>A sign is cropped and has no source. What do you say?</a:t>
             </a:r>
@@ -29928,8 +29392,7 @@
                   <a:srgbClr val="1B3B6F"/>
                 </a:solidFill>
                 <a:latin typeface="Calibri" pitchFamily="34" charset="0"/>
-                <a:ea typeface="Calibri" pitchFamily="34" charset="-122"/>
-                <a:cs typeface="Calibri" pitchFamily="34" charset="-120"/>
+                <a:cs typeface="Amiri" pitchFamily="2" charset="-78"/>
               </a:rPr>
               <a:t>A</a:t>
             </a:r>
@@ -29967,8 +29430,7 @@
                   <a:srgbClr val="9AA1AB"/>
                 </a:solidFill>
                 <a:latin typeface="Calibri" pitchFamily="34" charset="0"/>
-                <a:ea typeface="Calibri" pitchFamily="34" charset="-122"/>
-                <a:cs typeface="Calibri" pitchFamily="34" charset="-120"/>
+                <a:cs typeface="Amiri" pitchFamily="2" charset="-78"/>
               </a:rPr>
               <a:t>“I am sure what it means.”</a:t>
             </a:r>
@@ -30058,8 +29520,7 @@
                   <a:srgbClr val="FFFFFF"/>
                 </a:solidFill>
                 <a:latin typeface="Calibri" pitchFamily="34" charset="0"/>
-                <a:ea typeface="Calibri" pitchFamily="34" charset="-122"/>
-                <a:cs typeface="Calibri" pitchFamily="34" charset="-120"/>
+                <a:cs typeface="Amiri" pitchFamily="2" charset="-78"/>
               </a:rPr>
               <a:t>B</a:t>
             </a:r>
@@ -30097,8 +29558,7 @@
                   <a:srgbClr val="1F2A37"/>
                 </a:solidFill>
                 <a:latin typeface="Calibri" pitchFamily="34" charset="0"/>
-                <a:ea typeface="Calibri" pitchFamily="34" charset="-122"/>
-                <a:cs typeface="Calibri" pitchFamily="34" charset="-120"/>
+                <a:cs typeface="Amiri" pitchFamily="2" charset="-78"/>
               </a:rPr>
               <a:t>“I can identify the script, but I cannot yet verify the meaning.”</a:t>
             </a:r>
@@ -30136,8 +29596,7 @@
                   <a:srgbClr val="8A6D1E"/>
                 </a:solidFill>
                 <a:latin typeface="Calibri" pitchFamily="34" charset="0"/>
-                <a:ea typeface="Calibri" pitchFamily="34" charset="-122"/>
-                <a:cs typeface="Calibri" pitchFamily="34" charset="-120"/>
+                <a:cs typeface="Amiri" pitchFamily="2" charset="-78"/>
               </a:rPr>
               <a:t>Website strong sentence.</a:t>
             </a:r>
@@ -30209,8 +29668,7 @@
                   <a:srgbClr val="1B3B6F"/>
                 </a:solidFill>
                 <a:latin typeface="Calibri" pitchFamily="34" charset="0"/>
-                <a:ea typeface="Calibri" pitchFamily="34" charset="-122"/>
-                <a:cs typeface="Calibri" pitchFamily="34" charset="-120"/>
+                <a:cs typeface="Amiri" pitchFamily="2" charset="-78"/>
               </a:rPr>
               <a:t>SCORE</a:t>
             </a:r>
@@ -30248,8 +29706,7 @@
                   <a:srgbClr val="1F2A37"/>
                 </a:solidFill>
                 <a:latin typeface="Calibri" pitchFamily="34" charset="0"/>
-                <a:ea typeface="Calibri" pitchFamily="34" charset="-122"/>
-                <a:cs typeface="Calibri" pitchFamily="34" charset="-120"/>
+                <a:cs typeface="Amiri" pitchFamily="2" charset="-78"/>
               </a:rPr>
               <a:t>3/3 → aim for Stretch next lesson  ·  2/3 → Develop  ·  0–1 → Core route and a quick check-in during the next Do Now.</a:t>
             </a:r>
@@ -30287,8 +29744,7 @@
                   <a:srgbClr val="8A93A0"/>
                 </a:solidFill>
                 <a:latin typeface="Calibri" pitchFamily="34" charset="0"/>
-                <a:ea typeface="Calibri" pitchFamily="34" charset="-122"/>
-                <a:cs typeface="Calibri" pitchFamily="34" charset="-120"/>
+                <a:cs typeface="Amiri" pitchFamily="2" charset="-78"/>
               </a:rPr>
               <a:t>23 / 25</a:t>
             </a:r>
@@ -30382,9 +29838,8 @@
                 <a:solidFill>
                   <a:srgbClr val="D4AF37"/>
                 </a:solidFill>
-                <a:latin typeface="Amiri" pitchFamily="34" charset="0"/>
-                <a:ea typeface="Amiri" pitchFamily="34" charset="-122"/>
-                <a:cs typeface="Amiri" pitchFamily="34" charset="-120"/>
+                <a:latin typeface="Amiri" pitchFamily="2" charset="-78"/>
+                <a:cs typeface="Amiri" pitchFamily="2" charset="-78"/>
               </a:rPr>
               <a:t>م</a:t>
             </a:r>
@@ -30422,8 +29877,7 @@
                   <a:srgbClr val="1B3B6F"/>
                 </a:solidFill>
                 <a:latin typeface="Cambria" pitchFamily="34" charset="0"/>
-                <a:ea typeface="Cambria" pitchFamily="34" charset="-122"/>
-                <a:cs typeface="Cambria" pitchFamily="34" charset="-120"/>
+                <a:cs typeface="Amiri" pitchFamily="2" charset="-78"/>
               </a:rPr>
               <a:t>Al Madina Online School</a:t>
             </a:r>
@@ -30461,8 +29915,7 @@
                   <a:srgbClr val="8A6D1E"/>
                 </a:solidFill>
                 <a:latin typeface="Calibri" pitchFamily="34" charset="0"/>
-                <a:ea typeface="Calibri" pitchFamily="34" charset="-122"/>
-                <a:cs typeface="Calibri" pitchFamily="34" charset="-120"/>
+                <a:cs typeface="Amiri" pitchFamily="2" charset="-78"/>
               </a:rPr>
               <a:t>ARABIC DEPARTMENT · MIFTAH ARABIC · IGCSE 0544</a:t>
             </a:r>
@@ -30527,8 +29980,7 @@
                   <a:srgbClr val="FFFFFF"/>
                 </a:solidFill>
                 <a:latin typeface="Calibri" pitchFamily="34" charset="0"/>
-                <a:ea typeface="Calibri" pitchFamily="34" charset="-122"/>
-                <a:cs typeface="Calibri" pitchFamily="34" charset="-120"/>
+                <a:cs typeface="Amiri" pitchFamily="2" charset="-78"/>
               </a:rPr>
               <a:t>F1-L11 · Arabic around us</a:t>
             </a:r>
@@ -30593,8 +30045,7 @@
                   <a:srgbClr val="FFFFFF"/>
                 </a:solidFill>
                 <a:latin typeface="Calibri" pitchFamily="34" charset="0"/>
-                <a:ea typeface="Calibri" pitchFamily="34" charset="-122"/>
-                <a:cs typeface="Calibri" pitchFamily="34" charset="-120"/>
+                <a:cs typeface="Amiri" pitchFamily="2" charset="-78"/>
               </a:rPr>
               <a:t>PREPARATION · 2 MIN</a:t>
             </a:r>
@@ -30632,8 +30083,7 @@
                   <a:srgbClr val="C45A3C"/>
                 </a:solidFill>
                 <a:latin typeface="Calibri" pitchFamily="34" charset="0"/>
-                <a:ea typeface="Calibri" pitchFamily="34" charset="-122"/>
-                <a:cs typeface="Calibri" pitchFamily="34" charset="-120"/>
+                <a:cs typeface="Amiri" pitchFamily="2" charset="-78"/>
               </a:rPr>
               <a:t>PREPARATION FOR NEXT LESSON · ABOUT 10 MINUTES</a:t>
             </a:r>
@@ -30671,8 +30121,7 @@
                   <a:srgbClr val="1B3B6F"/>
                 </a:solidFill>
                 <a:latin typeface="Cambria" pitchFamily="34" charset="0"/>
-                <a:ea typeface="Cambria" pitchFamily="34" charset="-122"/>
-                <a:cs typeface="Cambria" pitchFamily="34" charset="-120"/>
+                <a:cs typeface="Amiri" pitchFamily="2" charset="-78"/>
               </a:rPr>
               <a:t>Before F1-L12: get ready at home</a:t>
             </a:r>
@@ -30709,9 +30158,8 @@
                 <a:solidFill>
                   <a:srgbClr val="8A6D1E"/>
                 </a:solidFill>
-                <a:latin typeface="Amiri" pitchFamily="34" charset="0"/>
-                <a:ea typeface="Amiri" pitchFamily="34" charset="-122"/>
-                <a:cs typeface="Amiri" pitchFamily="34" charset="-120"/>
+                <a:latin typeface="Amiri" pitchFamily="2" charset="-78"/>
+                <a:cs typeface="Amiri" pitchFamily="2" charset="-78"/>
               </a:rPr>
               <a:t>التَّحْضِيرُ لِلدَّرْسِ القَادِمِ</a:t>
             </a:r>
@@ -30749,8 +30197,7 @@
                   <a:srgbClr val="8A93A0"/>
                 </a:solidFill>
                 <a:latin typeface="Calibri" pitchFamily="34" charset="0"/>
-                <a:ea typeface="Calibri" pitchFamily="34" charset="-122"/>
-                <a:cs typeface="Calibri" pitchFamily="34" charset="-120"/>
+                <a:cs typeface="Amiri" pitchFamily="2" charset="-78"/>
               </a:rPr>
               <a:t>Miftah Arabic · Foundation F1 · Arabic Script &amp; Sounds · F1-L11</a:t>
             </a:r>
@@ -30871,8 +30318,7 @@
                   <a:srgbClr val="C45A3C"/>
                 </a:solidFill>
                 <a:latin typeface="Calibri" pitchFamily="34" charset="0"/>
-                <a:ea typeface="Calibri" pitchFamily="34" charset="-122"/>
-                <a:cs typeface="Calibri" pitchFamily="34" charset="-120"/>
+                <a:cs typeface="Amiri" pitchFamily="2" charset="-78"/>
               </a:rPr>
               <a:t>LEARN THESE 5 WORDS</a:t>
             </a:r>
@@ -30888,8 +30334,7 @@
                   <a:srgbClr val="5A6472"/>
                 </a:solidFill>
                 <a:latin typeface="Calibri" pitchFamily="34" charset="0"/>
-                <a:ea typeface="Calibri" pitchFamily="34" charset="-122"/>
-                <a:cs typeface="Calibri" pitchFamily="34" charset="-120"/>
+                <a:cs typeface="Amiri" pitchFamily="2" charset="-78"/>
               </a:rPr>
               <a:t>for F1-L12 · Review &amp; Assessment</a:t>
             </a:r>
@@ -30926,9 +30371,8 @@
                 <a:solidFill>
                   <a:srgbClr val="1B3B6F"/>
                 </a:solidFill>
-                <a:latin typeface="Amiri" pitchFamily="34" charset="0"/>
-                <a:ea typeface="Amiri" pitchFamily="34" charset="-122"/>
-                <a:cs typeface="Amiri" pitchFamily="34" charset="-120"/>
+                <a:latin typeface="Amiri" pitchFamily="2" charset="-78"/>
+                <a:cs typeface="Amiri" pitchFamily="2" charset="-78"/>
               </a:rPr>
               <a:t>ا د ذ ر ز و</a:t>
             </a:r>
@@ -30966,8 +30410,7 @@
                   <a:srgbClr val="1F2A37"/>
                 </a:solidFill>
                 <a:latin typeface="Calibri" pitchFamily="34" charset="0"/>
-                <a:ea typeface="Calibri" pitchFamily="34" charset="-122"/>
-                <a:cs typeface="Calibri" pitchFamily="34" charset="-120"/>
+                <a:cs typeface="Amiri" pitchFamily="2" charset="-78"/>
               </a:rPr>
               <a:t>the six non-connectors</a:t>
             </a:r>
@@ -31007,9 +30450,8 @@
                 <a:solidFill>
                   <a:srgbClr val="1B3B6F"/>
                 </a:solidFill>
-                <a:latin typeface="Amiri" pitchFamily="34" charset="0"/>
-                <a:ea typeface="Amiri" pitchFamily="34" charset="-122"/>
-                <a:cs typeface="Amiri" pitchFamily="34" charset="-120"/>
+                <a:latin typeface="Amiri" pitchFamily="2" charset="-78"/>
+                <a:cs typeface="Amiri" pitchFamily="2" charset="-78"/>
               </a:rPr>
               <a:t>بَ  بُ  بِ  بْ</a:t>
             </a:r>
@@ -31047,8 +30489,7 @@
                   <a:srgbClr val="1F2A37"/>
                 </a:solidFill>
                 <a:latin typeface="Calibri" pitchFamily="34" charset="0"/>
-                <a:ea typeface="Calibri" pitchFamily="34" charset="-122"/>
-                <a:cs typeface="Calibri" pitchFamily="34" charset="-120"/>
+                <a:cs typeface="Amiri" pitchFamily="2" charset="-78"/>
               </a:rPr>
               <a:t>fatḥa · ḍamma · kasra · sukūn</a:t>
             </a:r>
@@ -31088,9 +30529,8 @@
                 <a:solidFill>
                   <a:srgbClr val="1B3B6F"/>
                 </a:solidFill>
-                <a:latin typeface="Amiri" pitchFamily="34" charset="0"/>
-                <a:ea typeface="Amiri" pitchFamily="34" charset="-122"/>
-                <a:cs typeface="Amiri" pitchFamily="34" charset="-120"/>
+                <a:latin typeface="Amiri" pitchFamily="2" charset="-78"/>
+                <a:cs typeface="Amiri" pitchFamily="2" charset="-78"/>
               </a:rPr>
               <a:t>بّ  بٌ  آ  ء</a:t>
             </a:r>
@@ -31128,8 +30568,7 @@
                   <a:srgbClr val="1F2A37"/>
                 </a:solidFill>
                 <a:latin typeface="Calibri" pitchFamily="34" charset="0"/>
-                <a:ea typeface="Calibri" pitchFamily="34" charset="-122"/>
-                <a:cs typeface="Calibri" pitchFamily="34" charset="-120"/>
+                <a:cs typeface="Amiri" pitchFamily="2" charset="-78"/>
               </a:rPr>
               <a:t>shadda · tanwīn · madda · hamza</a:t>
             </a:r>
@@ -31169,9 +30608,8 @@
                 <a:solidFill>
                   <a:srgbClr val="1B3B6F"/>
                 </a:solidFill>
-                <a:latin typeface="Amiri" pitchFamily="34" charset="0"/>
-                <a:ea typeface="Amiri" pitchFamily="34" charset="-122"/>
-                <a:cs typeface="Amiri" pitchFamily="34" charset="-120"/>
+                <a:latin typeface="Amiri" pitchFamily="2" charset="-78"/>
+                <a:cs typeface="Amiri" pitchFamily="2" charset="-78"/>
               </a:rPr>
               <a:t>١ ٢ ٣ … ٢٠</a:t>
             </a:r>
@@ -31209,8 +30647,7 @@
                   <a:srgbClr val="1F2A37"/>
                 </a:solidFill>
                 <a:latin typeface="Calibri" pitchFamily="34" charset="0"/>
-                <a:ea typeface="Calibri" pitchFamily="34" charset="-122"/>
-                <a:cs typeface="Calibri" pitchFamily="34" charset="-120"/>
+                <a:cs typeface="Amiri" pitchFamily="2" charset="-78"/>
               </a:rPr>
               <a:t>numerals 0–20</a:t>
             </a:r>
@@ -31250,9 +30687,8 @@
                 <a:solidFill>
                   <a:srgbClr val="1B3B6F"/>
                 </a:solidFill>
-                <a:latin typeface="Amiri" pitchFamily="34" charset="0"/>
-                <a:ea typeface="Amiri" pitchFamily="34" charset="-122"/>
-                <a:cs typeface="Amiri" pitchFamily="34" charset="-120"/>
+                <a:latin typeface="Amiri" pitchFamily="2" charset="-78"/>
+                <a:cs typeface="Amiri" pitchFamily="2" charset="-78"/>
               </a:rPr>
               <a:t>مطعم · مدرسة</a:t>
             </a:r>
@@ -31290,8 +30726,7 @@
                   <a:srgbClr val="1F2A37"/>
                 </a:solidFill>
                 <a:latin typeface="Calibri" pitchFamily="34" charset="0"/>
-                <a:ea typeface="Calibri" pitchFamily="34" charset="-122"/>
-                <a:cs typeface="Calibri" pitchFamily="34" charset="-120"/>
+                <a:cs typeface="Amiri" pitchFamily="2" charset="-78"/>
               </a:rPr>
               <a:t>two sign words</a:t>
             </a:r>
@@ -31332,8 +30767,7 @@
                   <a:srgbClr val="C45A3C"/>
                 </a:solidFill>
                 <a:latin typeface="Calibri" pitchFamily="34" charset="0"/>
-                <a:ea typeface="Calibri" pitchFamily="34" charset="-122"/>
-                <a:cs typeface="Calibri" pitchFamily="34" charset="-120"/>
+                <a:cs typeface="Amiri" pitchFamily="2" charset="-78"/>
               </a:rPr>
               <a:t>AND ANSWER ONE QUESTION</a:t>
             </a:r>
@@ -31371,8 +30805,7 @@
                   <a:srgbClr val="1F2A37"/>
                 </a:solidFill>
                 <a:latin typeface="Calibri" pitchFamily="34" charset="0"/>
-                <a:ea typeface="Calibri" pitchFamily="34" charset="-122"/>
-                <a:cs typeface="Calibri" pitchFamily="34" charset="-120"/>
+                <a:cs typeface="Amiri" pitchFamily="2" charset="-78"/>
               </a:rPr>
               <a:t>Review the 28-letter chart and circle three letter families you feel unsure about.</a:t>
             </a:r>
@@ -31409,9 +30842,8 @@
                 <a:solidFill>
                   <a:srgbClr val="1B3B6F"/>
                 </a:solidFill>
-                <a:latin typeface="Amiri" pitchFamily="34" charset="0"/>
-                <a:ea typeface="Amiri" pitchFamily="34" charset="-122"/>
-                <a:cs typeface="Amiri" pitchFamily="34" charset="-120"/>
+                <a:latin typeface="Amiri" pitchFamily="2" charset="-78"/>
+                <a:cs typeface="Amiri" pitchFamily="2" charset="-78"/>
               </a:rPr>
               <a:t>ا ب ت ث … ن ه و ي</a:t>
             </a:r>
@@ -31449,8 +30881,7 @@
                   <a:srgbClr val="1B3B6F"/>
                 </a:solidFill>
                 <a:latin typeface="Calibri" pitchFamily="34" charset="0"/>
-                <a:ea typeface="Calibri" pitchFamily="34" charset="-122"/>
-                <a:cs typeface="Calibri" pitchFamily="34" charset="-120"/>
+                <a:cs typeface="Amiri" pitchFamily="2" charset="-78"/>
               </a:rPr>
               <a:t>HOMEWORK — CHOOSE YOUR ROUTE</a:t>
             </a:r>
@@ -31549,8 +30980,7 @@
                   <a:srgbClr val="FFFFFF"/>
                 </a:solidFill>
                 <a:latin typeface="Calibri" pitchFamily="34" charset="0"/>
-                <a:ea typeface="Calibri" pitchFamily="34" charset="-122"/>
-                <a:cs typeface="Calibri" pitchFamily="34" charset="-120"/>
+                <a:cs typeface="Amiri" pitchFamily="2" charset="-78"/>
               </a:rPr>
               <a:t>CORE</a:t>
             </a:r>
@@ -31588,8 +31018,7 @@
                   <a:srgbClr val="1F2A37"/>
                 </a:solidFill>
                 <a:latin typeface="Calibri" pitchFamily="34" charset="0"/>
-                <a:ea typeface="Calibri" pitchFamily="34" charset="-122"/>
-                <a:cs typeface="Calibri" pitchFamily="34" charset="-120"/>
+                <a:cs typeface="Amiri" pitchFamily="2" charset="-78"/>
               </a:rPr>
               <a:t>Website “Next step”: review the 28-letter chart; practise the six non-connectors.</a:t>
             </a:r>
@@ -31688,8 +31117,7 @@
                   <a:srgbClr val="FFFFFF"/>
                 </a:solidFill>
                 <a:latin typeface="Calibri" pitchFamily="34" charset="0"/>
-                <a:ea typeface="Calibri" pitchFamily="34" charset="-122"/>
-                <a:cs typeface="Calibri" pitchFamily="34" charset="-120"/>
+                <a:cs typeface="Amiri" pitchFamily="2" charset="-78"/>
               </a:rPr>
               <a:t>DEVELOP</a:t>
             </a:r>
@@ -31727,8 +31155,7 @@
                   <a:srgbClr val="1F2A37"/>
                 </a:solidFill>
                 <a:latin typeface="Calibri" pitchFamily="34" charset="0"/>
-                <a:ea typeface="Calibri" pitchFamily="34" charset="-122"/>
-                <a:cs typeface="Calibri" pitchFamily="34" charset="-120"/>
+                <a:cs typeface="Amiri" pitchFamily="2" charset="-78"/>
               </a:rPr>
               <a:t>Website “Next step”: review diacritics, numerals 0–20 and five sign words.</a:t>
             </a:r>
@@ -31827,8 +31254,7 @@
                   <a:srgbClr val="FFFFFF"/>
                 </a:solidFill>
                 <a:latin typeface="Calibri" pitchFamily="34" charset="0"/>
-                <a:ea typeface="Calibri" pitchFamily="34" charset="-122"/>
-                <a:cs typeface="Calibri" pitchFamily="34" charset="-120"/>
+                <a:cs typeface="Amiri" pitchFamily="2" charset="-78"/>
               </a:rPr>
               <a:t>STRETCH</a:t>
             </a:r>
@@ -31866,8 +31292,7 @@
                   <a:srgbClr val="1F2A37"/>
                 </a:solidFill>
                 <a:latin typeface="Calibri" pitchFamily="34" charset="0"/>
-                <a:ea typeface="Calibri" pitchFamily="34" charset="-122"/>
-                <a:cs typeface="Calibri" pitchFamily="34" charset="-120"/>
+                <a:cs typeface="Amiri" pitchFamily="2" charset="-78"/>
               </a:rPr>
               <a:t>Website “Next step”: prepare a short vowelled read-aloud passage and one question for the review lesson.</a:t>
             </a:r>
@@ -31905,8 +31330,7 @@
                   <a:srgbClr val="8A93A0"/>
                 </a:solidFill>
                 <a:latin typeface="Calibri" pitchFamily="34" charset="0"/>
-                <a:ea typeface="Calibri" pitchFamily="34" charset="-122"/>
-                <a:cs typeface="Calibri" pitchFamily="34" charset="-120"/>
+                <a:cs typeface="Amiri" pitchFamily="2" charset="-78"/>
               </a:rPr>
               <a:t>24 / 25</a:t>
             </a:r>
@@ -32050,8 +31474,7 @@
                   <a:srgbClr val="D4AF37"/>
                 </a:solidFill>
                 <a:latin typeface="Calibri" pitchFamily="34" charset="0"/>
-                <a:ea typeface="Calibri" pitchFamily="34" charset="-122"/>
-                <a:cs typeface="Calibri" pitchFamily="34" charset="-120"/>
+                <a:cs typeface="Amiri" pitchFamily="2" charset="-78"/>
               </a:rPr>
               <a:t>F1-L11 COMPLETE</a:t>
             </a:r>
@@ -32088,9 +31511,8 @@
                 <a:solidFill>
                   <a:srgbClr val="FFFFFF"/>
                 </a:solidFill>
-                <a:latin typeface="Amiri" pitchFamily="34" charset="0"/>
-                <a:ea typeface="Amiri" pitchFamily="34" charset="-122"/>
-                <a:cs typeface="Amiri" pitchFamily="34" charset="-120"/>
+                <a:latin typeface="Amiri" pitchFamily="2" charset="-78"/>
+                <a:cs typeface="Amiri" pitchFamily="2" charset="-78"/>
               </a:rPr>
               <a:t>أَحْسَنْتُمْ! إِلَى اللِّقَاءِ</a:t>
             </a:r>
@@ -32128,8 +31550,7 @@
                   <a:srgbClr val="C6D2E6"/>
                 </a:solidFill>
                 <a:latin typeface="Calibri" pitchFamily="34" charset="0"/>
-                <a:ea typeface="Calibri" pitchFamily="34" charset="-122"/>
-                <a:cs typeface="Calibri" pitchFamily="34" charset="-120"/>
+                <a:cs typeface="Amiri" pitchFamily="2" charset="-78"/>
               </a:rPr>
               <a:t>Well done — see you next lesson.</a:t>
             </a:r>
@@ -32167,8 +31588,7 @@
                   <a:srgbClr val="D4AF37"/>
                 </a:solidFill>
                 <a:latin typeface="Calibri" pitchFamily="34" charset="0"/>
-                <a:ea typeface="Calibri" pitchFamily="34" charset="-122"/>
-                <a:cs typeface="Calibri" pitchFamily="34" charset="-120"/>
+                <a:cs typeface="Amiri" pitchFamily="2" charset="-78"/>
               </a:rPr>
               <a:t>NEXT LESSON</a:t>
             </a:r>
@@ -32206,8 +31626,7 @@
                   <a:srgbClr val="FFFFFF"/>
                 </a:solidFill>
                 <a:latin typeface="Cambria" pitchFamily="34" charset="0"/>
-                <a:ea typeface="Cambria" pitchFamily="34" charset="-122"/>
-                <a:cs typeface="Cambria" pitchFamily="34" charset="-120"/>
+                <a:cs typeface="Amiri" pitchFamily="2" charset="-78"/>
               </a:rPr>
               <a:t>F1-L12 · Review &amp; Assessment</a:t>
             </a:r>
@@ -32244,9 +31663,8 @@
                 <a:solidFill>
                   <a:srgbClr val="D4AF37"/>
                 </a:solidFill>
-                <a:latin typeface="Amiri" pitchFamily="34" charset="0"/>
-                <a:ea typeface="Amiri" pitchFamily="34" charset="-122"/>
-                <a:cs typeface="Amiri" pitchFamily="34" charset="-120"/>
+                <a:latin typeface="Amiri" pitchFamily="2" charset="-78"/>
+                <a:cs typeface="Amiri" pitchFamily="2" charset="-78"/>
               </a:rPr>
               <a:t>مُرَاجَعَةُ الوَحْدَةِ الأُولَى</a:t>
             </a:r>
@@ -32284,8 +31702,7 @@
                   <a:srgbClr val="FFFFFF"/>
                 </a:solidFill>
                 <a:latin typeface="Calibri" pitchFamily="34" charset="0"/>
-                <a:ea typeface="Calibri" pitchFamily="34" charset="-122"/>
-                <a:cs typeface="Calibri" pitchFamily="34" charset="-120"/>
+                <a:cs typeface="Amiri" pitchFamily="2" charset="-78"/>
               </a:rPr>
               <a:t>Remember: revise the 5 areas + bring one question.</a:t>
             </a:r>
@@ -32379,9 +31796,8 @@
                 <a:solidFill>
                   <a:srgbClr val="D4AF37"/>
                 </a:solidFill>
-                <a:latin typeface="Amiri" pitchFamily="34" charset="0"/>
-                <a:ea typeface="Amiri" pitchFamily="34" charset="-122"/>
-                <a:cs typeface="Amiri" pitchFamily="34" charset="-120"/>
+                <a:latin typeface="Amiri" pitchFamily="2" charset="-78"/>
+                <a:cs typeface="Amiri" pitchFamily="2" charset="-78"/>
               </a:rPr>
               <a:t>م</a:t>
             </a:r>
@@ -32419,8 +31835,7 @@
                   <a:srgbClr val="1B3B6F"/>
                 </a:solidFill>
                 <a:latin typeface="Cambria" pitchFamily="34" charset="0"/>
-                <a:ea typeface="Cambria" pitchFamily="34" charset="-122"/>
-                <a:cs typeface="Cambria" pitchFamily="34" charset="-120"/>
+                <a:cs typeface="Amiri" pitchFamily="2" charset="-78"/>
               </a:rPr>
               <a:t>Al Madina Online School</a:t>
             </a:r>
@@ -32458,8 +31873,7 @@
                   <a:srgbClr val="8A6D1E"/>
                 </a:solidFill>
                 <a:latin typeface="Calibri" pitchFamily="34" charset="0"/>
-                <a:ea typeface="Calibri" pitchFamily="34" charset="-122"/>
-                <a:cs typeface="Calibri" pitchFamily="34" charset="-120"/>
+                <a:cs typeface="Amiri" pitchFamily="2" charset="-78"/>
               </a:rPr>
               <a:t>ARABIC DEPARTMENT · MIFTAH ARABIC · IGCSE 0544</a:t>
             </a:r>
@@ -32524,8 +31938,7 @@
                   <a:srgbClr val="FFFFFF"/>
                 </a:solidFill>
                 <a:latin typeface="Calibri" pitchFamily="34" charset="0"/>
-                <a:ea typeface="Calibri" pitchFamily="34" charset="-122"/>
-                <a:cs typeface="Calibri" pitchFamily="34" charset="-120"/>
+                <a:cs typeface="Amiri" pitchFamily="2" charset="-78"/>
               </a:rPr>
               <a:t>F1-L11 · Arabic around us</a:t>
             </a:r>
@@ -32590,8 +32003,7 @@
                   <a:srgbClr val="FFFFFF"/>
                 </a:solidFill>
                 <a:latin typeface="Calibri" pitchFamily="34" charset="0"/>
-                <a:ea typeface="Calibri" pitchFamily="34" charset="-122"/>
-                <a:cs typeface="Calibri" pitchFamily="34" charset="-120"/>
+                <a:cs typeface="Amiri" pitchFamily="2" charset="-78"/>
               </a:rPr>
               <a:t>WELCOME</a:t>
             </a:r>
@@ -32629,8 +32041,7 @@
                   <a:srgbClr val="5A6472"/>
                 </a:solidFill>
                 <a:latin typeface="Calibri" pitchFamily="34" charset="0"/>
-                <a:ea typeface="Calibri" pitchFamily="34" charset="-122"/>
-                <a:cs typeface="Calibri" pitchFamily="34" charset="-120"/>
+                <a:cs typeface="Amiri" pitchFamily="2" charset="-78"/>
               </a:rPr>
               <a:t>TODAY’S LESSON MAP</a:t>
             </a:r>
@@ -32668,8 +32079,7 @@
                   <a:srgbClr val="1B3B6F"/>
                 </a:solidFill>
                 <a:latin typeface="Cambria" pitchFamily="34" charset="0"/>
-                <a:ea typeface="Cambria" pitchFamily="34" charset="-122"/>
-                <a:cs typeface="Cambria" pitchFamily="34" charset="-120"/>
+                <a:cs typeface="Amiri" pitchFamily="2" charset="-78"/>
               </a:rPr>
               <a:t>Our lesson today, step by step</a:t>
             </a:r>
@@ -32706,9 +32116,8 @@
                 <a:solidFill>
                   <a:srgbClr val="8A6D1E"/>
                 </a:solidFill>
-                <a:latin typeface="Amiri" pitchFamily="34" charset="0"/>
-                <a:ea typeface="Amiri" pitchFamily="34" charset="-122"/>
-                <a:cs typeface="Amiri" pitchFamily="34" charset="-120"/>
+                <a:latin typeface="Amiri" pitchFamily="2" charset="-78"/>
+                <a:cs typeface="Amiri" pitchFamily="2" charset="-78"/>
               </a:rPr>
               <a:t>خَرِيطَةُ الدَّرْسِ</a:t>
             </a:r>
@@ -32746,8 +32155,7 @@
                   <a:srgbClr val="8A93A0"/>
                 </a:solidFill>
                 <a:latin typeface="Calibri" pitchFamily="34" charset="0"/>
-                <a:ea typeface="Calibri" pitchFamily="34" charset="-122"/>
-                <a:cs typeface="Calibri" pitchFamily="34" charset="-120"/>
+                <a:cs typeface="Amiri" pitchFamily="2" charset="-78"/>
               </a:rPr>
               <a:t>Miftah Arabic · Foundation F1 · Arabic Script &amp; Sounds · F1-L11</a:t>
             </a:r>
@@ -32846,8 +32254,7 @@
                   <a:srgbClr val="FFFFFF"/>
                 </a:solidFill>
                 <a:latin typeface="Calibri" pitchFamily="34" charset="0"/>
-                <a:ea typeface="Calibri" pitchFamily="34" charset="-122"/>
-                <a:cs typeface="Calibri" pitchFamily="34" charset="-120"/>
+                <a:cs typeface="Amiri" pitchFamily="2" charset="-78"/>
               </a:rPr>
               <a:t>DO NOW</a:t>
             </a:r>
@@ -32885,8 +32292,7 @@
                   <a:srgbClr val="E8EDF5"/>
                 </a:solidFill>
                 <a:latin typeface="Calibri" pitchFamily="34" charset="0"/>
-                <a:ea typeface="Calibri" pitchFamily="34" charset="-122"/>
-                <a:cs typeface="Calibri" pitchFamily="34" charset="-120"/>
+                <a:cs typeface="Amiri" pitchFamily="2" charset="-78"/>
               </a:rPr>
               <a:t>7 min</a:t>
             </a:r>
@@ -32949,8 +32355,7 @@
                   <a:srgbClr val="1B3B6F"/>
                 </a:solidFill>
                 <a:latin typeface="Calibri" pitchFamily="34" charset="0"/>
-                <a:ea typeface="Calibri" pitchFamily="34" charset="-122"/>
-                <a:cs typeface="Calibri" pitchFamily="34" charset="-120"/>
+                <a:cs typeface="Amiri" pitchFamily="2" charset="-78"/>
               </a:rPr>
               <a:t>1</a:t>
             </a:r>
@@ -32988,8 +32393,7 @@
                   <a:srgbClr val="1F2A37"/>
                 </a:solidFill>
                 <a:latin typeface="Calibri" pitchFamily="34" charset="0"/>
-                <a:ea typeface="Calibri" pitchFamily="34" charset="-122"/>
-                <a:cs typeface="Calibri" pitchFamily="34" charset="-120"/>
+                <a:cs typeface="Amiri" pitchFamily="2" charset="-78"/>
               </a:rPr>
               <a:t>Retrieval quiz on your own, then we check together.</a:t>
             </a:r>
@@ -33026,9 +32430,8 @@
                 <a:solidFill>
                   <a:srgbClr val="0E7C86"/>
                 </a:solidFill>
-                <a:latin typeface="Amiri" pitchFamily="34" charset="0"/>
-                <a:ea typeface="Amiri" pitchFamily="34" charset="-122"/>
-                <a:cs typeface="Amiri" pitchFamily="34" charset="-120"/>
+                <a:latin typeface="Amiri" pitchFamily="2" charset="-78"/>
+                <a:cs typeface="Amiri" pitchFamily="2" charset="-78"/>
               </a:rPr>
               <a:t>اِبْدَأِ الآنَ</a:t>
             </a:r>
@@ -33127,8 +32530,7 @@
                   <a:srgbClr val="FFFFFF"/>
                 </a:solidFill>
                 <a:latin typeface="Calibri" pitchFamily="34" charset="0"/>
-                <a:ea typeface="Calibri" pitchFamily="34" charset="-122"/>
-                <a:cs typeface="Calibri" pitchFamily="34" charset="-120"/>
+                <a:cs typeface="Amiri" pitchFamily="2" charset="-78"/>
               </a:rPr>
               <a:t>TEACHER INSTRUCTION</a:t>
             </a:r>
@@ -33166,8 +32568,7 @@
                   <a:srgbClr val="E8EDF5"/>
                 </a:solidFill>
                 <a:latin typeface="Calibri" pitchFamily="34" charset="0"/>
-                <a:ea typeface="Calibri" pitchFamily="34" charset="-122"/>
-                <a:cs typeface="Calibri" pitchFamily="34" charset="-120"/>
+                <a:cs typeface="Amiri" pitchFamily="2" charset="-78"/>
               </a:rPr>
               <a:t>14 min</a:t>
             </a:r>
@@ -33230,8 +32631,7 @@
                   <a:srgbClr val="1B3B6F"/>
                 </a:solidFill>
                 <a:latin typeface="Calibri" pitchFamily="34" charset="0"/>
-                <a:ea typeface="Calibri" pitchFamily="34" charset="-122"/>
-                <a:cs typeface="Calibri" pitchFamily="34" charset="-120"/>
+                <a:cs typeface="Amiri" pitchFamily="2" charset="-78"/>
               </a:rPr>
               <a:t>2</a:t>
             </a:r>
@@ -33269,8 +32669,7 @@
                   <a:srgbClr val="1F2A37"/>
                 </a:solidFill>
                 <a:latin typeface="Calibri" pitchFamily="34" charset="0"/>
-                <a:ea typeface="Calibri" pitchFamily="34" charset="-122"/>
-                <a:cs typeface="Calibri" pitchFamily="34" charset="-120"/>
+                <a:cs typeface="Amiri" pitchFamily="2" charset="-78"/>
               </a:rPr>
               <a:t>Script, language, meaning; MSA and dialects.</a:t>
             </a:r>
@@ -33307,9 +32706,8 @@
                 <a:solidFill>
                   <a:srgbClr val="1B3B6F"/>
                 </a:solidFill>
-                <a:latin typeface="Amiri" pitchFamily="34" charset="0"/>
-                <a:ea typeface="Amiri" pitchFamily="34" charset="-122"/>
-                <a:cs typeface="Amiri" pitchFamily="34" charset="-120"/>
+                <a:latin typeface="Amiri" pitchFamily="2" charset="-78"/>
+                <a:cs typeface="Amiri" pitchFamily="2" charset="-78"/>
               </a:rPr>
               <a:t>كَلِمَاتٌ وَقَوَاعِدُ</a:t>
             </a:r>
@@ -33408,8 +32806,7 @@
                   <a:srgbClr val="FFFFFF"/>
                 </a:solidFill>
                 <a:latin typeface="Calibri" pitchFamily="34" charset="0"/>
-                <a:ea typeface="Calibri" pitchFamily="34" charset="-122"/>
-                <a:cs typeface="Calibri" pitchFamily="34" charset="-120"/>
+                <a:cs typeface="Amiri" pitchFamily="2" charset="-78"/>
               </a:rPr>
               <a:t>I DO</a:t>
             </a:r>
@@ -33447,8 +32844,7 @@
                   <a:srgbClr val="E8EDF5"/>
                 </a:solidFill>
                 <a:latin typeface="Calibri" pitchFamily="34" charset="0"/>
-                <a:ea typeface="Calibri" pitchFamily="34" charset="-122"/>
-                <a:cs typeface="Calibri" pitchFamily="34" charset="-120"/>
+                <a:cs typeface="Amiri" pitchFamily="2" charset="-78"/>
               </a:rPr>
               <a:t>3 min</a:t>
             </a:r>
@@ -33511,8 +32907,7 @@
                   <a:srgbClr val="1B3B6F"/>
                 </a:solidFill>
                 <a:latin typeface="Calibri" pitchFamily="34" charset="0"/>
-                <a:ea typeface="Calibri" pitchFamily="34" charset="-122"/>
-                <a:cs typeface="Calibri" pitchFamily="34" charset="-120"/>
+                <a:cs typeface="Amiri" pitchFamily="2" charset="-78"/>
               </a:rPr>
               <a:t>3</a:t>
             </a:r>
@@ -33550,8 +32945,7 @@
                   <a:srgbClr val="1F2A37"/>
                 </a:solidFill>
                 <a:latin typeface="Calibri" pitchFamily="34" charset="0"/>
-                <a:ea typeface="Calibri" pitchFamily="34" charset="-122"/>
-                <a:cs typeface="Calibri" pitchFamily="34" charset="-120"/>
+                <a:cs typeface="Amiri" pitchFamily="2" charset="-78"/>
               </a:rPr>
               <a:t>Watch me build one sentence. Copy it into your book.</a:t>
             </a:r>
@@ -33588,9 +32982,8 @@
                 <a:solidFill>
                   <a:srgbClr val="6B4C9A"/>
                 </a:solidFill>
-                <a:latin typeface="Amiri" pitchFamily="34" charset="0"/>
-                <a:ea typeface="Amiri" pitchFamily="34" charset="-122"/>
-                <a:cs typeface="Amiri" pitchFamily="34" charset="-120"/>
+                <a:latin typeface="Amiri" pitchFamily="2" charset="-78"/>
+                <a:cs typeface="Amiri" pitchFamily="2" charset="-78"/>
               </a:rPr>
               <a:t>شَاهِدْ</a:t>
             </a:r>
@@ -33689,8 +33082,7 @@
                   <a:srgbClr val="FFFFFF"/>
                 </a:solidFill>
                 <a:latin typeface="Calibri" pitchFamily="34" charset="0"/>
-                <a:ea typeface="Calibri" pitchFamily="34" charset="-122"/>
-                <a:cs typeface="Calibri" pitchFamily="34" charset="-120"/>
+                <a:cs typeface="Amiri" pitchFamily="2" charset="-78"/>
               </a:rPr>
               <a:t>WE DO</a:t>
             </a:r>
@@ -33728,8 +33120,7 @@
                   <a:srgbClr val="E8EDF5"/>
                 </a:solidFill>
                 <a:latin typeface="Calibri" pitchFamily="34" charset="0"/>
-                <a:ea typeface="Calibri" pitchFamily="34" charset="-122"/>
-                <a:cs typeface="Calibri" pitchFamily="34" charset="-120"/>
+                <a:cs typeface="Amiri" pitchFamily="2" charset="-78"/>
               </a:rPr>
               <a:t>9 min</a:t>
             </a:r>
@@ -33792,8 +33183,7 @@
                   <a:srgbClr val="1B3B6F"/>
                 </a:solidFill>
                 <a:latin typeface="Calibri" pitchFamily="34" charset="0"/>
-                <a:ea typeface="Calibri" pitchFamily="34" charset="-122"/>
-                <a:cs typeface="Calibri" pitchFamily="34" charset="-120"/>
+                <a:cs typeface="Amiri" pitchFamily="2" charset="-78"/>
               </a:rPr>
               <a:t>4</a:t>
             </a:r>
@@ -33831,8 +33221,7 @@
                   <a:srgbClr val="1F2A37"/>
                 </a:solidFill>
                 <a:latin typeface="Calibri" pitchFamily="34" charset="0"/>
-                <a:ea typeface="Calibri" pitchFamily="34" charset="-122"/>
-                <a:cs typeface="Calibri" pitchFamily="34" charset="-120"/>
+                <a:cs typeface="Amiri" pitchFamily="2" charset="-78"/>
               </a:rPr>
               <a:t>Context sort, calligraphy, the ten-country route.</a:t>
             </a:r>
@@ -33869,9 +33258,8 @@
                 <a:solidFill>
                   <a:srgbClr val="2F6FB0"/>
                 </a:solidFill>
-                <a:latin typeface="Amiri" pitchFamily="34" charset="0"/>
-                <a:ea typeface="Amiri" pitchFamily="34" charset="-122"/>
-                <a:cs typeface="Amiri" pitchFamily="34" charset="-120"/>
+                <a:latin typeface="Amiri" pitchFamily="2" charset="-78"/>
+                <a:cs typeface="Amiri" pitchFamily="2" charset="-78"/>
               </a:rPr>
               <a:t>مَعًا</a:t>
             </a:r>
@@ -33970,8 +33358,7 @@
                   <a:srgbClr val="FFFFFF"/>
                 </a:solidFill>
                 <a:latin typeface="Calibri" pitchFamily="34" charset="0"/>
-                <a:ea typeface="Calibri" pitchFamily="34" charset="-122"/>
-                <a:cs typeface="Calibri" pitchFamily="34" charset="-120"/>
+                <a:cs typeface="Amiri" pitchFamily="2" charset="-78"/>
               </a:rPr>
               <a:t>YOU DO</a:t>
             </a:r>
@@ -34009,8 +33396,7 @@
                   <a:srgbClr val="E8EDF5"/>
                 </a:solidFill>
                 <a:latin typeface="Calibri" pitchFamily="34" charset="0"/>
-                <a:ea typeface="Calibri" pitchFamily="34" charset="-122"/>
-                <a:cs typeface="Calibri" pitchFamily="34" charset="-120"/>
+                <a:cs typeface="Amiri" pitchFamily="2" charset="-78"/>
               </a:rPr>
               <a:t>12 min</a:t>
             </a:r>
@@ -34073,8 +33459,7 @@
                   <a:srgbClr val="1B3B6F"/>
                 </a:solidFill>
                 <a:latin typeface="Calibri" pitchFamily="34" charset="0"/>
-                <a:ea typeface="Calibri" pitchFamily="34" charset="-122"/>
-                <a:cs typeface="Calibri" pitchFamily="34" charset="-120"/>
+                <a:cs typeface="Amiri" pitchFamily="2" charset="-78"/>
               </a:rPr>
               <a:t>5</a:t>
             </a:r>
@@ -34112,8 +33497,7 @@
                   <a:srgbClr val="1F2A37"/>
                 </a:solidFill>
                 <a:latin typeface="Calibri" pitchFamily="34" charset="0"/>
-                <a:ea typeface="Calibri" pitchFamily="34" charset="-122"/>
-                <a:cs typeface="Calibri" pitchFamily="34" charset="-120"/>
+                <a:cs typeface="Amiri" pitchFamily="2" charset="-78"/>
               </a:rPr>
               <a:t>Speak first, then write on your route.</a:t>
             </a:r>
@@ -34150,9 +33534,8 @@
                 <a:solidFill>
                   <a:srgbClr val="1E6B52"/>
                 </a:solidFill>
-                <a:latin typeface="Amiri" pitchFamily="34" charset="0"/>
-                <a:ea typeface="Amiri" pitchFamily="34" charset="-122"/>
-                <a:cs typeface="Amiri" pitchFamily="34" charset="-120"/>
+                <a:latin typeface="Amiri" pitchFamily="2" charset="-78"/>
+                <a:cs typeface="Amiri" pitchFamily="2" charset="-78"/>
               </a:rPr>
               <a:t>وَحْدَكَ</a:t>
             </a:r>
@@ -34251,8 +33634,7 @@
                   <a:srgbClr val="FFFFFF"/>
                 </a:solidFill>
                 <a:latin typeface="Calibri" pitchFamily="34" charset="0"/>
-                <a:ea typeface="Calibri" pitchFamily="34" charset="-122"/>
-                <a:cs typeface="Calibri" pitchFamily="34" charset="-120"/>
+                <a:cs typeface="Amiri" pitchFamily="2" charset="-78"/>
               </a:rPr>
               <a:t>FEEDBACK</a:t>
             </a:r>
@@ -34290,8 +33672,7 @@
                   <a:srgbClr val="E8EDF5"/>
                 </a:solidFill>
                 <a:latin typeface="Calibri" pitchFamily="34" charset="0"/>
-                <a:ea typeface="Calibri" pitchFamily="34" charset="-122"/>
-                <a:cs typeface="Calibri" pitchFamily="34" charset="-120"/>
+                <a:cs typeface="Amiri" pitchFamily="2" charset="-78"/>
               </a:rPr>
               <a:t>5 min</a:t>
             </a:r>
@@ -34354,8 +33735,7 @@
                   <a:srgbClr val="1B3B6F"/>
                 </a:solidFill>
                 <a:latin typeface="Calibri" pitchFamily="34" charset="0"/>
-                <a:ea typeface="Calibri" pitchFamily="34" charset="-122"/>
-                <a:cs typeface="Calibri" pitchFamily="34" charset="-120"/>
+                <a:cs typeface="Amiri" pitchFamily="2" charset="-78"/>
               </a:rPr>
               <a:t>6</a:t>
             </a:r>
@@ -34393,8 +33773,7 @@
                   <a:srgbClr val="1F2A37"/>
                 </a:solidFill>
                 <a:latin typeface="Calibri" pitchFamily="34" charset="0"/>
-                <a:ea typeface="Calibri" pitchFamily="34" charset="-122"/>
-                <a:cs typeface="Calibri" pitchFamily="34" charset="-120"/>
+                <a:cs typeface="Amiri" pitchFamily="2" charset="-78"/>
               </a:rPr>
               <a:t>Compare with a model and complete the exit ticket.</a:t>
             </a:r>
@@ -34431,9 +33810,8 @@
                 <a:solidFill>
                   <a:srgbClr val="8A6D1E"/>
                 </a:solidFill>
-                <a:latin typeface="Amiri" pitchFamily="34" charset="0"/>
-                <a:ea typeface="Amiri" pitchFamily="34" charset="-122"/>
-                <a:cs typeface="Amiri" pitchFamily="34" charset="-120"/>
+                <a:latin typeface="Amiri" pitchFamily="2" charset="-78"/>
+                <a:cs typeface="Amiri" pitchFamily="2" charset="-78"/>
               </a:rPr>
               <a:t>قَيِّمْ عَمَلَكَ</a:t>
             </a:r>
@@ -34532,8 +33910,7 @@
                   <a:srgbClr val="FFFFFF"/>
                 </a:solidFill>
                 <a:latin typeface="Calibri" pitchFamily="34" charset="0"/>
-                <a:ea typeface="Calibri" pitchFamily="34" charset="-122"/>
-                <a:cs typeface="Calibri" pitchFamily="34" charset="-120"/>
+                <a:cs typeface="Amiri" pitchFamily="2" charset="-78"/>
               </a:rPr>
               <a:t>PREPARATION</a:t>
             </a:r>
@@ -34571,8 +33948,7 @@
                   <a:srgbClr val="E8EDF5"/>
                 </a:solidFill>
                 <a:latin typeface="Calibri" pitchFamily="34" charset="0"/>
-                <a:ea typeface="Calibri" pitchFamily="34" charset="-122"/>
-                <a:cs typeface="Calibri" pitchFamily="34" charset="-120"/>
+                <a:cs typeface="Amiri" pitchFamily="2" charset="-78"/>
               </a:rPr>
               <a:t>2 min</a:t>
             </a:r>
@@ -34635,8 +34011,7 @@
                   <a:srgbClr val="1B3B6F"/>
                 </a:solidFill>
                 <a:latin typeface="Calibri" pitchFamily="34" charset="0"/>
-                <a:ea typeface="Calibri" pitchFamily="34" charset="-122"/>
-                <a:cs typeface="Calibri" pitchFamily="34" charset="-120"/>
+                <a:cs typeface="Amiri" pitchFamily="2" charset="-78"/>
               </a:rPr>
               <a:t>7</a:t>
             </a:r>
@@ -34674,8 +34049,7 @@
                   <a:srgbClr val="1F2A37"/>
                 </a:solidFill>
                 <a:latin typeface="Calibri" pitchFamily="34" charset="0"/>
-                <a:ea typeface="Calibri" pitchFamily="34" charset="-122"/>
-                <a:cs typeface="Calibri" pitchFamily="34" charset="-120"/>
+                <a:cs typeface="Amiri" pitchFamily="2" charset="-78"/>
               </a:rPr>
               <a:t>Get ready at home for F1-L12.</a:t>
             </a:r>
@@ -34712,9 +34086,8 @@
                 <a:solidFill>
                   <a:srgbClr val="C45A3C"/>
                 </a:solidFill>
-                <a:latin typeface="Amiri" pitchFamily="34" charset="0"/>
-                <a:ea typeface="Amiri" pitchFamily="34" charset="-122"/>
-                <a:cs typeface="Amiri" pitchFamily="34" charset="-120"/>
+                <a:latin typeface="Amiri" pitchFamily="2" charset="-78"/>
+                <a:cs typeface="Amiri" pitchFamily="2" charset="-78"/>
               </a:rPr>
               <a:t>اِسْتَعِدَّ</a:t>
             </a:r>
@@ -34786,8 +34159,7 @@
                   <a:srgbClr val="1E6B52"/>
                 </a:solidFill>
                 <a:latin typeface="Calibri" pitchFamily="34" charset="0"/>
-                <a:ea typeface="Calibri" pitchFamily="34" charset="-122"/>
-                <a:cs typeface="Calibri" pitchFamily="34" charset="-120"/>
+                <a:cs typeface="Amiri" pitchFamily="2" charset="-78"/>
               </a:rPr>
               <a:t>IF ARABIC FEELS HARD TODAY</a:t>
             </a:r>
@@ -34825,8 +34197,7 @@
                   <a:srgbClr val="1F2A37"/>
                 </a:solidFill>
                 <a:latin typeface="Calibri" pitchFamily="34" charset="0"/>
-                <a:ea typeface="Calibri" pitchFamily="34" charset="-122"/>
-                <a:cs typeface="Calibri" pitchFamily="34" charset="-120"/>
+                <a:cs typeface="Amiri" pitchFamily="2" charset="-78"/>
               </a:rPr>
               <a:t>Look for the green CORE boxes: they give you transliteration, English meanings and sentence frames. You never need every word — find the key word first. You can answer in the chat, in English, or by holding up A / B / C to your camera.</a:t>
             </a:r>
@@ -34864,8 +34235,7 @@
                   <a:srgbClr val="8A93A0"/>
                 </a:solidFill>
                 <a:latin typeface="Calibri" pitchFamily="34" charset="0"/>
-                <a:ea typeface="Calibri" pitchFamily="34" charset="-122"/>
-                <a:cs typeface="Calibri" pitchFamily="34" charset="-120"/>
+                <a:cs typeface="Amiri" pitchFamily="2" charset="-78"/>
               </a:rPr>
               <a:t>3 / 25</a:t>
             </a:r>
@@ -34959,9 +34329,8 @@
                 <a:solidFill>
                   <a:srgbClr val="D4AF37"/>
                 </a:solidFill>
-                <a:latin typeface="Amiri" pitchFamily="34" charset="0"/>
-                <a:ea typeface="Amiri" pitchFamily="34" charset="-122"/>
-                <a:cs typeface="Amiri" pitchFamily="34" charset="-120"/>
+                <a:latin typeface="Amiri" pitchFamily="2" charset="-78"/>
+                <a:cs typeface="Amiri" pitchFamily="2" charset="-78"/>
               </a:rPr>
               <a:t>م</a:t>
             </a:r>
@@ -34999,8 +34368,7 @@
                   <a:srgbClr val="1B3B6F"/>
                 </a:solidFill>
                 <a:latin typeface="Cambria" pitchFamily="34" charset="0"/>
-                <a:ea typeface="Cambria" pitchFamily="34" charset="-122"/>
-                <a:cs typeface="Cambria" pitchFamily="34" charset="-120"/>
+                <a:cs typeface="Amiri" pitchFamily="2" charset="-78"/>
               </a:rPr>
               <a:t>Al Madina Online School</a:t>
             </a:r>
@@ -35038,8 +34406,7 @@
                   <a:srgbClr val="8A6D1E"/>
                 </a:solidFill>
                 <a:latin typeface="Calibri" pitchFamily="34" charset="0"/>
-                <a:ea typeface="Calibri" pitchFamily="34" charset="-122"/>
-                <a:cs typeface="Calibri" pitchFamily="34" charset="-120"/>
+                <a:cs typeface="Amiri" pitchFamily="2" charset="-78"/>
               </a:rPr>
               <a:t>ARABIC DEPARTMENT · MIFTAH ARABIC · IGCSE 0544</a:t>
             </a:r>
@@ -35104,8 +34471,7 @@
                   <a:srgbClr val="FFFFFF"/>
                 </a:solidFill>
                 <a:latin typeface="Calibri" pitchFamily="34" charset="0"/>
-                <a:ea typeface="Calibri" pitchFamily="34" charset="-122"/>
-                <a:cs typeface="Calibri" pitchFamily="34" charset="-120"/>
+                <a:cs typeface="Amiri" pitchFamily="2" charset="-78"/>
               </a:rPr>
               <a:t>F1-L11 · Arabic around us</a:t>
             </a:r>
@@ -35170,8 +34536,7 @@
                   <a:srgbClr val="FFFFFF"/>
                 </a:solidFill>
                 <a:latin typeface="Calibri" pitchFamily="34" charset="0"/>
-                <a:ea typeface="Calibri" pitchFamily="34" charset="-122"/>
-                <a:cs typeface="Calibri" pitchFamily="34" charset="-120"/>
+                <a:cs typeface="Amiri" pitchFamily="2" charset="-78"/>
               </a:rPr>
               <a:t>DO NOW · 5 MIN</a:t>
             </a:r>
@@ -35209,8 +34574,7 @@
                   <a:srgbClr val="0E7C86"/>
                 </a:solidFill>
                 <a:latin typeface="Calibri" pitchFamily="34" charset="0"/>
-                <a:ea typeface="Calibri" pitchFamily="34" charset="-122"/>
-                <a:cs typeface="Calibri" pitchFamily="34" charset="-120"/>
+                <a:cs typeface="Amiri" pitchFamily="2" charset="-78"/>
               </a:rPr>
               <a:t>DO NOW · ON YOUR OWN · 5 MINUTES</a:t>
             </a:r>
@@ -35248,8 +34612,7 @@
                   <a:srgbClr val="1B3B6F"/>
                 </a:solidFill>
                 <a:latin typeface="Cambria" pitchFamily="34" charset="0"/>
-                <a:ea typeface="Cambria" pitchFamily="34" charset="-122"/>
-                <a:cs typeface="Cambria" pitchFamily="34" charset="-120"/>
+                <a:cs typeface="Amiri" pitchFamily="2" charset="-78"/>
               </a:rPr>
               <a:t>Retrieval: what do you remember?</a:t>
             </a:r>
@@ -35286,9 +34649,8 @@
                 <a:solidFill>
                   <a:srgbClr val="8A6D1E"/>
                 </a:solidFill>
-                <a:latin typeface="Amiri" pitchFamily="34" charset="0"/>
-                <a:ea typeface="Amiri" pitchFamily="34" charset="-122"/>
-                <a:cs typeface="Amiri" pitchFamily="34" charset="-120"/>
+                <a:latin typeface="Amiri" pitchFamily="2" charset="-78"/>
+                <a:cs typeface="Amiri" pitchFamily="2" charset="-78"/>
               </a:rPr>
               <a:t>اِبْدَأِ الآنَ</a:t>
             </a:r>
@@ -35326,8 +34688,7 @@
                   <a:srgbClr val="8A93A0"/>
                 </a:solidFill>
                 <a:latin typeface="Calibri" pitchFamily="34" charset="0"/>
-                <a:ea typeface="Calibri" pitchFamily="34" charset="-122"/>
-                <a:cs typeface="Calibri" pitchFamily="34" charset="-120"/>
+                <a:cs typeface="Amiri" pitchFamily="2" charset="-78"/>
               </a:rPr>
               <a:t>Miftah Arabic · Foundation F1 · Arabic Script &amp; Sounds · F1-L11</a:t>
             </a:r>
@@ -35424,8 +34785,7 @@
                   <a:srgbClr val="FFFFFF"/>
                 </a:solidFill>
                 <a:latin typeface="Calibri" pitchFamily="34" charset="0"/>
-                <a:ea typeface="Calibri" pitchFamily="34" charset="-122"/>
-                <a:cs typeface="Calibri" pitchFamily="34" charset="-120"/>
+                <a:cs typeface="Amiri" pitchFamily="2" charset="-78"/>
               </a:rPr>
               <a:t>1</a:t>
             </a:r>
@@ -35463,8 +34823,7 @@
                   <a:srgbClr val="1B3B6F"/>
                 </a:solidFill>
                 <a:latin typeface="Calibri" pitchFamily="34" charset="0"/>
-                <a:ea typeface="Calibri" pitchFamily="34" charset="-122"/>
-                <a:cs typeface="Calibri" pitchFamily="34" charset="-120"/>
+                <a:cs typeface="Amiri" pitchFamily="2" charset="-78"/>
               </a:rPr>
               <a:t>What does SCOPE start with?</a:t>
             </a:r>
@@ -35527,8 +34886,7 @@
                   <a:srgbClr val="1B3B6F"/>
                 </a:solidFill>
                 <a:latin typeface="Calibri" pitchFamily="34" charset="0"/>
-                <a:ea typeface="Calibri" pitchFamily="34" charset="-122"/>
-                <a:cs typeface="Calibri" pitchFamily="34" charset="-120"/>
+                <a:cs typeface="Amiri" pitchFamily="2" charset="-78"/>
               </a:rPr>
               <a:t>A</a:t>
             </a:r>
@@ -35566,8 +34924,7 @@
                   <a:srgbClr val="1F2A37"/>
                 </a:solidFill>
                 <a:latin typeface="Calibri" pitchFamily="34" charset="0"/>
-                <a:ea typeface="Calibri" pitchFamily="34" charset="-122"/>
-                <a:cs typeface="Calibri" pitchFamily="34" charset="-120"/>
+                <a:cs typeface="Amiri" pitchFamily="2" charset="-78"/>
               </a:rPr>
               <a:t>Look at the picture</a:t>
             </a:r>
@@ -35630,8 +34987,7 @@
                   <a:srgbClr val="1B3B6F"/>
                 </a:solidFill>
                 <a:latin typeface="Calibri" pitchFamily="34" charset="0"/>
-                <a:ea typeface="Calibri" pitchFamily="34" charset="-122"/>
-                <a:cs typeface="Calibri" pitchFamily="34" charset="-120"/>
+                <a:cs typeface="Amiri" pitchFamily="2" charset="-78"/>
               </a:rPr>
               <a:t>B</a:t>
             </a:r>
@@ -35669,8 +35025,7 @@
                   <a:srgbClr val="1F2A37"/>
                 </a:solidFill>
                 <a:latin typeface="Calibri" pitchFamily="34" charset="0"/>
-                <a:ea typeface="Calibri" pitchFamily="34" charset="-122"/>
-                <a:cs typeface="Calibri" pitchFamily="34" charset="-120"/>
+                <a:cs typeface="Amiri" pitchFamily="2" charset="-78"/>
               </a:rPr>
               <a:t>Scan every letter and dot</a:t>
             </a:r>
@@ -35767,8 +35122,7 @@
                   <a:srgbClr val="FFFFFF"/>
                 </a:solidFill>
                 <a:latin typeface="Calibri" pitchFamily="34" charset="0"/>
-                <a:ea typeface="Calibri" pitchFamily="34" charset="-122"/>
-                <a:cs typeface="Calibri" pitchFamily="34" charset="-120"/>
+                <a:cs typeface="Amiri" pitchFamily="2" charset="-78"/>
               </a:rPr>
               <a:t>2</a:t>
             </a:r>
@@ -35806,8 +35160,7 @@
                   <a:srgbClr val="1B3B6F"/>
                 </a:solidFill>
                 <a:latin typeface="Calibri" pitchFamily="34" charset="0"/>
-                <a:ea typeface="Calibri" pitchFamily="34" charset="-122"/>
-                <a:cs typeface="Calibri" pitchFamily="34" charset="-120"/>
+                <a:cs typeface="Amiri" pitchFamily="2" charset="-78"/>
               </a:rPr>
               <a:t>What does </a:t>
             </a:r>
@@ -35819,9 +35172,8 @@
                 <a:solidFill>
                   <a:srgbClr val="1B3B6F"/>
                 </a:solidFill>
-                <a:latin typeface="Amiri" pitchFamily="34" charset="0"/>
-                <a:ea typeface="Amiri" pitchFamily="34" charset="-122"/>
-                <a:cs typeface="Amiri" pitchFamily="34" charset="-120"/>
+                <a:latin typeface="Amiri" pitchFamily="2" charset="-78"/>
+                <a:cs typeface="Amiri" pitchFamily="2" charset="-78"/>
               </a:rPr>
               <a:t>مطعم</a:t>
             </a:r>
@@ -35834,8 +35186,7 @@
                   <a:srgbClr val="1B3B6F"/>
                 </a:solidFill>
                 <a:latin typeface="Calibri" pitchFamily="34" charset="0"/>
-                <a:ea typeface="Calibri" pitchFamily="34" charset="-122"/>
-                <a:cs typeface="Calibri" pitchFamily="34" charset="-120"/>
+                <a:cs typeface="Amiri" pitchFamily="2" charset="-78"/>
               </a:rPr>
               <a:t> mean?</a:t>
             </a:r>
@@ -35898,8 +35249,7 @@
                   <a:srgbClr val="1B3B6F"/>
                 </a:solidFill>
                 <a:latin typeface="Calibri" pitchFamily="34" charset="0"/>
-                <a:ea typeface="Calibri" pitchFamily="34" charset="-122"/>
-                <a:cs typeface="Calibri" pitchFamily="34" charset="-120"/>
+                <a:cs typeface="Amiri" pitchFamily="2" charset="-78"/>
               </a:rPr>
               <a:t>A</a:t>
             </a:r>
@@ -35937,8 +35287,7 @@
                   <a:srgbClr val="1F2A37"/>
                 </a:solidFill>
                 <a:latin typeface="Calibri" pitchFamily="34" charset="0"/>
-                <a:ea typeface="Calibri" pitchFamily="34" charset="-122"/>
-                <a:cs typeface="Calibri" pitchFamily="34" charset="-120"/>
+                <a:cs typeface="Amiri" pitchFamily="2" charset="-78"/>
               </a:rPr>
               <a:t>restaurant</a:t>
             </a:r>
@@ -36001,8 +35350,7 @@
                   <a:srgbClr val="1B3B6F"/>
                 </a:solidFill>
                 <a:latin typeface="Calibri" pitchFamily="34" charset="0"/>
-                <a:ea typeface="Calibri" pitchFamily="34" charset="-122"/>
-                <a:cs typeface="Calibri" pitchFamily="34" charset="-120"/>
+                <a:cs typeface="Amiri" pitchFamily="2" charset="-78"/>
               </a:rPr>
               <a:t>B</a:t>
             </a:r>
@@ -36040,8 +35388,7 @@
                   <a:srgbClr val="1F2A37"/>
                 </a:solidFill>
                 <a:latin typeface="Calibri" pitchFamily="34" charset="0"/>
-                <a:ea typeface="Calibri" pitchFamily="34" charset="-122"/>
-                <a:cs typeface="Calibri" pitchFamily="34" charset="-120"/>
+                <a:cs typeface="Amiri" pitchFamily="2" charset="-78"/>
               </a:rPr>
               <a:t>school</a:t>
             </a:r>
@@ -36104,8 +35451,7 @@
                   <a:srgbClr val="1B3B6F"/>
                 </a:solidFill>
                 <a:latin typeface="Calibri" pitchFamily="34" charset="0"/>
-                <a:ea typeface="Calibri" pitchFamily="34" charset="-122"/>
-                <a:cs typeface="Calibri" pitchFamily="34" charset="-120"/>
+                <a:cs typeface="Amiri" pitchFamily="2" charset="-78"/>
               </a:rPr>
               <a:t>C</a:t>
             </a:r>
@@ -36143,8 +35489,7 @@
                   <a:srgbClr val="1F2A37"/>
                 </a:solidFill>
                 <a:latin typeface="Calibri" pitchFamily="34" charset="0"/>
-                <a:ea typeface="Calibri" pitchFamily="34" charset="-122"/>
-                <a:cs typeface="Calibri" pitchFamily="34" charset="-120"/>
+                <a:cs typeface="Amiri" pitchFamily="2" charset="-78"/>
               </a:rPr>
               <a:t>station</a:t>
             </a:r>
@@ -36241,8 +35586,7 @@
                   <a:srgbClr val="FFFFFF"/>
                 </a:solidFill>
                 <a:latin typeface="Calibri" pitchFamily="34" charset="0"/>
-                <a:ea typeface="Calibri" pitchFamily="34" charset="-122"/>
-                <a:cs typeface="Calibri" pitchFamily="34" charset="-120"/>
+                <a:cs typeface="Amiri" pitchFamily="2" charset="-78"/>
               </a:rPr>
               <a:t>3</a:t>
             </a:r>
@@ -36280,8 +35624,7 @@
                   <a:srgbClr val="1B3B6F"/>
                 </a:solidFill>
                 <a:latin typeface="Calibri" pitchFamily="34" charset="0"/>
-                <a:ea typeface="Calibri" pitchFamily="34" charset="-122"/>
-                <a:cs typeface="Calibri" pitchFamily="34" charset="-120"/>
+                <a:cs typeface="Amiri" pitchFamily="2" charset="-78"/>
               </a:rPr>
               <a:t>Can context turn </a:t>
             </a:r>
@@ -36293,9 +35636,8 @@
                 <a:solidFill>
                   <a:srgbClr val="1B3B6F"/>
                 </a:solidFill>
-                <a:latin typeface="Amiri" pitchFamily="34" charset="0"/>
-                <a:ea typeface="Amiri" pitchFamily="34" charset="-122"/>
-                <a:cs typeface="Amiri" pitchFamily="34" charset="-120"/>
+                <a:latin typeface="Amiri" pitchFamily="2" charset="-78"/>
+                <a:cs typeface="Amiri" pitchFamily="2" charset="-78"/>
               </a:rPr>
               <a:t>بت</a:t>
             </a:r>
@@ -36308,8 +35650,7 @@
                   <a:srgbClr val="1B3B6F"/>
                 </a:solidFill>
                 <a:latin typeface="Calibri" pitchFamily="34" charset="0"/>
-                <a:ea typeface="Calibri" pitchFamily="34" charset="-122"/>
-                <a:cs typeface="Calibri" pitchFamily="34" charset="-120"/>
+                <a:cs typeface="Amiri" pitchFamily="2" charset="-78"/>
               </a:rPr>
               <a:t> into </a:t>
             </a:r>
@@ -36321,9 +35662,8 @@
                 <a:solidFill>
                   <a:srgbClr val="1B3B6F"/>
                 </a:solidFill>
-                <a:latin typeface="Amiri" pitchFamily="34" charset="0"/>
-                <a:ea typeface="Amiri" pitchFamily="34" charset="-122"/>
-                <a:cs typeface="Amiri" pitchFamily="34" charset="-120"/>
+                <a:latin typeface="Amiri" pitchFamily="2" charset="-78"/>
+                <a:cs typeface="Amiri" pitchFamily="2" charset="-78"/>
               </a:rPr>
               <a:t>بيت</a:t>
             </a:r>
@@ -36336,8 +35676,7 @@
                   <a:srgbClr val="1B3B6F"/>
                 </a:solidFill>
                 <a:latin typeface="Calibri" pitchFamily="34" charset="0"/>
-                <a:ea typeface="Calibri" pitchFamily="34" charset="-122"/>
-                <a:cs typeface="Calibri" pitchFamily="34" charset="-120"/>
+                <a:cs typeface="Amiri" pitchFamily="2" charset="-78"/>
               </a:rPr>
               <a:t>?</a:t>
             </a:r>
@@ -36400,8 +35739,7 @@
                   <a:srgbClr val="1B3B6F"/>
                 </a:solidFill>
                 <a:latin typeface="Calibri" pitchFamily="34" charset="0"/>
-                <a:ea typeface="Calibri" pitchFamily="34" charset="-122"/>
-                <a:cs typeface="Calibri" pitchFamily="34" charset="-120"/>
+                <a:cs typeface="Amiri" pitchFamily="2" charset="-78"/>
               </a:rPr>
               <a:t>A</a:t>
             </a:r>
@@ -36439,8 +35777,7 @@
                   <a:srgbClr val="1F2A37"/>
                 </a:solidFill>
                 <a:latin typeface="Calibri" pitchFamily="34" charset="0"/>
-                <a:ea typeface="Calibri" pitchFamily="34" charset="-122"/>
-                <a:cs typeface="Calibri" pitchFamily="34" charset="-120"/>
+                <a:cs typeface="Amiri" pitchFamily="2" charset="-78"/>
               </a:rPr>
               <a:t>No</a:t>
             </a:r>
@@ -36503,8 +35840,7 @@
                   <a:srgbClr val="1B3B6F"/>
                 </a:solidFill>
                 <a:latin typeface="Calibri" pitchFamily="34" charset="0"/>
-                <a:ea typeface="Calibri" pitchFamily="34" charset="-122"/>
-                <a:cs typeface="Calibri" pitchFamily="34" charset="-120"/>
+                <a:cs typeface="Amiri" pitchFamily="2" charset="-78"/>
               </a:rPr>
               <a:t>B</a:t>
             </a:r>
@@ -36542,8 +35878,7 @@
                   <a:srgbClr val="1F2A37"/>
                 </a:solidFill>
                 <a:latin typeface="Calibri" pitchFamily="34" charset="0"/>
-                <a:ea typeface="Calibri" pitchFamily="34" charset="-122"/>
-                <a:cs typeface="Calibri" pitchFamily="34" charset="-120"/>
+                <a:cs typeface="Amiri" pitchFamily="2" charset="-78"/>
               </a:rPr>
               <a:t>Yes</a:t>
             </a:r>
@@ -36640,8 +35975,7 @@
                   <a:srgbClr val="FFFFFF"/>
                 </a:solidFill>
                 <a:latin typeface="Calibri" pitchFamily="34" charset="0"/>
-                <a:ea typeface="Calibri" pitchFamily="34" charset="-122"/>
-                <a:cs typeface="Calibri" pitchFamily="34" charset="-120"/>
+                <a:cs typeface="Amiri" pitchFamily="2" charset="-78"/>
               </a:rPr>
               <a:t>4</a:t>
             </a:r>
@@ -36679,8 +36013,7 @@
                   <a:srgbClr val="1B3B6F"/>
                 </a:solidFill>
                 <a:latin typeface="Calibri" pitchFamily="34" charset="0"/>
-                <a:ea typeface="Calibri" pitchFamily="34" charset="-122"/>
-                <a:cs typeface="Calibri" pitchFamily="34" charset="-120"/>
+                <a:cs typeface="Amiri" pitchFamily="2" charset="-78"/>
               </a:rPr>
               <a:t>What does </a:t>
             </a:r>
@@ -36692,9 +36025,8 @@
                 <a:solidFill>
                   <a:srgbClr val="1B3B6F"/>
                 </a:solidFill>
-                <a:latin typeface="Amiri" pitchFamily="34" charset="0"/>
-                <a:ea typeface="Amiri" pitchFamily="34" charset="-122"/>
-                <a:cs typeface="Amiri" pitchFamily="34" charset="-120"/>
+                <a:latin typeface="Amiri" pitchFamily="2" charset="-78"/>
+                <a:cs typeface="Amiri" pitchFamily="2" charset="-78"/>
               </a:rPr>
               <a:t>لُغَةٌ</a:t>
             </a:r>
@@ -36707,8 +36039,7 @@
                   <a:srgbClr val="1B3B6F"/>
                 </a:solidFill>
                 <a:latin typeface="Calibri" pitchFamily="34" charset="0"/>
-                <a:ea typeface="Calibri" pitchFamily="34" charset="-122"/>
-                <a:cs typeface="Calibri" pitchFamily="34" charset="-120"/>
+                <a:cs typeface="Amiri" pitchFamily="2" charset="-78"/>
               </a:rPr>
               <a:t> mean (prepared at home)?</a:t>
             </a:r>
@@ -36771,8 +36102,7 @@
                   <a:srgbClr val="1B3B6F"/>
                 </a:solidFill>
                 <a:latin typeface="Calibri" pitchFamily="34" charset="0"/>
-                <a:ea typeface="Calibri" pitchFamily="34" charset="-122"/>
-                <a:cs typeface="Calibri" pitchFamily="34" charset="-120"/>
+                <a:cs typeface="Amiri" pitchFamily="2" charset="-78"/>
               </a:rPr>
               <a:t>A</a:t>
             </a:r>
@@ -36810,8 +36140,7 @@
                   <a:srgbClr val="1F2A37"/>
                 </a:solidFill>
                 <a:latin typeface="Calibri" pitchFamily="34" charset="0"/>
-                <a:ea typeface="Calibri" pitchFamily="34" charset="-122"/>
-                <a:cs typeface="Calibri" pitchFamily="34" charset="-120"/>
+                <a:cs typeface="Amiri" pitchFamily="2" charset="-78"/>
               </a:rPr>
               <a:t>a country</a:t>
             </a:r>
@@ -36874,8 +36203,7 @@
                   <a:srgbClr val="1B3B6F"/>
                 </a:solidFill>
                 <a:latin typeface="Calibri" pitchFamily="34" charset="0"/>
-                <a:ea typeface="Calibri" pitchFamily="34" charset="-122"/>
-                <a:cs typeface="Calibri" pitchFamily="34" charset="-120"/>
+                <a:cs typeface="Amiri" pitchFamily="2" charset="-78"/>
               </a:rPr>
               <a:t>B</a:t>
             </a:r>
@@ -36913,8 +36241,7 @@
                   <a:srgbClr val="1F2A37"/>
                 </a:solidFill>
                 <a:latin typeface="Calibri" pitchFamily="34" charset="0"/>
-                <a:ea typeface="Calibri" pitchFamily="34" charset="-122"/>
-                <a:cs typeface="Calibri" pitchFamily="34" charset="-120"/>
+                <a:cs typeface="Amiri" pitchFamily="2" charset="-78"/>
               </a:rPr>
               <a:t>a sign</a:t>
             </a:r>
@@ -36977,8 +36304,7 @@
                   <a:srgbClr val="1B3B6F"/>
                 </a:solidFill>
                 <a:latin typeface="Calibri" pitchFamily="34" charset="0"/>
-                <a:ea typeface="Calibri" pitchFamily="34" charset="-122"/>
-                <a:cs typeface="Calibri" pitchFamily="34" charset="-120"/>
+                <a:cs typeface="Amiri" pitchFamily="2" charset="-78"/>
               </a:rPr>
               <a:t>C</a:t>
             </a:r>
@@ -37016,8 +36342,7 @@
                   <a:srgbClr val="1F2A37"/>
                 </a:solidFill>
                 <a:latin typeface="Calibri" pitchFamily="34" charset="0"/>
-                <a:ea typeface="Calibri" pitchFamily="34" charset="-122"/>
-                <a:cs typeface="Calibri" pitchFamily="34" charset="-120"/>
+                <a:cs typeface="Amiri" pitchFamily="2" charset="-78"/>
               </a:rPr>
               <a:t>a language</a:t>
             </a:r>
@@ -37114,8 +36439,7 @@
                   <a:srgbClr val="FFFFFF"/>
                 </a:solidFill>
                 <a:latin typeface="Calibri" pitchFamily="34" charset="0"/>
-                <a:ea typeface="Calibri" pitchFamily="34" charset="-122"/>
-                <a:cs typeface="Calibri" pitchFamily="34" charset="-120"/>
+                <a:cs typeface="Amiri" pitchFamily="2" charset="-78"/>
               </a:rPr>
               <a:t>5</a:t>
             </a:r>
@@ -37153,8 +36477,7 @@
                   <a:srgbClr val="1B3B6F"/>
                 </a:solidFill>
                 <a:latin typeface="Calibri" pitchFamily="34" charset="0"/>
-                <a:ea typeface="Calibri" pitchFamily="34" charset="-122"/>
-                <a:cs typeface="Calibri" pitchFamily="34" charset="-120"/>
+                <a:cs typeface="Amiri" pitchFamily="2" charset="-78"/>
               </a:rPr>
               <a:t>Where did you find Arabic script recently?</a:t>
             </a:r>
@@ -37217,8 +36540,7 @@
                   <a:srgbClr val="1B3B6F"/>
                 </a:solidFill>
                 <a:latin typeface="Calibri" pitchFamily="34" charset="0"/>
-                <a:ea typeface="Calibri" pitchFamily="34" charset="-122"/>
-                <a:cs typeface="Calibri" pitchFamily="34" charset="-120"/>
+                <a:cs typeface="Amiri" pitchFamily="2" charset="-78"/>
               </a:rPr>
               <a:t>A</a:t>
             </a:r>
@@ -37256,8 +36578,7 @@
                   <a:srgbClr val="1F2A37"/>
                 </a:solidFill>
                 <a:latin typeface="Calibri" pitchFamily="34" charset="0"/>
-                <a:ea typeface="Calibri" pitchFamily="34" charset="-122"/>
-                <a:cs typeface="Calibri" pitchFamily="34" charset="-120"/>
+                <a:cs typeface="Amiri" pitchFamily="2" charset="-78"/>
               </a:rPr>
               <a:t>Any safe example is right!</a:t>
             </a:r>
@@ -37320,8 +36641,7 @@
                   <a:srgbClr val="1B3B6F"/>
                 </a:solidFill>
                 <a:latin typeface="Calibri" pitchFamily="34" charset="0"/>
-                <a:ea typeface="Calibri" pitchFamily="34" charset="-122"/>
-                <a:cs typeface="Calibri" pitchFamily="34" charset="-120"/>
+                <a:cs typeface="Amiri" pitchFamily="2" charset="-78"/>
               </a:rPr>
               <a:t>B</a:t>
             </a:r>
@@ -37359,8 +36679,7 @@
                   <a:srgbClr val="1F2A37"/>
                 </a:solidFill>
                 <a:latin typeface="Calibri" pitchFamily="34" charset="0"/>
-                <a:ea typeface="Calibri" pitchFamily="34" charset="-122"/>
-                <a:cs typeface="Calibri" pitchFamily="34" charset="-120"/>
+                <a:cs typeface="Amiri" pitchFamily="2" charset="-78"/>
               </a:rPr>
               <a:t>Nowhere — Arabic is only in books</a:t>
             </a:r>
@@ -37432,8 +36751,7 @@
                   <a:srgbClr val="0E7C86"/>
                 </a:solidFill>
                 <a:latin typeface="Calibri" pitchFamily="34" charset="0"/>
-                <a:ea typeface="Calibri" pitchFamily="34" charset="-122"/>
-                <a:cs typeface="Calibri" pitchFamily="34" charset="-120"/>
+                <a:cs typeface="Amiri" pitchFamily="2" charset="-78"/>
               </a:rPr>
               <a:t>HOW TO ANSWER</a:t>
             </a:r>
@@ -37471,8 +36789,7 @@
                   <a:srgbClr val="1F2A37"/>
                 </a:solidFill>
                 <a:latin typeface="Calibri" pitchFamily="34" charset="0"/>
-                <a:ea typeface="Calibri" pitchFamily="34" charset="-122"/>
-                <a:cs typeface="Calibri" pitchFamily="34" charset="-120"/>
+                <a:cs typeface="Amiri" pitchFamily="2" charset="-78"/>
               </a:rPr>
               <a:t>Work on your own in silence.</a:t>
             </a:r>
@@ -37488,8 +36805,7 @@
                   <a:srgbClr val="1F2A37"/>
                 </a:solidFill>
                 <a:latin typeface="Calibri" pitchFamily="34" charset="0"/>
-                <a:ea typeface="Calibri" pitchFamily="34" charset="-122"/>
-                <a:cs typeface="Calibri" pitchFamily="34" charset="-120"/>
+                <a:cs typeface="Amiri" pitchFamily="2" charset="-78"/>
               </a:rPr>
               <a:t>When the timer ends, type in the chat:</a:t>
             </a:r>
@@ -37527,8 +36843,7 @@
                   <a:srgbClr val="1B3B6F"/>
                 </a:solidFill>
                 <a:latin typeface="Consolas" pitchFamily="34" charset="0"/>
-                <a:ea typeface="Consolas" pitchFamily="34" charset="-122"/>
-                <a:cs typeface="Consolas" pitchFamily="34" charset="-120"/>
+                <a:cs typeface="Amiri" pitchFamily="2" charset="-78"/>
               </a:rPr>
               <a:t>1_  2_  3_  4_  5_</a:t>
             </a:r>
@@ -37566,8 +36881,7 @@
                   <a:srgbClr val="0E7C86"/>
                 </a:solidFill>
                 <a:latin typeface="Calibri" pitchFamily="34" charset="0"/>
-                <a:ea typeface="Calibri" pitchFamily="34" charset="-122"/>
-                <a:cs typeface="Calibri" pitchFamily="34" charset="-120"/>
+                <a:cs typeface="Amiri" pitchFamily="2" charset="-78"/>
               </a:rPr>
               <a:t>⏱  5 : 00</a:t>
             </a:r>
@@ -37605,8 +36919,7 @@
                   <a:srgbClr val="8A93A0"/>
                 </a:solidFill>
                 <a:latin typeface="Calibri" pitchFamily="34" charset="0"/>
-                <a:ea typeface="Calibri" pitchFamily="34" charset="-122"/>
-                <a:cs typeface="Calibri" pitchFamily="34" charset="-120"/>
+                <a:cs typeface="Amiri" pitchFamily="2" charset="-78"/>
               </a:rPr>
               <a:t>4 / 25</a:t>
             </a:r>
@@ -37700,9 +37013,8 @@
                 <a:solidFill>
                   <a:srgbClr val="D4AF37"/>
                 </a:solidFill>
-                <a:latin typeface="Amiri" pitchFamily="34" charset="0"/>
-                <a:ea typeface="Amiri" pitchFamily="34" charset="-122"/>
-                <a:cs typeface="Amiri" pitchFamily="34" charset="-120"/>
+                <a:latin typeface="Amiri" pitchFamily="2" charset="-78"/>
+                <a:cs typeface="Amiri" pitchFamily="2" charset="-78"/>
               </a:rPr>
               <a:t>م</a:t>
             </a:r>
@@ -37740,8 +37052,7 @@
                   <a:srgbClr val="1B3B6F"/>
                 </a:solidFill>
                 <a:latin typeface="Cambria" pitchFamily="34" charset="0"/>
-                <a:ea typeface="Cambria" pitchFamily="34" charset="-122"/>
-                <a:cs typeface="Cambria" pitchFamily="34" charset="-120"/>
+                <a:cs typeface="Amiri" pitchFamily="2" charset="-78"/>
               </a:rPr>
               <a:t>Al Madina Online School</a:t>
             </a:r>
@@ -37779,8 +37090,7 @@
                   <a:srgbClr val="8A6D1E"/>
                 </a:solidFill>
                 <a:latin typeface="Calibri" pitchFamily="34" charset="0"/>
-                <a:ea typeface="Calibri" pitchFamily="34" charset="-122"/>
-                <a:cs typeface="Calibri" pitchFamily="34" charset="-120"/>
+                <a:cs typeface="Amiri" pitchFamily="2" charset="-78"/>
               </a:rPr>
               <a:t>ARABIC DEPARTMENT · MIFTAH ARABIC · IGCSE 0544</a:t>
             </a:r>
@@ -37845,8 +37155,7 @@
                   <a:srgbClr val="FFFFFF"/>
                 </a:solidFill>
                 <a:latin typeface="Calibri" pitchFamily="34" charset="0"/>
-                <a:ea typeface="Calibri" pitchFamily="34" charset="-122"/>
-                <a:cs typeface="Calibri" pitchFamily="34" charset="-120"/>
+                <a:cs typeface="Amiri" pitchFamily="2" charset="-78"/>
               </a:rPr>
               <a:t>F1-L11 · Arabic around us</a:t>
             </a:r>
@@ -37911,8 +37220,7 @@
                   <a:srgbClr val="FFFFFF"/>
                 </a:solidFill>
                 <a:latin typeface="Calibri" pitchFamily="34" charset="0"/>
-                <a:ea typeface="Calibri" pitchFamily="34" charset="-122"/>
-                <a:cs typeface="Calibri" pitchFamily="34" charset="-120"/>
+                <a:cs typeface="Amiri" pitchFamily="2" charset="-78"/>
               </a:rPr>
               <a:t>DO NOW · 2 MIN</a:t>
             </a:r>
@@ -37950,8 +37258,7 @@
                   <a:srgbClr val="0E7C86"/>
                 </a:solidFill>
                 <a:latin typeface="Calibri" pitchFamily="34" charset="0"/>
-                <a:ea typeface="Calibri" pitchFamily="34" charset="-122"/>
-                <a:cs typeface="Calibri" pitchFamily="34" charset="-120"/>
+                <a:cs typeface="Amiri" pitchFamily="2" charset="-78"/>
               </a:rPr>
               <a:t>DO NOW · ANSWERS AND REASONS</a:t>
             </a:r>
@@ -37989,8 +37296,7 @@
                   <a:srgbClr val="1B3B6F"/>
                 </a:solidFill>
                 <a:latin typeface="Cambria" pitchFamily="34" charset="0"/>
-                <a:ea typeface="Cambria" pitchFamily="34" charset="-122"/>
-                <a:cs typeface="Cambria" pitchFamily="34" charset="-120"/>
+                <a:cs typeface="Amiri" pitchFamily="2" charset="-78"/>
               </a:rPr>
               <a:t>Let’s check — and explain why</a:t>
             </a:r>
@@ -38027,9 +37333,8 @@
                 <a:solidFill>
                   <a:srgbClr val="8A6D1E"/>
                 </a:solidFill>
-                <a:latin typeface="Amiri" pitchFamily="34" charset="0"/>
-                <a:ea typeface="Amiri" pitchFamily="34" charset="-122"/>
-                <a:cs typeface="Amiri" pitchFamily="34" charset="-120"/>
+                <a:latin typeface="Amiri" pitchFamily="2" charset="-78"/>
+                <a:cs typeface="Amiri" pitchFamily="2" charset="-78"/>
               </a:rPr>
               <a:t>الإِجَابَاتُ وَالتَّعْلِيلُ</a:t>
             </a:r>
@@ -38067,8 +37372,7 @@
                   <a:srgbClr val="8A93A0"/>
                 </a:solidFill>
                 <a:latin typeface="Calibri" pitchFamily="34" charset="0"/>
-                <a:ea typeface="Calibri" pitchFamily="34" charset="-122"/>
-                <a:cs typeface="Calibri" pitchFamily="34" charset="-120"/>
+                <a:cs typeface="Amiri" pitchFamily="2" charset="-78"/>
               </a:rPr>
               <a:t>Miftah Arabic · Foundation F1 · Arabic Script &amp; Sounds · F1-L11</a:t>
             </a:r>
@@ -38165,8 +37469,7 @@
                   <a:srgbClr val="FFFFFF"/>
                 </a:solidFill>
                 <a:latin typeface="Calibri" pitchFamily="34" charset="0"/>
-                <a:ea typeface="Calibri" pitchFamily="34" charset="-122"/>
-                <a:cs typeface="Calibri" pitchFamily="34" charset="-120"/>
+                <a:cs typeface="Amiri" pitchFamily="2" charset="-78"/>
               </a:rPr>
               <a:t>1</a:t>
             </a:r>
@@ -38204,8 +37507,7 @@
                   <a:srgbClr val="1B3B6F"/>
                 </a:solidFill>
                 <a:latin typeface="Calibri" pitchFamily="34" charset="0"/>
-                <a:ea typeface="Calibri" pitchFamily="34" charset="-122"/>
-                <a:cs typeface="Calibri" pitchFamily="34" charset="-120"/>
+                <a:cs typeface="Amiri" pitchFamily="2" charset="-78"/>
               </a:rPr>
               <a:t>What does SCOPE start with?</a:t>
             </a:r>
@@ -38268,8 +37570,7 @@
                   <a:srgbClr val="1B3B6F"/>
                 </a:solidFill>
                 <a:latin typeface="Calibri" pitchFamily="34" charset="0"/>
-                <a:ea typeface="Calibri" pitchFamily="34" charset="-122"/>
-                <a:cs typeface="Calibri" pitchFamily="34" charset="-120"/>
+                <a:cs typeface="Amiri" pitchFamily="2" charset="-78"/>
               </a:rPr>
               <a:t>A</a:t>
             </a:r>
@@ -38307,8 +37608,7 @@
                   <a:srgbClr val="9AA1AB"/>
                 </a:solidFill>
                 <a:latin typeface="Calibri" pitchFamily="34" charset="0"/>
-                <a:ea typeface="Calibri" pitchFamily="34" charset="-122"/>
-                <a:cs typeface="Calibri" pitchFamily="34" charset="-120"/>
+                <a:cs typeface="Amiri" pitchFamily="2" charset="-78"/>
               </a:rPr>
               <a:t>Look at the picture</a:t>
             </a:r>
@@ -38398,8 +37698,7 @@
                   <a:srgbClr val="FFFFFF"/>
                 </a:solidFill>
                 <a:latin typeface="Calibri" pitchFamily="34" charset="0"/>
-                <a:ea typeface="Calibri" pitchFamily="34" charset="-122"/>
-                <a:cs typeface="Calibri" pitchFamily="34" charset="-120"/>
+                <a:cs typeface="Amiri" pitchFamily="2" charset="-78"/>
               </a:rPr>
               <a:t>B</a:t>
             </a:r>
@@ -38437,8 +37736,7 @@
                   <a:srgbClr val="1F2A37"/>
                 </a:solidFill>
                 <a:latin typeface="Calibri" pitchFamily="34" charset="0"/>
-                <a:ea typeface="Calibri" pitchFamily="34" charset="-122"/>
-                <a:cs typeface="Calibri" pitchFamily="34" charset="-120"/>
+                <a:cs typeface="Amiri" pitchFamily="2" charset="-78"/>
               </a:rPr>
               <a:t>Scan every letter and dot</a:t>
             </a:r>
@@ -38476,8 +37774,7 @@
                   <a:srgbClr val="8A6D1E"/>
                 </a:solidFill>
                 <a:latin typeface="Calibri" pitchFamily="34" charset="0"/>
-                <a:ea typeface="Calibri" pitchFamily="34" charset="-122"/>
-                <a:cs typeface="Calibri" pitchFamily="34" charset="-120"/>
+                <a:cs typeface="Amiri" pitchFamily="2" charset="-78"/>
               </a:rPr>
               <a:t>F1-L10: letters first.</a:t>
             </a:r>
@@ -38574,8 +37871,7 @@
                   <a:srgbClr val="FFFFFF"/>
                 </a:solidFill>
                 <a:latin typeface="Calibri" pitchFamily="34" charset="0"/>
-                <a:ea typeface="Calibri" pitchFamily="34" charset="-122"/>
-                <a:cs typeface="Calibri" pitchFamily="34" charset="-120"/>
+                <a:cs typeface="Amiri" pitchFamily="2" charset="-78"/>
               </a:rPr>
               <a:t>2</a:t>
             </a:r>
@@ -38613,8 +37909,7 @@
                   <a:srgbClr val="1B3B6F"/>
                 </a:solidFill>
                 <a:latin typeface="Calibri" pitchFamily="34" charset="0"/>
-                <a:ea typeface="Calibri" pitchFamily="34" charset="-122"/>
-                <a:cs typeface="Calibri" pitchFamily="34" charset="-120"/>
+                <a:cs typeface="Amiri" pitchFamily="2" charset="-78"/>
               </a:rPr>
               <a:t>What does </a:t>
             </a:r>
@@ -38626,9 +37921,8 @@
                 <a:solidFill>
                   <a:srgbClr val="1B3B6F"/>
                 </a:solidFill>
-                <a:latin typeface="Amiri" pitchFamily="34" charset="0"/>
-                <a:ea typeface="Amiri" pitchFamily="34" charset="-122"/>
-                <a:cs typeface="Amiri" pitchFamily="34" charset="-120"/>
+                <a:latin typeface="Amiri" pitchFamily="2" charset="-78"/>
+                <a:cs typeface="Amiri" pitchFamily="2" charset="-78"/>
               </a:rPr>
               <a:t>مطعم</a:t>
             </a:r>
@@ -38641,8 +37935,7 @@
                   <a:srgbClr val="1B3B6F"/>
                 </a:solidFill>
                 <a:latin typeface="Calibri" pitchFamily="34" charset="0"/>
-                <a:ea typeface="Calibri" pitchFamily="34" charset="-122"/>
-                <a:cs typeface="Calibri" pitchFamily="34" charset="-120"/>
+                <a:cs typeface="Amiri" pitchFamily="2" charset="-78"/>
               </a:rPr>
               <a:t> mean?</a:t>
             </a:r>
@@ -38732,8 +38025,7 @@
                   <a:srgbClr val="FFFFFF"/>
                 </a:solidFill>
                 <a:latin typeface="Calibri" pitchFamily="34" charset="0"/>
-                <a:ea typeface="Calibri" pitchFamily="34" charset="-122"/>
-                <a:cs typeface="Calibri" pitchFamily="34" charset="-120"/>
+                <a:cs typeface="Amiri" pitchFamily="2" charset="-78"/>
               </a:rPr>
               <a:t>A</a:t>
             </a:r>
@@ -38771,8 +38063,7 @@
                   <a:srgbClr val="1F2A37"/>
                 </a:solidFill>
                 <a:latin typeface="Calibri" pitchFamily="34" charset="0"/>
-                <a:ea typeface="Calibri" pitchFamily="34" charset="-122"/>
-                <a:cs typeface="Calibri" pitchFamily="34" charset="-120"/>
+                <a:cs typeface="Amiri" pitchFamily="2" charset="-78"/>
               </a:rPr>
               <a:t>restaurant</a:t>
             </a:r>
@@ -38835,8 +38126,7 @@
                   <a:srgbClr val="1B3B6F"/>
                 </a:solidFill>
                 <a:latin typeface="Calibri" pitchFamily="34" charset="0"/>
-                <a:ea typeface="Calibri" pitchFamily="34" charset="-122"/>
-                <a:cs typeface="Calibri" pitchFamily="34" charset="-120"/>
+                <a:cs typeface="Amiri" pitchFamily="2" charset="-78"/>
               </a:rPr>
               <a:t>B</a:t>
             </a:r>
@@ -38874,8 +38164,7 @@
                   <a:srgbClr val="9AA1AB"/>
                 </a:solidFill>
                 <a:latin typeface="Calibri" pitchFamily="34" charset="0"/>
-                <a:ea typeface="Calibri" pitchFamily="34" charset="-122"/>
-                <a:cs typeface="Calibri" pitchFamily="34" charset="-120"/>
+                <a:cs typeface="Amiri" pitchFamily="2" charset="-78"/>
               </a:rPr>
               <a:t>school</a:t>
             </a:r>
@@ -38938,8 +38227,7 @@
                   <a:srgbClr val="1B3B6F"/>
                 </a:solidFill>
                 <a:latin typeface="Calibri" pitchFamily="34" charset="0"/>
-                <a:ea typeface="Calibri" pitchFamily="34" charset="-122"/>
-                <a:cs typeface="Calibri" pitchFamily="34" charset="-120"/>
+                <a:cs typeface="Amiri" pitchFamily="2" charset="-78"/>
               </a:rPr>
               <a:t>C</a:t>
             </a:r>
@@ -38977,8 +38265,7 @@
                   <a:srgbClr val="9AA1AB"/>
                 </a:solidFill>
                 <a:latin typeface="Calibri" pitchFamily="34" charset="0"/>
-                <a:ea typeface="Calibri" pitchFamily="34" charset="-122"/>
-                <a:cs typeface="Calibri" pitchFamily="34" charset="-120"/>
+                <a:cs typeface="Amiri" pitchFamily="2" charset="-78"/>
               </a:rPr>
               <a:t>station</a:t>
             </a:r>
@@ -39016,8 +38303,7 @@
                   <a:srgbClr val="8A6D1E"/>
                 </a:solidFill>
                 <a:latin typeface="Calibri" pitchFamily="34" charset="0"/>
-                <a:ea typeface="Calibri" pitchFamily="34" charset="-122"/>
-                <a:cs typeface="Calibri" pitchFamily="34" charset="-120"/>
+                <a:cs typeface="Amiri" pitchFamily="2" charset="-78"/>
               </a:rPr>
               <a:t>F1-L10 sign.</a:t>
             </a:r>
@@ -39114,8 +38400,7 @@
                   <a:srgbClr val="FFFFFF"/>
                 </a:solidFill>
                 <a:latin typeface="Calibri" pitchFamily="34" charset="0"/>
-                <a:ea typeface="Calibri" pitchFamily="34" charset="-122"/>
-                <a:cs typeface="Calibri" pitchFamily="34" charset="-120"/>
+                <a:cs typeface="Amiri" pitchFamily="2" charset="-78"/>
               </a:rPr>
               <a:t>3</a:t>
             </a:r>
@@ -39153,8 +38438,7 @@
                   <a:srgbClr val="1B3B6F"/>
                 </a:solidFill>
                 <a:latin typeface="Calibri" pitchFamily="34" charset="0"/>
-                <a:ea typeface="Calibri" pitchFamily="34" charset="-122"/>
-                <a:cs typeface="Calibri" pitchFamily="34" charset="-120"/>
+                <a:cs typeface="Amiri" pitchFamily="2" charset="-78"/>
               </a:rPr>
               <a:t>Can context turn </a:t>
             </a:r>
@@ -39166,9 +38450,8 @@
                 <a:solidFill>
                   <a:srgbClr val="1B3B6F"/>
                 </a:solidFill>
-                <a:latin typeface="Amiri" pitchFamily="34" charset="0"/>
-                <a:ea typeface="Amiri" pitchFamily="34" charset="-122"/>
-                <a:cs typeface="Amiri" pitchFamily="34" charset="-120"/>
+                <a:latin typeface="Amiri" pitchFamily="2" charset="-78"/>
+                <a:cs typeface="Amiri" pitchFamily="2" charset="-78"/>
               </a:rPr>
               <a:t>بت</a:t>
             </a:r>
@@ -39181,8 +38464,7 @@
                   <a:srgbClr val="1B3B6F"/>
                 </a:solidFill>
                 <a:latin typeface="Calibri" pitchFamily="34" charset="0"/>
-                <a:ea typeface="Calibri" pitchFamily="34" charset="-122"/>
-                <a:cs typeface="Calibri" pitchFamily="34" charset="-120"/>
+                <a:cs typeface="Amiri" pitchFamily="2" charset="-78"/>
               </a:rPr>
               <a:t> into </a:t>
             </a:r>
@@ -39194,9 +38476,8 @@
                 <a:solidFill>
                   <a:srgbClr val="1B3B6F"/>
                 </a:solidFill>
-                <a:latin typeface="Amiri" pitchFamily="34" charset="0"/>
-                <a:ea typeface="Amiri" pitchFamily="34" charset="-122"/>
-                <a:cs typeface="Amiri" pitchFamily="34" charset="-120"/>
+                <a:latin typeface="Amiri" pitchFamily="2" charset="-78"/>
+                <a:cs typeface="Amiri" pitchFamily="2" charset="-78"/>
               </a:rPr>
               <a:t>بيت</a:t>
             </a:r>
@@ -39209,8 +38490,7 @@
                   <a:srgbClr val="1B3B6F"/>
                 </a:solidFill>
                 <a:latin typeface="Calibri" pitchFamily="34" charset="0"/>
-                <a:ea typeface="Calibri" pitchFamily="34" charset="-122"/>
-                <a:cs typeface="Calibri" pitchFamily="34" charset="-120"/>
+                <a:cs typeface="Amiri" pitchFamily="2" charset="-78"/>
               </a:rPr>
               <a:t>?</a:t>
             </a:r>
@@ -39300,8 +38580,7 @@
                   <a:srgbClr val="FFFFFF"/>
                 </a:solidFill>
                 <a:latin typeface="Calibri" pitchFamily="34" charset="0"/>
-                <a:ea typeface="Calibri" pitchFamily="34" charset="-122"/>
-                <a:cs typeface="Calibri" pitchFamily="34" charset="-120"/>
+                <a:cs typeface="Amiri" pitchFamily="2" charset="-78"/>
               </a:rPr>
               <a:t>A</a:t>
             </a:r>
@@ -39339,8 +38618,7 @@
                   <a:srgbClr val="1F2A37"/>
                 </a:solidFill>
                 <a:latin typeface="Calibri" pitchFamily="34" charset="0"/>
-                <a:ea typeface="Calibri" pitchFamily="34" charset="-122"/>
-                <a:cs typeface="Calibri" pitchFamily="34" charset="-120"/>
+                <a:cs typeface="Amiri" pitchFamily="2" charset="-78"/>
               </a:rPr>
               <a:t>No</a:t>
             </a:r>
@@ -39403,8 +38681,7 @@
                   <a:srgbClr val="1B3B6F"/>
                 </a:solidFill>
                 <a:latin typeface="Calibri" pitchFamily="34" charset="0"/>
-                <a:ea typeface="Calibri" pitchFamily="34" charset="-122"/>
-                <a:cs typeface="Calibri" pitchFamily="34" charset="-120"/>
+                <a:cs typeface="Amiri" pitchFamily="2" charset="-78"/>
               </a:rPr>
               <a:t>B</a:t>
             </a:r>
@@ -39442,8 +38719,7 @@
                   <a:srgbClr val="9AA1AB"/>
                 </a:solidFill>
                 <a:latin typeface="Calibri" pitchFamily="34" charset="0"/>
-                <a:ea typeface="Calibri" pitchFamily="34" charset="-122"/>
-                <a:cs typeface="Calibri" pitchFamily="34" charset="-120"/>
+                <a:cs typeface="Amiri" pitchFamily="2" charset="-78"/>
               </a:rPr>
               <a:t>Yes</a:t>
             </a:r>
@@ -39481,8 +38757,7 @@
                   <a:srgbClr val="8A6D1E"/>
                 </a:solidFill>
                 <a:latin typeface="Calibri" pitchFamily="34" charset="0"/>
-                <a:ea typeface="Calibri" pitchFamily="34" charset="-122"/>
-                <a:cs typeface="Calibri" pitchFamily="34" charset="-120"/>
+                <a:cs typeface="Amiri" pitchFamily="2" charset="-78"/>
               </a:rPr>
               <a:t>F1-L10: the hard boundary.</a:t>
             </a:r>
@@ -39579,8 +38854,7 @@
                   <a:srgbClr val="FFFFFF"/>
                 </a:solidFill>
                 <a:latin typeface="Calibri" pitchFamily="34" charset="0"/>
-                <a:ea typeface="Calibri" pitchFamily="34" charset="-122"/>
-                <a:cs typeface="Calibri" pitchFamily="34" charset="-120"/>
+                <a:cs typeface="Amiri" pitchFamily="2" charset="-78"/>
               </a:rPr>
               <a:t>4</a:t>
             </a:r>
@@ -39618,8 +38892,7 @@
                   <a:srgbClr val="1B3B6F"/>
                 </a:solidFill>
                 <a:latin typeface="Calibri" pitchFamily="34" charset="0"/>
-                <a:ea typeface="Calibri" pitchFamily="34" charset="-122"/>
-                <a:cs typeface="Calibri" pitchFamily="34" charset="-120"/>
+                <a:cs typeface="Amiri" pitchFamily="2" charset="-78"/>
               </a:rPr>
               <a:t>What does </a:t>
             </a:r>
@@ -39631,9 +38904,8 @@
                 <a:solidFill>
                   <a:srgbClr val="1B3B6F"/>
                 </a:solidFill>
-                <a:latin typeface="Amiri" pitchFamily="34" charset="0"/>
-                <a:ea typeface="Amiri" pitchFamily="34" charset="-122"/>
-                <a:cs typeface="Amiri" pitchFamily="34" charset="-120"/>
+                <a:latin typeface="Amiri" pitchFamily="2" charset="-78"/>
+                <a:cs typeface="Amiri" pitchFamily="2" charset="-78"/>
               </a:rPr>
               <a:t>لُغَةٌ</a:t>
             </a:r>
@@ -39646,8 +38918,7 @@
                   <a:srgbClr val="1B3B6F"/>
                 </a:solidFill>
                 <a:latin typeface="Calibri" pitchFamily="34" charset="0"/>
-                <a:ea typeface="Calibri" pitchFamily="34" charset="-122"/>
-                <a:cs typeface="Calibri" pitchFamily="34" charset="-120"/>
+                <a:cs typeface="Amiri" pitchFamily="2" charset="-78"/>
               </a:rPr>
               <a:t> mean (prepared at home)?</a:t>
             </a:r>
@@ -39710,8 +38981,7 @@
                   <a:srgbClr val="1B3B6F"/>
                 </a:solidFill>
                 <a:latin typeface="Calibri" pitchFamily="34" charset="0"/>
-                <a:ea typeface="Calibri" pitchFamily="34" charset="-122"/>
-                <a:cs typeface="Calibri" pitchFamily="34" charset="-120"/>
+                <a:cs typeface="Amiri" pitchFamily="2" charset="-78"/>
               </a:rPr>
               <a:t>A</a:t>
             </a:r>
@@ -39749,8 +39019,7 @@
                   <a:srgbClr val="9AA1AB"/>
                 </a:solidFill>
                 <a:latin typeface="Calibri" pitchFamily="34" charset="0"/>
-                <a:ea typeface="Calibri" pitchFamily="34" charset="-122"/>
-                <a:cs typeface="Calibri" pitchFamily="34" charset="-120"/>
+                <a:cs typeface="Amiri" pitchFamily="2" charset="-78"/>
               </a:rPr>
               <a:t>a country</a:t>
             </a:r>
@@ -39813,8 +39082,7 @@
                   <a:srgbClr val="1B3B6F"/>
                 </a:solidFill>
                 <a:latin typeface="Calibri" pitchFamily="34" charset="0"/>
-                <a:ea typeface="Calibri" pitchFamily="34" charset="-122"/>
-                <a:cs typeface="Calibri" pitchFamily="34" charset="-120"/>
+                <a:cs typeface="Amiri" pitchFamily="2" charset="-78"/>
               </a:rPr>
               <a:t>B</a:t>
             </a:r>
@@ -39852,8 +39120,7 @@
                   <a:srgbClr val="9AA1AB"/>
                 </a:solidFill>
                 <a:latin typeface="Calibri" pitchFamily="34" charset="0"/>
-                <a:ea typeface="Calibri" pitchFamily="34" charset="-122"/>
-                <a:cs typeface="Calibri" pitchFamily="34" charset="-120"/>
+                <a:cs typeface="Amiri" pitchFamily="2" charset="-78"/>
               </a:rPr>
               <a:t>a sign</a:t>
             </a:r>
@@ -39943,8 +39210,7 @@
                   <a:srgbClr val="FFFFFF"/>
                 </a:solidFill>
                 <a:latin typeface="Calibri" pitchFamily="34" charset="0"/>
-                <a:ea typeface="Calibri" pitchFamily="34" charset="-122"/>
-                <a:cs typeface="Calibri" pitchFamily="34" charset="-120"/>
+                <a:cs typeface="Amiri" pitchFamily="2" charset="-78"/>
               </a:rPr>
               <a:t>C</a:t>
             </a:r>
@@ -39982,8 +39248,7 @@
                   <a:srgbClr val="1F2A37"/>
                 </a:solidFill>
                 <a:latin typeface="Calibri" pitchFamily="34" charset="0"/>
-                <a:ea typeface="Calibri" pitchFamily="34" charset="-122"/>
-                <a:cs typeface="Calibri" pitchFamily="34" charset="-120"/>
+                <a:cs typeface="Amiri" pitchFamily="2" charset="-78"/>
               </a:rPr>
               <a:t>a language</a:t>
             </a:r>
@@ -40021,8 +39286,7 @@
                   <a:srgbClr val="8A6D1E"/>
                 </a:solidFill>
                 <a:latin typeface="Calibri" pitchFamily="34" charset="0"/>
-                <a:ea typeface="Calibri" pitchFamily="34" charset="-122"/>
-                <a:cs typeface="Calibri" pitchFamily="34" charset="-120"/>
+                <a:cs typeface="Amiri" pitchFamily="2" charset="-78"/>
               </a:rPr>
               <a:t>Prepared at home.</a:t>
             </a:r>
@@ -40119,8 +39383,7 @@
                   <a:srgbClr val="FFFFFF"/>
                 </a:solidFill>
                 <a:latin typeface="Calibri" pitchFamily="34" charset="0"/>
-                <a:ea typeface="Calibri" pitchFamily="34" charset="-122"/>
-                <a:cs typeface="Calibri" pitchFamily="34" charset="-120"/>
+                <a:cs typeface="Amiri" pitchFamily="2" charset="-78"/>
               </a:rPr>
               <a:t>5</a:t>
             </a:r>
@@ -40158,8 +39421,7 @@
                   <a:srgbClr val="1B3B6F"/>
                 </a:solidFill>
                 <a:latin typeface="Calibri" pitchFamily="34" charset="0"/>
-                <a:ea typeface="Calibri" pitchFamily="34" charset="-122"/>
-                <a:cs typeface="Calibri" pitchFamily="34" charset="-120"/>
+                <a:cs typeface="Amiri" pitchFamily="2" charset="-78"/>
               </a:rPr>
               <a:t>Where did you find Arabic script recently?</a:t>
             </a:r>
@@ -40249,8 +39511,7 @@
                   <a:srgbClr val="FFFFFF"/>
                 </a:solidFill>
                 <a:latin typeface="Calibri" pitchFamily="34" charset="0"/>
-                <a:ea typeface="Calibri" pitchFamily="34" charset="-122"/>
-                <a:cs typeface="Calibri" pitchFamily="34" charset="-120"/>
+                <a:cs typeface="Amiri" pitchFamily="2" charset="-78"/>
               </a:rPr>
               <a:t>A</a:t>
             </a:r>
@@ -40288,8 +39549,7 @@
                   <a:srgbClr val="1F2A37"/>
                 </a:solidFill>
                 <a:latin typeface="Calibri" pitchFamily="34" charset="0"/>
-                <a:ea typeface="Calibri" pitchFamily="34" charset="-122"/>
-                <a:cs typeface="Calibri" pitchFamily="34" charset="-120"/>
+                <a:cs typeface="Amiri" pitchFamily="2" charset="-78"/>
               </a:rPr>
               <a:t>Any safe example is right!</a:t>
             </a:r>
@@ -40352,8 +39612,7 @@
                   <a:srgbClr val="1B3B6F"/>
                 </a:solidFill>
                 <a:latin typeface="Calibri" pitchFamily="34" charset="0"/>
-                <a:ea typeface="Calibri" pitchFamily="34" charset="-122"/>
-                <a:cs typeface="Calibri" pitchFamily="34" charset="-120"/>
+                <a:cs typeface="Amiri" pitchFamily="2" charset="-78"/>
               </a:rPr>
               <a:t>B</a:t>
             </a:r>
@@ -40391,8 +39650,7 @@
                   <a:srgbClr val="9AA1AB"/>
                 </a:solidFill>
                 <a:latin typeface="Calibri" pitchFamily="34" charset="0"/>
-                <a:ea typeface="Calibri" pitchFamily="34" charset="-122"/>
-                <a:cs typeface="Calibri" pitchFamily="34" charset="-120"/>
+                <a:cs typeface="Amiri" pitchFamily="2" charset="-78"/>
               </a:rPr>
               <a:t>Nowhere — Arabic is only in books</a:t>
             </a:r>
@@ -40430,8 +39688,7 @@
                   <a:srgbClr val="8A6D1E"/>
                 </a:solidFill>
                 <a:latin typeface="Calibri" pitchFamily="34" charset="0"/>
-                <a:ea typeface="Calibri" pitchFamily="34" charset="-122"/>
-                <a:cs typeface="Calibri" pitchFamily="34" charset="-120"/>
+                <a:cs typeface="Amiri" pitchFamily="2" charset="-78"/>
               </a:rPr>
               <a:t>Share your example: source, script, reading, confidence.</a:t>
             </a:r>
@@ -40503,8 +39760,7 @@
                   <a:srgbClr val="8A6D1E"/>
                 </a:solidFill>
                 <a:latin typeface="Calibri" pitchFamily="34" charset="0"/>
-                <a:ea typeface="Calibri" pitchFamily="34" charset="-122"/>
-                <a:cs typeface="Calibri" pitchFamily="34" charset="-120"/>
+                <a:cs typeface="Amiri" pitchFamily="2" charset="-78"/>
               </a:rPr>
               <a:t>THE KEY IDEA FOR TODAY</a:t>
             </a:r>
@@ -40542,8 +39798,7 @@
                   <a:srgbClr val="1F2A37"/>
                 </a:solidFill>
                 <a:latin typeface="Calibri" pitchFamily="34" charset="0"/>
-                <a:ea typeface="Calibri" pitchFamily="34" charset="-122"/>
-                <a:cs typeface="Calibri" pitchFamily="34" charset="-120"/>
+                <a:cs typeface="Amiri" pitchFamily="2" charset="-78"/>
               </a:rPr>
               <a:t>Seeing Arabic script does not always mean the language is Arabic. Investigate!</a:t>
             </a:r>
@@ -40580,9 +39835,8 @@
                 <a:solidFill>
                   <a:srgbClr val="1B3B6F"/>
                 </a:solidFill>
-                <a:latin typeface="Amiri" pitchFamily="34" charset="0"/>
-                <a:ea typeface="Amiri" pitchFamily="34" charset="-122"/>
-                <a:cs typeface="Amiri" pitchFamily="34" charset="-120"/>
+                <a:latin typeface="Amiri" pitchFamily="2" charset="-78"/>
+                <a:cs typeface="Amiri" pitchFamily="2" charset="-78"/>
               </a:rPr>
               <a:t>خَطٌّ · لُغَةٌ · مَعْنًى</a:t>
             </a:r>
@@ -40620,8 +39874,7 @@
                   <a:srgbClr val="8A93A0"/>
                 </a:solidFill>
                 <a:latin typeface="Calibri" pitchFamily="34" charset="0"/>
-                <a:ea typeface="Calibri" pitchFamily="34" charset="-122"/>
-                <a:cs typeface="Calibri" pitchFamily="34" charset="-120"/>
+                <a:cs typeface="Amiri" pitchFamily="2" charset="-78"/>
               </a:rPr>
               <a:t>5 / 25</a:t>
             </a:r>
@@ -40715,9 +39968,8 @@
                 <a:solidFill>
                   <a:srgbClr val="D4AF37"/>
                 </a:solidFill>
-                <a:latin typeface="Amiri" pitchFamily="34" charset="0"/>
-                <a:ea typeface="Amiri" pitchFamily="34" charset="-122"/>
-                <a:cs typeface="Amiri" pitchFamily="34" charset="-120"/>
+                <a:latin typeface="Amiri" pitchFamily="2" charset="-78"/>
+                <a:cs typeface="Amiri" pitchFamily="2" charset="-78"/>
               </a:rPr>
               <a:t>م</a:t>
             </a:r>
@@ -40755,8 +40007,7 @@
                   <a:srgbClr val="1B3B6F"/>
                 </a:solidFill>
                 <a:latin typeface="Cambria" pitchFamily="34" charset="0"/>
-                <a:ea typeface="Cambria" pitchFamily="34" charset="-122"/>
-                <a:cs typeface="Cambria" pitchFamily="34" charset="-120"/>
+                <a:cs typeface="Amiri" pitchFamily="2" charset="-78"/>
               </a:rPr>
               <a:t>Al Madina Online School</a:t>
             </a:r>
@@ -40794,8 +40045,7 @@
                   <a:srgbClr val="8A6D1E"/>
                 </a:solidFill>
                 <a:latin typeface="Calibri" pitchFamily="34" charset="0"/>
-                <a:ea typeface="Calibri" pitchFamily="34" charset="-122"/>
-                <a:cs typeface="Calibri" pitchFamily="34" charset="-120"/>
+                <a:cs typeface="Amiri" pitchFamily="2" charset="-78"/>
               </a:rPr>
               <a:t>ARABIC DEPARTMENT · MIFTAH ARABIC · IGCSE 0544</a:t>
             </a:r>
@@ -40860,8 +40110,7 @@
                   <a:srgbClr val="FFFFFF"/>
                 </a:solidFill>
                 <a:latin typeface="Calibri" pitchFamily="34" charset="0"/>
-                <a:ea typeface="Calibri" pitchFamily="34" charset="-122"/>
-                <a:cs typeface="Calibri" pitchFamily="34" charset="-120"/>
+                <a:cs typeface="Amiri" pitchFamily="2" charset="-78"/>
               </a:rPr>
               <a:t>F1-L11 · Arabic around us</a:t>
             </a:r>
@@ -40926,8 +40175,7 @@
                   <a:srgbClr val="FFFFFF"/>
                 </a:solidFill>
                 <a:latin typeface="Calibri" pitchFamily="34" charset="0"/>
-                <a:ea typeface="Calibri" pitchFamily="34" charset="-122"/>
-                <a:cs typeface="Calibri" pitchFamily="34" charset="-120"/>
+                <a:cs typeface="Amiri" pitchFamily="2" charset="-78"/>
               </a:rPr>
               <a:t>WELCOME · 1 MIN</a:t>
             </a:r>
@@ -40965,8 +40213,7 @@
                   <a:srgbClr val="5A6472"/>
                 </a:solidFill>
                 <a:latin typeface="Calibri" pitchFamily="34" charset="0"/>
-                <a:ea typeface="Calibri" pitchFamily="34" charset="-122"/>
-                <a:cs typeface="Calibri" pitchFamily="34" charset="-120"/>
+                <a:cs typeface="Amiri" pitchFamily="2" charset="-78"/>
               </a:rPr>
               <a:t>LESSON OBJECTIVES</a:t>
             </a:r>
@@ -41004,8 +40251,7 @@
                   <a:srgbClr val="1B3B6F"/>
                 </a:solidFill>
                 <a:latin typeface="Cambria" pitchFamily="34" charset="0"/>
-                <a:ea typeface="Cambria" pitchFamily="34" charset="-122"/>
-                <a:cs typeface="Cambria" pitchFamily="34" charset="-120"/>
+                <a:cs typeface="Amiri" pitchFamily="2" charset="-78"/>
               </a:rPr>
               <a:t>Objectives and success criteria</a:t>
             </a:r>
@@ -41042,9 +40288,8 @@
                 <a:solidFill>
                   <a:srgbClr val="8A6D1E"/>
                 </a:solidFill>
-                <a:latin typeface="Amiri" pitchFamily="34" charset="0"/>
-                <a:ea typeface="Amiri" pitchFamily="34" charset="-122"/>
-                <a:cs typeface="Amiri" pitchFamily="34" charset="-120"/>
+                <a:latin typeface="Amiri" pitchFamily="2" charset="-78"/>
+                <a:cs typeface="Amiri" pitchFamily="2" charset="-78"/>
               </a:rPr>
               <a:t>الأَهْدَافُ وَمَعَايِيرُ النَّجَاحِ</a:t>
             </a:r>
@@ -41082,8 +40327,7 @@
                   <a:srgbClr val="8A93A0"/>
                 </a:solidFill>
                 <a:latin typeface="Calibri" pitchFamily="34" charset="0"/>
-                <a:ea typeface="Calibri" pitchFamily="34" charset="-122"/>
-                <a:cs typeface="Calibri" pitchFamily="34" charset="-120"/>
+                <a:cs typeface="Amiri" pitchFamily="2" charset="-78"/>
               </a:rPr>
               <a:t>Miftah Arabic · Foundation F1 · Arabic Script &amp; Sounds · F1-L11</a:t>
             </a:r>
@@ -41155,8 +40399,7 @@
                   <a:srgbClr val="1B3B6F"/>
                 </a:solidFill>
                 <a:latin typeface="Calibri" pitchFamily="34" charset="0"/>
-                <a:ea typeface="Calibri" pitchFamily="34" charset="-122"/>
-                <a:cs typeface="Calibri" pitchFamily="34" charset="-120"/>
+                <a:cs typeface="Amiri" pitchFamily="2" charset="-78"/>
               </a:rPr>
               <a:t>TODAY YOU WILL</a:t>
             </a:r>
@@ -41193,9 +40436,8 @@
                 <a:solidFill>
                   <a:srgbClr val="8A6D1E"/>
                 </a:solidFill>
-                <a:latin typeface="Amiri" pitchFamily="34" charset="0"/>
-                <a:ea typeface="Amiri" pitchFamily="34" charset="-122"/>
-                <a:cs typeface="Amiri" pitchFamily="34" charset="-120"/>
+                <a:latin typeface="Amiri" pitchFamily="2" charset="-78"/>
+                <a:cs typeface="Amiri" pitchFamily="2" charset="-78"/>
               </a:rPr>
               <a:t>سَتَتَعَلَّمُ اليَوْمَ</a:t>
             </a:r>
@@ -41258,8 +40500,7 @@
                   <a:srgbClr val="D4AF37"/>
                 </a:solidFill>
                 <a:latin typeface="Calibri" pitchFamily="34" charset="0"/>
-                <a:ea typeface="Calibri" pitchFamily="34" charset="-122"/>
-                <a:cs typeface="Calibri" pitchFamily="34" charset="-120"/>
+                <a:cs typeface="Amiri" pitchFamily="2" charset="-78"/>
               </a:rPr>
               <a:t>1</a:t>
             </a:r>
@@ -41297,8 +40538,7 @@
                   <a:srgbClr val="1F2A37"/>
                 </a:solidFill>
                 <a:latin typeface="Calibri" pitchFamily="34" charset="0"/>
-                <a:ea typeface="Calibri" pitchFamily="34" charset="-122"/>
-                <a:cs typeface="Calibri" pitchFamily="34" charset="-120"/>
+                <a:cs typeface="Amiri" pitchFamily="2" charset="-78"/>
               </a:rPr>
               <a:t>Separate script, language and meaning.</a:t>
             </a:r>
@@ -41361,8 +40601,7 @@
                   <a:srgbClr val="D4AF37"/>
                 </a:solidFill>
                 <a:latin typeface="Calibri" pitchFamily="34" charset="0"/>
-                <a:ea typeface="Calibri" pitchFamily="34" charset="-122"/>
-                <a:cs typeface="Calibri" pitchFamily="34" charset="-120"/>
+                <a:cs typeface="Amiri" pitchFamily="2" charset="-78"/>
               </a:rPr>
               <a:t>2</a:t>
             </a:r>
@@ -41400,8 +40639,7 @@
                   <a:srgbClr val="1F2A37"/>
                 </a:solidFill>
                 <a:latin typeface="Calibri" pitchFamily="34" charset="0"/>
-                <a:ea typeface="Calibri" pitchFamily="34" charset="-122"/>
-                <a:cs typeface="Calibri" pitchFamily="34" charset="-120"/>
+                <a:cs typeface="Amiri" pitchFamily="2" charset="-78"/>
               </a:rPr>
               <a:t>Explain formal Arabic and spoken varieties respectfully.</a:t>
             </a:r>
@@ -41464,8 +40702,7 @@
                   <a:srgbClr val="D4AF37"/>
                 </a:solidFill>
                 <a:latin typeface="Calibri" pitchFamily="34" charset="0"/>
-                <a:ea typeface="Calibri" pitchFamily="34" charset="-122"/>
-                <a:cs typeface="Calibri" pitchFamily="34" charset="-120"/>
+                <a:cs typeface="Amiri" pitchFamily="2" charset="-78"/>
               </a:rPr>
               <a:t>3</a:t>
             </a:r>
@@ -41503,8 +40740,7 @@
                   <a:srgbClr val="1F2A37"/>
                 </a:solidFill>
                 <a:latin typeface="Calibri" pitchFamily="34" charset="0"/>
-                <a:ea typeface="Calibri" pitchFamily="34" charset="-122"/>
-                <a:cs typeface="Calibri" pitchFamily="34" charset="-120"/>
+                <a:cs typeface="Amiri" pitchFamily="2" charset="-78"/>
               </a:rPr>
               <a:t>Connect examples and calligraphy styles to their purpose.</a:t>
             </a:r>
@@ -41567,8 +40803,7 @@
                   <a:srgbClr val="D4AF37"/>
                 </a:solidFill>
                 <a:latin typeface="Calibri" pitchFamily="34" charset="0"/>
-                <a:ea typeface="Calibri" pitchFamily="34" charset="-122"/>
-                <a:cs typeface="Calibri" pitchFamily="34" charset="-120"/>
+                <a:cs typeface="Amiri" pitchFamily="2" charset="-78"/>
               </a:rPr>
               <a:t>4</a:t>
             </a:r>
@@ -41606,8 +40841,7 @@
                   <a:srgbClr val="1F2A37"/>
                 </a:solidFill>
                 <a:latin typeface="Calibri" pitchFamily="34" charset="0"/>
-                <a:ea typeface="Calibri" pitchFamily="34" charset="-122"/>
-                <a:cs typeface="Calibri" pitchFamily="34" charset="-120"/>
+                <a:cs typeface="Amiri" pitchFamily="2" charset="-78"/>
               </a:rPr>
               <a:t>Make claims with evidence — and say when you are not sure.</a:t>
             </a:r>
@@ -41699,8 +40933,7 @@
                   <a:srgbClr val="FFFFFF"/>
                 </a:solidFill>
                 <a:latin typeface="Calibri" pitchFamily="34" charset="0"/>
-                <a:ea typeface="Calibri" pitchFamily="34" charset="-122"/>
-                <a:cs typeface="Calibri" pitchFamily="34" charset="-120"/>
+                <a:cs typeface="Amiri" pitchFamily="2" charset="-78"/>
               </a:rPr>
               <a:t>CORE</a:t>
             </a:r>
@@ -41738,8 +40971,7 @@
                   <a:srgbClr val="2E8B57"/>
                 </a:solidFill>
                 <a:latin typeface="Calibri" pitchFamily="34" charset="0"/>
-                <a:ea typeface="Calibri" pitchFamily="34" charset="-122"/>
-                <a:cs typeface="Calibri" pitchFamily="34" charset="-120"/>
+                <a:cs typeface="Amiri" pitchFamily="2" charset="-78"/>
               </a:rPr>
               <a:t>Everyone</a:t>
             </a:r>
@@ -41777,8 +41009,7 @@
                   <a:srgbClr val="2E8B57"/>
                 </a:solidFill>
                 <a:latin typeface="Calibri" pitchFamily="34" charset="0"/>
-                <a:ea typeface="Calibri" pitchFamily="34" charset="-122"/>
-                <a:cs typeface="Calibri" pitchFamily="34" charset="-120"/>
+                <a:cs typeface="Amiri" pitchFamily="2" charset="-78"/>
               </a:rPr>
               <a:t>☐  I can say where Arabic appears around me.</a:t>
             </a:r>
@@ -41816,8 +41047,7 @@
                   <a:srgbClr val="2E8B57"/>
                 </a:solidFill>
                 <a:latin typeface="Calibri" pitchFamily="34" charset="0"/>
-                <a:ea typeface="Calibri" pitchFamily="34" charset="-122"/>
-                <a:cs typeface="Calibri" pitchFamily="34" charset="-120"/>
+                <a:cs typeface="Amiri" pitchFamily="2" charset="-78"/>
               </a:rPr>
               <a:t>☐  I can read five Arabic country names.</a:t>
             </a:r>
@@ -41909,8 +41139,7 @@
                   <a:srgbClr val="FFFFFF"/>
                 </a:solidFill>
                 <a:latin typeface="Calibri" pitchFamily="34" charset="0"/>
-                <a:ea typeface="Calibri" pitchFamily="34" charset="-122"/>
-                <a:cs typeface="Calibri" pitchFamily="34" charset="-120"/>
+                <a:cs typeface="Amiri" pitchFamily="2" charset="-78"/>
               </a:rPr>
               <a:t>DEVELOP</a:t>
             </a:r>
@@ -41948,8 +41177,7 @@
                   <a:srgbClr val="C9780A"/>
                 </a:solidFill>
                 <a:latin typeface="Calibri" pitchFamily="34" charset="0"/>
-                <a:ea typeface="Calibri" pitchFamily="34" charset="-122"/>
-                <a:cs typeface="Calibri" pitchFamily="34" charset="-120"/>
+                <a:cs typeface="Amiri" pitchFamily="2" charset="-78"/>
               </a:rPr>
               <a:t>Most of us</a:t>
             </a:r>
@@ -41987,8 +41215,7 @@
                   <a:srgbClr val="C9780A"/>
                 </a:solidFill>
                 <a:latin typeface="Calibri" pitchFamily="34" charset="0"/>
-                <a:ea typeface="Calibri" pitchFamily="34" charset="-122"/>
-                <a:cs typeface="Calibri" pitchFamily="34" charset="-120"/>
+                <a:cs typeface="Amiri" pitchFamily="2" charset="-78"/>
               </a:rPr>
               <a:t>☐  I can explain script vs language vs meaning.</a:t>
             </a:r>
@@ -42026,8 +41253,7 @@
                   <a:srgbClr val="C9780A"/>
                 </a:solidFill>
                 <a:latin typeface="Calibri" pitchFamily="34" charset="0"/>
-                <a:ea typeface="Calibri" pitchFamily="34" charset="-122"/>
-                <a:cs typeface="Calibri" pitchFamily="34" charset="-120"/>
+                <a:cs typeface="Amiri" pitchFamily="2" charset="-78"/>
               </a:rPr>
               <a:t>☐  I can explain MSA and dialects respectfully.</a:t>
             </a:r>
@@ -42119,8 +41345,7 @@
                   <a:srgbClr val="FFFFFF"/>
                 </a:solidFill>
                 <a:latin typeface="Calibri" pitchFamily="34" charset="0"/>
-                <a:ea typeface="Calibri" pitchFamily="34" charset="-122"/>
-                <a:cs typeface="Calibri" pitchFamily="34" charset="-120"/>
+                <a:cs typeface="Amiri" pitchFamily="2" charset="-78"/>
               </a:rPr>
               <a:t>STRETCH</a:t>
             </a:r>
@@ -42158,8 +41383,7 @@
                   <a:srgbClr val="B83227"/>
                 </a:solidFill>
                 <a:latin typeface="Calibri" pitchFamily="34" charset="0"/>
-                <a:ea typeface="Calibri" pitchFamily="34" charset="-122"/>
-                <a:cs typeface="Calibri" pitchFamily="34" charset="-120"/>
+                <a:cs typeface="Amiri" pitchFamily="2" charset="-78"/>
               </a:rPr>
               <a:t>Aim high</a:t>
             </a:r>
@@ -42197,8 +41421,7 @@
                   <a:srgbClr val="B83227"/>
                 </a:solidFill>
                 <a:latin typeface="Calibri" pitchFamily="34" charset="0"/>
-                <a:ea typeface="Calibri" pitchFamily="34" charset="-122"/>
-                <a:cs typeface="Calibri" pitchFamily="34" charset="-120"/>
+                <a:cs typeface="Amiri" pitchFamily="2" charset="-78"/>
               </a:rPr>
               <a:t>☐  I can use the ABCD detective chain.</a:t>
             </a:r>
@@ -42236,8 +41459,7 @@
                   <a:srgbClr val="B83227"/>
                 </a:solidFill>
                 <a:latin typeface="Calibri" pitchFamily="34" charset="0"/>
-                <a:ea typeface="Calibri" pitchFamily="34" charset="-122"/>
-                <a:cs typeface="Calibri" pitchFamily="34" charset="-120"/>
+                <a:cs typeface="Amiri" pitchFamily="2" charset="-78"/>
               </a:rPr>
               <a:t>☐  I can say “I can identify the script, but I cannot yet verify the meaning.”</a:t>
             </a:r>
@@ -42275,8 +41497,7 @@
                   <a:srgbClr val="8A93A0"/>
                 </a:solidFill>
                 <a:latin typeface="Calibri" pitchFamily="34" charset="0"/>
-                <a:ea typeface="Calibri" pitchFamily="34" charset="-122"/>
-                <a:cs typeface="Calibri" pitchFamily="34" charset="-120"/>
+                <a:cs typeface="Amiri" pitchFamily="2" charset="-78"/>
               </a:rPr>
               <a:t>6 / 25</a:t>
             </a:r>
@@ -42370,9 +41591,8 @@
                 <a:solidFill>
                   <a:srgbClr val="D4AF37"/>
                 </a:solidFill>
-                <a:latin typeface="Amiri" pitchFamily="34" charset="0"/>
-                <a:ea typeface="Amiri" pitchFamily="34" charset="-122"/>
-                <a:cs typeface="Amiri" pitchFamily="34" charset="-120"/>
+                <a:latin typeface="Amiri" pitchFamily="2" charset="-78"/>
+                <a:cs typeface="Amiri" pitchFamily="2" charset="-78"/>
               </a:rPr>
               <a:t>م</a:t>
             </a:r>
@@ -42410,8 +41630,7 @@
                   <a:srgbClr val="1B3B6F"/>
                 </a:solidFill>
                 <a:latin typeface="Cambria" pitchFamily="34" charset="0"/>
-                <a:ea typeface="Cambria" pitchFamily="34" charset="-122"/>
-                <a:cs typeface="Cambria" pitchFamily="34" charset="-120"/>
+                <a:cs typeface="Amiri" pitchFamily="2" charset="-78"/>
               </a:rPr>
               <a:t>Al Madina Online School</a:t>
             </a:r>
@@ -42449,8 +41668,7 @@
                   <a:srgbClr val="8A6D1E"/>
                 </a:solidFill>
                 <a:latin typeface="Calibri" pitchFamily="34" charset="0"/>
-                <a:ea typeface="Calibri" pitchFamily="34" charset="-122"/>
-                <a:cs typeface="Calibri" pitchFamily="34" charset="-120"/>
+                <a:cs typeface="Amiri" pitchFamily="2" charset="-78"/>
               </a:rPr>
               <a:t>ARABIC DEPARTMENT · MIFTAH ARABIC · IGCSE 0544</a:t>
             </a:r>
@@ -42515,8 +41733,7 @@
                   <a:srgbClr val="FFFFFF"/>
                 </a:solidFill>
                 <a:latin typeface="Calibri" pitchFamily="34" charset="0"/>
-                <a:ea typeface="Calibri" pitchFamily="34" charset="-122"/>
-                <a:cs typeface="Calibri" pitchFamily="34" charset="-120"/>
+                <a:cs typeface="Amiri" pitchFamily="2" charset="-78"/>
               </a:rPr>
               <a:t>F1-L11 · Arabic around us</a:t>
             </a:r>
@@ -42581,8 +41798,7 @@
                   <a:srgbClr val="FFFFFF"/>
                 </a:solidFill>
                 <a:latin typeface="Calibri" pitchFamily="34" charset="0"/>
-                <a:ea typeface="Calibri" pitchFamily="34" charset="-122"/>
-                <a:cs typeface="Calibri" pitchFamily="34" charset="-120"/>
+                <a:cs typeface="Amiri" pitchFamily="2" charset="-78"/>
               </a:rPr>
               <a:t>TEACHER INSTRUCTION · 3 MIN</a:t>
             </a:r>
@@ -42620,8 +41836,7 @@
                   <a:srgbClr val="1B3B6F"/>
                 </a:solidFill>
                 <a:latin typeface="Calibri" pitchFamily="34" charset="0"/>
-                <a:ea typeface="Calibri" pitchFamily="34" charset="-122"/>
-                <a:cs typeface="Calibri" pitchFamily="34" charset="-120"/>
+                <a:cs typeface="Amiri" pitchFamily="2" charset="-78"/>
               </a:rPr>
               <a:t>KEY WORDS · WEBSITE KEY VOCABULARY</a:t>
             </a:r>
@@ -42659,8 +41874,7 @@
                   <a:srgbClr val="1B3B6F"/>
                 </a:solidFill>
                 <a:latin typeface="Cambria" pitchFamily="34" charset="0"/>
-                <a:ea typeface="Cambria" pitchFamily="34" charset="-122"/>
-                <a:cs typeface="Cambria" pitchFamily="34" charset="-120"/>
+                <a:cs typeface="Amiri" pitchFamily="2" charset="-78"/>
               </a:rPr>
               <a:t>Words for talking about Arabic in the world</a:t>
             </a:r>
@@ -42697,9 +41911,8 @@
                 <a:solidFill>
                   <a:srgbClr val="8A6D1E"/>
                 </a:solidFill>
-                <a:latin typeface="Amiri" pitchFamily="34" charset="0"/>
-                <a:ea typeface="Amiri" pitchFamily="34" charset="-122"/>
-                <a:cs typeface="Amiri" pitchFamily="34" charset="-120"/>
+                <a:latin typeface="Amiri" pitchFamily="2" charset="-78"/>
+                <a:cs typeface="Amiri" pitchFamily="2" charset="-78"/>
               </a:rPr>
               <a:t>كَلِمَاتٌ عَنِ العَالَمِ</a:t>
             </a:r>
@@ -42737,8 +41950,7 @@
                   <a:srgbClr val="8A93A0"/>
                 </a:solidFill>
                 <a:latin typeface="Calibri" pitchFamily="34" charset="0"/>
-                <a:ea typeface="Calibri" pitchFamily="34" charset="-122"/>
-                <a:cs typeface="Calibri" pitchFamily="34" charset="-120"/>
+                <a:cs typeface="Amiri" pitchFamily="2" charset="-78"/>
               </a:rPr>
               <a:t>Miftah Arabic · Foundation F1 · Arabic Script &amp; Sounds · F1-L11</a:t>
             </a:r>
@@ -42835,8 +42047,7 @@
                   <a:srgbClr val="1B3B6F"/>
                 </a:solidFill>
                 <a:latin typeface="Calibri" pitchFamily="34" charset="0"/>
-                <a:ea typeface="Calibri" pitchFamily="34" charset="-122"/>
-                <a:cs typeface="Calibri" pitchFamily="34" charset="-120"/>
+                <a:cs typeface="Amiri" pitchFamily="2" charset="-78"/>
               </a:rPr>
               <a:t>1</a:t>
             </a:r>
@@ -42901,8 +42112,7 @@
                   <a:srgbClr val="8A6D1E"/>
                 </a:solidFill>
                 <a:latin typeface="Calibri" pitchFamily="34" charset="0"/>
-                <a:ea typeface="Calibri" pitchFamily="34" charset="-122"/>
-                <a:cs typeface="Calibri" pitchFamily="34" charset="-120"/>
+                <a:cs typeface="Amiri" pitchFamily="2" charset="-78"/>
               </a:rPr>
               <a:t>noun · f.</a:t>
             </a:r>
@@ -42967,8 +42177,7 @@
                   <a:srgbClr val="FFFFFF"/>
                 </a:solidFill>
                 <a:latin typeface="Calibri" pitchFamily="34" charset="0"/>
-                <a:ea typeface="Calibri" pitchFamily="34" charset="-122"/>
-                <a:cs typeface="Calibri" pitchFamily="34" charset="-120"/>
+                <a:cs typeface="Amiri" pitchFamily="2" charset="-78"/>
               </a:rPr>
               <a:t>CORE</a:t>
             </a:r>
@@ -43005,9 +42214,8 @@
                 <a:solidFill>
                   <a:srgbClr val="1B3B6F"/>
                 </a:solidFill>
-                <a:latin typeface="Amiri" pitchFamily="34" charset="0"/>
-                <a:ea typeface="Amiri" pitchFamily="34" charset="-122"/>
-                <a:cs typeface="Amiri" pitchFamily="34" charset="-120"/>
+                <a:latin typeface="Amiri" pitchFamily="2" charset="-78"/>
+                <a:cs typeface="Amiri" pitchFamily="2" charset="-78"/>
               </a:rPr>
               <a:t>لُغَةٌ</a:t>
             </a:r>
@@ -43045,8 +42253,7 @@
                   <a:srgbClr val="1F2A37"/>
                 </a:solidFill>
                 <a:latin typeface="Calibri" pitchFamily="34" charset="0"/>
-                <a:ea typeface="Calibri" pitchFamily="34" charset="-122"/>
-                <a:cs typeface="Calibri" pitchFamily="34" charset="-120"/>
+                <a:cs typeface="Amiri" pitchFamily="2" charset="-78"/>
               </a:rPr>
               <a:t>language</a:t>
             </a:r>
@@ -43062,8 +42269,7 @@
                   <a:srgbClr val="5A6472"/>
                 </a:solidFill>
                 <a:latin typeface="Calibri" pitchFamily="34" charset="0"/>
-                <a:ea typeface="Calibri" pitchFamily="34" charset="-122"/>
-                <a:cs typeface="Calibri" pitchFamily="34" charset="-120"/>
+                <a:cs typeface="Amiri" pitchFamily="2" charset="-78"/>
               </a:rPr>
               <a:t>lugha · pl. lughāt</a:t>
             </a:r>
@@ -43128,8 +42334,7 @@
                   <a:srgbClr val="8A6D1E"/>
                 </a:solidFill>
                 <a:latin typeface="Calibri" pitchFamily="34" charset="0"/>
-                <a:ea typeface="Calibri" pitchFamily="34" charset="-122"/>
-                <a:cs typeface="Calibri" pitchFamily="34" charset="-120"/>
+                <a:cs typeface="Amiri" pitchFamily="2" charset="-78"/>
               </a:rPr>
               <a:t>sg.</a:t>
             </a:r>
@@ -43166,9 +42371,8 @@
                 <a:solidFill>
                   <a:srgbClr val="1B3B6F"/>
                 </a:solidFill>
-                <a:latin typeface="Amiri" pitchFamily="34" charset="0"/>
-                <a:ea typeface="Amiri" pitchFamily="34" charset="-122"/>
-                <a:cs typeface="Amiri" pitchFamily="34" charset="-120"/>
+                <a:latin typeface="Amiri" pitchFamily="2" charset="-78"/>
+                <a:cs typeface="Amiri" pitchFamily="2" charset="-78"/>
               </a:rPr>
               <a:t>لُغَةٌ</a:t>
             </a:r>
@@ -43233,8 +42437,7 @@
                   <a:srgbClr val="8A6D1E"/>
                 </a:solidFill>
                 <a:latin typeface="Calibri" pitchFamily="34" charset="0"/>
-                <a:ea typeface="Calibri" pitchFamily="34" charset="-122"/>
-                <a:cs typeface="Calibri" pitchFamily="34" charset="-120"/>
+                <a:cs typeface="Amiri" pitchFamily="2" charset="-78"/>
               </a:rPr>
               <a:t>pl.</a:t>
             </a:r>
@@ -43271,9 +42474,8 @@
                 <a:solidFill>
                   <a:srgbClr val="1B3B6F"/>
                 </a:solidFill>
-                <a:latin typeface="Amiri" pitchFamily="34" charset="0"/>
-                <a:ea typeface="Amiri" pitchFamily="34" charset="-122"/>
-                <a:cs typeface="Amiri" pitchFamily="34" charset="-120"/>
+                <a:latin typeface="Amiri" pitchFamily="2" charset="-78"/>
+                <a:cs typeface="Amiri" pitchFamily="2" charset="-78"/>
               </a:rPr>
               <a:t>لُغَاتٌ</a:t>
             </a:r>
@@ -43370,8 +42572,7 @@
                   <a:srgbClr val="1B3B6F"/>
                 </a:solidFill>
                 <a:latin typeface="Calibri" pitchFamily="34" charset="0"/>
-                <a:ea typeface="Calibri" pitchFamily="34" charset="-122"/>
-                <a:cs typeface="Calibri" pitchFamily="34" charset="-120"/>
+                <a:cs typeface="Amiri" pitchFamily="2" charset="-78"/>
               </a:rPr>
               <a:t>2</a:t>
             </a:r>
@@ -43436,8 +42637,7 @@
                   <a:srgbClr val="8A6D1E"/>
                 </a:solidFill>
                 <a:latin typeface="Calibri" pitchFamily="34" charset="0"/>
-                <a:ea typeface="Calibri" pitchFamily="34" charset="-122"/>
-                <a:cs typeface="Calibri" pitchFamily="34" charset="-120"/>
+                <a:cs typeface="Amiri" pitchFamily="2" charset="-78"/>
               </a:rPr>
               <a:t>noun · f.</a:t>
             </a:r>
@@ -43502,8 +42702,7 @@
                   <a:srgbClr val="FFFFFF"/>
                 </a:solidFill>
                 <a:latin typeface="Calibri" pitchFamily="34" charset="0"/>
-                <a:ea typeface="Calibri" pitchFamily="34" charset="-122"/>
-                <a:cs typeface="Calibri" pitchFamily="34" charset="-120"/>
+                <a:cs typeface="Amiri" pitchFamily="2" charset="-78"/>
               </a:rPr>
               <a:t>CORE</a:t>
             </a:r>
@@ -43540,9 +42739,8 @@
                 <a:solidFill>
                   <a:srgbClr val="1B3B6F"/>
                 </a:solidFill>
-                <a:latin typeface="Amiri" pitchFamily="34" charset="0"/>
-                <a:ea typeface="Amiri" pitchFamily="34" charset="-122"/>
-                <a:cs typeface="Amiri" pitchFamily="34" charset="-120"/>
+                <a:latin typeface="Amiri" pitchFamily="2" charset="-78"/>
+                <a:cs typeface="Amiri" pitchFamily="2" charset="-78"/>
               </a:rPr>
               <a:t>ثَقَافَةٌ</a:t>
             </a:r>
@@ -43580,8 +42778,7 @@
                   <a:srgbClr val="1F2A37"/>
                 </a:solidFill>
                 <a:latin typeface="Calibri" pitchFamily="34" charset="0"/>
-                <a:ea typeface="Calibri" pitchFamily="34" charset="-122"/>
-                <a:cs typeface="Calibri" pitchFamily="34" charset="-120"/>
+                <a:cs typeface="Amiri" pitchFamily="2" charset="-78"/>
               </a:rPr>
               <a:t>culture</a:t>
             </a:r>
@@ -43597,8 +42794,7 @@
                   <a:srgbClr val="5A6472"/>
                 </a:solidFill>
                 <a:latin typeface="Calibri" pitchFamily="34" charset="0"/>
-                <a:ea typeface="Calibri" pitchFamily="34" charset="-122"/>
-                <a:cs typeface="Calibri" pitchFamily="34" charset="-120"/>
+                <a:cs typeface="Amiri" pitchFamily="2" charset="-78"/>
               </a:rPr>
               <a:t>thaqāfa</a:t>
             </a:r>
@@ -43663,8 +42859,7 @@
                   <a:srgbClr val="8A6D1E"/>
                 </a:solidFill>
                 <a:latin typeface="Calibri" pitchFamily="34" charset="0"/>
-                <a:ea typeface="Calibri" pitchFamily="34" charset="-122"/>
-                <a:cs typeface="Calibri" pitchFamily="34" charset="-120"/>
+                <a:cs typeface="Amiri" pitchFamily="2" charset="-78"/>
               </a:rPr>
               <a:t>sg.</a:t>
             </a:r>
@@ -43701,9 +42896,8 @@
                 <a:solidFill>
                   <a:srgbClr val="1B3B6F"/>
                 </a:solidFill>
-                <a:latin typeface="Amiri" pitchFamily="34" charset="0"/>
-                <a:ea typeface="Amiri" pitchFamily="34" charset="-122"/>
-                <a:cs typeface="Amiri" pitchFamily="34" charset="-120"/>
+                <a:latin typeface="Amiri" pitchFamily="2" charset="-78"/>
+                <a:cs typeface="Amiri" pitchFamily="2" charset="-78"/>
               </a:rPr>
               <a:t>ثَقَافَةٌ</a:t>
             </a:r>
@@ -43768,8 +42962,7 @@
                   <a:srgbClr val="8A6D1E"/>
                 </a:solidFill>
                 <a:latin typeface="Calibri" pitchFamily="34" charset="0"/>
-                <a:ea typeface="Calibri" pitchFamily="34" charset="-122"/>
-                <a:cs typeface="Calibri" pitchFamily="34" charset="-120"/>
+                <a:cs typeface="Amiri" pitchFamily="2" charset="-78"/>
               </a:rPr>
               <a:t>pl.</a:t>
             </a:r>
@@ -43806,9 +42999,8 @@
                 <a:solidFill>
                   <a:srgbClr val="1B3B6F"/>
                 </a:solidFill>
-                <a:latin typeface="Amiri" pitchFamily="34" charset="0"/>
-                <a:ea typeface="Amiri" pitchFamily="34" charset="-122"/>
-                <a:cs typeface="Amiri" pitchFamily="34" charset="-120"/>
+                <a:latin typeface="Amiri" pitchFamily="2" charset="-78"/>
+                <a:cs typeface="Amiri" pitchFamily="2" charset="-78"/>
               </a:rPr>
               <a:t>ثَقَافَاتٌ</a:t>
             </a:r>
@@ -43905,8 +43097,7 @@
                   <a:srgbClr val="1B3B6F"/>
                 </a:solidFill>
                 <a:latin typeface="Calibri" pitchFamily="34" charset="0"/>
-                <a:ea typeface="Calibri" pitchFamily="34" charset="-122"/>
-                <a:cs typeface="Calibri" pitchFamily="34" charset="-120"/>
+                <a:cs typeface="Amiri" pitchFamily="2" charset="-78"/>
               </a:rPr>
               <a:t>3</a:t>
             </a:r>
@@ -43971,8 +43162,7 @@
                   <a:srgbClr val="8A6D1E"/>
                 </a:solidFill>
                 <a:latin typeface="Calibri" pitchFamily="34" charset="0"/>
-                <a:ea typeface="Calibri" pitchFamily="34" charset="-122"/>
-                <a:cs typeface="Calibri" pitchFamily="34" charset="-120"/>
+                <a:cs typeface="Amiri" pitchFamily="2" charset="-78"/>
               </a:rPr>
               <a:t>noun · m.</a:t>
             </a:r>
@@ -44037,8 +43227,7 @@
                   <a:srgbClr val="FFFFFF"/>
                 </a:solidFill>
                 <a:latin typeface="Calibri" pitchFamily="34" charset="0"/>
-                <a:ea typeface="Calibri" pitchFamily="34" charset="-122"/>
-                <a:cs typeface="Calibri" pitchFamily="34" charset="-120"/>
+                <a:cs typeface="Amiri" pitchFamily="2" charset="-78"/>
               </a:rPr>
               <a:t>CORE</a:t>
             </a:r>
@@ -44075,9 +43264,8 @@
                 <a:solidFill>
                   <a:srgbClr val="1B3B6F"/>
                 </a:solidFill>
-                <a:latin typeface="Amiri" pitchFamily="34" charset="0"/>
-                <a:ea typeface="Amiri" pitchFamily="34" charset="-122"/>
-                <a:cs typeface="Amiri" pitchFamily="34" charset="-120"/>
+                <a:latin typeface="Amiri" pitchFamily="2" charset="-78"/>
+                <a:cs typeface="Amiri" pitchFamily="2" charset="-78"/>
               </a:rPr>
               <a:t>عَالَمٌ</a:t>
             </a:r>
@@ -44115,8 +43303,7 @@
                   <a:srgbClr val="1F2A37"/>
                 </a:solidFill>
                 <a:latin typeface="Calibri" pitchFamily="34" charset="0"/>
-                <a:ea typeface="Calibri" pitchFamily="34" charset="-122"/>
-                <a:cs typeface="Calibri" pitchFamily="34" charset="-120"/>
+                <a:cs typeface="Amiri" pitchFamily="2" charset="-78"/>
               </a:rPr>
               <a:t>world</a:t>
             </a:r>
@@ -44132,8 +43319,7 @@
                   <a:srgbClr val="5A6472"/>
                 </a:solidFill>
                 <a:latin typeface="Calibri" pitchFamily="34" charset="0"/>
-                <a:ea typeface="Calibri" pitchFamily="34" charset="-122"/>
-                <a:cs typeface="Calibri" pitchFamily="34" charset="-120"/>
+                <a:cs typeface="Amiri" pitchFamily="2" charset="-78"/>
               </a:rPr>
               <a:t>ʿālam</a:t>
             </a:r>
@@ -44170,9 +43356,8 @@
                 <a:solidFill>
                   <a:srgbClr val="8A6D1E"/>
                 </a:solidFill>
-                <a:latin typeface="Amiri" pitchFamily="34" charset="0"/>
-                <a:ea typeface="Amiri" pitchFamily="34" charset="-122"/>
-                <a:cs typeface="Amiri" pitchFamily="34" charset="-120"/>
+                <a:latin typeface="Amiri" pitchFamily="2" charset="-78"/>
+                <a:cs typeface="Amiri" pitchFamily="2" charset="-78"/>
               </a:rPr>
               <a:t>العَالَمُ العَرَبِيُّ</a:t>
             </a:r>
@@ -44185,8 +43370,7 @@
                   <a:srgbClr val="8A6D1E"/>
                 </a:solidFill>
                 <a:latin typeface="Calibri" pitchFamily="34" charset="0"/>
-                <a:ea typeface="Calibri" pitchFamily="34" charset="-122"/>
-                <a:cs typeface="Calibri" pitchFamily="34" charset="-120"/>
+                <a:cs typeface="Amiri" pitchFamily="2" charset="-78"/>
               </a:rPr>
               <a:t> = the Arab world</a:t>
             </a:r>
@@ -44283,8 +43467,7 @@
                   <a:srgbClr val="1B3B6F"/>
                 </a:solidFill>
                 <a:latin typeface="Calibri" pitchFamily="34" charset="0"/>
-                <a:ea typeface="Calibri" pitchFamily="34" charset="-122"/>
-                <a:cs typeface="Calibri" pitchFamily="34" charset="-120"/>
+                <a:cs typeface="Amiri" pitchFamily="2" charset="-78"/>
               </a:rPr>
               <a:t>4</a:t>
             </a:r>
@@ -44349,8 +43532,7 @@
                   <a:srgbClr val="8A6D1E"/>
                 </a:solidFill>
                 <a:latin typeface="Calibri" pitchFamily="34" charset="0"/>
-                <a:ea typeface="Calibri" pitchFamily="34" charset="-122"/>
-                <a:cs typeface="Calibri" pitchFamily="34" charset="-120"/>
+                <a:cs typeface="Amiri" pitchFamily="2" charset="-78"/>
               </a:rPr>
               <a:t>noun · pl.</a:t>
             </a:r>
@@ -44415,8 +43597,7 @@
                   <a:srgbClr val="FFFFFF"/>
                 </a:solidFill>
                 <a:latin typeface="Calibri" pitchFamily="34" charset="0"/>
-                <a:ea typeface="Calibri" pitchFamily="34" charset="-122"/>
-                <a:cs typeface="Calibri" pitchFamily="34" charset="-120"/>
+                <a:cs typeface="Amiri" pitchFamily="2" charset="-78"/>
               </a:rPr>
               <a:t>CORE</a:t>
             </a:r>
@@ -44453,9 +43634,8 @@
                 <a:solidFill>
                   <a:srgbClr val="1B3B6F"/>
                 </a:solidFill>
-                <a:latin typeface="Amiri" pitchFamily="34" charset="0"/>
-                <a:ea typeface="Amiri" pitchFamily="34" charset="-122"/>
-                <a:cs typeface="Amiri" pitchFamily="34" charset="-120"/>
+                <a:latin typeface="Amiri" pitchFamily="2" charset="-78"/>
+                <a:cs typeface="Amiri" pitchFamily="2" charset="-78"/>
               </a:rPr>
               <a:t>بِلَادٌ</a:t>
             </a:r>
@@ -44493,8 +43673,7 @@
                   <a:srgbClr val="1F2A37"/>
                 </a:solidFill>
                 <a:latin typeface="Calibri" pitchFamily="34" charset="0"/>
-                <a:ea typeface="Calibri" pitchFamily="34" charset="-122"/>
-                <a:cs typeface="Calibri" pitchFamily="34" charset="-120"/>
+                <a:cs typeface="Amiri" pitchFamily="2" charset="-78"/>
               </a:rPr>
               <a:t>countries, lands</a:t>
             </a:r>
@@ -44510,8 +43689,7 @@
                   <a:srgbClr val="5A6472"/>
                 </a:solidFill>
                 <a:latin typeface="Calibri" pitchFamily="34" charset="0"/>
-                <a:ea typeface="Calibri" pitchFamily="34" charset="-122"/>
-                <a:cs typeface="Calibri" pitchFamily="34" charset="-120"/>
+                <a:cs typeface="Amiri" pitchFamily="2" charset="-78"/>
               </a:rPr>
               <a:t>bilād</a:t>
             </a:r>
@@ -44576,8 +43754,7 @@
                   <a:srgbClr val="8A6D1E"/>
                 </a:solidFill>
                 <a:latin typeface="Calibri" pitchFamily="34" charset="0"/>
-                <a:ea typeface="Calibri" pitchFamily="34" charset="-122"/>
-                <a:cs typeface="Calibri" pitchFamily="34" charset="-120"/>
+                <a:cs typeface="Amiri" pitchFamily="2" charset="-78"/>
               </a:rPr>
               <a:t>sg.</a:t>
             </a:r>
@@ -44614,9 +43791,8 @@
                 <a:solidFill>
                   <a:srgbClr val="1B3B6F"/>
                 </a:solidFill>
-                <a:latin typeface="Amiri" pitchFamily="34" charset="0"/>
-                <a:ea typeface="Amiri" pitchFamily="34" charset="-122"/>
-                <a:cs typeface="Amiri" pitchFamily="34" charset="-120"/>
+                <a:latin typeface="Amiri" pitchFamily="2" charset="-78"/>
+                <a:cs typeface="Amiri" pitchFamily="2" charset="-78"/>
               </a:rPr>
               <a:t>بَلَدٌ</a:t>
             </a:r>
@@ -44681,8 +43857,7 @@
                   <a:srgbClr val="8A6D1E"/>
                 </a:solidFill>
                 <a:latin typeface="Calibri" pitchFamily="34" charset="0"/>
-                <a:ea typeface="Calibri" pitchFamily="34" charset="-122"/>
-                <a:cs typeface="Calibri" pitchFamily="34" charset="-120"/>
+                <a:cs typeface="Amiri" pitchFamily="2" charset="-78"/>
               </a:rPr>
               <a:t>pl.</a:t>
             </a:r>
@@ -44719,9 +43894,8 @@
                 <a:solidFill>
                   <a:srgbClr val="1B3B6F"/>
                 </a:solidFill>
-                <a:latin typeface="Amiri" pitchFamily="34" charset="0"/>
-                <a:ea typeface="Amiri" pitchFamily="34" charset="-122"/>
-                <a:cs typeface="Amiri" pitchFamily="34" charset="-120"/>
+                <a:latin typeface="Amiri" pitchFamily="2" charset="-78"/>
+                <a:cs typeface="Amiri" pitchFamily="2" charset="-78"/>
               </a:rPr>
               <a:t>بِلَادٌ</a:t>
             </a:r>
@@ -44818,8 +43992,7 @@
                   <a:srgbClr val="1B3B6F"/>
                 </a:solidFill>
                 <a:latin typeface="Calibri" pitchFamily="34" charset="0"/>
-                <a:ea typeface="Calibri" pitchFamily="34" charset="-122"/>
-                <a:cs typeface="Calibri" pitchFamily="34" charset="-120"/>
+                <a:cs typeface="Amiri" pitchFamily="2" charset="-78"/>
               </a:rPr>
               <a:t>5</a:t>
             </a:r>
@@ -44884,8 +44057,7 @@
                   <a:srgbClr val="8A6D1E"/>
                 </a:solidFill>
                 <a:latin typeface="Calibri" pitchFamily="34" charset="0"/>
-                <a:ea typeface="Calibri" pitchFamily="34" charset="-122"/>
-                <a:cs typeface="Calibri" pitchFamily="34" charset="-120"/>
+                <a:cs typeface="Amiri" pitchFamily="2" charset="-78"/>
               </a:rPr>
               <a:t>noun · m.</a:t>
             </a:r>
@@ -44922,9 +44094,8 @@
                 <a:solidFill>
                   <a:srgbClr val="1B3B6F"/>
                 </a:solidFill>
-                <a:latin typeface="Amiri" pitchFamily="34" charset="0"/>
-                <a:ea typeface="Amiri" pitchFamily="34" charset="-122"/>
-                <a:cs typeface="Amiri" pitchFamily="34" charset="-120"/>
+                <a:latin typeface="Amiri" pitchFamily="2" charset="-78"/>
+                <a:cs typeface="Amiri" pitchFamily="2" charset="-78"/>
               </a:rPr>
               <a:t>فَنٌّ</a:t>
             </a:r>
@@ -44962,8 +44133,7 @@
                   <a:srgbClr val="1F2A37"/>
                 </a:solidFill>
                 <a:latin typeface="Calibri" pitchFamily="34" charset="0"/>
-                <a:ea typeface="Calibri" pitchFamily="34" charset="-122"/>
-                <a:cs typeface="Calibri" pitchFamily="34" charset="-120"/>
+                <a:cs typeface="Amiri" pitchFamily="2" charset="-78"/>
               </a:rPr>
               <a:t>art</a:t>
             </a:r>
@@ -44979,8 +44149,7 @@
                   <a:srgbClr val="5A6472"/>
                 </a:solidFill>
                 <a:latin typeface="Calibri" pitchFamily="34" charset="0"/>
-                <a:ea typeface="Calibri" pitchFamily="34" charset="-122"/>
-                <a:cs typeface="Calibri" pitchFamily="34" charset="-120"/>
+                <a:cs typeface="Amiri" pitchFamily="2" charset="-78"/>
               </a:rPr>
               <a:t>fann · pl. funūn</a:t>
             </a:r>
@@ -45045,8 +44214,7 @@
                   <a:srgbClr val="8A6D1E"/>
                 </a:solidFill>
                 <a:latin typeface="Calibri" pitchFamily="34" charset="0"/>
-                <a:ea typeface="Calibri" pitchFamily="34" charset="-122"/>
-                <a:cs typeface="Calibri" pitchFamily="34" charset="-120"/>
+                <a:cs typeface="Amiri" pitchFamily="2" charset="-78"/>
               </a:rPr>
               <a:t>sg.</a:t>
             </a:r>
@@ -45083,9 +44251,8 @@
                 <a:solidFill>
                   <a:srgbClr val="1B3B6F"/>
                 </a:solidFill>
-                <a:latin typeface="Amiri" pitchFamily="34" charset="0"/>
-                <a:ea typeface="Amiri" pitchFamily="34" charset="-122"/>
-                <a:cs typeface="Amiri" pitchFamily="34" charset="-120"/>
+                <a:latin typeface="Amiri" pitchFamily="2" charset="-78"/>
+                <a:cs typeface="Amiri" pitchFamily="2" charset="-78"/>
               </a:rPr>
               <a:t>فَنٌّ</a:t>
             </a:r>
@@ -45150,8 +44317,7 @@
                   <a:srgbClr val="8A6D1E"/>
                 </a:solidFill>
                 <a:latin typeface="Calibri" pitchFamily="34" charset="0"/>
-                <a:ea typeface="Calibri" pitchFamily="34" charset="-122"/>
-                <a:cs typeface="Calibri" pitchFamily="34" charset="-120"/>
+                <a:cs typeface="Amiri" pitchFamily="2" charset="-78"/>
               </a:rPr>
               <a:t>pl.</a:t>
             </a:r>
@@ -45188,9 +44354,8 @@
                 <a:solidFill>
                   <a:srgbClr val="1B3B6F"/>
                 </a:solidFill>
-                <a:latin typeface="Amiri" pitchFamily="34" charset="0"/>
-                <a:ea typeface="Amiri" pitchFamily="34" charset="-122"/>
-                <a:cs typeface="Amiri" pitchFamily="34" charset="-120"/>
+                <a:latin typeface="Amiri" pitchFamily="2" charset="-78"/>
+                <a:cs typeface="Amiri" pitchFamily="2" charset="-78"/>
               </a:rPr>
               <a:t>فُنُونٌ</a:t>
             </a:r>
@@ -45287,8 +44452,7 @@
                   <a:srgbClr val="1B3B6F"/>
                 </a:solidFill>
                 <a:latin typeface="Calibri" pitchFamily="34" charset="0"/>
-                <a:ea typeface="Calibri" pitchFamily="34" charset="-122"/>
-                <a:cs typeface="Calibri" pitchFamily="34" charset="-120"/>
+                <a:cs typeface="Amiri" pitchFamily="2" charset="-78"/>
               </a:rPr>
               <a:t>6</a:t>
             </a:r>
@@ -45353,8 +44517,7 @@
                   <a:srgbClr val="8A6D1E"/>
                 </a:solidFill>
                 <a:latin typeface="Calibri" pitchFamily="34" charset="0"/>
-                <a:ea typeface="Calibri" pitchFamily="34" charset="-122"/>
-                <a:cs typeface="Calibri" pitchFamily="34" charset="-120"/>
+                <a:cs typeface="Amiri" pitchFamily="2" charset="-78"/>
               </a:rPr>
               <a:t>noun · f.</a:t>
             </a:r>
@@ -45391,9 +44554,8 @@
                 <a:solidFill>
                   <a:srgbClr val="1B3B6F"/>
                 </a:solidFill>
-                <a:latin typeface="Amiri" pitchFamily="34" charset="0"/>
-                <a:ea typeface="Amiri" pitchFamily="34" charset="-122"/>
-                <a:cs typeface="Amiri" pitchFamily="34" charset="-120"/>
+                <a:latin typeface="Amiri" pitchFamily="2" charset="-78"/>
+                <a:cs typeface="Amiri" pitchFamily="2" charset="-78"/>
               </a:rPr>
               <a:t>تِجَارَةٌ</a:t>
             </a:r>
@@ -45431,8 +44593,7 @@
                   <a:srgbClr val="1F2A37"/>
                 </a:solidFill>
                 <a:latin typeface="Calibri" pitchFamily="34" charset="0"/>
-                <a:ea typeface="Calibri" pitchFamily="34" charset="-122"/>
-                <a:cs typeface="Calibri" pitchFamily="34" charset="-120"/>
+                <a:cs typeface="Amiri" pitchFamily="2" charset="-78"/>
               </a:rPr>
               <a:t>commerce, trade</a:t>
             </a:r>
@@ -45448,8 +44609,7 @@
                   <a:srgbClr val="5A6472"/>
                 </a:solidFill>
                 <a:latin typeface="Calibri" pitchFamily="34" charset="0"/>
-                <a:ea typeface="Calibri" pitchFamily="34" charset="-122"/>
-                <a:cs typeface="Calibri" pitchFamily="34" charset="-120"/>
+                <a:cs typeface="Amiri" pitchFamily="2" charset="-78"/>
               </a:rPr>
               <a:t>tijāra</a:t>
             </a:r>
@@ -45487,8 +44647,7 @@
                   <a:srgbClr val="8A93A0"/>
                 </a:solidFill>
                 <a:latin typeface="Calibri" pitchFamily="34" charset="0"/>
-                <a:ea typeface="Calibri" pitchFamily="34" charset="-122"/>
-                <a:cs typeface="Calibri" pitchFamily="34" charset="-120"/>
+                <a:cs typeface="Amiri" pitchFamily="2" charset="-78"/>
               </a:rPr>
               <a:t>7 / 25</a:t>
             </a:r>
@@ -45582,9 +44741,8 @@
                 <a:solidFill>
                   <a:srgbClr val="D4AF37"/>
                 </a:solidFill>
-                <a:latin typeface="Amiri" pitchFamily="34" charset="0"/>
-                <a:ea typeface="Amiri" pitchFamily="34" charset="-122"/>
-                <a:cs typeface="Amiri" pitchFamily="34" charset="-120"/>
+                <a:latin typeface="Amiri" pitchFamily="2" charset="-78"/>
+                <a:cs typeface="Amiri" pitchFamily="2" charset="-78"/>
               </a:rPr>
               <a:t>م</a:t>
             </a:r>
@@ -45622,8 +44780,7 @@
                   <a:srgbClr val="1B3B6F"/>
                 </a:solidFill>
                 <a:latin typeface="Cambria" pitchFamily="34" charset="0"/>
-                <a:ea typeface="Cambria" pitchFamily="34" charset="-122"/>
-                <a:cs typeface="Cambria" pitchFamily="34" charset="-120"/>
+                <a:cs typeface="Amiri" pitchFamily="2" charset="-78"/>
               </a:rPr>
               <a:t>Al Madina Online School</a:t>
             </a:r>
@@ -45661,8 +44818,7 @@
                   <a:srgbClr val="8A6D1E"/>
                 </a:solidFill>
                 <a:latin typeface="Calibri" pitchFamily="34" charset="0"/>
-                <a:ea typeface="Calibri" pitchFamily="34" charset="-122"/>
-                <a:cs typeface="Calibri" pitchFamily="34" charset="-120"/>
+                <a:cs typeface="Amiri" pitchFamily="2" charset="-78"/>
               </a:rPr>
               <a:t>ARABIC DEPARTMENT · MIFTAH ARABIC · IGCSE 0544</a:t>
             </a:r>
@@ -45727,8 +44883,7 @@
                   <a:srgbClr val="FFFFFF"/>
                 </a:solidFill>
                 <a:latin typeface="Calibri" pitchFamily="34" charset="0"/>
-                <a:ea typeface="Calibri" pitchFamily="34" charset="-122"/>
-                <a:cs typeface="Calibri" pitchFamily="34" charset="-120"/>
+                <a:cs typeface="Amiri" pitchFamily="2" charset="-78"/>
               </a:rPr>
               <a:t>F1-L11 · Arabic around us</a:t>
             </a:r>
@@ -45793,8 +44948,7 @@
                   <a:srgbClr val="FFFFFF"/>
                 </a:solidFill>
                 <a:latin typeface="Calibri" pitchFamily="34" charset="0"/>
-                <a:ea typeface="Calibri" pitchFamily="34" charset="-122"/>
-                <a:cs typeface="Calibri" pitchFamily="34" charset="-120"/>
+                <a:cs typeface="Amiri" pitchFamily="2" charset="-78"/>
               </a:rPr>
               <a:t>TEACHER INSTRUCTION · 3 MIN</a:t>
             </a:r>
@@ -45832,8 +44986,7 @@
                   <a:srgbClr val="1B3B6F"/>
                 </a:solidFill>
                 <a:latin typeface="Calibri" pitchFamily="34" charset="0"/>
-                <a:ea typeface="Calibri" pitchFamily="34" charset="-122"/>
-                <a:cs typeface="Calibri" pitchFamily="34" charset="-120"/>
+                <a:cs typeface="Amiri" pitchFamily="2" charset="-78"/>
               </a:rPr>
               <a:t>TEACHER INSTRUCTION · SCRIPT, LANGUAGE AND MEANING ARE THREE QUESTIONS (WEBSITE PART 2)</a:t>
             </a:r>
@@ -45871,8 +45024,7 @@
                   <a:srgbClr val="1B3B6F"/>
                 </a:solidFill>
                 <a:latin typeface="Cambria" pitchFamily="34" charset="0"/>
-                <a:ea typeface="Cambria" pitchFamily="34" charset="-122"/>
-                <a:cs typeface="Cambria" pitchFamily="34" charset="-120"/>
+                <a:cs typeface="Amiri" pitchFamily="2" charset="-78"/>
               </a:rPr>
               <a:t>Three different questions</a:t>
             </a:r>
@@ -45909,9 +45061,8 @@
                 <a:solidFill>
                   <a:srgbClr val="8A6D1E"/>
                 </a:solidFill>
-                <a:latin typeface="Amiri" pitchFamily="34" charset="0"/>
-                <a:ea typeface="Amiri" pitchFamily="34" charset="-122"/>
-                <a:cs typeface="Amiri" pitchFamily="34" charset="-120"/>
+                <a:latin typeface="Amiri" pitchFamily="2" charset="-78"/>
+                <a:cs typeface="Amiri" pitchFamily="2" charset="-78"/>
               </a:rPr>
               <a:t>الخَطُّ وَاللُّغَةُ وَالمَعْنَى</a:t>
             </a:r>
@@ -45949,8 +45100,7 @@
                   <a:srgbClr val="8A93A0"/>
                 </a:solidFill>
                 <a:latin typeface="Calibri" pitchFamily="34" charset="0"/>
-                <a:ea typeface="Calibri" pitchFamily="34" charset="-122"/>
-                <a:cs typeface="Calibri" pitchFamily="34" charset="-120"/>
+                <a:cs typeface="Amiri" pitchFamily="2" charset="-78"/>
               </a:rPr>
               <a:t>Miftah Arabic · Foundation F1 · Arabic Script &amp; Sounds · F1-L11</a:t>
             </a:r>
@@ -46049,8 +45199,7 @@
                   <a:srgbClr val="FFFFFF"/>
                 </a:solidFill>
                 <a:latin typeface="Calibri" pitchFamily="34" charset="0"/>
-                <a:ea typeface="Calibri" pitchFamily="34" charset="-122"/>
-                <a:cs typeface="Calibri" pitchFamily="34" charset="-120"/>
+                <a:cs typeface="Amiri" pitchFamily="2" charset="-78"/>
               </a:rPr>
               <a:t>1 · WHAT CAN I SEE?</a:t>
             </a:r>
@@ -46088,8 +45237,7 @@
                   <a:srgbClr val="8A6D1E"/>
                 </a:solidFill>
                 <a:latin typeface="Calibri" pitchFamily="34" charset="0"/>
-                <a:ea typeface="Calibri" pitchFamily="34" charset="-122"/>
-                <a:cs typeface="Calibri" pitchFamily="34" charset="-120"/>
+                <a:cs typeface="Amiri" pitchFamily="2" charset="-78"/>
               </a:rPr>
               <a:t>the script</a:t>
             </a:r>
@@ -46126,9 +45274,8 @@
                 <a:solidFill>
                   <a:srgbClr val="1B3B6F"/>
                 </a:solidFill>
-                <a:latin typeface="Amiri" pitchFamily="34" charset="0"/>
-                <a:ea typeface="Amiri" pitchFamily="34" charset="-122"/>
-                <a:cs typeface="Amiri" pitchFamily="34" charset="-120"/>
+                <a:latin typeface="Amiri" pitchFamily="2" charset="-78"/>
+                <a:cs typeface="Amiri" pitchFamily="2" charset="-78"/>
               </a:rPr>
               <a:t>مَطْعَم</a:t>
             </a:r>
@@ -46166,8 +45313,7 @@
                   <a:srgbClr val="5A6472"/>
                 </a:solidFill>
                 <a:latin typeface="Calibri" pitchFamily="34" charset="0"/>
-                <a:ea typeface="Calibri" pitchFamily="34" charset="-122"/>
-                <a:cs typeface="Calibri" pitchFamily="34" charset="-120"/>
+                <a:cs typeface="Amiri" pitchFamily="2" charset="-78"/>
               </a:rPr>
               <a:t>Letter shapes, joins, dots, numerals and marks.</a:t>
             </a:r>
@@ -46232,8 +45378,7 @@
                   <a:srgbClr val="1F2A37"/>
                 </a:solidFill>
                 <a:latin typeface="Calibri" pitchFamily="34" charset="0"/>
-                <a:ea typeface="Calibri" pitchFamily="34" charset="-122"/>
-                <a:cs typeface="Calibri" pitchFamily="34" charset="-120"/>
+                <a:cs typeface="Amiri" pitchFamily="2" charset="-78"/>
               </a:rPr>
               <a:t>This is evidence you can observe.</a:t>
             </a:r>
@@ -46332,8 +45477,7 @@
                   <a:srgbClr val="FFFFFF"/>
                 </a:solidFill>
                 <a:latin typeface="Calibri" pitchFamily="34" charset="0"/>
-                <a:ea typeface="Calibri" pitchFamily="34" charset="-122"/>
-                <a:cs typeface="Calibri" pitchFamily="34" charset="-120"/>
+                <a:cs typeface="Amiri" pitchFamily="2" charset="-78"/>
               </a:rPr>
               <a:t>2 · WHICH LANGUAGE?</a:t>
             </a:r>
@@ -46371,8 +45515,7 @@
                   <a:srgbClr val="8A6D1E"/>
                 </a:solidFill>
                 <a:latin typeface="Calibri" pitchFamily="34" charset="0"/>
-                <a:ea typeface="Calibri" pitchFamily="34" charset="-122"/>
-                <a:cs typeface="Calibri" pitchFamily="34" charset="-120"/>
+                <a:cs typeface="Amiri" pitchFamily="2" charset="-78"/>
               </a:rPr>
               <a:t>check, don’t assume</a:t>
             </a:r>
@@ -46409,9 +45552,8 @@
                 <a:solidFill>
                   <a:srgbClr val="1B3B6F"/>
                 </a:solidFill>
-                <a:latin typeface="Amiri" pitchFamily="34" charset="0"/>
-                <a:ea typeface="Amiri" pitchFamily="34" charset="-122"/>
-                <a:cs typeface="Amiri" pitchFamily="34" charset="-120"/>
+                <a:latin typeface="Amiri" pitchFamily="2" charset="-78"/>
+                <a:cs typeface="Amiri" pitchFamily="2" charset="-78"/>
               </a:rPr>
               <a:t>كِتَاب · کتاب</a:t>
             </a:r>
@@ -46449,8 +45591,7 @@
                   <a:srgbClr val="5A6472"/>
                 </a:solidFill>
                 <a:latin typeface="Calibri" pitchFamily="34" charset="0"/>
-                <a:ea typeface="Calibri" pitchFamily="34" charset="-122"/>
-                <a:cs typeface="Calibri" pitchFamily="34" charset="-120"/>
+                <a:cs typeface="Amiri" pitchFamily="2" charset="-78"/>
               </a:rPr>
               <a:t>Arabic </a:t>
             </a:r>
@@ -46462,9 +45603,8 @@
                 <a:solidFill>
                   <a:srgbClr val="5A6472"/>
                 </a:solidFill>
-                <a:latin typeface="Amiri" pitchFamily="34" charset="0"/>
-                <a:ea typeface="Amiri" pitchFamily="34" charset="-122"/>
-                <a:cs typeface="Amiri" pitchFamily="34" charset="-120"/>
+                <a:latin typeface="Amiri" pitchFamily="2" charset="-78"/>
+                <a:cs typeface="Amiri" pitchFamily="2" charset="-78"/>
               </a:rPr>
               <a:t>كِتَاب</a:t>
             </a:r>
@@ -46477,8 +45617,7 @@
                   <a:srgbClr val="5A6472"/>
                 </a:solidFill>
                 <a:latin typeface="Calibri" pitchFamily="34" charset="0"/>
-                <a:ea typeface="Calibri" pitchFamily="34" charset="-122"/>
-                <a:cs typeface="Calibri" pitchFamily="34" charset="-120"/>
+                <a:cs typeface="Amiri" pitchFamily="2" charset="-78"/>
               </a:rPr>
               <a:t> and Persian/Urdu </a:t>
             </a:r>
@@ -46490,9 +45629,8 @@
                 <a:solidFill>
                   <a:srgbClr val="5A6472"/>
                 </a:solidFill>
-                <a:latin typeface="Amiri" pitchFamily="34" charset="0"/>
-                <a:ea typeface="Amiri" pitchFamily="34" charset="-122"/>
-                <a:cs typeface="Amiri" pitchFamily="34" charset="-120"/>
+                <a:latin typeface="Amiri" pitchFamily="2" charset="-78"/>
+                <a:cs typeface="Amiri" pitchFamily="2" charset="-78"/>
               </a:rPr>
               <a:t>کتاب</a:t>
             </a:r>
@@ -46505,8 +45643,7 @@
                   <a:srgbClr val="5A6472"/>
                 </a:solidFill>
                 <a:latin typeface="Calibri" pitchFamily="34" charset="0"/>
-                <a:ea typeface="Calibri" pitchFamily="34" charset="-122"/>
-                <a:cs typeface="Calibri" pitchFamily="34" charset="-120"/>
+                <a:cs typeface="Amiri" pitchFamily="2" charset="-78"/>
               </a:rPr>
               <a:t> — same script family.</a:t>
             </a:r>
@@ -46571,8 +45708,7 @@
                   <a:srgbClr val="1F2A37"/>
                 </a:solidFill>
                 <a:latin typeface="Calibri" pitchFamily="34" charset="0"/>
-                <a:ea typeface="Calibri" pitchFamily="34" charset="-122"/>
-                <a:cs typeface="Calibri" pitchFamily="34" charset="-120"/>
+                <a:cs typeface="Amiri" pitchFamily="2" charset="-78"/>
               </a:rPr>
               <a:t>Arabic script also writes Persian, Urdu and other languages.</a:t>
             </a:r>
@@ -46671,8 +45807,7 @@
                   <a:srgbClr val="FFFFFF"/>
                 </a:solidFill>
                 <a:latin typeface="Calibri" pitchFamily="34" charset="0"/>
-                <a:ea typeface="Calibri" pitchFamily="34" charset="-122"/>
-                <a:cs typeface="Calibri" pitchFamily="34" charset="-120"/>
+                <a:cs typeface="Amiri" pitchFamily="2" charset="-78"/>
               </a:rPr>
               <a:t>3 · WHAT MIGHT IT MEAN?</a:t>
             </a:r>
@@ -46710,8 +45845,7 @@
                   <a:srgbClr val="8A6D1E"/>
                 </a:solidFill>
                 <a:latin typeface="Calibri" pitchFamily="34" charset="0"/>
-                <a:ea typeface="Calibri" pitchFamily="34" charset="-122"/>
-                <a:cs typeface="Calibri" pitchFamily="34" charset="-120"/>
+                <a:cs typeface="Amiri" pitchFamily="2" charset="-78"/>
               </a:rPr>
               <a:t>decode first</a:t>
             </a:r>
@@ -46748,9 +45882,8 @@
                 <a:solidFill>
                   <a:srgbClr val="1B3B6F"/>
                 </a:solidFill>
-                <a:latin typeface="Amiri" pitchFamily="34" charset="0"/>
-                <a:ea typeface="Amiri" pitchFamily="34" charset="-122"/>
-                <a:cs typeface="Amiri" pitchFamily="34" charset="-120"/>
+                <a:latin typeface="Amiri" pitchFamily="2" charset="-78"/>
+                <a:cs typeface="Amiri" pitchFamily="2" charset="-78"/>
               </a:rPr>
               <a:t>مَا المَعْنَى؟</a:t>
             </a:r>
@@ -46788,8 +45921,7 @@
                   <a:srgbClr val="5A6472"/>
                 </a:solidFill>
                 <a:latin typeface="Calibri" pitchFamily="34" charset="0"/>
-                <a:ea typeface="Calibri" pitchFamily="34" charset="-122"/>
-                <a:cs typeface="Calibri" pitchFamily="34" charset="-120"/>
+                <a:cs typeface="Amiri" pitchFamily="2" charset="-78"/>
               </a:rPr>
               <a:t>Read the letters, then use the setting to check.</a:t>
             </a:r>
@@ -46854,8 +45986,7 @@
                   <a:srgbClr val="1F2A37"/>
                 </a:solidFill>
                 <a:latin typeface="Calibri" pitchFamily="34" charset="0"/>
-                <a:ea typeface="Calibri" pitchFamily="34" charset="-122"/>
-                <a:cs typeface="Calibri" pitchFamily="34" charset="-120"/>
+                <a:cs typeface="Amiri" pitchFamily="2" charset="-78"/>
               </a:rPr>
               <a:t>Context checks a reading; it does not replace it.</a:t>
             </a:r>
@@ -46893,8 +46024,7 @@
                   <a:srgbClr val="8A93A0"/>
                 </a:solidFill>
                 <a:latin typeface="Calibri" pitchFamily="34" charset="0"/>
-                <a:ea typeface="Calibri" pitchFamily="34" charset="-122"/>
-                <a:cs typeface="Calibri" pitchFamily="34" charset="-120"/>
+                <a:cs typeface="Amiri" pitchFamily="2" charset="-78"/>
               </a:rPr>
               <a:t>8 / 25</a:t>
             </a:r>
@@ -46988,9 +46118,8 @@
                 <a:solidFill>
                   <a:srgbClr val="D4AF37"/>
                 </a:solidFill>
-                <a:latin typeface="Amiri" pitchFamily="34" charset="0"/>
-                <a:ea typeface="Amiri" pitchFamily="34" charset="-122"/>
-                <a:cs typeface="Amiri" pitchFamily="34" charset="-120"/>
+                <a:latin typeface="Amiri" pitchFamily="2" charset="-78"/>
+                <a:cs typeface="Amiri" pitchFamily="2" charset="-78"/>
               </a:rPr>
               <a:t>م</a:t>
             </a:r>
@@ -47028,8 +46157,7 @@
                   <a:srgbClr val="1B3B6F"/>
                 </a:solidFill>
                 <a:latin typeface="Cambria" pitchFamily="34" charset="0"/>
-                <a:ea typeface="Cambria" pitchFamily="34" charset="-122"/>
-                <a:cs typeface="Cambria" pitchFamily="34" charset="-120"/>
+                <a:cs typeface="Amiri" pitchFamily="2" charset="-78"/>
               </a:rPr>
               <a:t>Al Madina Online School</a:t>
             </a:r>
@@ -47067,8 +46195,7 @@
                   <a:srgbClr val="8A6D1E"/>
                 </a:solidFill>
                 <a:latin typeface="Calibri" pitchFamily="34" charset="0"/>
-                <a:ea typeface="Calibri" pitchFamily="34" charset="-122"/>
-                <a:cs typeface="Calibri" pitchFamily="34" charset="-120"/>
+                <a:cs typeface="Amiri" pitchFamily="2" charset="-78"/>
               </a:rPr>
               <a:t>ARABIC DEPARTMENT · MIFTAH ARABIC · IGCSE 0544</a:t>
             </a:r>
@@ -47133,8 +46260,7 @@
                   <a:srgbClr val="FFFFFF"/>
                 </a:solidFill>
                 <a:latin typeface="Calibri" pitchFamily="34" charset="0"/>
-                <a:ea typeface="Calibri" pitchFamily="34" charset="-122"/>
-                <a:cs typeface="Calibri" pitchFamily="34" charset="-120"/>
+                <a:cs typeface="Amiri" pitchFamily="2" charset="-78"/>
               </a:rPr>
               <a:t>F1-L11 · Arabic around us</a:t>
             </a:r>
@@ -47199,8 +46325,7 @@
                   <a:srgbClr val="FFFFFF"/>
                 </a:solidFill>
                 <a:latin typeface="Calibri" pitchFamily="34" charset="0"/>
-                <a:ea typeface="Calibri" pitchFamily="34" charset="-122"/>
-                <a:cs typeface="Calibri" pitchFamily="34" charset="-120"/>
+                <a:cs typeface="Amiri" pitchFamily="2" charset="-78"/>
               </a:rPr>
               <a:t>TEACHER INSTRUCTION · 3 MIN</a:t>
             </a:r>
@@ -47238,8 +46363,7 @@
                   <a:srgbClr val="1B3B6F"/>
                 </a:solidFill>
                 <a:latin typeface="Calibri" pitchFamily="34" charset="0"/>
-                <a:ea typeface="Calibri" pitchFamily="34" charset="-122"/>
-                <a:cs typeface="Calibri" pitchFamily="34" charset="-120"/>
+                <a:cs typeface="Amiri" pitchFamily="2" charset="-78"/>
               </a:rPr>
               <a:t>TEACHER INSTRUCTION · FORMAL ARABIC AND EVERYDAY VOICES (WEBSITE PART 3)</a:t>
             </a:r>
@@ -47277,8 +46401,7 @@
                   <a:srgbClr val="1B3B6F"/>
                 </a:solidFill>
                 <a:latin typeface="Cambria" pitchFamily="34" charset="0"/>
-                <a:ea typeface="Cambria" pitchFamily="34" charset="-122"/>
-                <a:cs typeface="Cambria" pitchFamily="34" charset="-120"/>
+                <a:cs typeface="Amiri" pitchFamily="2" charset="-78"/>
               </a:rPr>
               <a:t>One language, many voices</a:t>
             </a:r>
@@ -47315,9 +46438,8 @@
                 <a:solidFill>
                   <a:srgbClr val="8A6D1E"/>
                 </a:solidFill>
-                <a:latin typeface="Amiri" pitchFamily="34" charset="0"/>
-                <a:ea typeface="Amiri" pitchFamily="34" charset="-122"/>
-                <a:cs typeface="Amiri" pitchFamily="34" charset="-120"/>
+                <a:latin typeface="Amiri" pitchFamily="2" charset="-78"/>
+                <a:cs typeface="Amiri" pitchFamily="2" charset="-78"/>
               </a:rPr>
               <a:t>الفُصْحَى وَاللَّهَجَاتُ</a:t>
             </a:r>
@@ -47355,8 +46477,7 @@
                   <a:srgbClr val="8A93A0"/>
                 </a:solidFill>
                 <a:latin typeface="Calibri" pitchFamily="34" charset="0"/>
-                <a:ea typeface="Calibri" pitchFamily="34" charset="-122"/>
-                <a:cs typeface="Calibri" pitchFamily="34" charset="-120"/>
+                <a:cs typeface="Amiri" pitchFamily="2" charset="-78"/>
               </a:rPr>
               <a:t>Miftah Arabic · Foundation F1 · Arabic Script &amp; Sounds · F1-L11</a:t>
             </a:r>
@@ -47455,8 +46576,7 @@
                   <a:srgbClr val="FFFFFF"/>
                 </a:solidFill>
                 <a:latin typeface="Calibri" pitchFamily="34" charset="0"/>
-                <a:ea typeface="Calibri" pitchFamily="34" charset="-122"/>
-                <a:cs typeface="Calibri" pitchFamily="34" charset="-120"/>
+                <a:cs typeface="Amiri" pitchFamily="2" charset="-78"/>
               </a:rPr>
               <a:t>MSA</a:t>
             </a:r>
@@ -47494,8 +46614,7 @@
                   <a:srgbClr val="8A6D1E"/>
                 </a:solidFill>
                 <a:latin typeface="Calibri" pitchFamily="34" charset="0"/>
-                <a:ea typeface="Calibri" pitchFamily="34" charset="-122"/>
-                <a:cs typeface="Calibri" pitchFamily="34" charset="-120"/>
+                <a:cs typeface="Amiri" pitchFamily="2" charset="-78"/>
               </a:rPr>
               <a:t>Modern Standard Arabic</a:t>
             </a:r>
@@ -47532,9 +46651,8 @@
                 <a:solidFill>
                   <a:srgbClr val="1B3B6F"/>
                 </a:solidFill>
-                <a:latin typeface="Amiri" pitchFamily="34" charset="0"/>
-                <a:ea typeface="Amiri" pitchFamily="34" charset="-122"/>
-                <a:cs typeface="Amiri" pitchFamily="34" charset="-120"/>
+                <a:latin typeface="Amiri" pitchFamily="2" charset="-78"/>
+                <a:cs typeface="Amiri" pitchFamily="2" charset="-78"/>
               </a:rPr>
               <a:t>الفُصْحَى</a:t>
             </a:r>
@@ -47572,8 +46690,7 @@
                   <a:srgbClr val="5A6472"/>
                 </a:solidFill>
                 <a:latin typeface="Calibri" pitchFamily="34" charset="0"/>
-                <a:ea typeface="Calibri" pitchFamily="34" charset="-122"/>
-                <a:cs typeface="Calibri" pitchFamily="34" charset="-120"/>
+                <a:cs typeface="Amiri" pitchFamily="2" charset="-78"/>
               </a:rPr>
               <a:t>Shared formal Arabic: school, news, books, speeches.</a:t>
             </a:r>
@@ -47638,8 +46755,7 @@
                   <a:srgbClr val="1F2A37"/>
                 </a:solidFill>
                 <a:latin typeface="Calibri" pitchFamily="34" charset="0"/>
-                <a:ea typeface="Calibri" pitchFamily="34" charset="-122"/>
-                <a:cs typeface="Calibri" pitchFamily="34" charset="-120"/>
+                <a:cs typeface="Amiri" pitchFamily="2" charset="-78"/>
               </a:rPr>
               <a:t>This course teaches MSA.</a:t>
             </a:r>
@@ -47738,8 +46854,7 @@
                   <a:srgbClr val="FFFFFF"/>
                 </a:solidFill>
                 <a:latin typeface="Calibri" pitchFamily="34" charset="0"/>
-                <a:ea typeface="Calibri" pitchFamily="34" charset="-122"/>
-                <a:cs typeface="Calibri" pitchFamily="34" charset="-120"/>
+                <a:cs typeface="Amiri" pitchFamily="2" charset="-78"/>
               </a:rPr>
               <a:t>DIALECTS</a:t>
             </a:r>
@@ -47777,8 +46892,7 @@
                   <a:srgbClr val="8A6D1E"/>
                 </a:solidFill>
                 <a:latin typeface="Calibri" pitchFamily="34" charset="0"/>
-                <a:ea typeface="Calibri" pitchFamily="34" charset="-122"/>
-                <a:cs typeface="Calibri" pitchFamily="34" charset="-120"/>
+                <a:cs typeface="Amiri" pitchFamily="2" charset="-78"/>
               </a:rPr>
               <a:t>regional spoken varieties</a:t>
             </a:r>
@@ -47815,9 +46929,8 @@
                 <a:solidFill>
                   <a:srgbClr val="1B3B6F"/>
                 </a:solidFill>
-                <a:latin typeface="Amiri" pitchFamily="34" charset="0"/>
-                <a:ea typeface="Amiri" pitchFamily="34" charset="-122"/>
-                <a:cs typeface="Amiri" pitchFamily="34" charset="-120"/>
+                <a:latin typeface="Amiri" pitchFamily="2" charset="-78"/>
+                <a:cs typeface="Amiri" pitchFamily="2" charset="-78"/>
               </a:rPr>
               <a:t>اللَّهَجَاتُ</a:t>
             </a:r>
@@ -47855,8 +46968,7 @@
                   <a:srgbClr val="5A6472"/>
                 </a:solidFill>
                 <a:latin typeface="Calibri" pitchFamily="34" charset="0"/>
-                <a:ea typeface="Calibri" pitchFamily="34" charset="-122"/>
-                <a:cs typeface="Calibri" pitchFamily="34" charset="-120"/>
+                <a:cs typeface="Amiri" pitchFamily="2" charset="-78"/>
               </a:rPr>
               <a:t>Egyptian, Levantine, Gulf, Iraqi, Sudanese, Maghrebi …</a:t>
             </a:r>
@@ -47921,8 +47033,7 @@
                   <a:srgbClr val="1F2A37"/>
                 </a:solidFill>
                 <a:latin typeface="Calibri" pitchFamily="34" charset="0"/>
-                <a:ea typeface="Calibri" pitchFamily="34" charset="-122"/>
-                <a:cs typeface="Calibri" pitchFamily="34" charset="-120"/>
+                <a:cs typeface="Amiri" pitchFamily="2" charset="-78"/>
               </a:rPr>
               <a:t>Systematic varieties with their own rules — not “bad Arabic”.</a:t>
             </a:r>
@@ -48021,8 +47132,7 @@
                   <a:srgbClr val="FFFFFF"/>
                 </a:solidFill>
                 <a:latin typeface="Calibri" pitchFamily="34" charset="0"/>
-                <a:ea typeface="Calibri" pitchFamily="34" charset="-122"/>
-                <a:cs typeface="Calibri" pitchFamily="34" charset="-120"/>
+                <a:cs typeface="Amiri" pitchFamily="2" charset="-78"/>
               </a:rPr>
               <a:t>CHOICE</a:t>
             </a:r>
@@ -48060,8 +47170,7 @@
                   <a:srgbClr val="8A6D1E"/>
                 </a:solidFill>
                 <a:latin typeface="Calibri" pitchFamily="34" charset="0"/>
-                <a:ea typeface="Calibri" pitchFamily="34" charset="-122"/>
-                <a:cs typeface="Calibri" pitchFamily="34" charset="-120"/>
+                <a:cs typeface="Amiri" pitchFamily="2" charset="-78"/>
               </a:rPr>
               <a:t>flexible repertoires</a:t>
             </a:r>
@@ -48098,9 +47207,8 @@
                 <a:solidFill>
                   <a:srgbClr val="1B3B6F"/>
                 </a:solidFill>
-                <a:latin typeface="Amiri" pitchFamily="34" charset="0"/>
-                <a:ea typeface="Amiri" pitchFamily="34" charset="-122"/>
-                <a:cs typeface="Amiri" pitchFamily="34" charset="-120"/>
+                <a:latin typeface="Amiri" pitchFamily="2" charset="-78"/>
+                <a:cs typeface="Amiri" pitchFamily="2" charset="-78"/>
               </a:rPr>
               <a:t>حَسَبَ السِّيَاقِ</a:t>
             </a:r>
@@ -48138,8 +47246,7 @@
                   <a:srgbClr val="5A6472"/>
                 </a:solidFill>
                 <a:latin typeface="Calibri" pitchFamily="34" charset="0"/>
-                <a:ea typeface="Calibri" pitchFamily="34" charset="-122"/>
-                <a:cs typeface="Calibri" pitchFamily="34" charset="-120"/>
+                <a:cs typeface="Amiri" pitchFamily="2" charset="-78"/>
               </a:rPr>
               <a:t>Family chat → more local · formal writing → more MSA.</a:t>
             </a:r>
@@ -48204,8 +47311,7 @@
                   <a:srgbClr val="1F2A37"/>
                 </a:solidFill>
                 <a:latin typeface="Calibri" pitchFamily="34" charset="0"/>
-                <a:ea typeface="Calibri" pitchFamily="34" charset="-122"/>
-                <a:cs typeface="Calibri" pitchFamily="34" charset="-120"/>
+                <a:cs typeface="Amiri" pitchFamily="2" charset="-78"/>
               </a:rPr>
               <a:t>Speakers shift and blend with audience, place and purpose.</a:t>
             </a:r>
@@ -48243,8 +47349,7 @@
                   <a:srgbClr val="8A93A0"/>
                 </a:solidFill>
                 <a:latin typeface="Calibri" pitchFamily="34" charset="0"/>
-                <a:ea typeface="Calibri" pitchFamily="34" charset="-122"/>
-                <a:cs typeface="Calibri" pitchFamily="34" charset="-120"/>
+                <a:cs typeface="Amiri" pitchFamily="2" charset="-78"/>
               </a:rPr>
               <a:t>9 / 25</a:t>
             </a:r>

--- a/Foundation_F1/F1-L11_Arabic_Around_Us.pptx
+++ b/Foundation_F1/F1-L11_Arabic_Around_Us.pptx
@@ -523,7 +523,11 @@
           <a:lstStyle/>
           <a:p>
             <a:r>
-              <a:rPr lang="en-US" dirty="0"/>
+              <a:rPr lang="ar-SA" dirty="0">
+                <a:latin typeface="Amiri" pitchFamily="2" charset="-78"/>
+                <a:ea typeface="Amiri" pitchFamily="2" charset="-78"/>
+                <a:cs typeface="Amiri" pitchFamily="2" charset="-78"/>
+              </a:rPr>
               <a:t>LESSON AT A GLANCE — planned for 56 minutes, leaving about 4 minutes for Teams delays.
 0–1 Welcome · 1–2 Lesson map · 2–9 Do Now + answers · 9–10 Objectives · 10–20 New letters and sounds · 20–23 Quick check · 23–27 I Do (formation) · 27–38 We Do (listen, sort, detect) · 38–49 You Do (write, then show-and-say) · 49–54 Feedback · 54–56 Preparation.
 FLEX slides are optional. Use them if the class is moving quickly; otherwise the same activities are on the website for homework.
@@ -1246,7 +1250,11 @@
           <a:lstStyle/>
           <a:p>
             <a:r>
-              <a:rPr lang="en-US" dirty="0"/>
+              <a:rPr lang="ar-SA" dirty="0">
+                <a:latin typeface="Amiri" pitchFamily="2" charset="-78"/>
+                <a:ea typeface="Amiri" pitchFamily="2" charset="-78"/>
+                <a:cs typeface="Amiri" pitchFamily="2" charset="-78"/>
+              </a:rPr>
               <a:t>WE DO — the website ten-country route (schematic, not to scale; not a political map). Read each name with SCOPE: many start with الـ — sun or moon letter? (المَغْرِب moon; الجَزَائِر moon; السُّودَان sun; العِرَاق moon; السُّعُودِيَّة sun).
 Language map ≠ identity map (website): Arabic may be official while people also use Amazigh languages, Kurdish, Nubian languages, South Arabian languages, English, French and more.
 Website game “World Route”: read each Arabic country name, then match its English name or region.</a:t>
@@ -1424,7 +1432,11 @@
           <a:lstStyle/>
           <a:p>
             <a:r>
-              <a:rPr lang="en-US" dirty="0"/>
+              <a:rPr lang="ar-SA" dirty="0">
+                <a:latin typeface="Amiri" pitchFamily="2" charset="-78"/>
+                <a:ea typeface="Amiri" pitchFamily="2" charset="-78"/>
+                <a:cs typeface="Amiri" pitchFamily="2" charset="-78"/>
+              </a:rPr>
               <a:t>SPEAKING REHEARSAL (3 min) — website speaking prompts. No breakout rooms (saves setup time).
 Sequence: ● 10s think → ↔ 45s everyone rehearses their answer aloud with mic muted → ◎ pairs on open mic: name two students (warned in advance); A asks, B answers; the rest of the class types one follow-up question in chat (+ / ?) → ↺ one student summarises the answer they heard.
 Routes: Core uses the Core prompt and stem; Develop the Develop prompts; Stretch the last prompt.
@@ -1518,7 +1530,11 @@
           <a:lstStyle/>
           <a:p>
             <a:r>
-              <a:rPr lang="en-US" dirty="0"/>
+              <a:rPr lang="ar-SA" dirty="0">
+                <a:latin typeface="Amiri" pitchFamily="2" charset="-78"/>
+                <a:ea typeface="Amiri" pitchFamily="2" charset="-78"/>
+                <a:cs typeface="Amiri" pitchFamily="2" charset="-78"/>
+              </a:rPr>
               <a:t>WELCOME (1 min) — while students join.
 • Greet each student by name as they arrive: السَّلَامُ عَلَيْكُمْ. Take the register (Pastoral Tracker: attendance 0/1).
 • 2-MINUTE CHECK-IN (SEND training): a private chat to any student who seemed unsettled last lesson — “Are you okay today? 👍 / 👎”.
@@ -2506,7 +2522,11 @@
           <a:lstStyle/>
           <a:p>
             <a:r>
-              <a:rPr lang="en-US" dirty="0"/>
+              <a:rPr lang="ar-SA" dirty="0">
+                <a:latin typeface="Amiri" pitchFamily="2" charset="-78"/>
+                <a:ea typeface="Amiri" pitchFamily="2" charset="-78"/>
+                <a:cs typeface="Amiri" pitchFamily="2" charset="-78"/>
+              </a:rPr>
               <a:t>KEY WORDS — the website key vocabulary (also دِين religion). Hear → say → see → use. Urdu bridge: زبان is Urdu for language, but ثقافت، عالم، فن، تجارت are shared words.</a:t>
             </a:r>
             <a:endParaRPr lang="en-US" dirty="0"/>
@@ -3169,6 +3189,7 @@
                   <a:srgbClr val="D4AF37"/>
                 </a:solidFill>
                 <a:latin typeface="Amiri" pitchFamily="2" charset="-78"/>
+                <a:ea typeface="Amiri" pitchFamily="2" charset="-78"/>
                 <a:cs typeface="Amiri" pitchFamily="2" charset="-78"/>
               </a:rPr>
               <a:t>م</a:t>
@@ -3375,6 +3396,7 @@
                   <a:srgbClr val="D4AF37"/>
                 </a:solidFill>
                 <a:latin typeface="Amiri" pitchFamily="2" charset="-78"/>
+                <a:ea typeface="Amiri" pitchFamily="2" charset="-78"/>
                 <a:cs typeface="Amiri" pitchFamily="2" charset="-78"/>
               </a:rPr>
               <a:t>خَطٌّ وَاحِدٌ، أَصْوَاتٌ كَثِيرَةٌ، ثَقَافَاتٌ كَثِيرَةٌ</a:t>
@@ -3832,6 +3854,7 @@
                   <a:srgbClr val="D4AF37"/>
                 </a:solidFill>
                 <a:latin typeface="Amiri" pitchFamily="2" charset="-78"/>
+                <a:ea typeface="Amiri" pitchFamily="2" charset="-78"/>
                 <a:cs typeface="Amiri" pitchFamily="2" charset="-78"/>
               </a:rPr>
               <a:t>م</a:t>
@@ -4152,6 +4175,7 @@
                   <a:srgbClr val="8A6D1E"/>
                 </a:solidFill>
                 <a:latin typeface="Amiri" pitchFamily="2" charset="-78"/>
+                <a:ea typeface="Amiri" pitchFamily="2" charset="-78"/>
                 <a:cs typeface="Amiri" pitchFamily="2" charset="-78"/>
               </a:rPr>
               <a:t>فَحْصٌ سَرِيعٌ</a:t>
@@ -5349,6 +5373,7 @@
                   <a:srgbClr val="1B3B6F"/>
                 </a:solidFill>
                 <a:latin typeface="Amiri" pitchFamily="2" charset="-78"/>
+                <a:ea typeface="Amiri" pitchFamily="2" charset="-78"/>
                 <a:cs typeface="Amiri" pitchFamily="2" charset="-78"/>
               </a:rPr>
               <a:t>ثَقَافَةٌ</a:t>
@@ -5798,6 +5823,7 @@
                   <a:srgbClr val="D4AF37"/>
                 </a:solidFill>
                 <a:latin typeface="Amiri" pitchFamily="2" charset="-78"/>
+                <a:ea typeface="Amiri" pitchFamily="2" charset="-78"/>
                 <a:cs typeface="Amiri" pitchFamily="2" charset="-78"/>
               </a:rPr>
               <a:t>م</a:t>
@@ -6118,6 +6144,7 @@
                   <a:srgbClr val="8A6D1E"/>
                 </a:solidFill>
                 <a:latin typeface="Amiri" pitchFamily="2" charset="-78"/>
+                <a:ea typeface="Amiri" pitchFamily="2" charset="-78"/>
                 <a:cs typeface="Amiri" pitchFamily="2" charset="-78"/>
               </a:rPr>
               <a:t>الإِجَابَاتُ وَالتَّعْلِيلُ</a:t>
@@ -7510,6 +7537,7 @@
                   <a:srgbClr val="1B3B6F"/>
                 </a:solidFill>
                 <a:latin typeface="Amiri" pitchFamily="2" charset="-78"/>
+                <a:ea typeface="Amiri" pitchFamily="2" charset="-78"/>
                 <a:cs typeface="Amiri" pitchFamily="2" charset="-78"/>
               </a:rPr>
               <a:t>ثَقَافَةٌ</a:t>
@@ -8024,6 +8052,7 @@
                   <a:srgbClr val="D4AF37"/>
                 </a:solidFill>
                 <a:latin typeface="Amiri" pitchFamily="2" charset="-78"/>
+                <a:ea typeface="Amiri" pitchFamily="2" charset="-78"/>
                 <a:cs typeface="Amiri" pitchFamily="2" charset="-78"/>
               </a:rPr>
               <a:t>م</a:t>
@@ -8344,6 +8373,7 @@
                   <a:srgbClr val="8A6D1E"/>
                 </a:solidFill>
                 <a:latin typeface="Amiri" pitchFamily="2" charset="-78"/>
+                <a:ea typeface="Amiri" pitchFamily="2" charset="-78"/>
                 <a:cs typeface="Amiri" pitchFamily="2" charset="-78"/>
               </a:rPr>
               <a:t>كُنْ مُحَقِّقًا لِلْخَطِّ العَرَبِيِّ</a:t>
@@ -8521,6 +8551,7 @@
                   <a:srgbClr val="FFFFFF"/>
                 </a:solidFill>
                 <a:latin typeface="Amiri" pitchFamily="2" charset="-78"/>
+                <a:ea typeface="Amiri" pitchFamily="2" charset="-78"/>
                 <a:cs typeface="Amiri" pitchFamily="2" charset="-78"/>
               </a:rPr>
               <a:t>مَخْبَز</a:t>
@@ -8675,6 +8706,7 @@
                   <a:srgbClr val="5A6472"/>
                 </a:solidFill>
                 <a:latin typeface="Amiri" pitchFamily="2" charset="-78"/>
+                <a:ea typeface="Amiri" pitchFamily="2" charset="-78"/>
                 <a:cs typeface="Amiri" pitchFamily="2" charset="-78"/>
               </a:rPr>
               <a:t>م خ ب ز</a:t>
@@ -8701,6 +8733,7 @@
                   <a:srgbClr val="5A6472"/>
                 </a:solidFill>
                 <a:latin typeface="Amiri" pitchFamily="2" charset="-78"/>
+                <a:ea typeface="Amiri" pitchFamily="2" charset="-78"/>
                 <a:cs typeface="Amiri" pitchFamily="2" charset="-78"/>
               </a:rPr>
               <a:t>ز</a:t>
@@ -8920,6 +8953,7 @@
                   <a:srgbClr val="5A6472"/>
                 </a:solidFill>
                 <a:latin typeface="Amiri" pitchFamily="2" charset="-78"/>
+                <a:ea typeface="Amiri" pitchFamily="2" charset="-78"/>
                 <a:cs typeface="Amiri" pitchFamily="2" charset="-78"/>
               </a:rPr>
               <a:t>مَخْبَز</a:t>
@@ -9543,6 +9577,7 @@
                   <a:srgbClr val="D4AF37"/>
                 </a:solidFill>
                 <a:latin typeface="Amiri" pitchFamily="2" charset="-78"/>
+                <a:ea typeface="Amiri" pitchFamily="2" charset="-78"/>
                 <a:cs typeface="Amiri" pitchFamily="2" charset="-78"/>
               </a:rPr>
               <a:t>م</a:t>
@@ -9863,6 +9898,7 @@
                   <a:srgbClr val="8A6D1E"/>
                 </a:solidFill>
                 <a:latin typeface="Amiri" pitchFamily="2" charset="-78"/>
+                <a:ea typeface="Amiri" pitchFamily="2" charset="-78"/>
                 <a:cs typeface="Amiri" pitchFamily="2" charset="-78"/>
               </a:rPr>
               <a:t>العَرَبِيَّةُ فِي الحَيَاةِ اليَوْمِيَّةِ</a:t>
@@ -10143,6 +10179,7 @@
                   <a:srgbClr val="1B3B6F"/>
                 </a:solidFill>
                 <a:latin typeface="Amiri" pitchFamily="2" charset="-78"/>
+                <a:ea typeface="Amiri" pitchFamily="2" charset="-78"/>
                 <a:cs typeface="Amiri" pitchFamily="2" charset="-78"/>
               </a:rPr>
               <a:t>مُكَوِّنَات · تَارِيخ</a:t>
@@ -10349,6 +10386,7 @@
                   <a:srgbClr val="1B3B6F"/>
                 </a:solidFill>
                 <a:latin typeface="Amiri" pitchFamily="2" charset="-78"/>
+                <a:ea typeface="Amiri" pitchFamily="2" charset="-78"/>
                 <a:cs typeface="Amiri" pitchFamily="2" charset="-78"/>
               </a:rPr>
               <a:t>مَطْعَم · مَخْبَز</a:t>
@@ -10555,6 +10593,7 @@
                   <a:srgbClr val="1B3B6F"/>
                 </a:solidFill>
                 <a:latin typeface="Amiri" pitchFamily="2" charset="-78"/>
+                <a:ea typeface="Amiri" pitchFamily="2" charset="-78"/>
                 <a:cs typeface="Amiri" pitchFamily="2" charset="-78"/>
               </a:rPr>
               <a:t>مَرْكَز · مَسْجِد</a:t>
@@ -10761,6 +10800,7 @@
                   <a:srgbClr val="1B3B6F"/>
                 </a:solidFill>
                 <a:latin typeface="Amiri" pitchFamily="2" charset="-78"/>
+                <a:ea typeface="Amiri" pitchFamily="2" charset="-78"/>
                 <a:cs typeface="Amiri" pitchFamily="2" charset="-78"/>
               </a:rPr>
               <a:t>أَخْبَار · صَحِيفَة</a:t>
@@ -10902,6 +10942,7 @@
                   <a:srgbClr val="1B3B6F"/>
                 </a:solidFill>
                 <a:latin typeface="Amiri" pitchFamily="2" charset="-78"/>
+                <a:ea typeface="Amiri" pitchFamily="2" charset="-78"/>
                 <a:cs typeface="Amiri" pitchFamily="2" charset="-78"/>
               </a:rPr>
               <a:t>وُصُول · مُغَادَرَة</a:t>
@@ -11043,6 +11084,7 @@
                   <a:srgbClr val="1B3B6F"/>
                 </a:solidFill>
                 <a:latin typeface="Amiri" pitchFamily="2" charset="-78"/>
+                <a:ea typeface="Amiri" pitchFamily="2" charset="-78"/>
                 <a:cs typeface="Amiri" pitchFamily="2" charset="-78"/>
               </a:rPr>
               <a:t>بَحْث · رِسَالَة</a:t>
@@ -11214,6 +11256,7 @@
                   <a:srgbClr val="D4AF37"/>
                 </a:solidFill>
                 <a:latin typeface="Amiri" pitchFamily="2" charset="-78"/>
+                <a:ea typeface="Amiri" pitchFamily="2" charset="-78"/>
                 <a:cs typeface="Amiri" pitchFamily="2" charset="-78"/>
               </a:rPr>
               <a:t>م</a:t>
@@ -11534,6 +11577,7 @@
                   <a:srgbClr val="8A6D1E"/>
                 </a:solidFill>
                 <a:latin typeface="Amiri" pitchFamily="2" charset="-78"/>
+                <a:ea typeface="Amiri" pitchFamily="2" charset="-78"/>
                 <a:cs typeface="Amiri" pitchFamily="2" charset="-78"/>
               </a:rPr>
               <a:t>صَنِّفِ الأَمْثِلَةَ</a:t>
@@ -11644,6 +11688,7 @@
                   <a:srgbClr val="1B3B6F"/>
                 </a:solidFill>
                 <a:latin typeface="Amiri" pitchFamily="2" charset="-78"/>
+                <a:ea typeface="Amiri" pitchFamily="2" charset="-78"/>
                 <a:cs typeface="Amiri" pitchFamily="2" charset="-78"/>
               </a:rPr>
               <a:t>مَطْعَم</a:t>
@@ -11716,6 +11761,7 @@
                   <a:srgbClr val="1B3B6F"/>
                 </a:solidFill>
                 <a:latin typeface="Amiri" pitchFamily="2" charset="-78"/>
+                <a:ea typeface="Amiri" pitchFamily="2" charset="-78"/>
                 <a:cs typeface="Amiri" pitchFamily="2" charset="-78"/>
               </a:rPr>
               <a:t>أَخْبَار</a:t>
@@ -11788,6 +11834,7 @@
                   <a:srgbClr val="1B3B6F"/>
                 </a:solidFill>
                 <a:latin typeface="Amiri" pitchFamily="2" charset="-78"/>
+                <a:ea typeface="Amiri" pitchFamily="2" charset="-78"/>
                 <a:cs typeface="Amiri" pitchFamily="2" charset="-78"/>
               </a:rPr>
               <a:t>وُصُول</a:t>
@@ -11860,6 +11907,7 @@
                   <a:srgbClr val="1B3B6F"/>
                 </a:solidFill>
                 <a:latin typeface="Amiri" pitchFamily="2" charset="-78"/>
+                <a:ea typeface="Amiri" pitchFamily="2" charset="-78"/>
                 <a:cs typeface="Amiri" pitchFamily="2" charset="-78"/>
               </a:rPr>
               <a:t>مُكَوِّنَات</a:t>
@@ -11932,6 +11980,7 @@
                   <a:srgbClr val="1B3B6F"/>
                 </a:solidFill>
                 <a:latin typeface="Amiri" pitchFamily="2" charset="-78"/>
+                <a:ea typeface="Amiri" pitchFamily="2" charset="-78"/>
                 <a:cs typeface="Amiri" pitchFamily="2" charset="-78"/>
               </a:rPr>
               <a:t>رِسَالَة</a:t>
@@ -12004,6 +12053,7 @@
                   <a:srgbClr val="1B3B6F"/>
                 </a:solidFill>
                 <a:latin typeface="Amiri" pitchFamily="2" charset="-78"/>
+                <a:ea typeface="Amiri" pitchFamily="2" charset="-78"/>
                 <a:cs typeface="Amiri" pitchFamily="2" charset="-78"/>
               </a:rPr>
               <a:t>مُغَادَرَة</a:t>
@@ -12076,6 +12126,7 @@
                   <a:srgbClr val="1B3B6F"/>
                 </a:solidFill>
                 <a:latin typeface="Amiri" pitchFamily="2" charset="-78"/>
+                <a:ea typeface="Amiri" pitchFamily="2" charset="-78"/>
                 <a:cs typeface="Amiri" pitchFamily="2" charset="-78"/>
               </a:rPr>
               <a:t>مَخْبَز</a:t>
@@ -12148,6 +12199,7 @@
                   <a:srgbClr val="1B3B6F"/>
                 </a:solidFill>
                 <a:latin typeface="Amiri" pitchFamily="2" charset="-78"/>
+                <a:ea typeface="Amiri" pitchFamily="2" charset="-78"/>
                 <a:cs typeface="Amiri" pitchFamily="2" charset="-78"/>
               </a:rPr>
               <a:t>بَحْث</a:t>
@@ -12557,6 +12609,7 @@
                   <a:srgbClr val="D4AF37"/>
                 </a:solidFill>
                 <a:latin typeface="Amiri" pitchFamily="2" charset="-78"/>
+                <a:ea typeface="Amiri" pitchFamily="2" charset="-78"/>
                 <a:cs typeface="Amiri" pitchFamily="2" charset="-78"/>
               </a:rPr>
               <a:t>م</a:t>
@@ -12877,6 +12930,7 @@
                   <a:srgbClr val="8A6D1E"/>
                 </a:solidFill>
                 <a:latin typeface="Amiri" pitchFamily="2" charset="-78"/>
+                <a:ea typeface="Amiri" pitchFamily="2" charset="-78"/>
                 <a:cs typeface="Amiri" pitchFamily="2" charset="-78"/>
               </a:rPr>
               <a:t>الإِجَابَاتُ</a:t>
@@ -13072,6 +13126,7 @@
                   <a:srgbClr val="1B3B6F"/>
                 </a:solidFill>
                 <a:latin typeface="Amiri" pitchFamily="2" charset="-78"/>
+                <a:ea typeface="Amiri" pitchFamily="2" charset="-78"/>
                 <a:cs typeface="Amiri" pitchFamily="2" charset="-78"/>
               </a:rPr>
               <a:t>مَطْعَم</a:t>
@@ -13137,6 +13192,7 @@
                   <a:srgbClr val="1B3B6F"/>
                 </a:solidFill>
                 <a:latin typeface="Amiri" pitchFamily="2" charset="-78"/>
+                <a:ea typeface="Amiri" pitchFamily="2" charset="-78"/>
                 <a:cs typeface="Amiri" pitchFamily="2" charset="-78"/>
               </a:rPr>
               <a:t>مُكَوِّنَات</a:t>
@@ -13202,6 +13258,7 @@
                   <a:srgbClr val="1B3B6F"/>
                 </a:solidFill>
                 <a:latin typeface="Amiri" pitchFamily="2" charset="-78"/>
+                <a:ea typeface="Amiri" pitchFamily="2" charset="-78"/>
                 <a:cs typeface="Amiri" pitchFamily="2" charset="-78"/>
               </a:rPr>
               <a:t>مَخْبَز</a:t>
@@ -13359,6 +13416,7 @@
                   <a:srgbClr val="1B3B6F"/>
                 </a:solidFill>
                 <a:latin typeface="Amiri" pitchFamily="2" charset="-78"/>
+                <a:ea typeface="Amiri" pitchFamily="2" charset="-78"/>
                 <a:cs typeface="Amiri" pitchFamily="2" charset="-78"/>
               </a:rPr>
               <a:t>أَخْبَار</a:t>
@@ -13424,6 +13482,7 @@
                   <a:srgbClr val="1B3B6F"/>
                 </a:solidFill>
                 <a:latin typeface="Amiri" pitchFamily="2" charset="-78"/>
+                <a:ea typeface="Amiri" pitchFamily="2" charset="-78"/>
                 <a:cs typeface="Amiri" pitchFamily="2" charset="-78"/>
               </a:rPr>
               <a:t>رِسَالَة</a:t>
@@ -13489,6 +13548,7 @@
                   <a:srgbClr val="1B3B6F"/>
                 </a:solidFill>
                 <a:latin typeface="Amiri" pitchFamily="2" charset="-78"/>
+                <a:ea typeface="Amiri" pitchFamily="2" charset="-78"/>
                 <a:cs typeface="Amiri" pitchFamily="2" charset="-78"/>
               </a:rPr>
               <a:t>بَحْث</a:t>
@@ -13646,6 +13706,7 @@
                   <a:srgbClr val="1B3B6F"/>
                 </a:solidFill>
                 <a:latin typeface="Amiri" pitchFamily="2" charset="-78"/>
+                <a:ea typeface="Amiri" pitchFamily="2" charset="-78"/>
                 <a:cs typeface="Amiri" pitchFamily="2" charset="-78"/>
               </a:rPr>
               <a:t>وُصُول</a:t>
@@ -13711,6 +13772,7 @@
                   <a:srgbClr val="1B3B6F"/>
                 </a:solidFill>
                 <a:latin typeface="Amiri" pitchFamily="2" charset="-78"/>
+                <a:ea typeface="Amiri" pitchFamily="2" charset="-78"/>
                 <a:cs typeface="Amiri" pitchFamily="2" charset="-78"/>
               </a:rPr>
               <a:t>مُغَادَرَة</a:t>
@@ -13844,6 +13906,7 @@
                   <a:srgbClr val="D4AF37"/>
                 </a:solidFill>
                 <a:latin typeface="Amiri" pitchFamily="2" charset="-78"/>
+                <a:ea typeface="Amiri" pitchFamily="2" charset="-78"/>
                 <a:cs typeface="Amiri" pitchFamily="2" charset="-78"/>
               </a:rPr>
               <a:t>م</a:t>
@@ -14229,6 +14292,7 @@
                   <a:srgbClr val="8A6D1E"/>
                 </a:solidFill>
                 <a:latin typeface="Amiri" pitchFamily="2" charset="-78"/>
+                <a:ea typeface="Amiri" pitchFamily="2" charset="-78"/>
                 <a:cs typeface="Amiri" pitchFamily="2" charset="-78"/>
               </a:rPr>
               <a:t>فُنُونُ الخَطِّ العَرَبِيِّ</a:t>
@@ -14547,6 +14611,7 @@
                   <a:srgbClr val="1B3B6F"/>
                 </a:solidFill>
                 <a:latin typeface="Amiri" pitchFamily="2" charset="-78"/>
+                <a:ea typeface="Amiri" pitchFamily="2" charset="-78"/>
                 <a:cs typeface="Amiri" pitchFamily="2" charset="-78"/>
               </a:rPr>
               <a:t>النَّسْخ</a:t>
@@ -14791,6 +14856,7 @@
                   <a:srgbClr val="1B3B6F"/>
                 </a:solidFill>
                 <a:latin typeface="Amiri" pitchFamily="2" charset="-78"/>
+                <a:ea typeface="Amiri" pitchFamily="2" charset="-78"/>
                 <a:cs typeface="Amiri" pitchFamily="2" charset="-78"/>
               </a:rPr>
               <a:t>الرُّقْعَة</a:t>
@@ -14970,6 +15036,7 @@
                   <a:srgbClr val="1B3B6F"/>
                 </a:solidFill>
                 <a:latin typeface="Amiri" pitchFamily="2" charset="-78"/>
+                <a:ea typeface="Amiri" pitchFamily="2" charset="-78"/>
                 <a:cs typeface="Amiri" pitchFamily="2" charset="-78"/>
               </a:rPr>
               <a:t>الثُّلُث</a:t>
@@ -15179,6 +15246,7 @@
                   <a:srgbClr val="D4AF37"/>
                 </a:solidFill>
                 <a:latin typeface="Amiri" pitchFamily="2" charset="-78"/>
+                <a:ea typeface="Amiri" pitchFamily="2" charset="-78"/>
                 <a:cs typeface="Amiri" pitchFamily="2" charset="-78"/>
               </a:rPr>
               <a:t>م</a:t>
@@ -15499,6 +15567,7 @@
                   <a:srgbClr val="8A6D1E"/>
                 </a:solidFill>
                 <a:latin typeface="Amiri" pitchFamily="2" charset="-78"/>
+                <a:ea typeface="Amiri" pitchFamily="2" charset="-78"/>
                 <a:cs typeface="Amiri" pitchFamily="2" charset="-78"/>
               </a:rPr>
               <a:t>رِحْلَةٌ فِي العَالَمِ العَرَبِيِّ</a:t>
@@ -15741,6 +15810,7 @@
                   <a:srgbClr val="1B3B6F"/>
                 </a:solidFill>
                 <a:latin typeface="Amiri" pitchFamily="2" charset="-78"/>
+                <a:ea typeface="Amiri" pitchFamily="2" charset="-78"/>
                 <a:cs typeface="Amiri" pitchFamily="2" charset="-78"/>
               </a:rPr>
               <a:t>المَغْرِب</a:t>
@@ -15947,6 +16017,7 @@
                   <a:srgbClr val="1B3B6F"/>
                 </a:solidFill>
                 <a:latin typeface="Amiri" pitchFamily="2" charset="-78"/>
+                <a:ea typeface="Amiri" pitchFamily="2" charset="-78"/>
                 <a:cs typeface="Amiri" pitchFamily="2" charset="-78"/>
               </a:rPr>
               <a:t>الجَزَائِر</a:t>
@@ -16153,6 +16224,7 @@
                   <a:srgbClr val="1B3B6F"/>
                 </a:solidFill>
                 <a:latin typeface="Amiri" pitchFamily="2" charset="-78"/>
+                <a:ea typeface="Amiri" pitchFamily="2" charset="-78"/>
                 <a:cs typeface="Amiri" pitchFamily="2" charset="-78"/>
               </a:rPr>
               <a:t>تُونِس</a:t>
@@ -16294,6 +16366,7 @@
                   <a:srgbClr val="1B3B6F"/>
                 </a:solidFill>
                 <a:latin typeface="Amiri" pitchFamily="2" charset="-78"/>
+                <a:ea typeface="Amiri" pitchFamily="2" charset="-78"/>
                 <a:cs typeface="Amiri" pitchFamily="2" charset="-78"/>
               </a:rPr>
               <a:t>مِصْر</a:t>
@@ -16500,6 +16573,7 @@
                   <a:srgbClr val="1B3B6F"/>
                 </a:solidFill>
                 <a:latin typeface="Amiri" pitchFamily="2" charset="-78"/>
+                <a:ea typeface="Amiri" pitchFamily="2" charset="-78"/>
                 <a:cs typeface="Amiri" pitchFamily="2" charset="-78"/>
               </a:rPr>
               <a:t>السُّودَان</a:t>
@@ -16641,6 +16715,7 @@
                   <a:srgbClr val="1B3B6F"/>
                 </a:solidFill>
                 <a:latin typeface="Amiri" pitchFamily="2" charset="-78"/>
+                <a:ea typeface="Amiri" pitchFamily="2" charset="-78"/>
                 <a:cs typeface="Amiri" pitchFamily="2" charset="-78"/>
               </a:rPr>
               <a:t>لُبْنَان</a:t>
@@ -16782,6 +16857,7 @@
                   <a:srgbClr val="1B3B6F"/>
                 </a:solidFill>
                 <a:latin typeface="Amiri" pitchFamily="2" charset="-78"/>
+                <a:ea typeface="Amiri" pitchFamily="2" charset="-78"/>
                 <a:cs typeface="Amiri" pitchFamily="2" charset="-78"/>
               </a:rPr>
               <a:t>سُورِيَا</a:t>
@@ -16923,6 +16999,7 @@
                   <a:srgbClr val="1B3B6F"/>
                 </a:solidFill>
                 <a:latin typeface="Amiri" pitchFamily="2" charset="-78"/>
+                <a:ea typeface="Amiri" pitchFamily="2" charset="-78"/>
                 <a:cs typeface="Amiri" pitchFamily="2" charset="-78"/>
               </a:rPr>
               <a:t>العِرَاق</a:t>
@@ -17129,6 +17206,7 @@
                   <a:srgbClr val="1B3B6F"/>
                 </a:solidFill>
                 <a:latin typeface="Amiri" pitchFamily="2" charset="-78"/>
+                <a:ea typeface="Amiri" pitchFamily="2" charset="-78"/>
                 <a:cs typeface="Amiri" pitchFamily="2" charset="-78"/>
               </a:rPr>
               <a:t>المَمْلَكَةُ العَرَبِيَّةُ السُّعُودِيَّة</a:t>
@@ -17335,6 +17413,7 @@
                   <a:srgbClr val="1B3B6F"/>
                 </a:solidFill>
                 <a:latin typeface="Amiri" pitchFamily="2" charset="-78"/>
+                <a:ea typeface="Amiri" pitchFamily="2" charset="-78"/>
                 <a:cs typeface="Amiri" pitchFamily="2" charset="-78"/>
               </a:rPr>
               <a:t>عُمَان</a:t>
@@ -17544,6 +17623,7 @@
                   <a:srgbClr val="D4AF37"/>
                 </a:solidFill>
                 <a:latin typeface="Amiri" pitchFamily="2" charset="-78"/>
+                <a:ea typeface="Amiri" pitchFamily="2" charset="-78"/>
                 <a:cs typeface="Amiri" pitchFamily="2" charset="-78"/>
               </a:rPr>
               <a:t>م</a:t>
@@ -17864,6 +17944,7 @@
                   <a:srgbClr val="8A6D1E"/>
                 </a:solidFill>
                 <a:latin typeface="Amiri" pitchFamily="2" charset="-78"/>
+                <a:ea typeface="Amiri" pitchFamily="2" charset="-78"/>
                 <a:cs typeface="Amiri" pitchFamily="2" charset="-78"/>
               </a:rPr>
               <a:t>اِبْحَثْ وَاكْتُبْ</a:t>
@@ -18039,6 +18120,7 @@
                   <a:srgbClr val="2E8B57"/>
                 </a:solidFill>
                 <a:latin typeface="Amiri" pitchFamily="2" charset="-78"/>
+                <a:ea typeface="Amiri" pitchFamily="2" charset="-78"/>
                 <a:cs typeface="Amiri" pitchFamily="2" charset="-78"/>
               </a:rPr>
               <a:t>الأَسَاسُ</a:t>
@@ -18333,6 +18415,7 @@
                   <a:srgbClr val="C9780A"/>
                 </a:solidFill>
                 <a:latin typeface="Amiri" pitchFamily="2" charset="-78"/>
+                <a:ea typeface="Amiri" pitchFamily="2" charset="-78"/>
                 <a:cs typeface="Amiri" pitchFamily="2" charset="-78"/>
               </a:rPr>
               <a:t>التَّطْوِيرُ</a:t>
@@ -18422,6 +18505,7 @@
                   <a:srgbClr val="1F2A37"/>
                 </a:solidFill>
                 <a:latin typeface="Amiri" pitchFamily="2" charset="-78"/>
+                <a:ea typeface="Amiri" pitchFamily="2" charset="-78"/>
                 <a:cs typeface="Amiri" pitchFamily="2" charset="-78"/>
               </a:rPr>
               <a:t>مَطْعَم</a:t>
@@ -18653,6 +18737,7 @@
                   <a:srgbClr val="B83227"/>
                 </a:solidFill>
                 <a:latin typeface="Amiri" pitchFamily="2" charset="-78"/>
+                <a:ea typeface="Amiri" pitchFamily="2" charset="-78"/>
                 <a:cs typeface="Amiri" pitchFamily="2" charset="-78"/>
               </a:rPr>
               <a:t>التَّحَدِّي</a:t>
@@ -18943,6 +19028,7 @@
                   <a:srgbClr val="D4AF37"/>
                 </a:solidFill>
                 <a:latin typeface="Amiri" pitchFamily="2" charset="-78"/>
+                <a:ea typeface="Amiri" pitchFamily="2" charset="-78"/>
                 <a:cs typeface="Amiri" pitchFamily="2" charset="-78"/>
               </a:rPr>
               <a:t>م</a:t>
@@ -19263,6 +19349,7 @@
                   <a:srgbClr val="8A6D1E"/>
                 </a:solidFill>
                 <a:latin typeface="Amiri" pitchFamily="2" charset="-78"/>
+                <a:ea typeface="Amiri" pitchFamily="2" charset="-78"/>
                 <a:cs typeface="Amiri" pitchFamily="2" charset="-78"/>
               </a:rPr>
               <a:t>التَّحَدُّثُ</a:t>
@@ -20033,6 +20120,7 @@
                   <a:srgbClr val="1B3B6F"/>
                 </a:solidFill>
                 <a:latin typeface="Amiri" pitchFamily="2" charset="-78"/>
+                <a:ea typeface="Amiri" pitchFamily="2" charset="-78"/>
                 <a:cs typeface="Amiri" pitchFamily="2" charset="-78"/>
               </a:rPr>
               <a:t>أَيْنَ رَأَيْتَ الكِتَابَةَ العَرَبِيَّةَ؟</a:t>
@@ -20170,6 +20258,7 @@
                   <a:srgbClr val="1B3B6F"/>
                 </a:solidFill>
                 <a:latin typeface="Amiri" pitchFamily="2" charset="-78"/>
+                <a:ea typeface="Amiri" pitchFamily="2" charset="-78"/>
                 <a:cs typeface="Amiri" pitchFamily="2" charset="-78"/>
               </a:rPr>
               <a:t>اِقْرَأِ اسْمَ بَلَدٍ.</a:t>
@@ -20307,6 +20396,7 @@
                   <a:srgbClr val="1B3B6F"/>
                 </a:solidFill>
                 <a:latin typeface="Amiri" pitchFamily="2" charset="-78"/>
+                <a:ea typeface="Amiri" pitchFamily="2" charset="-78"/>
                 <a:cs typeface="Amiri" pitchFamily="2" charset="-78"/>
               </a:rPr>
               <a:t>هَلْ هِيَ العَرَبِيَّةُ؟ كَيْفَ تَعْرِفُ؟</a:t>
@@ -20444,6 +20534,7 @@
                   <a:srgbClr val="1B3B6F"/>
                 </a:solidFill>
                 <a:latin typeface="Amiri" pitchFamily="2" charset="-78"/>
+                <a:ea typeface="Amiri" pitchFamily="2" charset="-78"/>
                 <a:cs typeface="Amiri" pitchFamily="2" charset="-78"/>
               </a:rPr>
               <a:t>مَا الفَرْقُ بَيْنَ الفُصْحَى وَاللَّهْجَةِ؟</a:t>
@@ -20619,6 +20710,7 @@
                   <a:srgbClr val="1D5FBF"/>
                 </a:solidFill>
                 <a:latin typeface="Amiri" pitchFamily="2" charset="-78"/>
+                <a:ea typeface="Amiri" pitchFamily="2" charset="-78"/>
                 <a:cs typeface="Amiri" pitchFamily="2" charset="-78"/>
               </a:rPr>
               <a:t>رَأَيْتُهَا عَلَى ___ .</a:t>
@@ -20722,6 +20814,7 @@
                   <a:srgbClr val="1F2A37"/>
                 </a:solidFill>
                 <a:latin typeface="Amiri" pitchFamily="2" charset="-78"/>
+                <a:ea typeface="Amiri" pitchFamily="2" charset="-78"/>
                 <a:cs typeface="Amiri" pitchFamily="2" charset="-78"/>
               </a:rPr>
               <a:t>أَنَا مُتَأَكِّدٌ / لَسْتُ مُتَأَكِّدًا .</a:t>
@@ -20825,6 +20918,7 @@
                   <a:srgbClr val="1F2A37"/>
                 </a:solidFill>
                 <a:latin typeface="Amiri" pitchFamily="2" charset="-78"/>
+                <a:ea typeface="Amiri" pitchFamily="2" charset="-78"/>
                 <a:cs typeface="Amiri" pitchFamily="2" charset="-78"/>
               </a:rPr>
               <a:t>الفُصْحَى لِـ ___ ، وَاللَّهْجَةُ لِـ ___ .</a:t>
@@ -20928,6 +21022,7 @@
                   <a:srgbClr val="1F2A37"/>
                 </a:solidFill>
                 <a:latin typeface="Amiri" pitchFamily="2" charset="-78"/>
+                <a:ea typeface="Amiri" pitchFamily="2" charset="-78"/>
                 <a:cs typeface="Amiri" pitchFamily="2" charset="-78"/>
               </a:rPr>
               <a:t>رَأَى / رَأَتْ ___ .</a:t>
@@ -21101,6 +21196,7 @@
                   <a:srgbClr val="1F2A37"/>
                 </a:solidFill>
                 <a:latin typeface="Amiri" pitchFamily="2" charset="-78"/>
+                <a:ea typeface="Amiri" pitchFamily="2" charset="-78"/>
                 <a:cs typeface="Amiri" pitchFamily="2" charset="-78"/>
               </a:rPr>
               <a:t>أَيْنَ رَأَيْتَ الكِتَابَةَ العَرَبِيَّةَ؟</a:t>
@@ -21240,6 +21336,7 @@
                   <a:srgbClr val="1F2A37"/>
                 </a:solidFill>
                 <a:latin typeface="Amiri" pitchFamily="2" charset="-78"/>
+                <a:ea typeface="Amiri" pitchFamily="2" charset="-78"/>
                 <a:cs typeface="Amiri" pitchFamily="2" charset="-78"/>
               </a:rPr>
               <a:t>رَأَيْتُهَا عَلَى مَطْعَمٍ.</a:t>
@@ -21411,6 +21508,7 @@
                   <a:srgbClr val="D4AF37"/>
                 </a:solidFill>
                 <a:latin typeface="Amiri" pitchFamily="2" charset="-78"/>
+                <a:ea typeface="Amiri" pitchFamily="2" charset="-78"/>
                 <a:cs typeface="Amiri" pitchFamily="2" charset="-78"/>
               </a:rPr>
               <a:t>م</a:t>
@@ -21731,6 +21829,7 @@
                   <a:srgbClr val="8A6D1E"/>
                 </a:solidFill>
                 <a:latin typeface="Amiri" pitchFamily="2" charset="-78"/>
+                <a:ea typeface="Amiri" pitchFamily="2" charset="-78"/>
                 <a:cs typeface="Amiri" pitchFamily="2" charset="-78"/>
               </a:rPr>
               <a:t>آدَابُ الصَّفِّ</a:t>
@@ -23262,6 +23361,7 @@
                   <a:srgbClr val="D4AF37"/>
                 </a:solidFill>
                 <a:latin typeface="Amiri" pitchFamily="2" charset="-78"/>
+                <a:ea typeface="Amiri" pitchFamily="2" charset="-78"/>
                 <a:cs typeface="Amiri" pitchFamily="2" charset="-78"/>
               </a:rPr>
               <a:t>م</a:t>
@@ -23582,6 +23682,7 @@
                   <a:srgbClr val="8A6D1E"/>
                 </a:solidFill>
                 <a:latin typeface="Amiri" pitchFamily="2" charset="-78"/>
+                <a:ea typeface="Amiri" pitchFamily="2" charset="-78"/>
                 <a:cs typeface="Amiri" pitchFamily="2" charset="-78"/>
               </a:rPr>
               <a:t>الدَّلِيلُ أَوَّلًا</a:t>
@@ -24341,6 +24442,7 @@
                   <a:srgbClr val="5A6472"/>
                 </a:solidFill>
                 <a:latin typeface="Amiri" pitchFamily="2" charset="-78"/>
+                <a:ea typeface="Amiri" pitchFamily="2" charset="-78"/>
                 <a:cs typeface="Amiri" pitchFamily="2" charset="-78"/>
               </a:rPr>
               <a:t>مَخْبَز</a:t>
@@ -24487,6 +24589,7 @@
                   <a:srgbClr val="D4AF37"/>
                 </a:solidFill>
                 <a:latin typeface="Amiri" pitchFamily="2" charset="-78"/>
+                <a:ea typeface="Amiri" pitchFamily="2" charset="-78"/>
                 <a:cs typeface="Amiri" pitchFamily="2" charset="-78"/>
               </a:rPr>
               <a:t>م</a:t>
@@ -24807,6 +24910,7 @@
                   <a:srgbClr val="8A6D1E"/>
                 </a:solidFill>
                 <a:latin typeface="Amiri" pitchFamily="2" charset="-78"/>
+                <a:ea typeface="Amiri" pitchFamily="2" charset="-78"/>
                 <a:cs typeface="Amiri" pitchFamily="2" charset="-78"/>
               </a:rPr>
               <a:t>قَيِّمْ عَمَلَكَ</a:t>
@@ -25964,6 +26068,7 @@
                   <a:srgbClr val="D4AF37"/>
                 </a:solidFill>
                 <a:latin typeface="Amiri" pitchFamily="2" charset="-78"/>
+                <a:ea typeface="Amiri" pitchFamily="2" charset="-78"/>
                 <a:cs typeface="Amiri" pitchFamily="2" charset="-78"/>
               </a:rPr>
               <a:t>م</a:t>
@@ -26284,6 +26389,7 @@
                   <a:srgbClr val="8A6D1E"/>
                 </a:solidFill>
                 <a:latin typeface="Amiri" pitchFamily="2" charset="-78"/>
+                <a:ea typeface="Amiri" pitchFamily="2" charset="-78"/>
                 <a:cs typeface="Amiri" pitchFamily="2" charset="-78"/>
               </a:rPr>
               <a:t>تَذْكِرَةُ الخُرُوجِ</a:t>
@@ -26470,6 +26576,7 @@
                   <a:srgbClr val="1B3B6F"/>
                 </a:solidFill>
                 <a:latin typeface="Amiri" pitchFamily="2" charset="-78"/>
+                <a:ea typeface="Amiri" pitchFamily="2" charset="-78"/>
                 <a:cs typeface="Amiri" pitchFamily="2" charset="-78"/>
               </a:rPr>
               <a:t>مِصْر</a:t>
@@ -27804,6 +27911,7 @@
                   <a:srgbClr val="D4AF37"/>
                 </a:solidFill>
                 <a:latin typeface="Amiri" pitchFamily="2" charset="-78"/>
+                <a:ea typeface="Amiri" pitchFamily="2" charset="-78"/>
                 <a:cs typeface="Amiri" pitchFamily="2" charset="-78"/>
               </a:rPr>
               <a:t>م</a:t>
@@ -28124,6 +28232,7 @@
                   <a:srgbClr val="8A6D1E"/>
                 </a:solidFill>
                 <a:latin typeface="Amiri" pitchFamily="2" charset="-78"/>
+                <a:ea typeface="Amiri" pitchFamily="2" charset="-78"/>
                 <a:cs typeface="Amiri" pitchFamily="2" charset="-78"/>
               </a:rPr>
               <a:t>إِجَابَاتُ تَذْكِرَةِ الخُرُوجِ</a:t>
@@ -28310,6 +28419,7 @@
                   <a:srgbClr val="1B3B6F"/>
                 </a:solidFill>
                 <a:latin typeface="Amiri" pitchFamily="2" charset="-78"/>
+                <a:ea typeface="Amiri" pitchFamily="2" charset="-78"/>
                 <a:cs typeface="Amiri" pitchFamily="2" charset="-78"/>
               </a:rPr>
               <a:t>مِصْر</a:t>
@@ -29839,6 +29949,7 @@
                   <a:srgbClr val="D4AF37"/>
                 </a:solidFill>
                 <a:latin typeface="Amiri" pitchFamily="2" charset="-78"/>
+                <a:ea typeface="Amiri" pitchFamily="2" charset="-78"/>
                 <a:cs typeface="Amiri" pitchFamily="2" charset="-78"/>
               </a:rPr>
               <a:t>م</a:t>
@@ -30159,6 +30270,7 @@
                   <a:srgbClr val="8A6D1E"/>
                 </a:solidFill>
                 <a:latin typeface="Amiri" pitchFamily="2" charset="-78"/>
+                <a:ea typeface="Amiri" pitchFamily="2" charset="-78"/>
                 <a:cs typeface="Amiri" pitchFamily="2" charset="-78"/>
               </a:rPr>
               <a:t>التَّحْضِيرُ لِلدَّرْسِ القَادِمِ</a:t>
@@ -30372,6 +30484,7 @@
                   <a:srgbClr val="1B3B6F"/>
                 </a:solidFill>
                 <a:latin typeface="Amiri" pitchFamily="2" charset="-78"/>
+                <a:ea typeface="Amiri" pitchFamily="2" charset="-78"/>
                 <a:cs typeface="Amiri" pitchFamily="2" charset="-78"/>
               </a:rPr>
               <a:t>ا د ذ ر ز و</a:t>
@@ -30451,6 +30564,7 @@
                   <a:srgbClr val="1B3B6F"/>
                 </a:solidFill>
                 <a:latin typeface="Amiri" pitchFamily="2" charset="-78"/>
+                <a:ea typeface="Amiri" pitchFamily="2" charset="-78"/>
                 <a:cs typeface="Amiri" pitchFamily="2" charset="-78"/>
               </a:rPr>
               <a:t>بَ  بُ  بِ  بْ</a:t>
@@ -30530,6 +30644,7 @@
                   <a:srgbClr val="1B3B6F"/>
                 </a:solidFill>
                 <a:latin typeface="Amiri" pitchFamily="2" charset="-78"/>
+                <a:ea typeface="Amiri" pitchFamily="2" charset="-78"/>
                 <a:cs typeface="Amiri" pitchFamily="2" charset="-78"/>
               </a:rPr>
               <a:t>بّ  بٌ  آ  ء</a:t>
@@ -30609,6 +30724,7 @@
                   <a:srgbClr val="1B3B6F"/>
                 </a:solidFill>
                 <a:latin typeface="Amiri" pitchFamily="2" charset="-78"/>
+                <a:ea typeface="Amiri" pitchFamily="2" charset="-78"/>
                 <a:cs typeface="Amiri" pitchFamily="2" charset="-78"/>
               </a:rPr>
               <a:t>١ ٢ ٣ … ٢٠</a:t>
@@ -30688,6 +30804,7 @@
                   <a:srgbClr val="1B3B6F"/>
                 </a:solidFill>
                 <a:latin typeface="Amiri" pitchFamily="2" charset="-78"/>
+                <a:ea typeface="Amiri" pitchFamily="2" charset="-78"/>
                 <a:cs typeface="Amiri" pitchFamily="2" charset="-78"/>
               </a:rPr>
               <a:t>مطعم · مدرسة</a:t>
@@ -30843,6 +30960,7 @@
                   <a:srgbClr val="1B3B6F"/>
                 </a:solidFill>
                 <a:latin typeface="Amiri" pitchFamily="2" charset="-78"/>
+                <a:ea typeface="Amiri" pitchFamily="2" charset="-78"/>
                 <a:cs typeface="Amiri" pitchFamily="2" charset="-78"/>
               </a:rPr>
               <a:t>ا ب ت ث … ن ه و ي</a:t>
@@ -31512,6 +31630,7 @@
                   <a:srgbClr val="FFFFFF"/>
                 </a:solidFill>
                 <a:latin typeface="Amiri" pitchFamily="2" charset="-78"/>
+                <a:ea typeface="Amiri" pitchFamily="2" charset="-78"/>
                 <a:cs typeface="Amiri" pitchFamily="2" charset="-78"/>
               </a:rPr>
               <a:t>أَحْسَنْتُمْ! إِلَى اللِّقَاءِ</a:t>
@@ -31664,6 +31783,7 @@
                   <a:srgbClr val="D4AF37"/>
                 </a:solidFill>
                 <a:latin typeface="Amiri" pitchFamily="2" charset="-78"/>
+                <a:ea typeface="Amiri" pitchFamily="2" charset="-78"/>
                 <a:cs typeface="Amiri" pitchFamily="2" charset="-78"/>
               </a:rPr>
               <a:t>مُرَاجَعَةُ الوَحْدَةِ الأُولَى</a:t>
@@ -31797,6 +31917,7 @@
                   <a:srgbClr val="D4AF37"/>
                 </a:solidFill>
                 <a:latin typeface="Amiri" pitchFamily="2" charset="-78"/>
+                <a:ea typeface="Amiri" pitchFamily="2" charset="-78"/>
                 <a:cs typeface="Amiri" pitchFamily="2" charset="-78"/>
               </a:rPr>
               <a:t>م</a:t>
@@ -32117,6 +32238,7 @@
                   <a:srgbClr val="8A6D1E"/>
                 </a:solidFill>
                 <a:latin typeface="Amiri" pitchFamily="2" charset="-78"/>
+                <a:ea typeface="Amiri" pitchFamily="2" charset="-78"/>
                 <a:cs typeface="Amiri" pitchFamily="2" charset="-78"/>
               </a:rPr>
               <a:t>خَرِيطَةُ الدَّرْسِ</a:t>
@@ -32431,6 +32553,7 @@
                   <a:srgbClr val="0E7C86"/>
                 </a:solidFill>
                 <a:latin typeface="Amiri" pitchFamily="2" charset="-78"/>
+                <a:ea typeface="Amiri" pitchFamily="2" charset="-78"/>
                 <a:cs typeface="Amiri" pitchFamily="2" charset="-78"/>
               </a:rPr>
               <a:t>اِبْدَأِ الآنَ</a:t>
@@ -32707,6 +32830,7 @@
                   <a:srgbClr val="1B3B6F"/>
                 </a:solidFill>
                 <a:latin typeface="Amiri" pitchFamily="2" charset="-78"/>
+                <a:ea typeface="Amiri" pitchFamily="2" charset="-78"/>
                 <a:cs typeface="Amiri" pitchFamily="2" charset="-78"/>
               </a:rPr>
               <a:t>كَلِمَاتٌ وَقَوَاعِدُ</a:t>
@@ -32983,6 +33107,7 @@
                   <a:srgbClr val="6B4C9A"/>
                 </a:solidFill>
                 <a:latin typeface="Amiri" pitchFamily="2" charset="-78"/>
+                <a:ea typeface="Amiri" pitchFamily="2" charset="-78"/>
                 <a:cs typeface="Amiri" pitchFamily="2" charset="-78"/>
               </a:rPr>
               <a:t>شَاهِدْ</a:t>
@@ -33259,6 +33384,7 @@
                   <a:srgbClr val="2F6FB0"/>
                 </a:solidFill>
                 <a:latin typeface="Amiri" pitchFamily="2" charset="-78"/>
+                <a:ea typeface="Amiri" pitchFamily="2" charset="-78"/>
                 <a:cs typeface="Amiri" pitchFamily="2" charset="-78"/>
               </a:rPr>
               <a:t>مَعًا</a:t>
@@ -33535,6 +33661,7 @@
                   <a:srgbClr val="1E6B52"/>
                 </a:solidFill>
                 <a:latin typeface="Amiri" pitchFamily="2" charset="-78"/>
+                <a:ea typeface="Amiri" pitchFamily="2" charset="-78"/>
                 <a:cs typeface="Amiri" pitchFamily="2" charset="-78"/>
               </a:rPr>
               <a:t>وَحْدَكَ</a:t>
@@ -33811,6 +33938,7 @@
                   <a:srgbClr val="8A6D1E"/>
                 </a:solidFill>
                 <a:latin typeface="Amiri" pitchFamily="2" charset="-78"/>
+                <a:ea typeface="Amiri" pitchFamily="2" charset="-78"/>
                 <a:cs typeface="Amiri" pitchFamily="2" charset="-78"/>
               </a:rPr>
               <a:t>قَيِّمْ عَمَلَكَ</a:t>
@@ -34087,6 +34215,7 @@
                   <a:srgbClr val="C45A3C"/>
                 </a:solidFill>
                 <a:latin typeface="Amiri" pitchFamily="2" charset="-78"/>
+                <a:ea typeface="Amiri" pitchFamily="2" charset="-78"/>
                 <a:cs typeface="Amiri" pitchFamily="2" charset="-78"/>
               </a:rPr>
               <a:t>اِسْتَعِدَّ</a:t>
@@ -34330,6 +34459,7 @@
                   <a:srgbClr val="D4AF37"/>
                 </a:solidFill>
                 <a:latin typeface="Amiri" pitchFamily="2" charset="-78"/>
+                <a:ea typeface="Amiri" pitchFamily="2" charset="-78"/>
                 <a:cs typeface="Amiri" pitchFamily="2" charset="-78"/>
               </a:rPr>
               <a:t>م</a:t>
@@ -34650,6 +34780,7 @@
                   <a:srgbClr val="8A6D1E"/>
                 </a:solidFill>
                 <a:latin typeface="Amiri" pitchFamily="2" charset="-78"/>
+                <a:ea typeface="Amiri" pitchFamily="2" charset="-78"/>
                 <a:cs typeface="Amiri" pitchFamily="2" charset="-78"/>
               </a:rPr>
               <a:t>اِبْدَأِ الآنَ</a:t>
@@ -35173,6 +35304,7 @@
                   <a:srgbClr val="1B3B6F"/>
                 </a:solidFill>
                 <a:latin typeface="Amiri" pitchFamily="2" charset="-78"/>
+                <a:ea typeface="Amiri" pitchFamily="2" charset="-78"/>
                 <a:cs typeface="Amiri" pitchFamily="2" charset="-78"/>
               </a:rPr>
               <a:t>مطعم</a:t>
@@ -35637,6 +35769,7 @@
                   <a:srgbClr val="1B3B6F"/>
                 </a:solidFill>
                 <a:latin typeface="Amiri" pitchFamily="2" charset="-78"/>
+                <a:ea typeface="Amiri" pitchFamily="2" charset="-78"/>
                 <a:cs typeface="Amiri" pitchFamily="2" charset="-78"/>
               </a:rPr>
               <a:t>بت</a:t>
@@ -35663,6 +35796,7 @@
                   <a:srgbClr val="1B3B6F"/>
                 </a:solidFill>
                 <a:latin typeface="Amiri" pitchFamily="2" charset="-78"/>
+                <a:ea typeface="Amiri" pitchFamily="2" charset="-78"/>
                 <a:cs typeface="Amiri" pitchFamily="2" charset="-78"/>
               </a:rPr>
               <a:t>بيت</a:t>
@@ -36026,6 +36160,7 @@
                   <a:srgbClr val="1B3B6F"/>
                 </a:solidFill>
                 <a:latin typeface="Amiri" pitchFamily="2" charset="-78"/>
+                <a:ea typeface="Amiri" pitchFamily="2" charset="-78"/>
                 <a:cs typeface="Amiri" pitchFamily="2" charset="-78"/>
               </a:rPr>
               <a:t>لُغَةٌ</a:t>
@@ -37014,6 +37149,7 @@
                   <a:srgbClr val="D4AF37"/>
                 </a:solidFill>
                 <a:latin typeface="Amiri" pitchFamily="2" charset="-78"/>
+                <a:ea typeface="Amiri" pitchFamily="2" charset="-78"/>
                 <a:cs typeface="Amiri" pitchFamily="2" charset="-78"/>
               </a:rPr>
               <a:t>م</a:t>
@@ -37334,6 +37470,7 @@
                   <a:srgbClr val="8A6D1E"/>
                 </a:solidFill>
                 <a:latin typeface="Amiri" pitchFamily="2" charset="-78"/>
+                <a:ea typeface="Amiri" pitchFamily="2" charset="-78"/>
                 <a:cs typeface="Amiri" pitchFamily="2" charset="-78"/>
               </a:rPr>
               <a:t>الإِجَابَاتُ وَالتَّعْلِيلُ</a:t>
@@ -37922,6 +38059,7 @@
                   <a:srgbClr val="1B3B6F"/>
                 </a:solidFill>
                 <a:latin typeface="Amiri" pitchFamily="2" charset="-78"/>
+                <a:ea typeface="Amiri" pitchFamily="2" charset="-78"/>
                 <a:cs typeface="Amiri" pitchFamily="2" charset="-78"/>
               </a:rPr>
               <a:t>مطعم</a:t>
@@ -38451,6 +38589,7 @@
                   <a:srgbClr val="1B3B6F"/>
                 </a:solidFill>
                 <a:latin typeface="Amiri" pitchFamily="2" charset="-78"/>
+                <a:ea typeface="Amiri" pitchFamily="2" charset="-78"/>
                 <a:cs typeface="Amiri" pitchFamily="2" charset="-78"/>
               </a:rPr>
               <a:t>بت</a:t>
@@ -38477,6 +38616,7 @@
                   <a:srgbClr val="1B3B6F"/>
                 </a:solidFill>
                 <a:latin typeface="Amiri" pitchFamily="2" charset="-78"/>
+                <a:ea typeface="Amiri" pitchFamily="2" charset="-78"/>
                 <a:cs typeface="Amiri" pitchFamily="2" charset="-78"/>
               </a:rPr>
               <a:t>بيت</a:t>
@@ -38905,6 +39045,7 @@
                   <a:srgbClr val="1B3B6F"/>
                 </a:solidFill>
                 <a:latin typeface="Amiri" pitchFamily="2" charset="-78"/>
+                <a:ea typeface="Amiri" pitchFamily="2" charset="-78"/>
                 <a:cs typeface="Amiri" pitchFamily="2" charset="-78"/>
               </a:rPr>
               <a:t>لُغَةٌ</a:t>
@@ -39836,6 +39977,7 @@
                   <a:srgbClr val="1B3B6F"/>
                 </a:solidFill>
                 <a:latin typeface="Amiri" pitchFamily="2" charset="-78"/>
+                <a:ea typeface="Amiri" pitchFamily="2" charset="-78"/>
                 <a:cs typeface="Amiri" pitchFamily="2" charset="-78"/>
               </a:rPr>
               <a:t>خَطٌّ · لُغَةٌ · مَعْنًى</a:t>
@@ -39969,6 +40111,7 @@
                   <a:srgbClr val="D4AF37"/>
                 </a:solidFill>
                 <a:latin typeface="Amiri" pitchFamily="2" charset="-78"/>
+                <a:ea typeface="Amiri" pitchFamily="2" charset="-78"/>
                 <a:cs typeface="Amiri" pitchFamily="2" charset="-78"/>
               </a:rPr>
               <a:t>م</a:t>
@@ -40289,6 +40432,7 @@
                   <a:srgbClr val="8A6D1E"/>
                 </a:solidFill>
                 <a:latin typeface="Amiri" pitchFamily="2" charset="-78"/>
+                <a:ea typeface="Amiri" pitchFamily="2" charset="-78"/>
                 <a:cs typeface="Amiri" pitchFamily="2" charset="-78"/>
               </a:rPr>
               <a:t>الأَهْدَافُ وَمَعَايِيرُ النَّجَاحِ</a:t>
@@ -40437,6 +40581,7 @@
                   <a:srgbClr val="8A6D1E"/>
                 </a:solidFill>
                 <a:latin typeface="Amiri" pitchFamily="2" charset="-78"/>
+                <a:ea typeface="Amiri" pitchFamily="2" charset="-78"/>
                 <a:cs typeface="Amiri" pitchFamily="2" charset="-78"/>
               </a:rPr>
               <a:t>سَتَتَعَلَّمُ اليَوْمَ</a:t>
@@ -41592,6 +41737,7 @@
                   <a:srgbClr val="D4AF37"/>
                 </a:solidFill>
                 <a:latin typeface="Amiri" pitchFamily="2" charset="-78"/>
+                <a:ea typeface="Amiri" pitchFamily="2" charset="-78"/>
                 <a:cs typeface="Amiri" pitchFamily="2" charset="-78"/>
               </a:rPr>
               <a:t>م</a:t>
@@ -41912,6 +42058,7 @@
                   <a:srgbClr val="8A6D1E"/>
                 </a:solidFill>
                 <a:latin typeface="Amiri" pitchFamily="2" charset="-78"/>
+                <a:ea typeface="Amiri" pitchFamily="2" charset="-78"/>
                 <a:cs typeface="Amiri" pitchFamily="2" charset="-78"/>
               </a:rPr>
               <a:t>كَلِمَاتٌ عَنِ العَالَمِ</a:t>
@@ -42215,6 +42362,7 @@
                   <a:srgbClr val="1B3B6F"/>
                 </a:solidFill>
                 <a:latin typeface="Amiri" pitchFamily="2" charset="-78"/>
+                <a:ea typeface="Amiri" pitchFamily="2" charset="-78"/>
                 <a:cs typeface="Amiri" pitchFamily="2" charset="-78"/>
               </a:rPr>
               <a:t>لُغَةٌ</a:t>
@@ -42372,6 +42520,7 @@
                   <a:srgbClr val="1B3B6F"/>
                 </a:solidFill>
                 <a:latin typeface="Amiri" pitchFamily="2" charset="-78"/>
+                <a:ea typeface="Amiri" pitchFamily="2" charset="-78"/>
                 <a:cs typeface="Amiri" pitchFamily="2" charset="-78"/>
               </a:rPr>
               <a:t>لُغَةٌ</a:t>
@@ -42475,6 +42624,7 @@
                   <a:srgbClr val="1B3B6F"/>
                 </a:solidFill>
                 <a:latin typeface="Amiri" pitchFamily="2" charset="-78"/>
+                <a:ea typeface="Amiri" pitchFamily="2" charset="-78"/>
                 <a:cs typeface="Amiri" pitchFamily="2" charset="-78"/>
               </a:rPr>
               <a:t>لُغَاتٌ</a:t>
@@ -42740,6 +42890,7 @@
                   <a:srgbClr val="1B3B6F"/>
                 </a:solidFill>
                 <a:latin typeface="Amiri" pitchFamily="2" charset="-78"/>
+                <a:ea typeface="Amiri" pitchFamily="2" charset="-78"/>
                 <a:cs typeface="Amiri" pitchFamily="2" charset="-78"/>
               </a:rPr>
               <a:t>ثَقَافَةٌ</a:t>
@@ -42897,6 +43048,7 @@
                   <a:srgbClr val="1B3B6F"/>
                 </a:solidFill>
                 <a:latin typeface="Amiri" pitchFamily="2" charset="-78"/>
+                <a:ea typeface="Amiri" pitchFamily="2" charset="-78"/>
                 <a:cs typeface="Amiri" pitchFamily="2" charset="-78"/>
               </a:rPr>
               <a:t>ثَقَافَةٌ</a:t>
@@ -43000,6 +43152,7 @@
                   <a:srgbClr val="1B3B6F"/>
                 </a:solidFill>
                 <a:latin typeface="Amiri" pitchFamily="2" charset="-78"/>
+                <a:ea typeface="Amiri" pitchFamily="2" charset="-78"/>
                 <a:cs typeface="Amiri" pitchFamily="2" charset="-78"/>
               </a:rPr>
               <a:t>ثَقَافَاتٌ</a:t>
@@ -43265,6 +43418,7 @@
                   <a:srgbClr val="1B3B6F"/>
                 </a:solidFill>
                 <a:latin typeface="Amiri" pitchFamily="2" charset="-78"/>
+                <a:ea typeface="Amiri" pitchFamily="2" charset="-78"/>
                 <a:cs typeface="Amiri" pitchFamily="2" charset="-78"/>
               </a:rPr>
               <a:t>عَالَمٌ</a:t>
@@ -43357,6 +43511,7 @@
                   <a:srgbClr val="8A6D1E"/>
                 </a:solidFill>
                 <a:latin typeface="Amiri" pitchFamily="2" charset="-78"/>
+                <a:ea typeface="Amiri" pitchFamily="2" charset="-78"/>
                 <a:cs typeface="Amiri" pitchFamily="2" charset="-78"/>
               </a:rPr>
               <a:t>العَالَمُ العَرَبِيُّ</a:t>
@@ -43635,6 +43790,7 @@
                   <a:srgbClr val="1B3B6F"/>
                 </a:solidFill>
                 <a:latin typeface="Amiri" pitchFamily="2" charset="-78"/>
+                <a:ea typeface="Amiri" pitchFamily="2" charset="-78"/>
                 <a:cs typeface="Amiri" pitchFamily="2" charset="-78"/>
               </a:rPr>
               <a:t>بِلَادٌ</a:t>
@@ -43792,6 +43948,7 @@
                   <a:srgbClr val="1B3B6F"/>
                 </a:solidFill>
                 <a:latin typeface="Amiri" pitchFamily="2" charset="-78"/>
+                <a:ea typeface="Amiri" pitchFamily="2" charset="-78"/>
                 <a:cs typeface="Amiri" pitchFamily="2" charset="-78"/>
               </a:rPr>
               <a:t>بَلَدٌ</a:t>
@@ -43895,6 +44052,7 @@
                   <a:srgbClr val="1B3B6F"/>
                 </a:solidFill>
                 <a:latin typeface="Amiri" pitchFamily="2" charset="-78"/>
+                <a:ea typeface="Amiri" pitchFamily="2" charset="-78"/>
                 <a:cs typeface="Amiri" pitchFamily="2" charset="-78"/>
               </a:rPr>
               <a:t>بِلَادٌ</a:t>
@@ -44095,6 +44253,7 @@
                   <a:srgbClr val="1B3B6F"/>
                 </a:solidFill>
                 <a:latin typeface="Amiri" pitchFamily="2" charset="-78"/>
+                <a:ea typeface="Amiri" pitchFamily="2" charset="-78"/>
                 <a:cs typeface="Amiri" pitchFamily="2" charset="-78"/>
               </a:rPr>
               <a:t>فَنٌّ</a:t>
@@ -44252,6 +44411,7 @@
                   <a:srgbClr val="1B3B6F"/>
                 </a:solidFill>
                 <a:latin typeface="Amiri" pitchFamily="2" charset="-78"/>
+                <a:ea typeface="Amiri" pitchFamily="2" charset="-78"/>
                 <a:cs typeface="Amiri" pitchFamily="2" charset="-78"/>
               </a:rPr>
               <a:t>فَنٌّ</a:t>
@@ -44355,6 +44515,7 @@
                   <a:srgbClr val="1B3B6F"/>
                 </a:solidFill>
                 <a:latin typeface="Amiri" pitchFamily="2" charset="-78"/>
+                <a:ea typeface="Amiri" pitchFamily="2" charset="-78"/>
                 <a:cs typeface="Amiri" pitchFamily="2" charset="-78"/>
               </a:rPr>
               <a:t>فُنُونٌ</a:t>
@@ -44555,6 +44716,7 @@
                   <a:srgbClr val="1B3B6F"/>
                 </a:solidFill>
                 <a:latin typeface="Amiri" pitchFamily="2" charset="-78"/>
+                <a:ea typeface="Amiri" pitchFamily="2" charset="-78"/>
                 <a:cs typeface="Amiri" pitchFamily="2" charset="-78"/>
               </a:rPr>
               <a:t>تِجَارَةٌ</a:t>
@@ -44742,6 +44904,7 @@
                   <a:srgbClr val="D4AF37"/>
                 </a:solidFill>
                 <a:latin typeface="Amiri" pitchFamily="2" charset="-78"/>
+                <a:ea typeface="Amiri" pitchFamily="2" charset="-78"/>
                 <a:cs typeface="Amiri" pitchFamily="2" charset="-78"/>
               </a:rPr>
               <a:t>م</a:t>
@@ -45062,6 +45225,7 @@
                   <a:srgbClr val="8A6D1E"/>
                 </a:solidFill>
                 <a:latin typeface="Amiri" pitchFamily="2" charset="-78"/>
+                <a:ea typeface="Amiri" pitchFamily="2" charset="-78"/>
                 <a:cs typeface="Amiri" pitchFamily="2" charset="-78"/>
               </a:rPr>
               <a:t>الخَطُّ وَاللُّغَةُ وَالمَعْنَى</a:t>
@@ -45275,6 +45439,7 @@
                   <a:srgbClr val="1B3B6F"/>
                 </a:solidFill>
                 <a:latin typeface="Amiri" pitchFamily="2" charset="-78"/>
+                <a:ea typeface="Amiri" pitchFamily="2" charset="-78"/>
                 <a:cs typeface="Amiri" pitchFamily="2" charset="-78"/>
               </a:rPr>
               <a:t>مَطْعَم</a:t>
@@ -45553,6 +45718,7 @@
                   <a:srgbClr val="1B3B6F"/>
                 </a:solidFill>
                 <a:latin typeface="Amiri" pitchFamily="2" charset="-78"/>
+                <a:ea typeface="Amiri" pitchFamily="2" charset="-78"/>
                 <a:cs typeface="Amiri" pitchFamily="2" charset="-78"/>
               </a:rPr>
               <a:t>كِتَاب · کتاب</a:t>
@@ -45604,6 +45770,7 @@
                   <a:srgbClr val="5A6472"/>
                 </a:solidFill>
                 <a:latin typeface="Amiri" pitchFamily="2" charset="-78"/>
+                <a:ea typeface="Amiri" pitchFamily="2" charset="-78"/>
                 <a:cs typeface="Amiri" pitchFamily="2" charset="-78"/>
               </a:rPr>
               <a:t>كِتَاب</a:t>
@@ -45630,6 +45797,7 @@
                   <a:srgbClr val="5A6472"/>
                 </a:solidFill>
                 <a:latin typeface="Amiri" pitchFamily="2" charset="-78"/>
+                <a:ea typeface="Amiri" pitchFamily="2" charset="-78"/>
                 <a:cs typeface="Amiri" pitchFamily="2" charset="-78"/>
               </a:rPr>
               <a:t>کتاب</a:t>
@@ -45883,6 +46051,7 @@
                   <a:srgbClr val="1B3B6F"/>
                 </a:solidFill>
                 <a:latin typeface="Amiri" pitchFamily="2" charset="-78"/>
+                <a:ea typeface="Amiri" pitchFamily="2" charset="-78"/>
                 <a:cs typeface="Amiri" pitchFamily="2" charset="-78"/>
               </a:rPr>
               <a:t>مَا المَعْنَى؟</a:t>
@@ -46119,6 +46288,7 @@
                   <a:srgbClr val="D4AF37"/>
                 </a:solidFill>
                 <a:latin typeface="Amiri" pitchFamily="2" charset="-78"/>
+                <a:ea typeface="Amiri" pitchFamily="2" charset="-78"/>
                 <a:cs typeface="Amiri" pitchFamily="2" charset="-78"/>
               </a:rPr>
               <a:t>م</a:t>
@@ -46439,6 +46609,7 @@
                   <a:srgbClr val="8A6D1E"/>
                 </a:solidFill>
                 <a:latin typeface="Amiri" pitchFamily="2" charset="-78"/>
+                <a:ea typeface="Amiri" pitchFamily="2" charset="-78"/>
                 <a:cs typeface="Amiri" pitchFamily="2" charset="-78"/>
               </a:rPr>
               <a:t>الفُصْحَى وَاللَّهَجَاتُ</a:t>
@@ -46652,6 +46823,7 @@
                   <a:srgbClr val="1B3B6F"/>
                 </a:solidFill>
                 <a:latin typeface="Amiri" pitchFamily="2" charset="-78"/>
+                <a:ea typeface="Amiri" pitchFamily="2" charset="-78"/>
                 <a:cs typeface="Amiri" pitchFamily="2" charset="-78"/>
               </a:rPr>
               <a:t>الفُصْحَى</a:t>
@@ -46930,6 +47102,7 @@
                   <a:srgbClr val="1B3B6F"/>
                 </a:solidFill>
                 <a:latin typeface="Amiri" pitchFamily="2" charset="-78"/>
+                <a:ea typeface="Amiri" pitchFamily="2" charset="-78"/>
                 <a:cs typeface="Amiri" pitchFamily="2" charset="-78"/>
               </a:rPr>
               <a:t>اللَّهَجَاتُ</a:t>
@@ -47208,6 +47381,7 @@
                   <a:srgbClr val="1B3B6F"/>
                 </a:solidFill>
                 <a:latin typeface="Amiri" pitchFamily="2" charset="-78"/>
+                <a:ea typeface="Amiri" pitchFamily="2" charset="-78"/>
                 <a:cs typeface="Amiri" pitchFamily="2" charset="-78"/>
               </a:rPr>
               <a:t>حَسَبَ السِّيَاقِ</a:t>
@@ -47409,13 +47583,9 @@
     <a:fontScheme name="Office">
       <a:majorFont>
         <a:latin typeface="Calibri Light" panose="020F0302020204030204"/>
-        <a:ea typeface=""/>
-        <a:cs typeface=""/>
-        <a:font script="Jpan" typeface="游ゴシック Light"/>
-        <a:font script="Hang" typeface="맑은 고딕"/>
-        <a:font script="Hans" typeface="等线 Light"/>
-        <a:font script="Hant" typeface="新細明體"/>
-        <a:font script="Arab" typeface="Times New Roman"/>
+        <a:ea typeface="Amiri" pitchFamily="2" charset="-78"/>
+        <a:cs typeface="Amiri" pitchFamily="2" charset="-78"/>
+        <a:font script="Arab" typeface="Amiri"/>
         <a:font script="Hebr" typeface="Times New Roman"/>
         <a:font script="Thai" typeface="Angsana New"/>
         <a:font script="Ethi" typeface="Nyala"/>
@@ -47461,13 +47631,9 @@
       </a:majorFont>
       <a:minorFont>
         <a:latin typeface="Calibri" panose="020F0502020204030204"/>
-        <a:ea typeface=""/>
-        <a:cs typeface=""/>
-        <a:font script="Jpan" typeface="游ゴシック"/>
-        <a:font script="Hang" typeface="맑은 고딕"/>
-        <a:font script="Hans" typeface="等线"/>
-        <a:font script="Hant" typeface="新細明體"/>
-        <a:font script="Arab" typeface="Arial"/>
+        <a:ea typeface="Amiri" pitchFamily="2" charset="-78"/>
+        <a:cs typeface="Amiri" pitchFamily="2" charset="-78"/>
+        <a:font script="Arab" typeface="Amiri"/>
         <a:font script="Hebr" typeface="Arial"/>
         <a:font script="Thai" typeface="Cordia New"/>
         <a:font script="Ethi" typeface="Nyala"/>
